--- a/decks/Coag_05_Coagulation-Testing-and-Bleeding-Thrombosis.pptx
+++ b/decks/Coag_05_Coagulation-Testing-and-Bleeding-Thrombosis.pptx
@@ -29,9 +29,10 @@
     <p:sldId id="277" r:id="rId23"/>
     <p:sldId id="278" r:id="rId24"/>
     <p:sldId id="279" r:id="rId25"/>
+    <p:sldId id="280" r:id="rId26"/>
   </p:sldIdLst>
   <p:notesMasterIdLst>
-    <p:notesMasterId r:id="rId26"/>
+    <p:notesMasterId r:id="rId27"/>
   </p:notesMasterIdLst>
   <p:sldSz cx="12191695" cy="6858000"/>
   <p:notesSz cx="6858000" cy="12191695"/>
@@ -1957,6 +1958,94 @@
             <a:fld id="{F7021451-1387-4CA6-816F-3879F97B5CBC}" type="slidenum">
               <a:rPr lang="en-US"/>
               <a:t>24</a:t>
+            </a:fld>
+            <a:endParaRPr lang="en-US"/>
+          </a:p>
+        </p:txBody>
+      </p:sp>
+    </p:spTree>
+    <p:extLst>
+      <p:ext uri="{BB962C8B-B14F-4D97-AF65-F5344CB8AC3E}">
+        <p14:creationId xmlns:p14="http://schemas.microsoft.com/office/powerpoint/2010/main" val="1024086991"/>
+      </p:ext>
+    </p:extLst>
+  </p:cSld>
+  <p:clrMapOvr>
+    <a:masterClrMapping/>
+  </p:clrMapOvr>
+</p:notes>
+</file>
+
+<file path=ppt/notesSlides/notesSlide25.xml><?xml version="1.0" encoding="utf-8"?>
+<p:notes xmlns:a="http://schemas.openxmlformats.org/drawingml/2006/main" xmlns:r="http://schemas.openxmlformats.org/officeDocument/2006/relationships" xmlns:p="http://schemas.openxmlformats.org/presentationml/2006/main">
+  <p:cSld>
+    <p:spTree>
+      <p:nvGrpSpPr>
+        <p:cNvPr id="1" name=""/>
+        <p:cNvGrpSpPr/>
+        <p:nvPr/>
+      </p:nvGrpSpPr>
+      <p:grpSpPr>
+        <a:xfrm>
+          <a:off x="0" y="0"/>
+          <a:ext cx="0" cy="0"/>
+          <a:chOff x="0" y="0"/>
+          <a:chExt cx="0" cy="0"/>
+        </a:xfrm>
+      </p:grpSpPr>
+      <p:sp>
+        <p:nvSpPr>
+          <p:cNvPr id="2" name="Slide Image Placeholder 1"/>
+          <p:cNvSpPr>
+            <a:spLocks noGrp="1" noRot="1" noChangeAspect="1"/>
+          </p:cNvSpPr>
+          <p:nvPr>
+            <p:ph type="sldImg"/>
+          </p:nvPr>
+        </p:nvSpPr>
+        <p:spPr/>
+      </p:sp>
+      <p:sp>
+        <p:nvSpPr>
+          <p:cNvPr id="3" name="Notes Placeholder 2"/>
+          <p:cNvSpPr>
+            <a:spLocks noGrp="1"/>
+          </p:cNvSpPr>
+          <p:nvPr>
+            <p:ph type="body" idx="1"/>
+          </p:nvPr>
+        </p:nvSpPr>
+        <p:spPr/>
+        <p:txBody>
+          <a:bodyPr/>
+          <a:lstStyle/>
+          <a:p>
+            <a:r>
+              <a:rPr lang="en-US" dirty="0"/>
+              <a:t/>
+            </a:r>
+            <a:endParaRPr lang="en-US" dirty="0"/>
+          </a:p>
+        </p:txBody>
+      </p:sp>
+      <p:sp>
+        <p:nvSpPr>
+          <p:cNvPr id="4" name="Slide Number Placeholder 3"/>
+          <p:cNvSpPr>
+            <a:spLocks noGrp="1"/>
+          </p:cNvSpPr>
+          <p:nvPr>
+            <p:ph type="sldNum" sz="quarter" idx="10"/>
+          </p:nvPr>
+        </p:nvSpPr>
+        <p:spPr/>
+        <p:txBody>
+          <a:bodyPr/>
+          <a:lstStyle/>
+          <a:p>
+            <a:fld id="{F7021451-1387-4CA6-816F-3879F97B5CBC}" type="slidenum">
+              <a:rPr lang="en-US"/>
+              <a:t>25</a:t>
             </a:fld>
             <a:endParaRPr lang="en-US"/>
           </a:p>
@@ -3121,7 +3210,7 @@
                 <a:ea typeface="Calibri" pitchFamily="34" charset="-122"/>
                 <a:cs typeface="Calibri" pitchFamily="34" charset="-120"/>
               </a:rPr>
-              <a:t>Coagulation Testing &amp; Bleeding / Thrombosis Evaluation</a:t>
+              <a:t>Coagulation Testing, Bleeding &amp; Thrombosis</a:t>
             </a:r>
             <a:endParaRPr lang="en-US" sz="4600" dirty="0"/>
           </a:p>
@@ -3160,7 +3249,7 @@
                 <a:ea typeface="Calibri" pitchFamily="34" charset="-122"/>
                 <a:cs typeface="Calibri" pitchFamily="34" charset="-120"/>
               </a:rPr>
-              <a:t>PT, aPTT, Mixing Studies, and Thrombophilia</a:t>
+              <a:t>PT/aPTT Logic, Mixing Studies, and the High-Yield Disorders</a:t>
             </a:r>
             <a:endParaRPr lang="en-US" sz="1900" dirty="0"/>
           </a:p>
@@ -3352,7 +3441,7 @@
                 <a:ea typeface="Calibri" pitchFamily="34" charset="-122"/>
                 <a:cs typeface="Calibri" pitchFamily="34" charset="-120"/>
               </a:rPr>
-              <a:t>HEMATOLOGY &amp; COAGULATION   ·   MIXING STUDIES</a:t>
+              <a:t>HEMATOLOGY &amp; COAGULATION   ·   MIXING STUDY</a:t>
             </a:r>
             <a:endParaRPr lang="en-US" sz="1100" dirty="0"/>
           </a:p>
@@ -3391,7 +3480,7 @@
                 <a:ea typeface="Calibri" pitchFamily="34" charset="-122"/>
                 <a:cs typeface="Calibri" pitchFamily="34" charset="-120"/>
               </a:rPr>
-              <a:t>Inhibitors and Preanalytic Pitfalls</a:t>
+              <a:t>Mixing Study: Deficiency vs Inhibitor</a:t>
             </a:r>
             <a:endParaRPr lang="en-US" sz="3000" dirty="0"/>
           </a:p>
@@ -3405,18 +3494,23 @@
         </p:nvSpPr>
         <p:spPr>
           <a:xfrm>
-            <a:off x="566928" y="1517904"/>
-            <a:ext cx="5346040" cy="4114800"/>
+            <a:off x="883768" y="1481328"/>
+            <a:ext cx="10424160" cy="4425696"/>
           </a:xfrm>
           <a:prstGeom prst="roundRect">
             <a:avLst>
-              <a:gd name="adj" fmla="val 2000"/>
+              <a:gd name="adj" fmla="val 1860"/>
             </a:avLst>
           </a:prstGeom>
           <a:solidFill>
-            <a:srgbClr val="FBEAEC"/>
+            <a:srgbClr val="FFFFFF"/>
           </a:solidFill>
-          <a:ln/>
+          <a:ln w="12700">
+            <a:solidFill>
+              <a:srgbClr val="DCE4EC"/>
+            </a:solidFill>
+            <a:prstDash val="solid"/>
+          </a:ln>
           <a:effectLst>
             <a:outerShdw sx="100000" sy="100000" kx="0" ky="0" algn="bl" rotWithShape="0" blurRad="88900" dist="25400" dir="5400000">
               <a:srgbClr val="22303C">
@@ -3426,55 +3520,40 @@
           </a:effectLst>
         </p:spPr>
       </p:sp>
-      <p:sp>
-        <p:nvSpPr>
-          <p:cNvPr id="5" name="Text 3"/>
-          <p:cNvSpPr/>
-          <p:nvPr/>
-        </p:nvSpPr>
-        <p:spPr>
-          <a:xfrm>
-            <a:off x="804672" y="1682496"/>
-            <a:ext cx="4888840" cy="274320"/>
-          </a:xfrm>
-          <a:prstGeom prst="rect">
-            <a:avLst/>
-          </a:prstGeom>
-          <a:noFill/>
-          <a:ln/>
-        </p:spPr>
-        <p:txBody>
-          <a:bodyPr wrap="square" lIns="0" tIns="0" rIns="0" bIns="0" rtlCol="0" anchor="ctr"/>
-          <a:lstStyle/>
-          <a:p>
-            <a:pPr indent="0" marL="0">
-              <a:buNone/>
-            </a:pPr>
-            <a:r>
-              <a:rPr lang="en-US" sz="1200" b="1" spc="100" kern="0" dirty="0">
-                <a:solidFill>
-                  <a:srgbClr val="8E1622"/>
-                </a:solidFill>
-                <a:latin typeface="Calibri" pitchFamily="34" charset="0"/>
-                <a:ea typeface="Calibri" pitchFamily="34" charset="-122"/>
-                <a:cs typeface="Calibri" pitchFamily="34" charset="-120"/>
-              </a:rPr>
-              <a:t>FACTOR DEFICIENCY VS INHIBITOR</a:t>
-            </a:r>
-            <a:endParaRPr lang="en-US" sz="1200" dirty="0"/>
-          </a:p>
-        </p:txBody>
-      </p:sp>
-      <p:sp>
-        <p:nvSpPr>
-          <p:cNvPr id="6" name="Text 4"/>
-          <p:cNvSpPr/>
-          <p:nvPr/>
-        </p:nvSpPr>
-        <p:spPr>
-          <a:xfrm>
-            <a:off x="804672" y="2029968"/>
-            <a:ext cx="4870552" cy="3474720"/>
+      <p:pic>
+        <p:nvPicPr>
+          <p:cNvPr id="5" name="Image 0" descr="/tmp/cp_work2/art/coag_mixing.png">    </p:cNvPr>
+          <p:cNvPicPr>
+            <a:picLocks noChangeAspect="1"/>
+          </p:cNvPicPr>
+          <p:nvPr/>
+        </p:nvPicPr>
+        <p:blipFill>
+          <a:blip r:embed="rId1"/>
+          <a:stretch>
+            <a:fillRect/>
+          </a:stretch>
+        </p:blipFill>
+        <p:spPr>
+          <a:xfrm>
+            <a:off x="1011784" y="1609344"/>
+            <a:ext cx="10168128" cy="4169664"/>
+          </a:xfrm>
+          <a:prstGeom prst="rect">
+            <a:avLst/>
+          </a:prstGeom>
+        </p:spPr>
+      </p:pic>
+      <p:sp>
+        <p:nvSpPr>
+          <p:cNvPr id="6" name="Text 3"/>
+          <p:cNvSpPr/>
+          <p:nvPr/>
+        </p:nvSpPr>
+        <p:spPr>
+          <a:xfrm>
+            <a:off x="566928" y="5980176"/>
+            <a:ext cx="11057839" cy="365760"/>
           </a:xfrm>
           <a:prstGeom prst="rect">
             <a:avLst/>
@@ -3486,247 +3565,27 @@
           <a:bodyPr wrap="square" lIns="0" tIns="0" rIns="0" bIns="0" rtlCol="0" anchor="t"/>
           <a:lstStyle/>
           <a:p>
-            <a:pPr algn="l" marL="177800" indent="-177800">
-              <a:spcAft>
-                <a:spcPts val="900"/>
-              </a:spcAft>
-              <a:buSzPct val="100000"/>
-              <a:buChar char="•"/>
-            </a:pPr>
-            <a:r>
-              <a:rPr lang="en-US" sz="1250" b="1" dirty="0">
-                <a:solidFill>
-                  <a:srgbClr val="1B2A38"/>
-                </a:solidFill>
-                <a:latin typeface="Calibri" pitchFamily="34" charset="0"/>
-                <a:ea typeface="Calibri" pitchFamily="34" charset="-122"/>
-                <a:cs typeface="Calibri" pitchFamily="34" charset="-120"/>
-              </a:rPr>
-              <a:t>Deficiency corrects on mixing; an inhibitor does not.</a:t>
-            </a:r>
-            <a:endParaRPr lang="en-US" sz="1250" dirty="0"/>
-          </a:p>
-          <a:p>
-            <a:pPr algn="l" marL="177800" indent="-177800">
-              <a:spcAft>
-                <a:spcPts val="900"/>
-              </a:spcAft>
-              <a:buSzPct val="100000"/>
-              <a:buChar char="•"/>
-            </a:pPr>
-            <a:r>
-              <a:rPr lang="en-US" sz="1250" dirty="0">
-                <a:solidFill>
-                  <a:srgbClr val="33444F"/>
-                </a:solidFill>
-                <a:latin typeface="Calibri" pitchFamily="34" charset="0"/>
-                <a:ea typeface="Calibri" pitchFamily="34" charset="-122"/>
-                <a:cs typeface="Calibri" pitchFamily="34" charset="-120"/>
-              </a:rPr>
-              <a:t>Factor VIII inhibitors are time- and temperature-dependent — the incubated mix prolongs further.</a:t>
-            </a:r>
-            <a:endParaRPr lang="en-US" sz="1250" dirty="0"/>
-          </a:p>
-          <a:p>
-            <a:pPr algn="l" marL="177800" indent="-177800">
-              <a:spcAft>
-                <a:spcPts val="900"/>
-              </a:spcAft>
-              <a:buSzPct val="100000"/>
-              <a:buChar char="•"/>
-            </a:pPr>
-            <a:r>
-              <a:rPr lang="en-US" sz="1250" dirty="0">
-                <a:solidFill>
-                  <a:srgbClr val="33444F"/>
-                </a:solidFill>
-                <a:latin typeface="Calibri" pitchFamily="34" charset="0"/>
-                <a:ea typeface="Calibri" pitchFamily="34" charset="-122"/>
-                <a:cs typeface="Calibri" pitchFamily="34" charset="-120"/>
-              </a:rPr>
-              <a:t>Lupus anticoagulant is the commonest non-correcting aPTT and usually does not bleed.</a:t>
-            </a:r>
-            <a:endParaRPr lang="en-US" sz="1250" dirty="0"/>
-          </a:p>
-        </p:txBody>
-      </p:sp>
-      <p:sp>
-        <p:nvSpPr>
-          <p:cNvPr id="7" name="Shape 5"/>
-          <p:cNvSpPr/>
-          <p:nvPr/>
-        </p:nvSpPr>
-        <p:spPr>
-          <a:xfrm>
-            <a:off x="6278728" y="1517904"/>
-            <a:ext cx="5346040" cy="4114800"/>
-          </a:xfrm>
-          <a:prstGeom prst="roundRect">
-            <a:avLst>
-              <a:gd name="adj" fmla="val 2000"/>
-            </a:avLst>
-          </a:prstGeom>
-          <a:solidFill>
-            <a:srgbClr val="FBEAEC"/>
-          </a:solidFill>
-          <a:ln/>
-          <a:effectLst>
-            <a:outerShdw sx="100000" sy="100000" kx="0" ky="0" algn="bl" rotWithShape="0" blurRad="88900" dist="25400" dir="5400000">
-              <a:srgbClr val="22303C">
-                <a:alpha val="12000"/>
-              </a:srgbClr>
-            </a:outerShdw>
-          </a:effectLst>
-        </p:spPr>
-      </p:sp>
-      <p:sp>
-        <p:nvSpPr>
-          <p:cNvPr id="8" name="Text 6"/>
-          <p:cNvSpPr/>
-          <p:nvPr/>
-        </p:nvSpPr>
-        <p:spPr>
-          <a:xfrm>
-            <a:off x="6516472" y="1682496"/>
-            <a:ext cx="4888840" cy="274320"/>
-          </a:xfrm>
-          <a:prstGeom prst="rect">
-            <a:avLst/>
-          </a:prstGeom>
-          <a:noFill/>
-          <a:ln/>
-        </p:spPr>
-        <p:txBody>
-          <a:bodyPr wrap="square" lIns="0" tIns="0" rIns="0" bIns="0" rtlCol="0" anchor="ctr"/>
-          <a:lstStyle/>
-          <a:p>
-            <a:pPr indent="0" marL="0">
-              <a:buNone/>
-            </a:pPr>
-            <a:r>
-              <a:rPr lang="en-US" sz="1200" b="1" spc="100" kern="0" dirty="0">
-                <a:solidFill>
-                  <a:srgbClr val="8E1622"/>
-                </a:solidFill>
-                <a:latin typeface="Calibri" pitchFamily="34" charset="0"/>
-                <a:ea typeface="Calibri" pitchFamily="34" charset="-122"/>
-                <a:cs typeface="Calibri" pitchFamily="34" charset="-120"/>
-              </a:rPr>
-              <a:t>PREANALYTIC PITFALLS (EXCLUDE FIRST)</a:t>
-            </a:r>
-            <a:endParaRPr lang="en-US" sz="1200" dirty="0"/>
-          </a:p>
-        </p:txBody>
-      </p:sp>
-      <p:sp>
-        <p:nvSpPr>
-          <p:cNvPr id="9" name="Text 7"/>
-          <p:cNvSpPr/>
-          <p:nvPr/>
-        </p:nvSpPr>
-        <p:spPr>
-          <a:xfrm>
-            <a:off x="6516472" y="2029968"/>
-            <a:ext cx="4870552" cy="3474720"/>
-          </a:xfrm>
-          <a:prstGeom prst="rect">
-            <a:avLst/>
-          </a:prstGeom>
-          <a:noFill/>
-          <a:ln/>
-        </p:spPr>
-        <p:txBody>
-          <a:bodyPr wrap="square" lIns="0" tIns="0" rIns="0" bIns="0" rtlCol="0" anchor="t"/>
-          <a:lstStyle/>
-          <a:p>
-            <a:pPr algn="l" marL="177800" indent="-177800">
-              <a:spcAft>
-                <a:spcPts val="900"/>
-              </a:spcAft>
-              <a:buSzPct val="100000"/>
-              <a:buChar char="•"/>
-            </a:pPr>
-            <a:r>
-              <a:rPr lang="en-US" sz="1250" b="1" dirty="0">
-                <a:solidFill>
-                  <a:srgbClr val="1B2A38"/>
-                </a:solidFill>
-                <a:latin typeface="Calibri" pitchFamily="34" charset="0"/>
-                <a:ea typeface="Calibri" pitchFamily="34" charset="-122"/>
-                <a:cs typeface="Calibri" pitchFamily="34" charset="-120"/>
-              </a:rPr>
-              <a:t>Under-filled tube — wrong 9:1 blood-to-citrate ratio falsely prolongs results.</a:t>
-            </a:r>
-            <a:endParaRPr lang="en-US" sz="1250" dirty="0"/>
-          </a:p>
-          <a:p>
-            <a:pPr algn="l" marL="177800" indent="-177800">
-              <a:spcAft>
-                <a:spcPts val="900"/>
-              </a:spcAft>
-              <a:buSzPct val="100000"/>
-              <a:buChar char="•"/>
-            </a:pPr>
-            <a:r>
-              <a:rPr lang="en-US" sz="1250" dirty="0">
-                <a:solidFill>
-                  <a:srgbClr val="33444F"/>
-                </a:solidFill>
-                <a:latin typeface="Calibri" pitchFamily="34" charset="0"/>
-                <a:ea typeface="Calibri" pitchFamily="34" charset="-122"/>
-                <a:cs typeface="Calibri" pitchFamily="34" charset="-120"/>
-              </a:rPr>
-              <a:t>Heparin contamination from a line — prolongs aPTT; neutralize and repeat.</a:t>
-            </a:r>
-            <a:endParaRPr lang="en-US" sz="1250" dirty="0"/>
-          </a:p>
-          <a:p>
-            <a:pPr algn="l" marL="177800" indent="-177800">
-              <a:spcAft>
-                <a:spcPts val="900"/>
-              </a:spcAft>
-              <a:buSzPct val="100000"/>
-              <a:buChar char="•"/>
-            </a:pPr>
-            <a:r>
-              <a:rPr lang="en-US" sz="1250" dirty="0">
-                <a:solidFill>
-                  <a:srgbClr val="33444F"/>
-                </a:solidFill>
-                <a:latin typeface="Calibri" pitchFamily="34" charset="0"/>
-                <a:ea typeface="Calibri" pitchFamily="34" charset="-122"/>
-                <a:cs typeface="Calibri" pitchFamily="34" charset="-120"/>
-              </a:rPr>
-              <a:t>High hematocrit (&gt;55%) — relative citrate excess; adjust the tube.</a:t>
-            </a:r>
-            <a:endParaRPr lang="en-US" sz="1250" dirty="0"/>
-          </a:p>
-          <a:p>
-            <a:pPr algn="l" marL="177800" indent="-177800">
-              <a:spcAft>
-                <a:spcPts val="900"/>
-              </a:spcAft>
-              <a:buSzPct val="100000"/>
-              <a:buChar char="•"/>
-            </a:pPr>
-            <a:r>
-              <a:rPr lang="en-US" sz="1250" dirty="0">
-                <a:solidFill>
-                  <a:srgbClr val="33444F"/>
-                </a:solidFill>
-                <a:latin typeface="Calibri" pitchFamily="34" charset="0"/>
-                <a:ea typeface="Calibri" pitchFamily="34" charset="-122"/>
-                <a:cs typeface="Calibri" pitchFamily="34" charset="-120"/>
-              </a:rPr>
-              <a:t>Clotted or old sample — reject.</a:t>
-            </a:r>
-            <a:endParaRPr lang="en-US" sz="1250" dirty="0"/>
-          </a:p>
-        </p:txBody>
-      </p:sp>
-      <p:sp>
-        <p:nvSpPr>
-          <p:cNvPr id="10" name="Text 8"/>
+            <a:pPr algn="ctr" indent="0" marL="0">
+              <a:buNone/>
+            </a:pPr>
+            <a:r>
+              <a:rPr lang="en-US" sz="1150" i="1" dirty="0">
+                <a:solidFill>
+                  <a:srgbClr val="6B7B8A"/>
+                </a:solidFill>
+                <a:latin typeface="Calibri" pitchFamily="34" charset="0"/>
+                <a:ea typeface="Calibri" pitchFamily="34" charset="-122"/>
+                <a:cs typeface="Calibri" pitchFamily="34" charset="-120"/>
+              </a:rPr>
+              <a:t>Original schematic (department teaching reference). Corrects with normal plasma = factor deficiency; fails to correct = inhibitor.</a:t>
+            </a:r>
+            <a:endParaRPr lang="en-US" sz="1150" dirty="0"/>
+          </a:p>
+        </p:txBody>
+      </p:sp>
+      <p:sp>
+        <p:nvSpPr>
+          <p:cNvPr id="7" name="Text 4"/>
           <p:cNvSpPr/>
           <p:nvPr/>
         </p:nvSpPr>
@@ -3765,7 +3624,7 @@
       </p:sp>
       <p:sp>
         <p:nvSpPr>
-          <p:cNvPr id="11" name="Text 9"/>
+          <p:cNvPr id="8" name="Text 5"/>
           <p:cNvSpPr/>
           <p:nvPr/>
         </p:nvSpPr>
@@ -3841,6 +3700,570 @@
 <file path=ppt/slides/slide11.xml><?xml version="1.0" encoding="utf-8"?>
 <p:sld xmlns:a="http://schemas.openxmlformats.org/drawingml/2006/main" xmlns:r="http://schemas.openxmlformats.org/officeDocument/2006/relationships" xmlns:p="http://schemas.openxmlformats.org/presentationml/2006/main">
   <p:cSld name="Slide 11">
+    <p:bg>
+      <p:bgPr>
+        <a:solidFill>
+          <a:srgbClr val="FFFFFF"/>
+        </a:solidFill>
+      </p:bgPr>
+    </p:bg>
+    <p:spTree>
+      <p:nvGrpSpPr>
+        <p:cNvPr id="1" name=""/>
+        <p:cNvGrpSpPr/>
+        <p:nvPr/>
+      </p:nvGrpSpPr>
+      <p:grpSpPr>
+        <a:xfrm>
+          <a:off x="0" y="0"/>
+          <a:ext cx="0" cy="0"/>
+          <a:chOff x="0" y="0"/>
+          <a:chExt cx="0" cy="0"/>
+        </a:xfrm>
+      </p:grpSpPr>
+      <p:sp>
+        <p:nvSpPr>
+          <p:cNvPr id="2" name="Text 0"/>
+          <p:cNvSpPr/>
+          <p:nvPr/>
+        </p:nvSpPr>
+        <p:spPr>
+          <a:xfrm>
+            <a:off x="566928" y="329184"/>
+            <a:ext cx="10515600" cy="310896"/>
+          </a:xfrm>
+          <a:prstGeom prst="rect">
+            <a:avLst/>
+          </a:prstGeom>
+          <a:noFill/>
+          <a:ln/>
+        </p:spPr>
+        <p:txBody>
+          <a:bodyPr wrap="square" lIns="0" tIns="0" rIns="0" bIns="0" rtlCol="0" anchor="ctr"/>
+          <a:lstStyle/>
+          <a:p>
+            <a:pPr algn="l" indent="0" marL="0">
+              <a:buNone/>
+            </a:pPr>
+            <a:r>
+              <a:rPr lang="en-US" sz="1100" b="1" spc="150" kern="0" dirty="0">
+                <a:solidFill>
+                  <a:srgbClr val="C62133"/>
+                </a:solidFill>
+                <a:latin typeface="Calibri" pitchFamily="34" charset="0"/>
+                <a:ea typeface="Calibri" pitchFamily="34" charset="-122"/>
+                <a:cs typeface="Calibri" pitchFamily="34" charset="-120"/>
+              </a:rPr>
+              <a:t>HEMATOLOGY &amp; COAGULATION   ·   MIXING STUDY</a:t>
+            </a:r>
+            <a:endParaRPr lang="en-US" sz="1100" dirty="0"/>
+          </a:p>
+        </p:txBody>
+      </p:sp>
+      <p:sp>
+        <p:nvSpPr>
+          <p:cNvPr id="3" name="Text 1"/>
+          <p:cNvSpPr/>
+          <p:nvPr/>
+        </p:nvSpPr>
+        <p:spPr>
+          <a:xfrm>
+            <a:off x="566928" y="713232"/>
+            <a:ext cx="11064240" cy="749808"/>
+          </a:xfrm>
+          <a:prstGeom prst="rect">
+            <a:avLst/>
+          </a:prstGeom>
+          <a:noFill/>
+          <a:ln/>
+        </p:spPr>
+        <p:txBody>
+          <a:bodyPr wrap="square" lIns="0" tIns="0" rIns="0" bIns="0" rtlCol="0" anchor="ctr"/>
+          <a:lstStyle/>
+          <a:p>
+            <a:pPr algn="l" indent="0" marL="0">
+              <a:buNone/>
+            </a:pPr>
+            <a:r>
+              <a:rPr lang="en-US" sz="3000" b="1" dirty="0">
+                <a:solidFill>
+                  <a:srgbClr val="0E3A5F"/>
+                </a:solidFill>
+                <a:latin typeface="Calibri" pitchFamily="34" charset="0"/>
+                <a:ea typeface="Calibri" pitchFamily="34" charset="-122"/>
+                <a:cs typeface="Calibri" pitchFamily="34" charset="-120"/>
+              </a:rPr>
+              <a:t>Interpreting the Mix</a:t>
+            </a:r>
+            <a:endParaRPr lang="en-US" sz="3000" dirty="0"/>
+          </a:p>
+        </p:txBody>
+      </p:sp>
+      <p:sp>
+        <p:nvSpPr>
+          <p:cNvPr id="4" name="Shape 2"/>
+          <p:cNvSpPr/>
+          <p:nvPr/>
+        </p:nvSpPr>
+        <p:spPr>
+          <a:xfrm>
+            <a:off x="566928" y="1517904"/>
+            <a:ext cx="5346040" cy="4114800"/>
+          </a:xfrm>
+          <a:prstGeom prst="roundRect">
+            <a:avLst>
+              <a:gd name="adj" fmla="val 2000"/>
+            </a:avLst>
+          </a:prstGeom>
+          <a:solidFill>
+            <a:srgbClr val="FBEAEC"/>
+          </a:solidFill>
+          <a:ln/>
+          <a:effectLst>
+            <a:outerShdw sx="100000" sy="100000" kx="0" ky="0" algn="bl" rotWithShape="0" blurRad="88900" dist="25400" dir="5400000">
+              <a:srgbClr val="22303C">
+                <a:alpha val="12000"/>
+              </a:srgbClr>
+            </a:outerShdw>
+          </a:effectLst>
+        </p:spPr>
+      </p:sp>
+      <p:sp>
+        <p:nvSpPr>
+          <p:cNvPr id="5" name="Text 3"/>
+          <p:cNvSpPr/>
+          <p:nvPr/>
+        </p:nvSpPr>
+        <p:spPr>
+          <a:xfrm>
+            <a:off x="804672" y="1682496"/>
+            <a:ext cx="4888840" cy="274320"/>
+          </a:xfrm>
+          <a:prstGeom prst="rect">
+            <a:avLst/>
+          </a:prstGeom>
+          <a:noFill/>
+          <a:ln/>
+        </p:spPr>
+        <p:txBody>
+          <a:bodyPr wrap="square" lIns="0" tIns="0" rIns="0" bIns="0" rtlCol="0" anchor="ctr"/>
+          <a:lstStyle/>
+          <a:p>
+            <a:pPr indent="0" marL="0">
+              <a:buNone/>
+            </a:pPr>
+            <a:r>
+              <a:rPr lang="en-US" sz="1200" b="1" spc="100" kern="0" dirty="0">
+                <a:solidFill>
+                  <a:srgbClr val="8E1622"/>
+                </a:solidFill>
+                <a:latin typeface="Calibri" pitchFamily="34" charset="0"/>
+                <a:ea typeface="Calibri" pitchFamily="34" charset="-122"/>
+                <a:cs typeface="Calibri" pitchFamily="34" charset="-120"/>
+              </a:rPr>
+              <a:t>CORRECTS</a:t>
+            </a:r>
+            <a:endParaRPr lang="en-US" sz="1200" dirty="0"/>
+          </a:p>
+        </p:txBody>
+      </p:sp>
+      <p:sp>
+        <p:nvSpPr>
+          <p:cNvPr id="6" name="Text 4"/>
+          <p:cNvSpPr/>
+          <p:nvPr/>
+        </p:nvSpPr>
+        <p:spPr>
+          <a:xfrm>
+            <a:off x="804672" y="2029968"/>
+            <a:ext cx="4870552" cy="3474720"/>
+          </a:xfrm>
+          <a:prstGeom prst="rect">
+            <a:avLst/>
+          </a:prstGeom>
+          <a:noFill/>
+          <a:ln/>
+        </p:spPr>
+        <p:txBody>
+          <a:bodyPr wrap="square" lIns="0" tIns="0" rIns="0" bIns="0" rtlCol="0" anchor="t"/>
+          <a:lstStyle/>
+          <a:p>
+            <a:pPr algn="l" marL="177800" indent="-177800">
+              <a:spcAft>
+                <a:spcPts val="900"/>
+              </a:spcAft>
+              <a:buSzPct val="100000"/>
+              <a:buChar char="•"/>
+            </a:pPr>
+            <a:r>
+              <a:rPr lang="en-US" sz="1250" b="1" dirty="0">
+                <a:solidFill>
+                  <a:srgbClr val="1B2A38"/>
+                </a:solidFill>
+                <a:latin typeface="Calibri" pitchFamily="34" charset="0"/>
+                <a:ea typeface="Calibri" pitchFamily="34" charset="-122"/>
+                <a:cs typeface="Calibri" pitchFamily="34" charset="-120"/>
+              </a:rPr>
+              <a:t>Normalization on 1:1 mix with normal plasma indicates a FACTOR DEFICIENCY.</a:t>
+            </a:r>
+            <a:endParaRPr lang="en-US" sz="1250" dirty="0"/>
+          </a:p>
+          <a:p>
+            <a:pPr algn="l" marL="177800" indent="-177800">
+              <a:spcAft>
+                <a:spcPts val="900"/>
+              </a:spcAft>
+              <a:buSzPct val="100000"/>
+              <a:buChar char="•"/>
+            </a:pPr>
+            <a:r>
+              <a:rPr lang="en-US" sz="1250" dirty="0">
+                <a:solidFill>
+                  <a:srgbClr val="33444F"/>
+                </a:solidFill>
+                <a:latin typeface="Calibri" pitchFamily="34" charset="0"/>
+                <a:ea typeface="Calibri" pitchFamily="34" charset="-122"/>
+                <a:cs typeface="Calibri" pitchFamily="34" charset="-120"/>
+              </a:rPr>
+              <a:t>The normal plasma supplies the missing factor.</a:t>
+            </a:r>
+            <a:endParaRPr lang="en-US" sz="1250" dirty="0"/>
+          </a:p>
+          <a:p>
+            <a:pPr algn="l" marL="177800" indent="-177800">
+              <a:spcAft>
+                <a:spcPts val="900"/>
+              </a:spcAft>
+              <a:buSzPct val="100000"/>
+              <a:buChar char="•"/>
+            </a:pPr>
+            <a:r>
+              <a:rPr lang="en-US" sz="1250" dirty="0">
+                <a:solidFill>
+                  <a:srgbClr val="33444F"/>
+                </a:solidFill>
+                <a:latin typeface="Calibri" pitchFamily="34" charset="0"/>
+                <a:ea typeface="Calibri" pitchFamily="34" charset="-122"/>
+                <a:cs typeface="Calibri" pitchFamily="34" charset="-120"/>
+              </a:rPr>
+              <a:t>Confirm with specific factor assays.</a:t>
+            </a:r>
+            <a:endParaRPr lang="en-US" sz="1250" dirty="0"/>
+          </a:p>
+          <a:p>
+            <a:pPr algn="l" marL="177800" indent="-177800">
+              <a:spcAft>
+                <a:spcPts val="900"/>
+              </a:spcAft>
+              <a:buSzPct val="100000"/>
+              <a:buChar char="•"/>
+            </a:pPr>
+            <a:r>
+              <a:rPr lang="en-US" sz="1250" dirty="0">
+                <a:solidFill>
+                  <a:srgbClr val="33444F"/>
+                </a:solidFill>
+                <a:latin typeface="Calibri" pitchFamily="34" charset="0"/>
+                <a:ea typeface="Calibri" pitchFamily="34" charset="-122"/>
+                <a:cs typeface="Calibri" pitchFamily="34" charset="-120"/>
+              </a:rPr>
+              <a:t>Causes: hemophilia, vitamin-K deficiency, liver disease, DIC.</a:t>
+            </a:r>
+            <a:endParaRPr lang="en-US" sz="1250" dirty="0"/>
+          </a:p>
+        </p:txBody>
+      </p:sp>
+      <p:sp>
+        <p:nvSpPr>
+          <p:cNvPr id="7" name="Shape 5"/>
+          <p:cNvSpPr/>
+          <p:nvPr/>
+        </p:nvSpPr>
+        <p:spPr>
+          <a:xfrm>
+            <a:off x="6278728" y="1517904"/>
+            <a:ext cx="5346040" cy="4114800"/>
+          </a:xfrm>
+          <a:prstGeom prst="roundRect">
+            <a:avLst>
+              <a:gd name="adj" fmla="val 2000"/>
+            </a:avLst>
+          </a:prstGeom>
+          <a:solidFill>
+            <a:srgbClr val="FBE7E9"/>
+          </a:solidFill>
+          <a:ln/>
+          <a:effectLst>
+            <a:outerShdw sx="100000" sy="100000" kx="0" ky="0" algn="bl" rotWithShape="0" blurRad="88900" dist="25400" dir="5400000">
+              <a:srgbClr val="22303C">
+                <a:alpha val="12000"/>
+              </a:srgbClr>
+            </a:outerShdw>
+          </a:effectLst>
+        </p:spPr>
+      </p:sp>
+      <p:sp>
+        <p:nvSpPr>
+          <p:cNvPr id="8" name="Text 6"/>
+          <p:cNvSpPr/>
+          <p:nvPr/>
+        </p:nvSpPr>
+        <p:spPr>
+          <a:xfrm>
+            <a:off x="6516472" y="1682496"/>
+            <a:ext cx="4888840" cy="274320"/>
+          </a:xfrm>
+          <a:prstGeom prst="rect">
+            <a:avLst/>
+          </a:prstGeom>
+          <a:noFill/>
+          <a:ln/>
+        </p:spPr>
+        <p:txBody>
+          <a:bodyPr wrap="square" lIns="0" tIns="0" rIns="0" bIns="0" rtlCol="0" anchor="ctr"/>
+          <a:lstStyle/>
+          <a:p>
+            <a:pPr indent="0" marL="0">
+              <a:buNone/>
+            </a:pPr>
+            <a:r>
+              <a:rPr lang="en-US" sz="1200" b="1" spc="100" kern="0" dirty="0">
+                <a:solidFill>
+                  <a:srgbClr val="8E1622"/>
+                </a:solidFill>
+                <a:latin typeface="Calibri" pitchFamily="34" charset="0"/>
+                <a:ea typeface="Calibri" pitchFamily="34" charset="-122"/>
+                <a:cs typeface="Calibri" pitchFamily="34" charset="-120"/>
+              </a:rPr>
+              <a:t>DOES NOT CORRECT</a:t>
+            </a:r>
+            <a:endParaRPr lang="en-US" sz="1200" dirty="0"/>
+          </a:p>
+        </p:txBody>
+      </p:sp>
+      <p:sp>
+        <p:nvSpPr>
+          <p:cNvPr id="9" name="Text 7"/>
+          <p:cNvSpPr/>
+          <p:nvPr/>
+        </p:nvSpPr>
+        <p:spPr>
+          <a:xfrm>
+            <a:off x="6516472" y="2029968"/>
+            <a:ext cx="4870552" cy="3474720"/>
+          </a:xfrm>
+          <a:prstGeom prst="rect">
+            <a:avLst/>
+          </a:prstGeom>
+          <a:noFill/>
+          <a:ln/>
+        </p:spPr>
+        <p:txBody>
+          <a:bodyPr wrap="square" lIns="0" tIns="0" rIns="0" bIns="0" rtlCol="0" anchor="t"/>
+          <a:lstStyle/>
+          <a:p>
+            <a:pPr algn="l" marL="177800" indent="-177800">
+              <a:spcAft>
+                <a:spcPts val="900"/>
+              </a:spcAft>
+              <a:buSzPct val="100000"/>
+              <a:buChar char="•"/>
+            </a:pPr>
+            <a:r>
+              <a:rPr lang="en-US" sz="1250" b="1" dirty="0">
+                <a:solidFill>
+                  <a:srgbClr val="1B2A38"/>
+                </a:solidFill>
+                <a:latin typeface="Calibri" pitchFamily="34" charset="0"/>
+                <a:ea typeface="Calibri" pitchFamily="34" charset="-122"/>
+                <a:cs typeface="Calibri" pitchFamily="34" charset="-120"/>
+              </a:rPr>
+              <a:t>Persistent prolongation indicates an INHIBITOR.</a:t>
+            </a:r>
+            <a:endParaRPr lang="en-US" sz="1250" dirty="0"/>
+          </a:p>
+          <a:p>
+            <a:pPr algn="l" marL="177800" indent="-177800">
+              <a:spcAft>
+                <a:spcPts val="900"/>
+              </a:spcAft>
+              <a:buSzPct val="100000"/>
+              <a:buChar char="•"/>
+            </a:pPr>
+            <a:r>
+              <a:rPr lang="en-US" sz="1250" dirty="0">
+                <a:solidFill>
+                  <a:srgbClr val="33444F"/>
+                </a:solidFill>
+                <a:latin typeface="Calibri" pitchFamily="34" charset="0"/>
+                <a:ea typeface="Calibri" pitchFamily="34" charset="-122"/>
+                <a:cs typeface="Calibri" pitchFamily="34" charset="-120"/>
+              </a:rPr>
+              <a:t>Lupus anticoagulant, specific factor inhibitor, or heparin.</a:t>
+            </a:r>
+            <a:endParaRPr lang="en-US" sz="1250" dirty="0"/>
+          </a:p>
+          <a:p>
+            <a:pPr algn="l" marL="177800" indent="-177800">
+              <a:spcAft>
+                <a:spcPts val="900"/>
+              </a:spcAft>
+              <a:buSzPct val="100000"/>
+              <a:buChar char="•"/>
+            </a:pPr>
+            <a:r>
+              <a:rPr lang="en-US" sz="1250" dirty="0">
+                <a:solidFill>
+                  <a:srgbClr val="33444F"/>
+                </a:solidFill>
+                <a:latin typeface="Calibri" pitchFamily="34" charset="0"/>
+                <a:ea typeface="Calibri" pitchFamily="34" charset="-122"/>
+                <a:cs typeface="Calibri" pitchFamily="34" charset="-120"/>
+              </a:rPr>
+              <a:t>An incubated (37°C, 1–2 h) mix unmasks time-dependent factor VIII inhibitors.</a:t>
+            </a:r>
+            <a:endParaRPr lang="en-US" sz="1250" dirty="0"/>
+          </a:p>
+          <a:p>
+            <a:pPr algn="l" marL="177800" indent="-177800">
+              <a:spcAft>
+                <a:spcPts val="900"/>
+              </a:spcAft>
+              <a:buSzPct val="100000"/>
+              <a:buChar char="•"/>
+            </a:pPr>
+            <a:r>
+              <a:rPr lang="en-US" sz="1250" dirty="0">
+                <a:solidFill>
+                  <a:srgbClr val="33444F"/>
+                </a:solidFill>
+                <a:latin typeface="Calibri" pitchFamily="34" charset="0"/>
+                <a:ea typeface="Calibri" pitchFamily="34" charset="-122"/>
+                <a:cs typeface="Calibri" pitchFamily="34" charset="-120"/>
+              </a:rPr>
+              <a:t>Pursue inhibitor-specific testing.</a:t>
+            </a:r>
+            <a:endParaRPr lang="en-US" sz="1250" dirty="0"/>
+          </a:p>
+        </p:txBody>
+      </p:sp>
+      <p:sp>
+        <p:nvSpPr>
+          <p:cNvPr id="10" name="Text 8"/>
+          <p:cNvSpPr/>
+          <p:nvPr/>
+        </p:nvSpPr>
+        <p:spPr>
+          <a:xfrm>
+            <a:off x="566928" y="6473952"/>
+            <a:ext cx="7772400" cy="274320"/>
+          </a:xfrm>
+          <a:prstGeom prst="rect">
+            <a:avLst/>
+          </a:prstGeom>
+          <a:noFill/>
+          <a:ln/>
+        </p:spPr>
+        <p:txBody>
+          <a:bodyPr wrap="square" lIns="0" tIns="0" rIns="0" bIns="0" rtlCol="0" anchor="ctr"/>
+          <a:lstStyle/>
+          <a:p>
+            <a:pPr algn="l" indent="0" marL="0">
+              <a:buNone/>
+            </a:pPr>
+            <a:r>
+              <a:rPr lang="en-US" sz="850" dirty="0">
+                <a:solidFill>
+                  <a:srgbClr val="9AA8B4"/>
+                </a:solidFill>
+                <a:latin typeface="Calibri" pitchFamily="34" charset="0"/>
+                <a:ea typeface="Calibri" pitchFamily="34" charset="-122"/>
+                <a:cs typeface="Calibri" pitchFamily="34" charset="-120"/>
+              </a:rPr>
+              <a:t>Makassed General Hospital  ·  Department of Laboratory Medicine</a:t>
+            </a:r>
+            <a:endParaRPr lang="en-US" sz="850" dirty="0"/>
+          </a:p>
+        </p:txBody>
+      </p:sp>
+      <p:sp>
+        <p:nvSpPr>
+          <p:cNvPr id="11" name="Text 9"/>
+          <p:cNvSpPr/>
+          <p:nvPr/>
+        </p:nvSpPr>
+        <p:spPr>
+          <a:xfrm>
+            <a:off x="9814255" y="6473952"/>
+            <a:ext cx="1828800" cy="274320"/>
+          </a:xfrm>
+          <a:prstGeom prst="rect">
+            <a:avLst/>
+          </a:prstGeom>
+          <a:noFill/>
+          <a:ln/>
+        </p:spPr>
+        <p:txBody>
+          <a:bodyPr wrap="square" lIns="0" tIns="0" rIns="0" bIns="0" rtlCol="0" anchor="ctr"/>
+          <a:lstStyle/>
+          <a:p>
+            <a:pPr algn="r" indent="0" marL="0">
+              <a:buNone/>
+            </a:pPr>
+            <a:r>
+              <a:rPr lang="en-US" sz="850" dirty="0">
+                <a:solidFill>
+                  <a:srgbClr val="9AA8B4"/>
+                </a:solidFill>
+                <a:latin typeface="Calibri" pitchFamily="34" charset="0"/>
+                <a:ea typeface="Calibri" pitchFamily="34" charset="-122"/>
+                <a:cs typeface="Calibri" pitchFamily="34" charset="-120"/>
+              </a:rPr>
+              <a:t>CP Lecture Series</a:t>
+            </a:r>
+            <a:pPr algn="r" indent="0" marL="0">
+              <a:buNone/>
+            </a:pPr>
+            <a:r>
+              <a:rPr lang="en-US" sz="850" dirty="0">
+                <a:solidFill>
+                  <a:srgbClr val="DCE4EC"/>
+                </a:solidFill>
+                <a:latin typeface="Calibri" pitchFamily="34" charset="0"/>
+                <a:ea typeface="Calibri" pitchFamily="34" charset="-122"/>
+                <a:cs typeface="Calibri" pitchFamily="34" charset="-120"/>
+              </a:rPr>
+              <a:t>   ·   </a:t>
+            </a:r>
+            <a:pPr algn="r" indent="0" marL="0">
+              <a:buNone/>
+            </a:pPr>
+            <a:r>
+              <a:rPr lang="en-US" sz="850" b="1" dirty="0">
+                <a:solidFill>
+                  <a:srgbClr val="C62133"/>
+                </a:solidFill>
+                <a:latin typeface="Calibri" pitchFamily="34" charset="0"/>
+                <a:ea typeface="Calibri" pitchFamily="34" charset="-122"/>
+                <a:cs typeface="Calibri" pitchFamily="34" charset="-120"/>
+              </a:rPr>
+              <a:t>9</a:t>
+            </a:r>
+            <a:endParaRPr lang="en-US" sz="850" dirty="0"/>
+          </a:p>
+        </p:txBody>
+      </p:sp>
+    </p:spTree>
+  </p:cSld>
+  <p:clrMapOvr>
+    <a:masterClrMapping/>
+  </p:clrMapOvr>
+</p:sld>
+</file>
+
+<file path=ppt/slides/slide12.xml><?xml version="1.0" encoding="utf-8"?>
+<p:sld xmlns:a="http://schemas.openxmlformats.org/drawingml/2006/main" xmlns:r="http://schemas.openxmlformats.org/officeDocument/2006/relationships" xmlns:p="http://schemas.openxmlformats.org/presentationml/2006/main">
+  <p:cSld name="Slide 12">
     <p:bg>
       <p:bgPr>
         <a:solidFill>
@@ -4017,573 +4440,9 @@
                 <a:ea typeface="Calibri" pitchFamily="34" charset="-122"/>
                 <a:cs typeface="Calibri" pitchFamily="34" charset="-120"/>
               </a:rPr>
-              <a:t>Thrombophilia, Disease Patterns &amp; Cases</a:t>
+              <a:t>Disorders, Pre-Analytics, Cases &amp; Board</a:t>
             </a:r>
             <a:endParaRPr lang="en-US" sz="3800" dirty="0"/>
-          </a:p>
-        </p:txBody>
-      </p:sp>
-    </p:spTree>
-  </p:cSld>
-  <p:clrMapOvr>
-    <a:masterClrMapping/>
-  </p:clrMapOvr>
-</p:sld>
-</file>
-
-<file path=ppt/slides/slide12.xml><?xml version="1.0" encoding="utf-8"?>
-<p:sld xmlns:a="http://schemas.openxmlformats.org/drawingml/2006/main" xmlns:r="http://schemas.openxmlformats.org/officeDocument/2006/relationships" xmlns:p="http://schemas.openxmlformats.org/presentationml/2006/main">
-  <p:cSld name="Slide 12">
-    <p:bg>
-      <p:bgPr>
-        <a:solidFill>
-          <a:srgbClr val="FFFFFF"/>
-        </a:solidFill>
-      </p:bgPr>
-    </p:bg>
-    <p:spTree>
-      <p:nvGrpSpPr>
-        <p:cNvPr id="1" name=""/>
-        <p:cNvGrpSpPr/>
-        <p:nvPr/>
-      </p:nvGrpSpPr>
-      <p:grpSpPr>
-        <a:xfrm>
-          <a:off x="0" y="0"/>
-          <a:ext cx="0" cy="0"/>
-          <a:chOff x="0" y="0"/>
-          <a:chExt cx="0" cy="0"/>
-        </a:xfrm>
-      </p:grpSpPr>
-      <p:sp>
-        <p:nvSpPr>
-          <p:cNvPr id="2" name="Text 0"/>
-          <p:cNvSpPr/>
-          <p:nvPr/>
-        </p:nvSpPr>
-        <p:spPr>
-          <a:xfrm>
-            <a:off x="566928" y="329184"/>
-            <a:ext cx="10515600" cy="310896"/>
-          </a:xfrm>
-          <a:prstGeom prst="rect">
-            <a:avLst/>
-          </a:prstGeom>
-          <a:noFill/>
-          <a:ln/>
-        </p:spPr>
-        <p:txBody>
-          <a:bodyPr wrap="square" lIns="0" tIns="0" rIns="0" bIns="0" rtlCol="0" anchor="ctr"/>
-          <a:lstStyle/>
-          <a:p>
-            <a:pPr algn="l" indent="0" marL="0">
-              <a:buNone/>
-            </a:pPr>
-            <a:r>
-              <a:rPr lang="en-US" sz="1100" b="1" spc="150" kern="0" dirty="0">
-                <a:solidFill>
-                  <a:srgbClr val="C62133"/>
-                </a:solidFill>
-                <a:latin typeface="Calibri" pitchFamily="34" charset="0"/>
-                <a:ea typeface="Calibri" pitchFamily="34" charset="-122"/>
-                <a:cs typeface="Calibri" pitchFamily="34" charset="-120"/>
-              </a:rPr>
-              <a:t>HEMATOLOGY &amp; COAGULATION   ·   THROMBOPHILIA</a:t>
-            </a:r>
-            <a:endParaRPr lang="en-US" sz="1100" dirty="0"/>
-          </a:p>
-        </p:txBody>
-      </p:sp>
-      <p:sp>
-        <p:nvSpPr>
-          <p:cNvPr id="3" name="Text 1"/>
-          <p:cNvSpPr/>
-          <p:nvPr/>
-        </p:nvSpPr>
-        <p:spPr>
-          <a:xfrm>
-            <a:off x="566928" y="713232"/>
-            <a:ext cx="11064240" cy="749808"/>
-          </a:xfrm>
-          <a:prstGeom prst="rect">
-            <a:avLst/>
-          </a:prstGeom>
-          <a:noFill/>
-          <a:ln/>
-        </p:spPr>
-        <p:txBody>
-          <a:bodyPr wrap="square" lIns="0" tIns="0" rIns="0" bIns="0" rtlCol="0" anchor="ctr"/>
-          <a:lstStyle/>
-          <a:p>
-            <a:pPr algn="l" indent="0" marL="0">
-              <a:buNone/>
-            </a:pPr>
-            <a:r>
-              <a:rPr lang="en-US" sz="3000" b="1" dirty="0">
-                <a:solidFill>
-                  <a:srgbClr val="0E3A5F"/>
-                </a:solidFill>
-                <a:latin typeface="Calibri" pitchFamily="34" charset="0"/>
-                <a:ea typeface="Calibri" pitchFamily="34" charset="-122"/>
-                <a:cs typeface="Calibri" pitchFamily="34" charset="-120"/>
-              </a:rPr>
-              <a:t>Lupus Anticoagulant &amp; Thrombophilia Timing</a:t>
-            </a:r>
-            <a:endParaRPr lang="en-US" sz="3000" dirty="0"/>
-          </a:p>
-        </p:txBody>
-      </p:sp>
-      <p:sp>
-        <p:nvSpPr>
-          <p:cNvPr id="4" name="Shape 2"/>
-          <p:cNvSpPr/>
-          <p:nvPr/>
-        </p:nvSpPr>
-        <p:spPr>
-          <a:xfrm>
-            <a:off x="566928" y="1517904"/>
-            <a:ext cx="5346040" cy="4114800"/>
-          </a:xfrm>
-          <a:prstGeom prst="roundRect">
-            <a:avLst>
-              <a:gd name="adj" fmla="val 2000"/>
-            </a:avLst>
-          </a:prstGeom>
-          <a:solidFill>
-            <a:srgbClr val="FBEAEC"/>
-          </a:solidFill>
-          <a:ln/>
-          <a:effectLst>
-            <a:outerShdw sx="100000" sy="100000" kx="0" ky="0" algn="bl" rotWithShape="0" blurRad="88900" dist="25400" dir="5400000">
-              <a:srgbClr val="22303C">
-                <a:alpha val="12000"/>
-              </a:srgbClr>
-            </a:outerShdw>
-          </a:effectLst>
-        </p:spPr>
-      </p:sp>
-      <p:sp>
-        <p:nvSpPr>
-          <p:cNvPr id="5" name="Text 3"/>
-          <p:cNvSpPr/>
-          <p:nvPr/>
-        </p:nvSpPr>
-        <p:spPr>
-          <a:xfrm>
-            <a:off x="804672" y="1682496"/>
-            <a:ext cx="4888840" cy="274320"/>
-          </a:xfrm>
-          <a:prstGeom prst="rect">
-            <a:avLst/>
-          </a:prstGeom>
-          <a:noFill/>
-          <a:ln/>
-        </p:spPr>
-        <p:txBody>
-          <a:bodyPr wrap="square" lIns="0" tIns="0" rIns="0" bIns="0" rtlCol="0" anchor="ctr"/>
-          <a:lstStyle/>
-          <a:p>
-            <a:pPr indent="0" marL="0">
-              <a:buNone/>
-            </a:pPr>
-            <a:r>
-              <a:rPr lang="en-US" sz="1200" b="1" spc="100" kern="0" dirty="0">
-                <a:solidFill>
-                  <a:srgbClr val="8E1622"/>
-                </a:solidFill>
-                <a:latin typeface="Calibri" pitchFamily="34" charset="0"/>
-                <a:ea typeface="Calibri" pitchFamily="34" charset="-122"/>
-                <a:cs typeface="Calibri" pitchFamily="34" charset="-120"/>
-              </a:rPr>
-              <a:t>LUPUS ANTICOAGULANT</a:t>
-            </a:r>
-            <a:endParaRPr lang="en-US" sz="1200" dirty="0"/>
-          </a:p>
-        </p:txBody>
-      </p:sp>
-      <p:sp>
-        <p:nvSpPr>
-          <p:cNvPr id="6" name="Text 4"/>
-          <p:cNvSpPr/>
-          <p:nvPr/>
-        </p:nvSpPr>
-        <p:spPr>
-          <a:xfrm>
-            <a:off x="804672" y="2029968"/>
-            <a:ext cx="4870552" cy="3474720"/>
-          </a:xfrm>
-          <a:prstGeom prst="rect">
-            <a:avLst/>
-          </a:prstGeom>
-          <a:noFill/>
-          <a:ln/>
-        </p:spPr>
-        <p:txBody>
-          <a:bodyPr wrap="square" lIns="0" tIns="0" rIns="0" bIns="0" rtlCol="0" anchor="t"/>
-          <a:lstStyle/>
-          <a:p>
-            <a:pPr algn="l" marL="177800" indent="-177800">
-              <a:spcAft>
-                <a:spcPts val="900"/>
-              </a:spcAft>
-              <a:buSzPct val="100000"/>
-              <a:buChar char="•"/>
-            </a:pPr>
-            <a:r>
-              <a:rPr lang="en-US" sz="1250" b="1" dirty="0">
-                <a:solidFill>
-                  <a:srgbClr val="1B2A38"/>
-                </a:solidFill>
-                <a:latin typeface="Calibri" pitchFamily="34" charset="0"/>
-                <a:ea typeface="Calibri" pitchFamily="34" charset="-122"/>
-                <a:cs typeface="Calibri" pitchFamily="34" charset="-120"/>
-              </a:rPr>
-              <a:t>A phospholipid-dependent inhibitor; non-correcting aPTT with phospholipid dependence on confirmation.</a:t>
-            </a:r>
-            <a:endParaRPr lang="en-US" sz="1250" dirty="0"/>
-          </a:p>
-          <a:p>
-            <a:pPr algn="l" marL="177800" indent="-177800">
-              <a:spcAft>
-                <a:spcPts val="900"/>
-              </a:spcAft>
-              <a:buSzPct val="100000"/>
-              <a:buChar char="•"/>
-            </a:pPr>
-            <a:r>
-              <a:rPr lang="en-US" sz="1250" dirty="0">
-                <a:solidFill>
-                  <a:srgbClr val="33444F"/>
-                </a:solidFill>
-                <a:latin typeface="Calibri" pitchFamily="34" charset="0"/>
-                <a:ea typeface="Calibri" pitchFamily="34" charset="-122"/>
-                <a:cs typeface="Calibri" pitchFamily="34" charset="-120"/>
-              </a:rPr>
-              <a:t>Demonstrate with two systems (e.g., dRVVT + sensitive aPTT).</a:t>
-            </a:r>
-            <a:endParaRPr lang="en-US" sz="1250" dirty="0"/>
-          </a:p>
-          <a:p>
-            <a:pPr algn="l" marL="177800" indent="-177800">
-              <a:spcAft>
-                <a:spcPts val="900"/>
-              </a:spcAft>
-              <a:buSzPct val="100000"/>
-              <a:buChar char="•"/>
-            </a:pPr>
-            <a:r>
-              <a:rPr lang="en-US" sz="1250" dirty="0">
-                <a:solidFill>
-                  <a:srgbClr val="33444F"/>
-                </a:solidFill>
-                <a:latin typeface="Calibri" pitchFamily="34" charset="0"/>
-                <a:ea typeface="Calibri" pitchFamily="34" charset="-122"/>
-                <a:cs typeface="Calibri" pitchFamily="34" charset="-120"/>
-              </a:rPr>
-              <a:t>Associated with thrombosis, not bleeding.</a:t>
-            </a:r>
-            <a:endParaRPr lang="en-US" sz="1250" dirty="0"/>
-          </a:p>
-          <a:p>
-            <a:pPr algn="l" marL="177800" indent="-177800">
-              <a:spcAft>
-                <a:spcPts val="900"/>
-              </a:spcAft>
-              <a:buSzPct val="100000"/>
-              <a:buChar char="•"/>
-            </a:pPr>
-            <a:r>
-              <a:rPr lang="en-US" sz="1250" dirty="0">
-                <a:solidFill>
-                  <a:srgbClr val="33444F"/>
-                </a:solidFill>
-                <a:latin typeface="Calibri" pitchFamily="34" charset="0"/>
-                <a:ea typeface="Calibri" pitchFamily="34" charset="-122"/>
-                <a:cs typeface="Calibri" pitchFamily="34" charset="-120"/>
-              </a:rPr>
-              <a:t>Part of antiphospholipid syndrome (persistent ≥ 12 weeks).</a:t>
-            </a:r>
-            <a:endParaRPr lang="en-US" sz="1250" dirty="0"/>
-          </a:p>
-        </p:txBody>
-      </p:sp>
-      <p:sp>
-        <p:nvSpPr>
-          <p:cNvPr id="7" name="Shape 5"/>
-          <p:cNvSpPr/>
-          <p:nvPr/>
-        </p:nvSpPr>
-        <p:spPr>
-          <a:xfrm>
-            <a:off x="6278728" y="1517904"/>
-            <a:ext cx="5346040" cy="4114800"/>
-          </a:xfrm>
-          <a:prstGeom prst="roundRect">
-            <a:avLst>
-              <a:gd name="adj" fmla="val 2000"/>
-            </a:avLst>
-          </a:prstGeom>
-          <a:solidFill>
-            <a:srgbClr val="FBEAEC"/>
-          </a:solidFill>
-          <a:ln/>
-          <a:effectLst>
-            <a:outerShdw sx="100000" sy="100000" kx="0" ky="0" algn="bl" rotWithShape="0" blurRad="88900" dist="25400" dir="5400000">
-              <a:srgbClr val="22303C">
-                <a:alpha val="12000"/>
-              </a:srgbClr>
-            </a:outerShdw>
-          </a:effectLst>
-        </p:spPr>
-      </p:sp>
-      <p:sp>
-        <p:nvSpPr>
-          <p:cNvPr id="8" name="Text 6"/>
-          <p:cNvSpPr/>
-          <p:nvPr/>
-        </p:nvSpPr>
-        <p:spPr>
-          <a:xfrm>
-            <a:off x="6516472" y="1682496"/>
-            <a:ext cx="4888840" cy="274320"/>
-          </a:xfrm>
-          <a:prstGeom prst="rect">
-            <a:avLst/>
-          </a:prstGeom>
-          <a:noFill/>
-          <a:ln/>
-        </p:spPr>
-        <p:txBody>
-          <a:bodyPr wrap="square" lIns="0" tIns="0" rIns="0" bIns="0" rtlCol="0" anchor="ctr"/>
-          <a:lstStyle/>
-          <a:p>
-            <a:pPr indent="0" marL="0">
-              <a:buNone/>
-            </a:pPr>
-            <a:r>
-              <a:rPr lang="en-US" sz="1200" b="1" spc="100" kern="0" dirty="0">
-                <a:solidFill>
-                  <a:srgbClr val="8E1622"/>
-                </a:solidFill>
-                <a:latin typeface="Calibri" pitchFamily="34" charset="0"/>
-                <a:ea typeface="Calibri" pitchFamily="34" charset="-122"/>
-                <a:cs typeface="Calibri" pitchFamily="34" charset="-120"/>
-              </a:rPr>
-              <a:t>THROMBOPHILIA — WHAT AND WHEN</a:t>
-            </a:r>
-            <a:endParaRPr lang="en-US" sz="1200" dirty="0"/>
-          </a:p>
-        </p:txBody>
-      </p:sp>
-      <p:sp>
-        <p:nvSpPr>
-          <p:cNvPr id="9" name="Text 7"/>
-          <p:cNvSpPr/>
-          <p:nvPr/>
-        </p:nvSpPr>
-        <p:spPr>
-          <a:xfrm>
-            <a:off x="6516472" y="2029968"/>
-            <a:ext cx="4870552" cy="3474720"/>
-          </a:xfrm>
-          <a:prstGeom prst="rect">
-            <a:avLst/>
-          </a:prstGeom>
-          <a:noFill/>
-          <a:ln/>
-        </p:spPr>
-        <p:txBody>
-          <a:bodyPr wrap="square" lIns="0" tIns="0" rIns="0" bIns="0" rtlCol="0" anchor="t"/>
-          <a:lstStyle/>
-          <a:p>
-            <a:pPr algn="l" marL="177800" indent="-177800">
-              <a:spcAft>
-                <a:spcPts val="900"/>
-              </a:spcAft>
-              <a:buSzPct val="100000"/>
-              <a:buChar char="•"/>
-            </a:pPr>
-            <a:r>
-              <a:rPr lang="en-US" sz="1250" b="1" dirty="0">
-                <a:solidFill>
-                  <a:srgbClr val="1B2A38"/>
-                </a:solidFill>
-                <a:latin typeface="Calibri" pitchFamily="34" charset="0"/>
-                <a:ea typeface="Calibri" pitchFamily="34" charset="-122"/>
-                <a:cs typeface="Calibri" pitchFamily="34" charset="-120"/>
-              </a:rPr>
-              <a:t>DNA tests (factor V Leiden, prothrombin G20210A) are unaffected by timing.</a:t>
-            </a:r>
-            <a:endParaRPr lang="en-US" sz="1250" dirty="0"/>
-          </a:p>
-          <a:p>
-            <a:pPr algn="l" marL="177800" indent="-177800">
-              <a:spcAft>
-                <a:spcPts val="900"/>
-              </a:spcAft>
-              <a:buSzPct val="100000"/>
-              <a:buChar char="•"/>
-            </a:pPr>
-            <a:r>
-              <a:rPr lang="en-US" sz="1250" dirty="0">
-                <a:solidFill>
-                  <a:srgbClr val="33444F"/>
-                </a:solidFill>
-                <a:latin typeface="Calibri" pitchFamily="34" charset="0"/>
-                <a:ea typeface="Calibri" pitchFamily="34" charset="-122"/>
-                <a:cs typeface="Calibri" pitchFamily="34" charset="-120"/>
-              </a:rPr>
-              <a:t>Do NOT test functional protein C/S and antithrombin during acute clot or on anticoagulation (consumed/confounded).</a:t>
-            </a:r>
-            <a:endParaRPr lang="en-US" sz="1250" dirty="0"/>
-          </a:p>
-          <a:p>
-            <a:pPr algn="l" marL="177800" indent="-177800">
-              <a:spcAft>
-                <a:spcPts val="900"/>
-              </a:spcAft>
-              <a:buSzPct val="100000"/>
-              <a:buChar char="•"/>
-            </a:pPr>
-            <a:r>
-              <a:rPr lang="en-US" sz="1250" dirty="0">
-                <a:solidFill>
-                  <a:srgbClr val="33444F"/>
-                </a:solidFill>
-                <a:latin typeface="Calibri" pitchFamily="34" charset="0"/>
-                <a:ea typeface="Calibri" pitchFamily="34" charset="-122"/>
-                <a:cs typeface="Calibri" pitchFamily="34" charset="-120"/>
-              </a:rPr>
-              <a:t>Warfarin lowers protein C/S; heparin lowers antithrombin; DOACs affect clot-based assays.</a:t>
-            </a:r>
-            <a:endParaRPr lang="en-US" sz="1250" dirty="0"/>
-          </a:p>
-          <a:p>
-            <a:pPr algn="l" marL="177800" indent="-177800">
-              <a:spcAft>
-                <a:spcPts val="900"/>
-              </a:spcAft>
-              <a:buSzPct val="100000"/>
-              <a:buChar char="•"/>
-            </a:pPr>
-            <a:r>
-              <a:rPr lang="en-US" sz="1250" dirty="0">
-                <a:solidFill>
-                  <a:srgbClr val="33444F"/>
-                </a:solidFill>
-                <a:latin typeface="Calibri" pitchFamily="34" charset="0"/>
-                <a:ea typeface="Calibri" pitchFamily="34" charset="-122"/>
-                <a:cs typeface="Calibri" pitchFamily="34" charset="-120"/>
-              </a:rPr>
-              <a:t>Test only when results will change management.</a:t>
-            </a:r>
-            <a:endParaRPr lang="en-US" sz="1250" dirty="0"/>
-          </a:p>
-        </p:txBody>
-      </p:sp>
-      <p:sp>
-        <p:nvSpPr>
-          <p:cNvPr id="10" name="Text 8"/>
-          <p:cNvSpPr/>
-          <p:nvPr/>
-        </p:nvSpPr>
-        <p:spPr>
-          <a:xfrm>
-            <a:off x="566928" y="6473952"/>
-            <a:ext cx="7772400" cy="274320"/>
-          </a:xfrm>
-          <a:prstGeom prst="rect">
-            <a:avLst/>
-          </a:prstGeom>
-          <a:noFill/>
-          <a:ln/>
-        </p:spPr>
-        <p:txBody>
-          <a:bodyPr wrap="square" lIns="0" tIns="0" rIns="0" bIns="0" rtlCol="0" anchor="ctr"/>
-          <a:lstStyle/>
-          <a:p>
-            <a:pPr algn="l" indent="0" marL="0">
-              <a:buNone/>
-            </a:pPr>
-            <a:r>
-              <a:rPr lang="en-US" sz="850" dirty="0">
-                <a:solidFill>
-                  <a:srgbClr val="9AA8B4"/>
-                </a:solidFill>
-                <a:latin typeface="Calibri" pitchFamily="34" charset="0"/>
-                <a:ea typeface="Calibri" pitchFamily="34" charset="-122"/>
-                <a:cs typeface="Calibri" pitchFamily="34" charset="-120"/>
-              </a:rPr>
-              <a:t>Makassed General Hospital  ·  Department of Laboratory Medicine</a:t>
-            </a:r>
-            <a:endParaRPr lang="en-US" sz="850" dirty="0"/>
-          </a:p>
-        </p:txBody>
-      </p:sp>
-      <p:sp>
-        <p:nvSpPr>
-          <p:cNvPr id="11" name="Text 9"/>
-          <p:cNvSpPr/>
-          <p:nvPr/>
-        </p:nvSpPr>
-        <p:spPr>
-          <a:xfrm>
-            <a:off x="9814255" y="6473952"/>
-            <a:ext cx="1828800" cy="274320"/>
-          </a:xfrm>
-          <a:prstGeom prst="rect">
-            <a:avLst/>
-          </a:prstGeom>
-          <a:noFill/>
-          <a:ln/>
-        </p:spPr>
-        <p:txBody>
-          <a:bodyPr wrap="square" lIns="0" tIns="0" rIns="0" bIns="0" rtlCol="0" anchor="ctr"/>
-          <a:lstStyle/>
-          <a:p>
-            <a:pPr algn="r" indent="0" marL="0">
-              <a:buNone/>
-            </a:pPr>
-            <a:r>
-              <a:rPr lang="en-US" sz="850" dirty="0">
-                <a:solidFill>
-                  <a:srgbClr val="9AA8B4"/>
-                </a:solidFill>
-                <a:latin typeface="Calibri" pitchFamily="34" charset="0"/>
-                <a:ea typeface="Calibri" pitchFamily="34" charset="-122"/>
-                <a:cs typeface="Calibri" pitchFamily="34" charset="-120"/>
-              </a:rPr>
-              <a:t>CP Lecture Series</a:t>
-            </a:r>
-            <a:pPr algn="r" indent="0" marL="0">
-              <a:buNone/>
-            </a:pPr>
-            <a:r>
-              <a:rPr lang="en-US" sz="850" dirty="0">
-                <a:solidFill>
-                  <a:srgbClr val="DCE4EC"/>
-                </a:solidFill>
-                <a:latin typeface="Calibri" pitchFamily="34" charset="0"/>
-                <a:ea typeface="Calibri" pitchFamily="34" charset="-122"/>
-                <a:cs typeface="Calibri" pitchFamily="34" charset="-120"/>
-              </a:rPr>
-              <a:t>   ·   </a:t>
-            </a:r>
-            <a:pPr algn="r" indent="0" marL="0">
-              <a:buNone/>
-            </a:pPr>
-            <a:r>
-              <a:rPr lang="en-US" sz="850" b="1" dirty="0">
-                <a:solidFill>
-                  <a:srgbClr val="C62133"/>
-                </a:solidFill>
-                <a:latin typeface="Calibri" pitchFamily="34" charset="0"/>
-                <a:ea typeface="Calibri" pitchFamily="34" charset="-122"/>
-                <a:cs typeface="Calibri" pitchFamily="34" charset="-120"/>
-              </a:rPr>
-              <a:t>9</a:t>
-            </a:r>
-            <a:endParaRPr lang="en-US" sz="850" dirty="0"/>
           </a:p>
         </p:txBody>
       </p:sp>
@@ -4652,7 +4511,7 @@
                 <a:ea typeface="Calibri" pitchFamily="34" charset="-122"/>
                 <a:cs typeface="Calibri" pitchFamily="34" charset="-120"/>
               </a:rPr>
-              <a:t>HEMATOLOGY &amp; COAGULATION   ·   DISEASE PATTERNS</a:t>
+              <a:t>HEMATOLOGY &amp; COAGULATION   ·   DISORDERS / PRE-ANALYTICS</a:t>
             </a:r>
             <a:endParaRPr lang="en-US" sz="1100" dirty="0"/>
           </a:p>
@@ -4691,1972 +4550,51 @@
                 <a:ea typeface="Calibri" pitchFamily="34" charset="-122"/>
                 <a:cs typeface="Calibri" pitchFamily="34" charset="-120"/>
               </a:rPr>
-              <a:t>DIC vs Liver Disease vs Vitamin K Deficiency</a:t>
+              <a:t>Key Disorders and Sample Integrity</a:t>
             </a:r>
             <a:endParaRPr lang="en-US" sz="3000" dirty="0"/>
           </a:p>
         </p:txBody>
       </p:sp>
-      <p:graphicFrame>
-        <p:nvGraphicFramePr>
-          <p:cNvPr id="14" name="Table 0"/>
-          <p:cNvGraphicFramePr>
-            <a:graphicFrameLocks noGrp="1"/>
-          </p:cNvGraphicFramePr>
-          <p:nvPr>
-            <p:extLst>
-              <p:ext uri="{D42A27DB-BD31-4B8C-83A1-F6EECF244321}">
-                <p14:modId xmlns:p14="http://schemas.microsoft.com/office/powerpoint/2010/main" val="1579011935"/>
-              </p:ext>
-            </p:extLst>
-          </p:nvPr>
-        </p:nvGraphicFramePr>
-        <p:xfrm>
-          <a:off x="566928" y="1463040"/>
-          <a:ext cx="11057839" cy="914400"/>
-        </p:xfrm>
-        <a:graphic>
-          <a:graphicData uri="http://schemas.openxmlformats.org/drawingml/2006/table">
-            <a:tbl>
-              <a:tblPr/>
-              <a:tblGrid>
-                <a:gridCol w="2743200"/>
-                <a:gridCol w="2770632"/>
-                <a:gridCol w="2770632"/>
-                <a:gridCol w="2770632"/>
-              </a:tblGrid>
-              <a:tr h="530352">
-                <a:tc>
-                  <a:txBody>
-                    <a:bodyPr/>
-                    <a:lstStyle/>
-                    <a:p>
-                      <a:pPr algn="ctr" indent="0" marL="0">
-                        <a:buNone/>
-                      </a:pPr>
-                      <a:r>
-                        <a:rPr lang="en-US" sz="1200" b="1" dirty="0">
-                          <a:solidFill>
-                            <a:srgbClr val="FFFFFF"/>
-                          </a:solidFill>
-                          <a:latin typeface="Calibri" pitchFamily="34" charset="0"/>
-                          <a:ea typeface="Calibri" pitchFamily="34" charset="-122"/>
-                          <a:cs typeface="Calibri" pitchFamily="34" charset="-120"/>
-                        </a:rPr>
-                        <a:t>Test</a:t>
-                      </a:r>
-                      <a:endParaRPr lang="en-US" sz="1200" dirty="0">
-                        <a:latin typeface="Calibri" charset="0"/>
-                        <a:ea typeface="Calibri" charset="0"/>
-                        <a:cs typeface="Calibri" charset="0"/>
-                      </a:endParaRPr>
-                    </a:p>
-                  </a:txBody>
-                  <a:tcPr marL="91440" marR="91440" marT="45720" marB="45720" anchor="ctr">
-                    <a:lnL w="9525" cap="flat" cmpd="sng" algn="ctr">
-                      <a:solidFill>
-                        <a:srgbClr val="DCE4EC"/>
-                      </a:solidFill>
-                      <a:prstDash val="solid"/>
-                      <a:round/>
-                      <a:headEnd type="none" w="med" len="med"/>
-                      <a:tailEnd type="none" w="med" len="med"/>
-                    </a:lnL>
-                    <a:lnR w="9525" cap="flat" cmpd="sng" algn="ctr">
-                      <a:solidFill>
-                        <a:srgbClr val="DCE4EC"/>
-                      </a:solidFill>
-                      <a:prstDash val="solid"/>
-                      <a:round/>
-                      <a:headEnd type="none" w="med" len="med"/>
-                      <a:tailEnd type="none" w="med" len="med"/>
-                    </a:lnR>
-                    <a:lnT w="9525" cap="flat" cmpd="sng" algn="ctr">
-                      <a:solidFill>
-                        <a:srgbClr val="DCE4EC"/>
-                      </a:solidFill>
-                      <a:prstDash val="solid"/>
-                      <a:round/>
-                      <a:headEnd type="none" w="med" len="med"/>
-                      <a:tailEnd type="none" w="med" len="med"/>
-                    </a:lnT>
-                    <a:lnB w="9525" cap="flat" cmpd="sng" algn="ctr">
-                      <a:solidFill>
-                        <a:srgbClr val="DCE4EC"/>
-                      </a:solidFill>
-                      <a:prstDash val="solid"/>
-                      <a:round/>
-                      <a:headEnd type="none" w="med" len="med"/>
-                      <a:tailEnd type="none" w="med" len="med"/>
-                    </a:lnB>
-                    <a:solidFill>
-                      <a:srgbClr val="C62133"/>
-                    </a:solidFill>
-                  </a:tcPr>
-                </a:tc>
-                <a:tc>
-                  <a:txBody>
-                    <a:bodyPr/>
-                    <a:lstStyle/>
-                    <a:p>
-                      <a:pPr algn="ctr" indent="0" marL="0">
-                        <a:buNone/>
-                      </a:pPr>
-                      <a:r>
-                        <a:rPr lang="en-US" sz="1200" b="1" dirty="0">
-                          <a:solidFill>
-                            <a:srgbClr val="FFFFFF"/>
-                          </a:solidFill>
-                          <a:latin typeface="Calibri" pitchFamily="34" charset="0"/>
-                          <a:ea typeface="Calibri" pitchFamily="34" charset="-122"/>
-                          <a:cs typeface="Calibri" pitchFamily="34" charset="-120"/>
-                        </a:rPr>
-                        <a:t>DIC</a:t>
-                      </a:r>
-                      <a:endParaRPr lang="en-US" sz="1200" dirty="0">
-                        <a:latin typeface="Calibri" charset="0"/>
-                        <a:ea typeface="Calibri" charset="0"/>
-                        <a:cs typeface="Calibri" charset="0"/>
-                      </a:endParaRPr>
-                    </a:p>
-                  </a:txBody>
-                  <a:tcPr marL="91440" marR="91440" marT="45720" marB="45720" anchor="ctr">
-                    <a:lnL w="9525" cap="flat" cmpd="sng" algn="ctr">
-                      <a:solidFill>
-                        <a:srgbClr val="DCE4EC"/>
-                      </a:solidFill>
-                      <a:prstDash val="solid"/>
-                      <a:round/>
-                      <a:headEnd type="none" w="med" len="med"/>
-                      <a:tailEnd type="none" w="med" len="med"/>
-                    </a:lnL>
-                    <a:lnR w="9525" cap="flat" cmpd="sng" algn="ctr">
-                      <a:solidFill>
-                        <a:srgbClr val="DCE4EC"/>
-                      </a:solidFill>
-                      <a:prstDash val="solid"/>
-                      <a:round/>
-                      <a:headEnd type="none" w="med" len="med"/>
-                      <a:tailEnd type="none" w="med" len="med"/>
-                    </a:lnR>
-                    <a:lnT w="9525" cap="flat" cmpd="sng" algn="ctr">
-                      <a:solidFill>
-                        <a:srgbClr val="DCE4EC"/>
-                      </a:solidFill>
-                      <a:prstDash val="solid"/>
-                      <a:round/>
-                      <a:headEnd type="none" w="med" len="med"/>
-                      <a:tailEnd type="none" w="med" len="med"/>
-                    </a:lnT>
-                    <a:lnB w="9525" cap="flat" cmpd="sng" algn="ctr">
-                      <a:solidFill>
-                        <a:srgbClr val="DCE4EC"/>
-                      </a:solidFill>
-                      <a:prstDash val="solid"/>
-                      <a:round/>
-                      <a:headEnd type="none" w="med" len="med"/>
-                      <a:tailEnd type="none" w="med" len="med"/>
-                    </a:lnB>
-                    <a:solidFill>
-                      <a:srgbClr val="C62133"/>
-                    </a:solidFill>
-                  </a:tcPr>
-                </a:tc>
-                <a:tc>
-                  <a:txBody>
-                    <a:bodyPr/>
-                    <a:lstStyle/>
-                    <a:p>
-                      <a:pPr algn="ctr" indent="0" marL="0">
-                        <a:buNone/>
-                      </a:pPr>
-                      <a:r>
-                        <a:rPr lang="en-US" sz="1200" b="1" dirty="0">
-                          <a:solidFill>
-                            <a:srgbClr val="FFFFFF"/>
-                          </a:solidFill>
-                          <a:latin typeface="Calibri" pitchFamily="34" charset="0"/>
-                          <a:ea typeface="Calibri" pitchFamily="34" charset="-122"/>
-                          <a:cs typeface="Calibri" pitchFamily="34" charset="-120"/>
-                        </a:rPr>
-                        <a:t>Liver disease</a:t>
-                      </a:r>
-                      <a:endParaRPr lang="en-US" sz="1200" dirty="0">
-                        <a:latin typeface="Calibri" charset="0"/>
-                        <a:ea typeface="Calibri" charset="0"/>
-                        <a:cs typeface="Calibri" charset="0"/>
-                      </a:endParaRPr>
-                    </a:p>
-                  </a:txBody>
-                  <a:tcPr marL="91440" marR="91440" marT="45720" marB="45720" anchor="ctr">
-                    <a:lnL w="9525" cap="flat" cmpd="sng" algn="ctr">
-                      <a:solidFill>
-                        <a:srgbClr val="DCE4EC"/>
-                      </a:solidFill>
-                      <a:prstDash val="solid"/>
-                      <a:round/>
-                      <a:headEnd type="none" w="med" len="med"/>
-                      <a:tailEnd type="none" w="med" len="med"/>
-                    </a:lnL>
-                    <a:lnR w="9525" cap="flat" cmpd="sng" algn="ctr">
-                      <a:solidFill>
-                        <a:srgbClr val="DCE4EC"/>
-                      </a:solidFill>
-                      <a:prstDash val="solid"/>
-                      <a:round/>
-                      <a:headEnd type="none" w="med" len="med"/>
-                      <a:tailEnd type="none" w="med" len="med"/>
-                    </a:lnR>
-                    <a:lnT w="9525" cap="flat" cmpd="sng" algn="ctr">
-                      <a:solidFill>
-                        <a:srgbClr val="DCE4EC"/>
-                      </a:solidFill>
-                      <a:prstDash val="solid"/>
-                      <a:round/>
-                      <a:headEnd type="none" w="med" len="med"/>
-                      <a:tailEnd type="none" w="med" len="med"/>
-                    </a:lnT>
-                    <a:lnB w="9525" cap="flat" cmpd="sng" algn="ctr">
-                      <a:solidFill>
-                        <a:srgbClr val="DCE4EC"/>
-                      </a:solidFill>
-                      <a:prstDash val="solid"/>
-                      <a:round/>
-                      <a:headEnd type="none" w="med" len="med"/>
-                      <a:tailEnd type="none" w="med" len="med"/>
-                    </a:lnB>
-                    <a:solidFill>
-                      <a:srgbClr val="C62133"/>
-                    </a:solidFill>
-                  </a:tcPr>
-                </a:tc>
-                <a:tc>
-                  <a:txBody>
-                    <a:bodyPr/>
-                    <a:lstStyle/>
-                    <a:p>
-                      <a:pPr algn="ctr" indent="0" marL="0">
-                        <a:buNone/>
-                      </a:pPr>
-                      <a:r>
-                        <a:rPr lang="en-US" sz="1200" b="1" dirty="0">
-                          <a:solidFill>
-                            <a:srgbClr val="FFFFFF"/>
-                          </a:solidFill>
-                          <a:latin typeface="Calibri" pitchFamily="34" charset="0"/>
-                          <a:ea typeface="Calibri" pitchFamily="34" charset="-122"/>
-                          <a:cs typeface="Calibri" pitchFamily="34" charset="-120"/>
-                        </a:rPr>
-                        <a:t>Vitamin K deficiency</a:t>
-                      </a:r>
-                      <a:endParaRPr lang="en-US" sz="1200" dirty="0">
-                        <a:latin typeface="Calibri" charset="0"/>
-                        <a:ea typeface="Calibri" charset="0"/>
-                        <a:cs typeface="Calibri" charset="0"/>
-                      </a:endParaRPr>
-                    </a:p>
-                  </a:txBody>
-                  <a:tcPr marL="91440" marR="91440" marT="45720" marB="45720" anchor="ctr">
-                    <a:lnL w="9525" cap="flat" cmpd="sng" algn="ctr">
-                      <a:solidFill>
-                        <a:srgbClr val="DCE4EC"/>
-                      </a:solidFill>
-                      <a:prstDash val="solid"/>
-                      <a:round/>
-                      <a:headEnd type="none" w="med" len="med"/>
-                      <a:tailEnd type="none" w="med" len="med"/>
-                    </a:lnL>
-                    <a:lnR w="9525" cap="flat" cmpd="sng" algn="ctr">
-                      <a:solidFill>
-                        <a:srgbClr val="DCE4EC"/>
-                      </a:solidFill>
-                      <a:prstDash val="solid"/>
-                      <a:round/>
-                      <a:headEnd type="none" w="med" len="med"/>
-                      <a:tailEnd type="none" w="med" len="med"/>
-                    </a:lnR>
-                    <a:lnT w="9525" cap="flat" cmpd="sng" algn="ctr">
-                      <a:solidFill>
-                        <a:srgbClr val="DCE4EC"/>
-                      </a:solidFill>
-                      <a:prstDash val="solid"/>
-                      <a:round/>
-                      <a:headEnd type="none" w="med" len="med"/>
-                      <a:tailEnd type="none" w="med" len="med"/>
-                    </a:lnT>
-                    <a:lnB w="9525" cap="flat" cmpd="sng" algn="ctr">
-                      <a:solidFill>
-                        <a:srgbClr val="DCE4EC"/>
-                      </a:solidFill>
-                      <a:prstDash val="solid"/>
-                      <a:round/>
-                      <a:headEnd type="none" w="med" len="med"/>
-                      <a:tailEnd type="none" w="med" len="med"/>
-                    </a:lnB>
-                    <a:solidFill>
-                      <a:srgbClr val="C62133"/>
-                    </a:solidFill>
-                  </a:tcPr>
-                </a:tc>
-              </a:tr>
-              <a:tr h="530352">
-                <a:tc>
-                  <a:txBody>
-                    <a:bodyPr/>
-                    <a:lstStyle/>
-                    <a:p>
-                      <a:pPr algn="l" indent="0" marL="0">
-                        <a:buNone/>
-                      </a:pPr>
-                      <a:r>
-                        <a:rPr lang="en-US" sz="1100" b="1" dirty="0">
-                          <a:solidFill>
-                            <a:srgbClr val="1B2A38"/>
-                          </a:solidFill>
-                          <a:latin typeface="Calibri" pitchFamily="34" charset="0"/>
-                          <a:ea typeface="Calibri" pitchFamily="34" charset="-122"/>
-                          <a:cs typeface="Calibri" pitchFamily="34" charset="-120"/>
-                        </a:rPr>
-                        <a:t>PT</a:t>
-                      </a:r>
-                      <a:endParaRPr lang="en-US" sz="1100" dirty="0">
-                        <a:latin typeface="Calibri" charset="0"/>
-                        <a:ea typeface="Calibri" charset="0"/>
-                        <a:cs typeface="Calibri" charset="0"/>
-                      </a:endParaRPr>
-                    </a:p>
-                  </a:txBody>
-                  <a:tcPr marL="91440" marR="91440" marT="45720" marB="45720" anchor="ctr">
-                    <a:lnL w="9525" cap="flat" cmpd="sng" algn="ctr">
-                      <a:solidFill>
-                        <a:srgbClr val="DCE4EC"/>
-                      </a:solidFill>
-                      <a:prstDash val="solid"/>
-                      <a:round/>
-                      <a:headEnd type="none" w="med" len="med"/>
-                      <a:tailEnd type="none" w="med" len="med"/>
-                    </a:lnL>
-                    <a:lnR w="9525" cap="flat" cmpd="sng" algn="ctr">
-                      <a:solidFill>
-                        <a:srgbClr val="DCE4EC"/>
-                      </a:solidFill>
-                      <a:prstDash val="solid"/>
-                      <a:round/>
-                      <a:headEnd type="none" w="med" len="med"/>
-                      <a:tailEnd type="none" w="med" len="med"/>
-                    </a:lnR>
-                    <a:lnT w="9525" cap="flat" cmpd="sng" algn="ctr">
-                      <a:solidFill>
-                        <a:srgbClr val="DCE4EC"/>
-                      </a:solidFill>
-                      <a:prstDash val="solid"/>
-                      <a:round/>
-                      <a:headEnd type="none" w="med" len="med"/>
-                      <a:tailEnd type="none" w="med" len="med"/>
-                    </a:lnT>
-                    <a:lnB w="9525" cap="flat" cmpd="sng" algn="ctr">
-                      <a:solidFill>
-                        <a:srgbClr val="DCE4EC"/>
-                      </a:solidFill>
-                      <a:prstDash val="solid"/>
-                      <a:round/>
-                      <a:headEnd type="none" w="med" len="med"/>
-                      <a:tailEnd type="none" w="med" len="med"/>
-                    </a:lnB>
-                    <a:solidFill>
-                      <a:srgbClr val="F3F7FA"/>
-                    </a:solidFill>
-                  </a:tcPr>
-                </a:tc>
-                <a:tc>
-                  <a:txBody>
-                    <a:bodyPr/>
-                    <a:lstStyle/>
-                    <a:p>
-                      <a:pPr algn="ctr" indent="0" marL="0">
-                        <a:buNone/>
-                      </a:pPr>
-                      <a:r>
-                        <a:rPr lang="en-US" sz="1100" dirty="0">
-                          <a:solidFill>
-                            <a:srgbClr val="33444F"/>
-                          </a:solidFill>
-                          <a:latin typeface="Calibri" pitchFamily="34" charset="0"/>
-                          <a:ea typeface="Calibri" pitchFamily="34" charset="-122"/>
-                          <a:cs typeface="Calibri" pitchFamily="34" charset="-120"/>
-                        </a:rPr>
-                        <a:t>Prolonged</a:t>
-                      </a:r>
-                      <a:endParaRPr lang="en-US" sz="1100" dirty="0">
-                        <a:latin typeface="Calibri" charset="0"/>
-                        <a:ea typeface="Calibri" charset="0"/>
-                        <a:cs typeface="Calibri" charset="0"/>
-                      </a:endParaRPr>
-                    </a:p>
-                  </a:txBody>
-                  <a:tcPr marL="91440" marR="91440" marT="45720" marB="45720" anchor="ctr">
-                    <a:lnL w="9525" cap="flat" cmpd="sng" algn="ctr">
-                      <a:solidFill>
-                        <a:srgbClr val="DCE4EC"/>
-                      </a:solidFill>
-                      <a:prstDash val="solid"/>
-                      <a:round/>
-                      <a:headEnd type="none" w="med" len="med"/>
-                      <a:tailEnd type="none" w="med" len="med"/>
-                    </a:lnL>
-                    <a:lnR w="9525" cap="flat" cmpd="sng" algn="ctr">
-                      <a:solidFill>
-                        <a:srgbClr val="DCE4EC"/>
-                      </a:solidFill>
-                      <a:prstDash val="solid"/>
-                      <a:round/>
-                      <a:headEnd type="none" w="med" len="med"/>
-                      <a:tailEnd type="none" w="med" len="med"/>
-                    </a:lnR>
-                    <a:lnT w="9525" cap="flat" cmpd="sng" algn="ctr">
-                      <a:solidFill>
-                        <a:srgbClr val="DCE4EC"/>
-                      </a:solidFill>
-                      <a:prstDash val="solid"/>
-                      <a:round/>
-                      <a:headEnd type="none" w="med" len="med"/>
-                      <a:tailEnd type="none" w="med" len="med"/>
-                    </a:lnT>
-                    <a:lnB w="9525" cap="flat" cmpd="sng" algn="ctr">
-                      <a:solidFill>
-                        <a:srgbClr val="DCE4EC"/>
-                      </a:solidFill>
-                      <a:prstDash val="solid"/>
-                      <a:round/>
-                      <a:headEnd type="none" w="med" len="med"/>
-                      <a:tailEnd type="none" w="med" len="med"/>
-                    </a:lnB>
-                    <a:solidFill>
-                      <a:srgbClr val="F3F7FA"/>
-                    </a:solidFill>
-                  </a:tcPr>
-                </a:tc>
-                <a:tc>
-                  <a:txBody>
-                    <a:bodyPr/>
-                    <a:lstStyle/>
-                    <a:p>
-                      <a:pPr algn="ctr" indent="0" marL="0">
-                        <a:buNone/>
-                      </a:pPr>
-                      <a:r>
-                        <a:rPr lang="en-US" sz="1100" dirty="0">
-                          <a:solidFill>
-                            <a:srgbClr val="33444F"/>
-                          </a:solidFill>
-                          <a:latin typeface="Calibri" pitchFamily="34" charset="0"/>
-                          <a:ea typeface="Calibri" pitchFamily="34" charset="-122"/>
-                          <a:cs typeface="Calibri" pitchFamily="34" charset="-120"/>
-                        </a:rPr>
-                        <a:t>Prolonged</a:t>
-                      </a:r>
-                      <a:endParaRPr lang="en-US" sz="1100" dirty="0">
-                        <a:latin typeface="Calibri" charset="0"/>
-                        <a:ea typeface="Calibri" charset="0"/>
-                        <a:cs typeface="Calibri" charset="0"/>
-                      </a:endParaRPr>
-                    </a:p>
-                  </a:txBody>
-                  <a:tcPr marL="91440" marR="91440" marT="45720" marB="45720" anchor="ctr">
-                    <a:lnL w="9525" cap="flat" cmpd="sng" algn="ctr">
-                      <a:solidFill>
-                        <a:srgbClr val="DCE4EC"/>
-                      </a:solidFill>
-                      <a:prstDash val="solid"/>
-                      <a:round/>
-                      <a:headEnd type="none" w="med" len="med"/>
-                      <a:tailEnd type="none" w="med" len="med"/>
-                    </a:lnL>
-                    <a:lnR w="9525" cap="flat" cmpd="sng" algn="ctr">
-                      <a:solidFill>
-                        <a:srgbClr val="DCE4EC"/>
-                      </a:solidFill>
-                      <a:prstDash val="solid"/>
-                      <a:round/>
-                      <a:headEnd type="none" w="med" len="med"/>
-                      <a:tailEnd type="none" w="med" len="med"/>
-                    </a:lnR>
-                    <a:lnT w="9525" cap="flat" cmpd="sng" algn="ctr">
-                      <a:solidFill>
-                        <a:srgbClr val="DCE4EC"/>
-                      </a:solidFill>
-                      <a:prstDash val="solid"/>
-                      <a:round/>
-                      <a:headEnd type="none" w="med" len="med"/>
-                      <a:tailEnd type="none" w="med" len="med"/>
-                    </a:lnT>
-                    <a:lnB w="9525" cap="flat" cmpd="sng" algn="ctr">
-                      <a:solidFill>
-                        <a:srgbClr val="DCE4EC"/>
-                      </a:solidFill>
-                      <a:prstDash val="solid"/>
-                      <a:round/>
-                      <a:headEnd type="none" w="med" len="med"/>
-                      <a:tailEnd type="none" w="med" len="med"/>
-                    </a:lnB>
-                    <a:solidFill>
-                      <a:srgbClr val="F3F7FA"/>
-                    </a:solidFill>
-                  </a:tcPr>
-                </a:tc>
-                <a:tc>
-                  <a:txBody>
-                    <a:bodyPr/>
-                    <a:lstStyle/>
-                    <a:p>
-                      <a:pPr algn="ctr" indent="0" marL="0">
-                        <a:buNone/>
-                      </a:pPr>
-                      <a:r>
-                        <a:rPr lang="en-US" sz="1100" dirty="0">
-                          <a:solidFill>
-                            <a:srgbClr val="33444F"/>
-                          </a:solidFill>
-                          <a:latin typeface="Calibri" pitchFamily="34" charset="0"/>
-                          <a:ea typeface="Calibri" pitchFamily="34" charset="-122"/>
-                          <a:cs typeface="Calibri" pitchFamily="34" charset="-120"/>
-                        </a:rPr>
-                        <a:t>Prolonged (early)</a:t>
-                      </a:r>
-                      <a:endParaRPr lang="en-US" sz="1100" dirty="0">
-                        <a:latin typeface="Calibri" charset="0"/>
-                        <a:ea typeface="Calibri" charset="0"/>
-                        <a:cs typeface="Calibri" charset="0"/>
-                      </a:endParaRPr>
-                    </a:p>
-                  </a:txBody>
-                  <a:tcPr marL="91440" marR="91440" marT="45720" marB="45720" anchor="ctr">
-                    <a:lnL w="9525" cap="flat" cmpd="sng" algn="ctr">
-                      <a:solidFill>
-                        <a:srgbClr val="DCE4EC"/>
-                      </a:solidFill>
-                      <a:prstDash val="solid"/>
-                      <a:round/>
-                      <a:headEnd type="none" w="med" len="med"/>
-                      <a:tailEnd type="none" w="med" len="med"/>
-                    </a:lnL>
-                    <a:lnR w="9525" cap="flat" cmpd="sng" algn="ctr">
-                      <a:solidFill>
-                        <a:srgbClr val="DCE4EC"/>
-                      </a:solidFill>
-                      <a:prstDash val="solid"/>
-                      <a:round/>
-                      <a:headEnd type="none" w="med" len="med"/>
-                      <a:tailEnd type="none" w="med" len="med"/>
-                    </a:lnR>
-                    <a:lnT w="9525" cap="flat" cmpd="sng" algn="ctr">
-                      <a:solidFill>
-                        <a:srgbClr val="DCE4EC"/>
-                      </a:solidFill>
-                      <a:prstDash val="solid"/>
-                      <a:round/>
-                      <a:headEnd type="none" w="med" len="med"/>
-                      <a:tailEnd type="none" w="med" len="med"/>
-                    </a:lnT>
-                    <a:lnB w="9525" cap="flat" cmpd="sng" algn="ctr">
-                      <a:solidFill>
-                        <a:srgbClr val="DCE4EC"/>
-                      </a:solidFill>
-                      <a:prstDash val="solid"/>
-                      <a:round/>
-                      <a:headEnd type="none" w="med" len="med"/>
-                      <a:tailEnd type="none" w="med" len="med"/>
-                    </a:lnB>
-                    <a:solidFill>
-                      <a:srgbClr val="F3F7FA"/>
-                    </a:solidFill>
-                  </a:tcPr>
-                </a:tc>
-              </a:tr>
-              <a:tr h="530352">
-                <a:tc>
-                  <a:txBody>
-                    <a:bodyPr/>
-                    <a:lstStyle/>
-                    <a:p>
-                      <a:pPr algn="l" indent="0" marL="0">
-                        <a:buNone/>
-                      </a:pPr>
-                      <a:r>
-                        <a:rPr lang="en-US" sz="1100" b="1" dirty="0">
-                          <a:solidFill>
-                            <a:srgbClr val="1B2A38"/>
-                          </a:solidFill>
-                          <a:latin typeface="Calibri" pitchFamily="34" charset="0"/>
-                          <a:ea typeface="Calibri" pitchFamily="34" charset="-122"/>
-                          <a:cs typeface="Calibri" pitchFamily="34" charset="-120"/>
-                        </a:rPr>
-                        <a:t>aPTT</a:t>
-                      </a:r>
-                      <a:endParaRPr lang="en-US" sz="1100" dirty="0">
-                        <a:latin typeface="Calibri" charset="0"/>
-                        <a:ea typeface="Calibri" charset="0"/>
-                        <a:cs typeface="Calibri" charset="0"/>
-                      </a:endParaRPr>
-                    </a:p>
-                  </a:txBody>
-                  <a:tcPr marL="91440" marR="91440" marT="45720" marB="45720" anchor="ctr">
-                    <a:lnL w="9525" cap="flat" cmpd="sng" algn="ctr">
-                      <a:solidFill>
-                        <a:srgbClr val="DCE4EC"/>
-                      </a:solidFill>
-                      <a:prstDash val="solid"/>
-                      <a:round/>
-                      <a:headEnd type="none" w="med" len="med"/>
-                      <a:tailEnd type="none" w="med" len="med"/>
-                    </a:lnL>
-                    <a:lnR w="9525" cap="flat" cmpd="sng" algn="ctr">
-                      <a:solidFill>
-                        <a:srgbClr val="DCE4EC"/>
-                      </a:solidFill>
-                      <a:prstDash val="solid"/>
-                      <a:round/>
-                      <a:headEnd type="none" w="med" len="med"/>
-                      <a:tailEnd type="none" w="med" len="med"/>
-                    </a:lnR>
-                    <a:lnT w="9525" cap="flat" cmpd="sng" algn="ctr">
-                      <a:solidFill>
-                        <a:srgbClr val="DCE4EC"/>
-                      </a:solidFill>
-                      <a:prstDash val="solid"/>
-                      <a:round/>
-                      <a:headEnd type="none" w="med" len="med"/>
-                      <a:tailEnd type="none" w="med" len="med"/>
-                    </a:lnT>
-                    <a:lnB w="9525" cap="flat" cmpd="sng" algn="ctr">
-                      <a:solidFill>
-                        <a:srgbClr val="DCE4EC"/>
-                      </a:solidFill>
-                      <a:prstDash val="solid"/>
-                      <a:round/>
-                      <a:headEnd type="none" w="med" len="med"/>
-                      <a:tailEnd type="none" w="med" len="med"/>
-                    </a:lnB>
-                    <a:solidFill>
-                      <a:srgbClr val="FFFFFF"/>
-                    </a:solidFill>
-                  </a:tcPr>
-                </a:tc>
-                <a:tc>
-                  <a:txBody>
-                    <a:bodyPr/>
-                    <a:lstStyle/>
-                    <a:p>
-                      <a:pPr algn="ctr" indent="0" marL="0">
-                        <a:buNone/>
-                      </a:pPr>
-                      <a:r>
-                        <a:rPr lang="en-US" sz="1100" dirty="0">
-                          <a:solidFill>
-                            <a:srgbClr val="33444F"/>
-                          </a:solidFill>
-                          <a:latin typeface="Calibri" pitchFamily="34" charset="0"/>
-                          <a:ea typeface="Calibri" pitchFamily="34" charset="-122"/>
-                          <a:cs typeface="Calibri" pitchFamily="34" charset="-120"/>
-                        </a:rPr>
-                        <a:t>Prolonged</a:t>
-                      </a:r>
-                      <a:endParaRPr lang="en-US" sz="1100" dirty="0">
-                        <a:latin typeface="Calibri" charset="0"/>
-                        <a:ea typeface="Calibri" charset="0"/>
-                        <a:cs typeface="Calibri" charset="0"/>
-                      </a:endParaRPr>
-                    </a:p>
-                  </a:txBody>
-                  <a:tcPr marL="91440" marR="91440" marT="45720" marB="45720" anchor="ctr">
-                    <a:lnL w="9525" cap="flat" cmpd="sng" algn="ctr">
-                      <a:solidFill>
-                        <a:srgbClr val="DCE4EC"/>
-                      </a:solidFill>
-                      <a:prstDash val="solid"/>
-                      <a:round/>
-                      <a:headEnd type="none" w="med" len="med"/>
-                      <a:tailEnd type="none" w="med" len="med"/>
-                    </a:lnL>
-                    <a:lnR w="9525" cap="flat" cmpd="sng" algn="ctr">
-                      <a:solidFill>
-                        <a:srgbClr val="DCE4EC"/>
-                      </a:solidFill>
-                      <a:prstDash val="solid"/>
-                      <a:round/>
-                      <a:headEnd type="none" w="med" len="med"/>
-                      <a:tailEnd type="none" w="med" len="med"/>
-                    </a:lnR>
-                    <a:lnT w="9525" cap="flat" cmpd="sng" algn="ctr">
-                      <a:solidFill>
-                        <a:srgbClr val="DCE4EC"/>
-                      </a:solidFill>
-                      <a:prstDash val="solid"/>
-                      <a:round/>
-                      <a:headEnd type="none" w="med" len="med"/>
-                      <a:tailEnd type="none" w="med" len="med"/>
-                    </a:lnT>
-                    <a:lnB w="9525" cap="flat" cmpd="sng" algn="ctr">
-                      <a:solidFill>
-                        <a:srgbClr val="DCE4EC"/>
-                      </a:solidFill>
-                      <a:prstDash val="solid"/>
-                      <a:round/>
-                      <a:headEnd type="none" w="med" len="med"/>
-                      <a:tailEnd type="none" w="med" len="med"/>
-                    </a:lnB>
-                    <a:solidFill>
-                      <a:srgbClr val="FFFFFF"/>
-                    </a:solidFill>
-                  </a:tcPr>
-                </a:tc>
-                <a:tc>
-                  <a:txBody>
-                    <a:bodyPr/>
-                    <a:lstStyle/>
-                    <a:p>
-                      <a:pPr algn="ctr" indent="0" marL="0">
-                        <a:buNone/>
-                      </a:pPr>
-                      <a:r>
-                        <a:rPr lang="en-US" sz="1100" dirty="0">
-                          <a:solidFill>
-                            <a:srgbClr val="33444F"/>
-                          </a:solidFill>
-                          <a:latin typeface="Calibri" pitchFamily="34" charset="0"/>
-                          <a:ea typeface="Calibri" pitchFamily="34" charset="-122"/>
-                          <a:cs typeface="Calibri" pitchFamily="34" charset="-120"/>
-                        </a:rPr>
-                        <a:t>Prolonged (late)</a:t>
-                      </a:r>
-                      <a:endParaRPr lang="en-US" sz="1100" dirty="0">
-                        <a:latin typeface="Calibri" charset="0"/>
-                        <a:ea typeface="Calibri" charset="0"/>
-                        <a:cs typeface="Calibri" charset="0"/>
-                      </a:endParaRPr>
-                    </a:p>
-                  </a:txBody>
-                  <a:tcPr marL="91440" marR="91440" marT="45720" marB="45720" anchor="ctr">
-                    <a:lnL w="9525" cap="flat" cmpd="sng" algn="ctr">
-                      <a:solidFill>
-                        <a:srgbClr val="DCE4EC"/>
-                      </a:solidFill>
-                      <a:prstDash val="solid"/>
-                      <a:round/>
-                      <a:headEnd type="none" w="med" len="med"/>
-                      <a:tailEnd type="none" w="med" len="med"/>
-                    </a:lnL>
-                    <a:lnR w="9525" cap="flat" cmpd="sng" algn="ctr">
-                      <a:solidFill>
-                        <a:srgbClr val="DCE4EC"/>
-                      </a:solidFill>
-                      <a:prstDash val="solid"/>
-                      <a:round/>
-                      <a:headEnd type="none" w="med" len="med"/>
-                      <a:tailEnd type="none" w="med" len="med"/>
-                    </a:lnR>
-                    <a:lnT w="9525" cap="flat" cmpd="sng" algn="ctr">
-                      <a:solidFill>
-                        <a:srgbClr val="DCE4EC"/>
-                      </a:solidFill>
-                      <a:prstDash val="solid"/>
-                      <a:round/>
-                      <a:headEnd type="none" w="med" len="med"/>
-                      <a:tailEnd type="none" w="med" len="med"/>
-                    </a:lnT>
-                    <a:lnB w="9525" cap="flat" cmpd="sng" algn="ctr">
-                      <a:solidFill>
-                        <a:srgbClr val="DCE4EC"/>
-                      </a:solidFill>
-                      <a:prstDash val="solid"/>
-                      <a:round/>
-                      <a:headEnd type="none" w="med" len="med"/>
-                      <a:tailEnd type="none" w="med" len="med"/>
-                    </a:lnB>
-                    <a:solidFill>
-                      <a:srgbClr val="FFFFFF"/>
-                    </a:solidFill>
-                  </a:tcPr>
-                </a:tc>
-                <a:tc>
-                  <a:txBody>
-                    <a:bodyPr/>
-                    <a:lstStyle/>
-                    <a:p>
-                      <a:pPr algn="ctr" indent="0" marL="0">
-                        <a:buNone/>
-                      </a:pPr>
-                      <a:r>
-                        <a:rPr lang="en-US" sz="1100" dirty="0">
-                          <a:solidFill>
-                            <a:srgbClr val="33444F"/>
-                          </a:solidFill>
-                          <a:latin typeface="Calibri" pitchFamily="34" charset="0"/>
-                          <a:ea typeface="Calibri" pitchFamily="34" charset="-122"/>
-                          <a:cs typeface="Calibri" pitchFamily="34" charset="-120"/>
-                        </a:rPr>
-                        <a:t>Prolonged (later)</a:t>
-                      </a:r>
-                      <a:endParaRPr lang="en-US" sz="1100" dirty="0">
-                        <a:latin typeface="Calibri" charset="0"/>
-                        <a:ea typeface="Calibri" charset="0"/>
-                        <a:cs typeface="Calibri" charset="0"/>
-                      </a:endParaRPr>
-                    </a:p>
-                  </a:txBody>
-                  <a:tcPr marL="91440" marR="91440" marT="45720" marB="45720" anchor="ctr">
-                    <a:lnL w="9525" cap="flat" cmpd="sng" algn="ctr">
-                      <a:solidFill>
-                        <a:srgbClr val="DCE4EC"/>
-                      </a:solidFill>
-                      <a:prstDash val="solid"/>
-                      <a:round/>
-                      <a:headEnd type="none" w="med" len="med"/>
-                      <a:tailEnd type="none" w="med" len="med"/>
-                    </a:lnL>
-                    <a:lnR w="9525" cap="flat" cmpd="sng" algn="ctr">
-                      <a:solidFill>
-                        <a:srgbClr val="DCE4EC"/>
-                      </a:solidFill>
-                      <a:prstDash val="solid"/>
-                      <a:round/>
-                      <a:headEnd type="none" w="med" len="med"/>
-                      <a:tailEnd type="none" w="med" len="med"/>
-                    </a:lnR>
-                    <a:lnT w="9525" cap="flat" cmpd="sng" algn="ctr">
-                      <a:solidFill>
-                        <a:srgbClr val="DCE4EC"/>
-                      </a:solidFill>
-                      <a:prstDash val="solid"/>
-                      <a:round/>
-                      <a:headEnd type="none" w="med" len="med"/>
-                      <a:tailEnd type="none" w="med" len="med"/>
-                    </a:lnT>
-                    <a:lnB w="9525" cap="flat" cmpd="sng" algn="ctr">
-                      <a:solidFill>
-                        <a:srgbClr val="DCE4EC"/>
-                      </a:solidFill>
-                      <a:prstDash val="solid"/>
-                      <a:round/>
-                      <a:headEnd type="none" w="med" len="med"/>
-                      <a:tailEnd type="none" w="med" len="med"/>
-                    </a:lnB>
-                    <a:solidFill>
-                      <a:srgbClr val="FFFFFF"/>
-                    </a:solidFill>
-                  </a:tcPr>
-                </a:tc>
-              </a:tr>
-              <a:tr h="530352">
-                <a:tc>
-                  <a:txBody>
-                    <a:bodyPr/>
-                    <a:lstStyle/>
-                    <a:p>
-                      <a:pPr algn="l" indent="0" marL="0">
-                        <a:buNone/>
-                      </a:pPr>
-                      <a:r>
-                        <a:rPr lang="en-US" sz="1100" b="1" dirty="0">
-                          <a:solidFill>
-                            <a:srgbClr val="1B2A38"/>
-                          </a:solidFill>
-                          <a:latin typeface="Calibri" pitchFamily="34" charset="0"/>
-                          <a:ea typeface="Calibri" pitchFamily="34" charset="-122"/>
-                          <a:cs typeface="Calibri" pitchFamily="34" charset="-120"/>
-                        </a:rPr>
-                        <a:t>Fibrinogen</a:t>
-                      </a:r>
-                      <a:endParaRPr lang="en-US" sz="1100" dirty="0">
-                        <a:latin typeface="Calibri" charset="0"/>
-                        <a:ea typeface="Calibri" charset="0"/>
-                        <a:cs typeface="Calibri" charset="0"/>
-                      </a:endParaRPr>
-                    </a:p>
-                  </a:txBody>
-                  <a:tcPr marL="91440" marR="91440" marT="45720" marB="45720" anchor="ctr">
-                    <a:lnL w="9525" cap="flat" cmpd="sng" algn="ctr">
-                      <a:solidFill>
-                        <a:srgbClr val="DCE4EC"/>
-                      </a:solidFill>
-                      <a:prstDash val="solid"/>
-                      <a:round/>
-                      <a:headEnd type="none" w="med" len="med"/>
-                      <a:tailEnd type="none" w="med" len="med"/>
-                    </a:lnL>
-                    <a:lnR w="9525" cap="flat" cmpd="sng" algn="ctr">
-                      <a:solidFill>
-                        <a:srgbClr val="DCE4EC"/>
-                      </a:solidFill>
-                      <a:prstDash val="solid"/>
-                      <a:round/>
-                      <a:headEnd type="none" w="med" len="med"/>
-                      <a:tailEnd type="none" w="med" len="med"/>
-                    </a:lnR>
-                    <a:lnT w="9525" cap="flat" cmpd="sng" algn="ctr">
-                      <a:solidFill>
-                        <a:srgbClr val="DCE4EC"/>
-                      </a:solidFill>
-                      <a:prstDash val="solid"/>
-                      <a:round/>
-                      <a:headEnd type="none" w="med" len="med"/>
-                      <a:tailEnd type="none" w="med" len="med"/>
-                    </a:lnT>
-                    <a:lnB w="9525" cap="flat" cmpd="sng" algn="ctr">
-                      <a:solidFill>
-                        <a:srgbClr val="DCE4EC"/>
-                      </a:solidFill>
-                      <a:prstDash val="solid"/>
-                      <a:round/>
-                      <a:headEnd type="none" w="med" len="med"/>
-                      <a:tailEnd type="none" w="med" len="med"/>
-                    </a:lnB>
-                    <a:solidFill>
-                      <a:srgbClr val="F3F7FA"/>
-                    </a:solidFill>
-                  </a:tcPr>
-                </a:tc>
-                <a:tc>
-                  <a:txBody>
-                    <a:bodyPr/>
-                    <a:lstStyle/>
-                    <a:p>
-                      <a:pPr algn="ctr" indent="0" marL="0">
-                        <a:buNone/>
-                      </a:pPr>
-                      <a:r>
-                        <a:rPr lang="en-US" sz="1100" dirty="0">
-                          <a:solidFill>
-                            <a:srgbClr val="33444F"/>
-                          </a:solidFill>
-                          <a:latin typeface="Calibri" pitchFamily="34" charset="0"/>
-                          <a:ea typeface="Calibri" pitchFamily="34" charset="-122"/>
-                          <a:cs typeface="Calibri" pitchFamily="34" charset="-120"/>
-                        </a:rPr>
-                        <a:t>Low</a:t>
-                      </a:r>
-                      <a:endParaRPr lang="en-US" sz="1100" dirty="0">
-                        <a:latin typeface="Calibri" charset="0"/>
-                        <a:ea typeface="Calibri" charset="0"/>
-                        <a:cs typeface="Calibri" charset="0"/>
-                      </a:endParaRPr>
-                    </a:p>
-                  </a:txBody>
-                  <a:tcPr marL="91440" marR="91440" marT="45720" marB="45720" anchor="ctr">
-                    <a:lnL w="9525" cap="flat" cmpd="sng" algn="ctr">
-                      <a:solidFill>
-                        <a:srgbClr val="DCE4EC"/>
-                      </a:solidFill>
-                      <a:prstDash val="solid"/>
-                      <a:round/>
-                      <a:headEnd type="none" w="med" len="med"/>
-                      <a:tailEnd type="none" w="med" len="med"/>
-                    </a:lnL>
-                    <a:lnR w="9525" cap="flat" cmpd="sng" algn="ctr">
-                      <a:solidFill>
-                        <a:srgbClr val="DCE4EC"/>
-                      </a:solidFill>
-                      <a:prstDash val="solid"/>
-                      <a:round/>
-                      <a:headEnd type="none" w="med" len="med"/>
-                      <a:tailEnd type="none" w="med" len="med"/>
-                    </a:lnR>
-                    <a:lnT w="9525" cap="flat" cmpd="sng" algn="ctr">
-                      <a:solidFill>
-                        <a:srgbClr val="DCE4EC"/>
-                      </a:solidFill>
-                      <a:prstDash val="solid"/>
-                      <a:round/>
-                      <a:headEnd type="none" w="med" len="med"/>
-                      <a:tailEnd type="none" w="med" len="med"/>
-                    </a:lnT>
-                    <a:lnB w="9525" cap="flat" cmpd="sng" algn="ctr">
-                      <a:solidFill>
-                        <a:srgbClr val="DCE4EC"/>
-                      </a:solidFill>
-                      <a:prstDash val="solid"/>
-                      <a:round/>
-                      <a:headEnd type="none" w="med" len="med"/>
-                      <a:tailEnd type="none" w="med" len="med"/>
-                    </a:lnB>
-                    <a:solidFill>
-                      <a:srgbClr val="F3F7FA"/>
-                    </a:solidFill>
-                  </a:tcPr>
-                </a:tc>
-                <a:tc>
-                  <a:txBody>
-                    <a:bodyPr/>
-                    <a:lstStyle/>
-                    <a:p>
-                      <a:pPr algn="ctr" indent="0" marL="0">
-                        <a:buNone/>
-                      </a:pPr>
-                      <a:r>
-                        <a:rPr lang="en-US" sz="1100" dirty="0">
-                          <a:solidFill>
-                            <a:srgbClr val="33444F"/>
-                          </a:solidFill>
-                          <a:latin typeface="Calibri" pitchFamily="34" charset="0"/>
-                          <a:ea typeface="Calibri" pitchFamily="34" charset="-122"/>
-                          <a:cs typeface="Calibri" pitchFamily="34" charset="-120"/>
-                        </a:rPr>
-                        <a:t>Low (late)</a:t>
-                      </a:r>
-                      <a:endParaRPr lang="en-US" sz="1100" dirty="0">
-                        <a:latin typeface="Calibri" charset="0"/>
-                        <a:ea typeface="Calibri" charset="0"/>
-                        <a:cs typeface="Calibri" charset="0"/>
-                      </a:endParaRPr>
-                    </a:p>
-                  </a:txBody>
-                  <a:tcPr marL="91440" marR="91440" marT="45720" marB="45720" anchor="ctr">
-                    <a:lnL w="9525" cap="flat" cmpd="sng" algn="ctr">
-                      <a:solidFill>
-                        <a:srgbClr val="DCE4EC"/>
-                      </a:solidFill>
-                      <a:prstDash val="solid"/>
-                      <a:round/>
-                      <a:headEnd type="none" w="med" len="med"/>
-                      <a:tailEnd type="none" w="med" len="med"/>
-                    </a:lnL>
-                    <a:lnR w="9525" cap="flat" cmpd="sng" algn="ctr">
-                      <a:solidFill>
-                        <a:srgbClr val="DCE4EC"/>
-                      </a:solidFill>
-                      <a:prstDash val="solid"/>
-                      <a:round/>
-                      <a:headEnd type="none" w="med" len="med"/>
-                      <a:tailEnd type="none" w="med" len="med"/>
-                    </a:lnR>
-                    <a:lnT w="9525" cap="flat" cmpd="sng" algn="ctr">
-                      <a:solidFill>
-                        <a:srgbClr val="DCE4EC"/>
-                      </a:solidFill>
-                      <a:prstDash val="solid"/>
-                      <a:round/>
-                      <a:headEnd type="none" w="med" len="med"/>
-                      <a:tailEnd type="none" w="med" len="med"/>
-                    </a:lnT>
-                    <a:lnB w="9525" cap="flat" cmpd="sng" algn="ctr">
-                      <a:solidFill>
-                        <a:srgbClr val="DCE4EC"/>
-                      </a:solidFill>
-                      <a:prstDash val="solid"/>
-                      <a:round/>
-                      <a:headEnd type="none" w="med" len="med"/>
-                      <a:tailEnd type="none" w="med" len="med"/>
-                    </a:lnB>
-                    <a:solidFill>
-                      <a:srgbClr val="F3F7FA"/>
-                    </a:solidFill>
-                  </a:tcPr>
-                </a:tc>
-                <a:tc>
-                  <a:txBody>
-                    <a:bodyPr/>
-                    <a:lstStyle/>
-                    <a:p>
-                      <a:pPr algn="ctr" indent="0" marL="0">
-                        <a:buNone/>
-                      </a:pPr>
-                      <a:r>
-                        <a:rPr lang="en-US" sz="1100" dirty="0">
-                          <a:solidFill>
-                            <a:srgbClr val="33444F"/>
-                          </a:solidFill>
-                          <a:latin typeface="Calibri" pitchFamily="34" charset="0"/>
-                          <a:ea typeface="Calibri" pitchFamily="34" charset="-122"/>
-                          <a:cs typeface="Calibri" pitchFamily="34" charset="-120"/>
-                        </a:rPr>
-                        <a:t>Normal</a:t>
-                      </a:r>
-                      <a:endParaRPr lang="en-US" sz="1100" dirty="0">
-                        <a:latin typeface="Calibri" charset="0"/>
-                        <a:ea typeface="Calibri" charset="0"/>
-                        <a:cs typeface="Calibri" charset="0"/>
-                      </a:endParaRPr>
-                    </a:p>
-                  </a:txBody>
-                  <a:tcPr marL="91440" marR="91440" marT="45720" marB="45720" anchor="ctr">
-                    <a:lnL w="9525" cap="flat" cmpd="sng" algn="ctr">
-                      <a:solidFill>
-                        <a:srgbClr val="DCE4EC"/>
-                      </a:solidFill>
-                      <a:prstDash val="solid"/>
-                      <a:round/>
-                      <a:headEnd type="none" w="med" len="med"/>
-                      <a:tailEnd type="none" w="med" len="med"/>
-                    </a:lnL>
-                    <a:lnR w="9525" cap="flat" cmpd="sng" algn="ctr">
-                      <a:solidFill>
-                        <a:srgbClr val="DCE4EC"/>
-                      </a:solidFill>
-                      <a:prstDash val="solid"/>
-                      <a:round/>
-                      <a:headEnd type="none" w="med" len="med"/>
-                      <a:tailEnd type="none" w="med" len="med"/>
-                    </a:lnR>
-                    <a:lnT w="9525" cap="flat" cmpd="sng" algn="ctr">
-                      <a:solidFill>
-                        <a:srgbClr val="DCE4EC"/>
-                      </a:solidFill>
-                      <a:prstDash val="solid"/>
-                      <a:round/>
-                      <a:headEnd type="none" w="med" len="med"/>
-                      <a:tailEnd type="none" w="med" len="med"/>
-                    </a:lnT>
-                    <a:lnB w="9525" cap="flat" cmpd="sng" algn="ctr">
-                      <a:solidFill>
-                        <a:srgbClr val="DCE4EC"/>
-                      </a:solidFill>
-                      <a:prstDash val="solid"/>
-                      <a:round/>
-                      <a:headEnd type="none" w="med" len="med"/>
-                      <a:tailEnd type="none" w="med" len="med"/>
-                    </a:lnB>
-                    <a:solidFill>
-                      <a:srgbClr val="F3F7FA"/>
-                    </a:solidFill>
-                  </a:tcPr>
-                </a:tc>
-              </a:tr>
-              <a:tr h="530352">
-                <a:tc>
-                  <a:txBody>
-                    <a:bodyPr/>
-                    <a:lstStyle/>
-                    <a:p>
-                      <a:pPr algn="l" indent="0" marL="0">
-                        <a:buNone/>
-                      </a:pPr>
-                      <a:r>
-                        <a:rPr lang="en-US" sz="1100" b="1" dirty="0">
-                          <a:solidFill>
-                            <a:srgbClr val="1B2A38"/>
-                          </a:solidFill>
-                          <a:latin typeface="Calibri" pitchFamily="34" charset="0"/>
-                          <a:ea typeface="Calibri" pitchFamily="34" charset="-122"/>
-                          <a:cs typeface="Calibri" pitchFamily="34" charset="-120"/>
-                        </a:rPr>
-                        <a:t>Factor V</a:t>
-                      </a:r>
-                      <a:endParaRPr lang="en-US" sz="1100" dirty="0">
-                        <a:latin typeface="Calibri" charset="0"/>
-                        <a:ea typeface="Calibri" charset="0"/>
-                        <a:cs typeface="Calibri" charset="0"/>
-                      </a:endParaRPr>
-                    </a:p>
-                  </a:txBody>
-                  <a:tcPr marL="91440" marR="91440" marT="45720" marB="45720" anchor="ctr">
-                    <a:lnL w="9525" cap="flat" cmpd="sng" algn="ctr">
-                      <a:solidFill>
-                        <a:srgbClr val="DCE4EC"/>
-                      </a:solidFill>
-                      <a:prstDash val="solid"/>
-                      <a:round/>
-                      <a:headEnd type="none" w="med" len="med"/>
-                      <a:tailEnd type="none" w="med" len="med"/>
-                    </a:lnL>
-                    <a:lnR w="9525" cap="flat" cmpd="sng" algn="ctr">
-                      <a:solidFill>
-                        <a:srgbClr val="DCE4EC"/>
-                      </a:solidFill>
-                      <a:prstDash val="solid"/>
-                      <a:round/>
-                      <a:headEnd type="none" w="med" len="med"/>
-                      <a:tailEnd type="none" w="med" len="med"/>
-                    </a:lnR>
-                    <a:lnT w="9525" cap="flat" cmpd="sng" algn="ctr">
-                      <a:solidFill>
-                        <a:srgbClr val="DCE4EC"/>
-                      </a:solidFill>
-                      <a:prstDash val="solid"/>
-                      <a:round/>
-                      <a:headEnd type="none" w="med" len="med"/>
-                      <a:tailEnd type="none" w="med" len="med"/>
-                    </a:lnT>
-                    <a:lnB w="9525" cap="flat" cmpd="sng" algn="ctr">
-                      <a:solidFill>
-                        <a:srgbClr val="DCE4EC"/>
-                      </a:solidFill>
-                      <a:prstDash val="solid"/>
-                      <a:round/>
-                      <a:headEnd type="none" w="med" len="med"/>
-                      <a:tailEnd type="none" w="med" len="med"/>
-                    </a:lnB>
-                    <a:solidFill>
-                      <a:srgbClr val="FFFFFF"/>
-                    </a:solidFill>
-                  </a:tcPr>
-                </a:tc>
-                <a:tc>
-                  <a:txBody>
-                    <a:bodyPr/>
-                    <a:lstStyle/>
-                    <a:p>
-                      <a:pPr algn="ctr" indent="0" marL="0">
-                        <a:buNone/>
-                      </a:pPr>
-                      <a:r>
-                        <a:rPr lang="en-US" sz="1100" dirty="0">
-                          <a:solidFill>
-                            <a:srgbClr val="33444F"/>
-                          </a:solidFill>
-                          <a:latin typeface="Calibri" pitchFamily="34" charset="0"/>
-                          <a:ea typeface="Calibri" pitchFamily="34" charset="-122"/>
-                          <a:cs typeface="Calibri" pitchFamily="34" charset="-120"/>
-                        </a:rPr>
-                        <a:t>Low</a:t>
-                      </a:r>
-                      <a:endParaRPr lang="en-US" sz="1100" dirty="0">
-                        <a:latin typeface="Calibri" charset="0"/>
-                        <a:ea typeface="Calibri" charset="0"/>
-                        <a:cs typeface="Calibri" charset="0"/>
-                      </a:endParaRPr>
-                    </a:p>
-                  </a:txBody>
-                  <a:tcPr marL="91440" marR="91440" marT="45720" marB="45720" anchor="ctr">
-                    <a:lnL w="9525" cap="flat" cmpd="sng" algn="ctr">
-                      <a:solidFill>
-                        <a:srgbClr val="DCE4EC"/>
-                      </a:solidFill>
-                      <a:prstDash val="solid"/>
-                      <a:round/>
-                      <a:headEnd type="none" w="med" len="med"/>
-                      <a:tailEnd type="none" w="med" len="med"/>
-                    </a:lnL>
-                    <a:lnR w="9525" cap="flat" cmpd="sng" algn="ctr">
-                      <a:solidFill>
-                        <a:srgbClr val="DCE4EC"/>
-                      </a:solidFill>
-                      <a:prstDash val="solid"/>
-                      <a:round/>
-                      <a:headEnd type="none" w="med" len="med"/>
-                      <a:tailEnd type="none" w="med" len="med"/>
-                    </a:lnR>
-                    <a:lnT w="9525" cap="flat" cmpd="sng" algn="ctr">
-                      <a:solidFill>
-                        <a:srgbClr val="DCE4EC"/>
-                      </a:solidFill>
-                      <a:prstDash val="solid"/>
-                      <a:round/>
-                      <a:headEnd type="none" w="med" len="med"/>
-                      <a:tailEnd type="none" w="med" len="med"/>
-                    </a:lnT>
-                    <a:lnB w="9525" cap="flat" cmpd="sng" algn="ctr">
-                      <a:solidFill>
-                        <a:srgbClr val="DCE4EC"/>
-                      </a:solidFill>
-                      <a:prstDash val="solid"/>
-                      <a:round/>
-                      <a:headEnd type="none" w="med" len="med"/>
-                      <a:tailEnd type="none" w="med" len="med"/>
-                    </a:lnB>
-                    <a:solidFill>
-                      <a:srgbClr val="FFFFFF"/>
-                    </a:solidFill>
-                  </a:tcPr>
-                </a:tc>
-                <a:tc>
-                  <a:txBody>
-                    <a:bodyPr/>
-                    <a:lstStyle/>
-                    <a:p>
-                      <a:pPr algn="ctr" indent="0" marL="0">
-                        <a:buNone/>
-                      </a:pPr>
-                      <a:r>
-                        <a:rPr lang="en-US" sz="1100" dirty="0">
-                          <a:solidFill>
-                            <a:srgbClr val="33444F"/>
-                          </a:solidFill>
-                          <a:latin typeface="Calibri" pitchFamily="34" charset="0"/>
-                          <a:ea typeface="Calibri" pitchFamily="34" charset="-122"/>
-                          <a:cs typeface="Calibri" pitchFamily="34" charset="-120"/>
-                        </a:rPr>
-                        <a:t>Low</a:t>
-                      </a:r>
-                      <a:endParaRPr lang="en-US" sz="1100" dirty="0">
-                        <a:latin typeface="Calibri" charset="0"/>
-                        <a:ea typeface="Calibri" charset="0"/>
-                        <a:cs typeface="Calibri" charset="0"/>
-                      </a:endParaRPr>
-                    </a:p>
-                  </a:txBody>
-                  <a:tcPr marL="91440" marR="91440" marT="45720" marB="45720" anchor="ctr">
-                    <a:lnL w="9525" cap="flat" cmpd="sng" algn="ctr">
-                      <a:solidFill>
-                        <a:srgbClr val="DCE4EC"/>
-                      </a:solidFill>
-                      <a:prstDash val="solid"/>
-                      <a:round/>
-                      <a:headEnd type="none" w="med" len="med"/>
-                      <a:tailEnd type="none" w="med" len="med"/>
-                    </a:lnL>
-                    <a:lnR w="9525" cap="flat" cmpd="sng" algn="ctr">
-                      <a:solidFill>
-                        <a:srgbClr val="DCE4EC"/>
-                      </a:solidFill>
-                      <a:prstDash val="solid"/>
-                      <a:round/>
-                      <a:headEnd type="none" w="med" len="med"/>
-                      <a:tailEnd type="none" w="med" len="med"/>
-                    </a:lnR>
-                    <a:lnT w="9525" cap="flat" cmpd="sng" algn="ctr">
-                      <a:solidFill>
-                        <a:srgbClr val="DCE4EC"/>
-                      </a:solidFill>
-                      <a:prstDash val="solid"/>
-                      <a:round/>
-                      <a:headEnd type="none" w="med" len="med"/>
-                      <a:tailEnd type="none" w="med" len="med"/>
-                    </a:lnT>
-                    <a:lnB w="9525" cap="flat" cmpd="sng" algn="ctr">
-                      <a:solidFill>
-                        <a:srgbClr val="DCE4EC"/>
-                      </a:solidFill>
-                      <a:prstDash val="solid"/>
-                      <a:round/>
-                      <a:headEnd type="none" w="med" len="med"/>
-                      <a:tailEnd type="none" w="med" len="med"/>
-                    </a:lnB>
-                    <a:solidFill>
-                      <a:srgbClr val="FFFFFF"/>
-                    </a:solidFill>
-                  </a:tcPr>
-                </a:tc>
-                <a:tc>
-                  <a:txBody>
-                    <a:bodyPr/>
-                    <a:lstStyle/>
-                    <a:p>
-                      <a:pPr algn="ctr" indent="0" marL="0">
-                        <a:buNone/>
-                      </a:pPr>
-                      <a:r>
-                        <a:rPr lang="en-US" sz="1100" dirty="0">
-                          <a:solidFill>
-                            <a:srgbClr val="33444F"/>
-                          </a:solidFill>
-                          <a:latin typeface="Calibri" pitchFamily="34" charset="0"/>
-                          <a:ea typeface="Calibri" pitchFamily="34" charset="-122"/>
-                          <a:cs typeface="Calibri" pitchFamily="34" charset="-120"/>
-                        </a:rPr>
-                        <a:t>Normal</a:t>
-                      </a:r>
-                      <a:endParaRPr lang="en-US" sz="1100" dirty="0">
-                        <a:latin typeface="Calibri" charset="0"/>
-                        <a:ea typeface="Calibri" charset="0"/>
-                        <a:cs typeface="Calibri" charset="0"/>
-                      </a:endParaRPr>
-                    </a:p>
-                  </a:txBody>
-                  <a:tcPr marL="91440" marR="91440" marT="45720" marB="45720" anchor="ctr">
-                    <a:lnL w="9525" cap="flat" cmpd="sng" algn="ctr">
-                      <a:solidFill>
-                        <a:srgbClr val="DCE4EC"/>
-                      </a:solidFill>
-                      <a:prstDash val="solid"/>
-                      <a:round/>
-                      <a:headEnd type="none" w="med" len="med"/>
-                      <a:tailEnd type="none" w="med" len="med"/>
-                    </a:lnL>
-                    <a:lnR w="9525" cap="flat" cmpd="sng" algn="ctr">
-                      <a:solidFill>
-                        <a:srgbClr val="DCE4EC"/>
-                      </a:solidFill>
-                      <a:prstDash val="solid"/>
-                      <a:round/>
-                      <a:headEnd type="none" w="med" len="med"/>
-                      <a:tailEnd type="none" w="med" len="med"/>
-                    </a:lnR>
-                    <a:lnT w="9525" cap="flat" cmpd="sng" algn="ctr">
-                      <a:solidFill>
-                        <a:srgbClr val="DCE4EC"/>
-                      </a:solidFill>
-                      <a:prstDash val="solid"/>
-                      <a:round/>
-                      <a:headEnd type="none" w="med" len="med"/>
-                      <a:tailEnd type="none" w="med" len="med"/>
-                    </a:lnT>
-                    <a:lnB w="9525" cap="flat" cmpd="sng" algn="ctr">
-                      <a:solidFill>
-                        <a:srgbClr val="DCE4EC"/>
-                      </a:solidFill>
-                      <a:prstDash val="solid"/>
-                      <a:round/>
-                      <a:headEnd type="none" w="med" len="med"/>
-                      <a:tailEnd type="none" w="med" len="med"/>
-                    </a:lnB>
-                    <a:solidFill>
-                      <a:srgbClr val="FFFFFF"/>
-                    </a:solidFill>
-                  </a:tcPr>
-                </a:tc>
-              </a:tr>
-              <a:tr h="530352">
-                <a:tc>
-                  <a:txBody>
-                    <a:bodyPr/>
-                    <a:lstStyle/>
-                    <a:p>
-                      <a:pPr algn="l" indent="0" marL="0">
-                        <a:buNone/>
-                      </a:pPr>
-                      <a:r>
-                        <a:rPr lang="en-US" sz="1100" b="1" dirty="0">
-                          <a:solidFill>
-                            <a:srgbClr val="1B2A38"/>
-                          </a:solidFill>
-                          <a:latin typeface="Calibri" pitchFamily="34" charset="0"/>
-                          <a:ea typeface="Calibri" pitchFamily="34" charset="-122"/>
-                          <a:cs typeface="Calibri" pitchFamily="34" charset="-120"/>
-                        </a:rPr>
-                        <a:t>Factor VIII</a:t>
-                      </a:r>
-                      <a:endParaRPr lang="en-US" sz="1100" dirty="0">
-                        <a:latin typeface="Calibri" charset="0"/>
-                        <a:ea typeface="Calibri" charset="0"/>
-                        <a:cs typeface="Calibri" charset="0"/>
-                      </a:endParaRPr>
-                    </a:p>
-                  </a:txBody>
-                  <a:tcPr marL="91440" marR="91440" marT="45720" marB="45720" anchor="ctr">
-                    <a:lnL w="9525" cap="flat" cmpd="sng" algn="ctr">
-                      <a:solidFill>
-                        <a:srgbClr val="DCE4EC"/>
-                      </a:solidFill>
-                      <a:prstDash val="solid"/>
-                      <a:round/>
-                      <a:headEnd type="none" w="med" len="med"/>
-                      <a:tailEnd type="none" w="med" len="med"/>
-                    </a:lnL>
-                    <a:lnR w="9525" cap="flat" cmpd="sng" algn="ctr">
-                      <a:solidFill>
-                        <a:srgbClr val="DCE4EC"/>
-                      </a:solidFill>
-                      <a:prstDash val="solid"/>
-                      <a:round/>
-                      <a:headEnd type="none" w="med" len="med"/>
-                      <a:tailEnd type="none" w="med" len="med"/>
-                    </a:lnR>
-                    <a:lnT w="9525" cap="flat" cmpd="sng" algn="ctr">
-                      <a:solidFill>
-                        <a:srgbClr val="DCE4EC"/>
-                      </a:solidFill>
-                      <a:prstDash val="solid"/>
-                      <a:round/>
-                      <a:headEnd type="none" w="med" len="med"/>
-                      <a:tailEnd type="none" w="med" len="med"/>
-                    </a:lnT>
-                    <a:lnB w="9525" cap="flat" cmpd="sng" algn="ctr">
-                      <a:solidFill>
-                        <a:srgbClr val="DCE4EC"/>
-                      </a:solidFill>
-                      <a:prstDash val="solid"/>
-                      <a:round/>
-                      <a:headEnd type="none" w="med" len="med"/>
-                      <a:tailEnd type="none" w="med" len="med"/>
-                    </a:lnB>
-                    <a:solidFill>
-                      <a:srgbClr val="F3F7FA"/>
-                    </a:solidFill>
-                  </a:tcPr>
-                </a:tc>
-                <a:tc>
-                  <a:txBody>
-                    <a:bodyPr/>
-                    <a:lstStyle/>
-                    <a:p>
-                      <a:pPr algn="ctr" indent="0" marL="0">
-                        <a:buNone/>
-                      </a:pPr>
-                      <a:r>
-                        <a:rPr lang="en-US" sz="1100" dirty="0">
-                          <a:solidFill>
-                            <a:srgbClr val="33444F"/>
-                          </a:solidFill>
-                          <a:latin typeface="Calibri" pitchFamily="34" charset="0"/>
-                          <a:ea typeface="Calibri" pitchFamily="34" charset="-122"/>
-                          <a:cs typeface="Calibri" pitchFamily="34" charset="-120"/>
-                        </a:rPr>
-                        <a:t>Variable</a:t>
-                      </a:r>
-                      <a:endParaRPr lang="en-US" sz="1100" dirty="0">
-                        <a:latin typeface="Calibri" charset="0"/>
-                        <a:ea typeface="Calibri" charset="0"/>
-                        <a:cs typeface="Calibri" charset="0"/>
-                      </a:endParaRPr>
-                    </a:p>
-                  </a:txBody>
-                  <a:tcPr marL="91440" marR="91440" marT="45720" marB="45720" anchor="ctr">
-                    <a:lnL w="9525" cap="flat" cmpd="sng" algn="ctr">
-                      <a:solidFill>
-                        <a:srgbClr val="DCE4EC"/>
-                      </a:solidFill>
-                      <a:prstDash val="solid"/>
-                      <a:round/>
-                      <a:headEnd type="none" w="med" len="med"/>
-                      <a:tailEnd type="none" w="med" len="med"/>
-                    </a:lnL>
-                    <a:lnR w="9525" cap="flat" cmpd="sng" algn="ctr">
-                      <a:solidFill>
-                        <a:srgbClr val="DCE4EC"/>
-                      </a:solidFill>
-                      <a:prstDash val="solid"/>
-                      <a:round/>
-                      <a:headEnd type="none" w="med" len="med"/>
-                      <a:tailEnd type="none" w="med" len="med"/>
-                    </a:lnR>
-                    <a:lnT w="9525" cap="flat" cmpd="sng" algn="ctr">
-                      <a:solidFill>
-                        <a:srgbClr val="DCE4EC"/>
-                      </a:solidFill>
-                      <a:prstDash val="solid"/>
-                      <a:round/>
-                      <a:headEnd type="none" w="med" len="med"/>
-                      <a:tailEnd type="none" w="med" len="med"/>
-                    </a:lnT>
-                    <a:lnB w="9525" cap="flat" cmpd="sng" algn="ctr">
-                      <a:solidFill>
-                        <a:srgbClr val="DCE4EC"/>
-                      </a:solidFill>
-                      <a:prstDash val="solid"/>
-                      <a:round/>
-                      <a:headEnd type="none" w="med" len="med"/>
-                      <a:tailEnd type="none" w="med" len="med"/>
-                    </a:lnB>
-                    <a:solidFill>
-                      <a:srgbClr val="F3F7FA"/>
-                    </a:solidFill>
-                  </a:tcPr>
-                </a:tc>
-                <a:tc>
-                  <a:txBody>
-                    <a:bodyPr/>
-                    <a:lstStyle/>
-                    <a:p>
-                      <a:pPr algn="ctr" indent="0" marL="0">
-                        <a:buNone/>
-                      </a:pPr>
-                      <a:r>
-                        <a:rPr lang="en-US" sz="1100" dirty="0">
-                          <a:solidFill>
-                            <a:srgbClr val="33444F"/>
-                          </a:solidFill>
-                          <a:latin typeface="Calibri" pitchFamily="34" charset="0"/>
-                          <a:ea typeface="Calibri" pitchFamily="34" charset="-122"/>
-                          <a:cs typeface="Calibri" pitchFamily="34" charset="-120"/>
-                        </a:rPr>
-                        <a:t>Normal / high</a:t>
-                      </a:r>
-                      <a:endParaRPr lang="en-US" sz="1100" dirty="0">
-                        <a:latin typeface="Calibri" charset="0"/>
-                        <a:ea typeface="Calibri" charset="0"/>
-                        <a:cs typeface="Calibri" charset="0"/>
-                      </a:endParaRPr>
-                    </a:p>
-                  </a:txBody>
-                  <a:tcPr marL="91440" marR="91440" marT="45720" marB="45720" anchor="ctr">
-                    <a:lnL w="9525" cap="flat" cmpd="sng" algn="ctr">
-                      <a:solidFill>
-                        <a:srgbClr val="DCE4EC"/>
-                      </a:solidFill>
-                      <a:prstDash val="solid"/>
-                      <a:round/>
-                      <a:headEnd type="none" w="med" len="med"/>
-                      <a:tailEnd type="none" w="med" len="med"/>
-                    </a:lnL>
-                    <a:lnR w="9525" cap="flat" cmpd="sng" algn="ctr">
-                      <a:solidFill>
-                        <a:srgbClr val="DCE4EC"/>
-                      </a:solidFill>
-                      <a:prstDash val="solid"/>
-                      <a:round/>
-                      <a:headEnd type="none" w="med" len="med"/>
-                      <a:tailEnd type="none" w="med" len="med"/>
-                    </a:lnR>
-                    <a:lnT w="9525" cap="flat" cmpd="sng" algn="ctr">
-                      <a:solidFill>
-                        <a:srgbClr val="DCE4EC"/>
-                      </a:solidFill>
-                      <a:prstDash val="solid"/>
-                      <a:round/>
-                      <a:headEnd type="none" w="med" len="med"/>
-                      <a:tailEnd type="none" w="med" len="med"/>
-                    </a:lnT>
-                    <a:lnB w="9525" cap="flat" cmpd="sng" algn="ctr">
-                      <a:solidFill>
-                        <a:srgbClr val="DCE4EC"/>
-                      </a:solidFill>
-                      <a:prstDash val="solid"/>
-                      <a:round/>
-                      <a:headEnd type="none" w="med" len="med"/>
-                      <a:tailEnd type="none" w="med" len="med"/>
-                    </a:lnB>
-                    <a:solidFill>
-                      <a:srgbClr val="F3F7FA"/>
-                    </a:solidFill>
-                  </a:tcPr>
-                </a:tc>
-                <a:tc>
-                  <a:txBody>
-                    <a:bodyPr/>
-                    <a:lstStyle/>
-                    <a:p>
-                      <a:pPr algn="ctr" indent="0" marL="0">
-                        <a:buNone/>
-                      </a:pPr>
-                      <a:r>
-                        <a:rPr lang="en-US" sz="1100" dirty="0">
-                          <a:solidFill>
-                            <a:srgbClr val="33444F"/>
-                          </a:solidFill>
-                          <a:latin typeface="Calibri" pitchFamily="34" charset="0"/>
-                          <a:ea typeface="Calibri" pitchFamily="34" charset="-122"/>
-                          <a:cs typeface="Calibri" pitchFamily="34" charset="-120"/>
-                        </a:rPr>
-                        <a:t>Normal</a:t>
-                      </a:r>
-                      <a:endParaRPr lang="en-US" sz="1100" dirty="0">
-                        <a:latin typeface="Calibri" charset="0"/>
-                        <a:ea typeface="Calibri" charset="0"/>
-                        <a:cs typeface="Calibri" charset="0"/>
-                      </a:endParaRPr>
-                    </a:p>
-                  </a:txBody>
-                  <a:tcPr marL="91440" marR="91440" marT="45720" marB="45720" anchor="ctr">
-                    <a:lnL w="9525" cap="flat" cmpd="sng" algn="ctr">
-                      <a:solidFill>
-                        <a:srgbClr val="DCE4EC"/>
-                      </a:solidFill>
-                      <a:prstDash val="solid"/>
-                      <a:round/>
-                      <a:headEnd type="none" w="med" len="med"/>
-                      <a:tailEnd type="none" w="med" len="med"/>
-                    </a:lnL>
-                    <a:lnR w="9525" cap="flat" cmpd="sng" algn="ctr">
-                      <a:solidFill>
-                        <a:srgbClr val="DCE4EC"/>
-                      </a:solidFill>
-                      <a:prstDash val="solid"/>
-                      <a:round/>
-                      <a:headEnd type="none" w="med" len="med"/>
-                      <a:tailEnd type="none" w="med" len="med"/>
-                    </a:lnR>
-                    <a:lnT w="9525" cap="flat" cmpd="sng" algn="ctr">
-                      <a:solidFill>
-                        <a:srgbClr val="DCE4EC"/>
-                      </a:solidFill>
-                      <a:prstDash val="solid"/>
-                      <a:round/>
-                      <a:headEnd type="none" w="med" len="med"/>
-                      <a:tailEnd type="none" w="med" len="med"/>
-                    </a:lnT>
-                    <a:lnB w="9525" cap="flat" cmpd="sng" algn="ctr">
-                      <a:solidFill>
-                        <a:srgbClr val="DCE4EC"/>
-                      </a:solidFill>
-                      <a:prstDash val="solid"/>
-                      <a:round/>
-                      <a:headEnd type="none" w="med" len="med"/>
-                      <a:tailEnd type="none" w="med" len="med"/>
-                    </a:lnB>
-                    <a:solidFill>
-                      <a:srgbClr val="F3F7FA"/>
-                    </a:solidFill>
-                  </a:tcPr>
-                </a:tc>
-              </a:tr>
-              <a:tr h="530352">
-                <a:tc>
-                  <a:txBody>
-                    <a:bodyPr/>
-                    <a:lstStyle/>
-                    <a:p>
-                      <a:pPr algn="l" indent="0" marL="0">
-                        <a:buNone/>
-                      </a:pPr>
-                      <a:r>
-                        <a:rPr lang="en-US" sz="1100" b="1" dirty="0">
-                          <a:solidFill>
-                            <a:srgbClr val="1B2A38"/>
-                          </a:solidFill>
-                          <a:latin typeface="Calibri" pitchFamily="34" charset="0"/>
-                          <a:ea typeface="Calibri" pitchFamily="34" charset="-122"/>
-                          <a:cs typeface="Calibri" pitchFamily="34" charset="-120"/>
-                        </a:rPr>
-                        <a:t>D-dimer</a:t>
-                      </a:r>
-                      <a:endParaRPr lang="en-US" sz="1100" dirty="0">
-                        <a:latin typeface="Calibri" charset="0"/>
-                        <a:ea typeface="Calibri" charset="0"/>
-                        <a:cs typeface="Calibri" charset="0"/>
-                      </a:endParaRPr>
-                    </a:p>
-                  </a:txBody>
-                  <a:tcPr marL="91440" marR="91440" marT="45720" marB="45720" anchor="ctr">
-                    <a:lnL w="9525" cap="flat" cmpd="sng" algn="ctr">
-                      <a:solidFill>
-                        <a:srgbClr val="DCE4EC"/>
-                      </a:solidFill>
-                      <a:prstDash val="solid"/>
-                      <a:round/>
-                      <a:headEnd type="none" w="med" len="med"/>
-                      <a:tailEnd type="none" w="med" len="med"/>
-                    </a:lnL>
-                    <a:lnR w="9525" cap="flat" cmpd="sng" algn="ctr">
-                      <a:solidFill>
-                        <a:srgbClr val="DCE4EC"/>
-                      </a:solidFill>
-                      <a:prstDash val="solid"/>
-                      <a:round/>
-                      <a:headEnd type="none" w="med" len="med"/>
-                      <a:tailEnd type="none" w="med" len="med"/>
-                    </a:lnR>
-                    <a:lnT w="9525" cap="flat" cmpd="sng" algn="ctr">
-                      <a:solidFill>
-                        <a:srgbClr val="DCE4EC"/>
-                      </a:solidFill>
-                      <a:prstDash val="solid"/>
-                      <a:round/>
-                      <a:headEnd type="none" w="med" len="med"/>
-                      <a:tailEnd type="none" w="med" len="med"/>
-                    </a:lnT>
-                    <a:lnB w="9525" cap="flat" cmpd="sng" algn="ctr">
-                      <a:solidFill>
-                        <a:srgbClr val="DCE4EC"/>
-                      </a:solidFill>
-                      <a:prstDash val="solid"/>
-                      <a:round/>
-                      <a:headEnd type="none" w="med" len="med"/>
-                      <a:tailEnd type="none" w="med" len="med"/>
-                    </a:lnB>
-                    <a:solidFill>
-                      <a:srgbClr val="FFFFFF"/>
-                    </a:solidFill>
-                  </a:tcPr>
-                </a:tc>
-                <a:tc>
-                  <a:txBody>
-                    <a:bodyPr/>
-                    <a:lstStyle/>
-                    <a:p>
-                      <a:pPr algn="ctr" indent="0" marL="0">
-                        <a:buNone/>
-                      </a:pPr>
-                      <a:r>
-                        <a:rPr lang="en-US" sz="1100" dirty="0">
-                          <a:solidFill>
-                            <a:srgbClr val="33444F"/>
-                          </a:solidFill>
-                          <a:latin typeface="Calibri" pitchFamily="34" charset="0"/>
-                          <a:ea typeface="Calibri" pitchFamily="34" charset="-122"/>
-                          <a:cs typeface="Calibri" pitchFamily="34" charset="-120"/>
-                        </a:rPr>
-                        <a:t>High</a:t>
-                      </a:r>
-                      <a:endParaRPr lang="en-US" sz="1100" dirty="0">
-                        <a:latin typeface="Calibri" charset="0"/>
-                        <a:ea typeface="Calibri" charset="0"/>
-                        <a:cs typeface="Calibri" charset="0"/>
-                      </a:endParaRPr>
-                    </a:p>
-                  </a:txBody>
-                  <a:tcPr marL="91440" marR="91440" marT="45720" marB="45720" anchor="ctr">
-                    <a:lnL w="9525" cap="flat" cmpd="sng" algn="ctr">
-                      <a:solidFill>
-                        <a:srgbClr val="DCE4EC"/>
-                      </a:solidFill>
-                      <a:prstDash val="solid"/>
-                      <a:round/>
-                      <a:headEnd type="none" w="med" len="med"/>
-                      <a:tailEnd type="none" w="med" len="med"/>
-                    </a:lnL>
-                    <a:lnR w="9525" cap="flat" cmpd="sng" algn="ctr">
-                      <a:solidFill>
-                        <a:srgbClr val="DCE4EC"/>
-                      </a:solidFill>
-                      <a:prstDash val="solid"/>
-                      <a:round/>
-                      <a:headEnd type="none" w="med" len="med"/>
-                      <a:tailEnd type="none" w="med" len="med"/>
-                    </a:lnR>
-                    <a:lnT w="9525" cap="flat" cmpd="sng" algn="ctr">
-                      <a:solidFill>
-                        <a:srgbClr val="DCE4EC"/>
-                      </a:solidFill>
-                      <a:prstDash val="solid"/>
-                      <a:round/>
-                      <a:headEnd type="none" w="med" len="med"/>
-                      <a:tailEnd type="none" w="med" len="med"/>
-                    </a:lnT>
-                    <a:lnB w="9525" cap="flat" cmpd="sng" algn="ctr">
-                      <a:solidFill>
-                        <a:srgbClr val="DCE4EC"/>
-                      </a:solidFill>
-                      <a:prstDash val="solid"/>
-                      <a:round/>
-                      <a:headEnd type="none" w="med" len="med"/>
-                      <a:tailEnd type="none" w="med" len="med"/>
-                    </a:lnB>
-                    <a:solidFill>
-                      <a:srgbClr val="FFFFFF"/>
-                    </a:solidFill>
-                  </a:tcPr>
-                </a:tc>
-                <a:tc>
-                  <a:txBody>
-                    <a:bodyPr/>
-                    <a:lstStyle/>
-                    <a:p>
-                      <a:pPr algn="ctr" indent="0" marL="0">
-                        <a:buNone/>
-                      </a:pPr>
-                      <a:r>
-                        <a:rPr lang="en-US" sz="1100" dirty="0">
-                          <a:solidFill>
-                            <a:srgbClr val="33444F"/>
-                          </a:solidFill>
-                          <a:latin typeface="Calibri" pitchFamily="34" charset="0"/>
-                          <a:ea typeface="Calibri" pitchFamily="34" charset="-122"/>
-                          <a:cs typeface="Calibri" pitchFamily="34" charset="-120"/>
-                        </a:rPr>
-                        <a:t>Variable</a:t>
-                      </a:r>
-                      <a:endParaRPr lang="en-US" sz="1100" dirty="0">
-                        <a:latin typeface="Calibri" charset="0"/>
-                        <a:ea typeface="Calibri" charset="0"/>
-                        <a:cs typeface="Calibri" charset="0"/>
-                      </a:endParaRPr>
-                    </a:p>
-                  </a:txBody>
-                  <a:tcPr marL="91440" marR="91440" marT="45720" marB="45720" anchor="ctr">
-                    <a:lnL w="9525" cap="flat" cmpd="sng" algn="ctr">
-                      <a:solidFill>
-                        <a:srgbClr val="DCE4EC"/>
-                      </a:solidFill>
-                      <a:prstDash val="solid"/>
-                      <a:round/>
-                      <a:headEnd type="none" w="med" len="med"/>
-                      <a:tailEnd type="none" w="med" len="med"/>
-                    </a:lnL>
-                    <a:lnR w="9525" cap="flat" cmpd="sng" algn="ctr">
-                      <a:solidFill>
-                        <a:srgbClr val="DCE4EC"/>
-                      </a:solidFill>
-                      <a:prstDash val="solid"/>
-                      <a:round/>
-                      <a:headEnd type="none" w="med" len="med"/>
-                      <a:tailEnd type="none" w="med" len="med"/>
-                    </a:lnR>
-                    <a:lnT w="9525" cap="flat" cmpd="sng" algn="ctr">
-                      <a:solidFill>
-                        <a:srgbClr val="DCE4EC"/>
-                      </a:solidFill>
-                      <a:prstDash val="solid"/>
-                      <a:round/>
-                      <a:headEnd type="none" w="med" len="med"/>
-                      <a:tailEnd type="none" w="med" len="med"/>
-                    </a:lnT>
-                    <a:lnB w="9525" cap="flat" cmpd="sng" algn="ctr">
-                      <a:solidFill>
-                        <a:srgbClr val="DCE4EC"/>
-                      </a:solidFill>
-                      <a:prstDash val="solid"/>
-                      <a:round/>
-                      <a:headEnd type="none" w="med" len="med"/>
-                      <a:tailEnd type="none" w="med" len="med"/>
-                    </a:lnB>
-                    <a:solidFill>
-                      <a:srgbClr val="FFFFFF"/>
-                    </a:solidFill>
-                  </a:tcPr>
-                </a:tc>
-                <a:tc>
-                  <a:txBody>
-                    <a:bodyPr/>
-                    <a:lstStyle/>
-                    <a:p>
-                      <a:pPr algn="ctr" indent="0" marL="0">
-                        <a:buNone/>
-                      </a:pPr>
-                      <a:r>
-                        <a:rPr lang="en-US" sz="1100" dirty="0">
-                          <a:solidFill>
-                            <a:srgbClr val="33444F"/>
-                          </a:solidFill>
-                          <a:latin typeface="Calibri" pitchFamily="34" charset="0"/>
-                          <a:ea typeface="Calibri" pitchFamily="34" charset="-122"/>
-                          <a:cs typeface="Calibri" pitchFamily="34" charset="-120"/>
-                        </a:rPr>
-                        <a:t>Normal</a:t>
-                      </a:r>
-                      <a:endParaRPr lang="en-US" sz="1100" dirty="0">
-                        <a:latin typeface="Calibri" charset="0"/>
-                        <a:ea typeface="Calibri" charset="0"/>
-                        <a:cs typeface="Calibri" charset="0"/>
-                      </a:endParaRPr>
-                    </a:p>
-                  </a:txBody>
-                  <a:tcPr marL="91440" marR="91440" marT="45720" marB="45720" anchor="ctr">
-                    <a:lnL w="9525" cap="flat" cmpd="sng" algn="ctr">
-                      <a:solidFill>
-                        <a:srgbClr val="DCE4EC"/>
-                      </a:solidFill>
-                      <a:prstDash val="solid"/>
-                      <a:round/>
-                      <a:headEnd type="none" w="med" len="med"/>
-                      <a:tailEnd type="none" w="med" len="med"/>
-                    </a:lnL>
-                    <a:lnR w="9525" cap="flat" cmpd="sng" algn="ctr">
-                      <a:solidFill>
-                        <a:srgbClr val="DCE4EC"/>
-                      </a:solidFill>
-                      <a:prstDash val="solid"/>
-                      <a:round/>
-                      <a:headEnd type="none" w="med" len="med"/>
-                      <a:tailEnd type="none" w="med" len="med"/>
-                    </a:lnR>
-                    <a:lnT w="9525" cap="flat" cmpd="sng" algn="ctr">
-                      <a:solidFill>
-                        <a:srgbClr val="DCE4EC"/>
-                      </a:solidFill>
-                      <a:prstDash val="solid"/>
-                      <a:round/>
-                      <a:headEnd type="none" w="med" len="med"/>
-                      <a:tailEnd type="none" w="med" len="med"/>
-                    </a:lnT>
-                    <a:lnB w="9525" cap="flat" cmpd="sng" algn="ctr">
-                      <a:solidFill>
-                        <a:srgbClr val="DCE4EC"/>
-                      </a:solidFill>
-                      <a:prstDash val="solid"/>
-                      <a:round/>
-                      <a:headEnd type="none" w="med" len="med"/>
-                      <a:tailEnd type="none" w="med" len="med"/>
-                    </a:lnB>
-                    <a:solidFill>
-                      <a:srgbClr val="FFFFFF"/>
-                    </a:solidFill>
-                  </a:tcPr>
-                </a:tc>
-              </a:tr>
-            </a:tbl>
-          </a:graphicData>
-        </a:graphic>
-      </p:graphicFrame>
-      <p:sp>
-        <p:nvSpPr>
-          <p:cNvPr id="5" name="Text 2"/>
-          <p:cNvSpPr/>
-          <p:nvPr/>
-        </p:nvSpPr>
-        <p:spPr>
-          <a:xfrm>
-            <a:off x="566928" y="6016752"/>
-            <a:ext cx="11057839" cy="365760"/>
+      <p:sp>
+        <p:nvSpPr>
+          <p:cNvPr id="4" name="Shape 2"/>
+          <p:cNvSpPr/>
+          <p:nvPr/>
+        </p:nvSpPr>
+        <p:spPr>
+          <a:xfrm>
+            <a:off x="566928" y="1517904"/>
+            <a:ext cx="5346040" cy="4114800"/>
+          </a:xfrm>
+          <a:prstGeom prst="roundRect">
+            <a:avLst>
+              <a:gd name="adj" fmla="val 2000"/>
+            </a:avLst>
+          </a:prstGeom>
+          <a:solidFill>
+            <a:srgbClr val="FBEAEC"/>
+          </a:solidFill>
+          <a:ln/>
+          <a:effectLst>
+            <a:outerShdw sx="100000" sy="100000" kx="0" ky="0" algn="bl" rotWithShape="0" blurRad="88900" dist="25400" dir="5400000">
+              <a:srgbClr val="22303C">
+                <a:alpha val="12000"/>
+              </a:srgbClr>
+            </a:outerShdw>
+          </a:effectLst>
+        </p:spPr>
+      </p:sp>
+      <p:sp>
+        <p:nvSpPr>
+          <p:cNvPr id="5" name="Text 3"/>
+          <p:cNvSpPr/>
+          <p:nvPr/>
+        </p:nvSpPr>
+        <p:spPr>
+          <a:xfrm>
+            <a:off x="804672" y="1682496"/>
+            <a:ext cx="4888840" cy="274320"/>
           </a:xfrm>
           <a:prstGeom prst="rect">
             <a:avLst/>
@@ -6668,27 +4606,307 @@
           <a:bodyPr wrap="square" lIns="0" tIns="0" rIns="0" bIns="0" rtlCol="0" anchor="ctr"/>
           <a:lstStyle/>
           <a:p>
-            <a:pPr algn="l" indent="0" marL="0">
-              <a:buNone/>
-            </a:pPr>
-            <a:r>
-              <a:rPr lang="en-US" sz="1050" i="1" dirty="0">
-                <a:solidFill>
-                  <a:srgbClr val="6B7B8A"/>
-                </a:solidFill>
-                <a:latin typeface="Calibri" pitchFamily="34" charset="0"/>
-                <a:ea typeface="Calibri" pitchFamily="34" charset="-122"/>
-                <a:cs typeface="Calibri" pitchFamily="34" charset="-120"/>
-              </a:rPr>
-              <a:t>Factor VIII is normal/high in liver disease (extrahepatic synthesis) but consumed in DIC; factor V is normal in vitamin K deficiency.</a:t>
-            </a:r>
-            <a:endParaRPr lang="en-US" sz="1050" dirty="0"/>
-          </a:p>
-        </p:txBody>
-      </p:sp>
-      <p:sp>
-        <p:nvSpPr>
-          <p:cNvPr id="6" name="Text 3"/>
+            <a:pPr indent="0" marL="0">
+              <a:buNone/>
+            </a:pPr>
+            <a:r>
+              <a:rPr lang="en-US" sz="1200" b="1" spc="100" kern="0" dirty="0">
+                <a:solidFill>
+                  <a:srgbClr val="8E1622"/>
+                </a:solidFill>
+                <a:latin typeface="Calibri" pitchFamily="34" charset="0"/>
+                <a:ea typeface="Calibri" pitchFamily="34" charset="-122"/>
+                <a:cs typeface="Calibri" pitchFamily="34" charset="-120"/>
+              </a:rPr>
+              <a:t>BLEEDING &amp; THROMBOSIS</a:t>
+            </a:r>
+            <a:endParaRPr lang="en-US" sz="1200" dirty="0"/>
+          </a:p>
+        </p:txBody>
+      </p:sp>
+      <p:sp>
+        <p:nvSpPr>
+          <p:cNvPr id="6" name="Text 4"/>
+          <p:cNvSpPr/>
+          <p:nvPr/>
+        </p:nvSpPr>
+        <p:spPr>
+          <a:xfrm>
+            <a:off x="804672" y="2029968"/>
+            <a:ext cx="4870552" cy="3474720"/>
+          </a:xfrm>
+          <a:prstGeom prst="rect">
+            <a:avLst/>
+          </a:prstGeom>
+          <a:noFill/>
+          <a:ln/>
+        </p:spPr>
+        <p:txBody>
+          <a:bodyPr wrap="square" lIns="0" tIns="0" rIns="0" bIns="0" rtlCol="0" anchor="t"/>
+          <a:lstStyle/>
+          <a:p>
+            <a:pPr algn="l" marL="177800" indent="-177800">
+              <a:spcAft>
+                <a:spcPts val="900"/>
+              </a:spcAft>
+              <a:buSzPct val="100000"/>
+              <a:buChar char="•"/>
+            </a:pPr>
+            <a:r>
+              <a:rPr lang="en-US" sz="1200" b="1" dirty="0">
+                <a:solidFill>
+                  <a:srgbClr val="1B2A38"/>
+                </a:solidFill>
+                <a:latin typeface="Calibri" pitchFamily="34" charset="0"/>
+                <a:ea typeface="Calibri" pitchFamily="34" charset="-122"/>
+                <a:cs typeface="Calibri" pitchFamily="34" charset="-120"/>
+              </a:rPr>
+              <a:t>Von Willebrand disease is the commonest inherited bleeding disorder (often normal PT/aPTT).</a:t>
+            </a:r>
+            <a:endParaRPr lang="en-US" sz="1200" dirty="0"/>
+          </a:p>
+          <a:p>
+            <a:pPr algn="l" marL="177800" indent="-177800">
+              <a:spcAft>
+                <a:spcPts val="900"/>
+              </a:spcAft>
+              <a:buSzPct val="100000"/>
+              <a:buChar char="•"/>
+            </a:pPr>
+            <a:r>
+              <a:rPr lang="en-US" sz="1200" dirty="0">
+                <a:solidFill>
+                  <a:srgbClr val="33444F"/>
+                </a:solidFill>
+                <a:latin typeface="Calibri" pitchFamily="34" charset="0"/>
+                <a:ea typeface="Calibri" pitchFamily="34" charset="-122"/>
+                <a:cs typeface="Calibri" pitchFamily="34" charset="-120"/>
+              </a:rPr>
+              <a:t>Hemophilia A/B prolong aPTT and correct on mixing.</a:t>
+            </a:r>
+            <a:endParaRPr lang="en-US" sz="1200" dirty="0"/>
+          </a:p>
+          <a:p>
+            <a:pPr algn="l" marL="177800" indent="-177800">
+              <a:spcAft>
+                <a:spcPts val="900"/>
+              </a:spcAft>
+              <a:buSzPct val="100000"/>
+              <a:buChar char="•"/>
+            </a:pPr>
+            <a:r>
+              <a:rPr lang="en-US" sz="1200" dirty="0">
+                <a:solidFill>
+                  <a:srgbClr val="33444F"/>
+                </a:solidFill>
+                <a:latin typeface="Calibri" pitchFamily="34" charset="0"/>
+                <a:ea typeface="Calibri" pitchFamily="34" charset="-122"/>
+                <a:cs typeface="Calibri" pitchFamily="34" charset="-120"/>
+              </a:rPr>
+              <a:t>DIC: ↓platelets/fibrinogen, ↑PT/aPTT, ↑D-dimer.</a:t>
+            </a:r>
+            <a:endParaRPr lang="en-US" sz="1200" dirty="0"/>
+          </a:p>
+          <a:p>
+            <a:pPr algn="l" marL="177800" indent="-177800">
+              <a:spcAft>
+                <a:spcPts val="900"/>
+              </a:spcAft>
+              <a:buSzPct val="100000"/>
+              <a:buChar char="•"/>
+            </a:pPr>
+            <a:r>
+              <a:rPr lang="en-US" sz="1200" dirty="0">
+                <a:solidFill>
+                  <a:srgbClr val="33444F"/>
+                </a:solidFill>
+                <a:latin typeface="Calibri" pitchFamily="34" charset="0"/>
+                <a:ea typeface="Calibri" pitchFamily="34" charset="-122"/>
+                <a:cs typeface="Calibri" pitchFamily="34" charset="-120"/>
+              </a:rPr>
+              <a:t>D-dimer has high negative predictive value for VTE — not a rule-in test.</a:t>
+            </a:r>
+            <a:endParaRPr lang="en-US" sz="1200" dirty="0"/>
+          </a:p>
+        </p:txBody>
+      </p:sp>
+      <p:sp>
+        <p:nvSpPr>
+          <p:cNvPr id="7" name="Shape 5"/>
+          <p:cNvSpPr/>
+          <p:nvPr/>
+        </p:nvSpPr>
+        <p:spPr>
+          <a:xfrm>
+            <a:off x="6278728" y="1517904"/>
+            <a:ext cx="5346040" cy="4114800"/>
+          </a:xfrm>
+          <a:prstGeom prst="roundRect">
+            <a:avLst>
+              <a:gd name="adj" fmla="val 2000"/>
+            </a:avLst>
+          </a:prstGeom>
+          <a:solidFill>
+            <a:srgbClr val="FBE7E9"/>
+          </a:solidFill>
+          <a:ln/>
+          <a:effectLst>
+            <a:outerShdw sx="100000" sy="100000" kx="0" ky="0" algn="bl" rotWithShape="0" blurRad="88900" dist="25400" dir="5400000">
+              <a:srgbClr val="22303C">
+                <a:alpha val="12000"/>
+              </a:srgbClr>
+            </a:outerShdw>
+          </a:effectLst>
+        </p:spPr>
+      </p:sp>
+      <p:sp>
+        <p:nvSpPr>
+          <p:cNvPr id="8" name="Text 6"/>
+          <p:cNvSpPr/>
+          <p:nvPr/>
+        </p:nvSpPr>
+        <p:spPr>
+          <a:xfrm>
+            <a:off x="6516472" y="1682496"/>
+            <a:ext cx="4888840" cy="274320"/>
+          </a:xfrm>
+          <a:prstGeom prst="rect">
+            <a:avLst/>
+          </a:prstGeom>
+          <a:noFill/>
+          <a:ln/>
+        </p:spPr>
+        <p:txBody>
+          <a:bodyPr wrap="square" lIns="0" tIns="0" rIns="0" bIns="0" rtlCol="0" anchor="ctr"/>
+          <a:lstStyle/>
+          <a:p>
+            <a:pPr indent="0" marL="0">
+              <a:buNone/>
+            </a:pPr>
+            <a:r>
+              <a:rPr lang="en-US" sz="1200" b="1" spc="100" kern="0" dirty="0">
+                <a:solidFill>
+                  <a:srgbClr val="8E1622"/>
+                </a:solidFill>
+                <a:latin typeface="Calibri" pitchFamily="34" charset="0"/>
+                <a:ea typeface="Calibri" pitchFamily="34" charset="-122"/>
+                <a:cs typeface="Calibri" pitchFamily="34" charset="-120"/>
+              </a:rPr>
+              <a:t>PRE-ANALYTIC PITFALLS</a:t>
+            </a:r>
+            <a:endParaRPr lang="en-US" sz="1200" dirty="0"/>
+          </a:p>
+        </p:txBody>
+      </p:sp>
+      <p:sp>
+        <p:nvSpPr>
+          <p:cNvPr id="9" name="Text 7"/>
+          <p:cNvSpPr/>
+          <p:nvPr/>
+        </p:nvSpPr>
+        <p:spPr>
+          <a:xfrm>
+            <a:off x="6516472" y="2029968"/>
+            <a:ext cx="4870552" cy="3474720"/>
+          </a:xfrm>
+          <a:prstGeom prst="rect">
+            <a:avLst/>
+          </a:prstGeom>
+          <a:noFill/>
+          <a:ln/>
+        </p:spPr>
+        <p:txBody>
+          <a:bodyPr wrap="square" lIns="0" tIns="0" rIns="0" bIns="0" rtlCol="0" anchor="t"/>
+          <a:lstStyle/>
+          <a:p>
+            <a:pPr algn="l" marL="177800" indent="-177800">
+              <a:spcAft>
+                <a:spcPts val="900"/>
+              </a:spcAft>
+              <a:buSzPct val="100000"/>
+              <a:buChar char="•"/>
+            </a:pPr>
+            <a:r>
+              <a:rPr lang="en-US" sz="1200" b="1" dirty="0">
+                <a:solidFill>
+                  <a:srgbClr val="1B2A38"/>
+                </a:solidFill>
+                <a:latin typeface="Calibri" pitchFamily="34" charset="0"/>
+                <a:ea typeface="Calibri" pitchFamily="34" charset="-122"/>
+                <a:cs typeface="Calibri" pitchFamily="34" charset="-120"/>
+              </a:rPr>
+              <a:t>Use the correct 3.2% sodium citrate tube with a 9:1 blood-to-anticoagulant ratio.</a:t>
+            </a:r>
+            <a:endParaRPr lang="en-US" sz="1200" dirty="0"/>
+          </a:p>
+          <a:p>
+            <a:pPr algn="l" marL="177800" indent="-177800">
+              <a:spcAft>
+                <a:spcPts val="900"/>
+              </a:spcAft>
+              <a:buSzPct val="100000"/>
+              <a:buChar char="•"/>
+            </a:pPr>
+            <a:r>
+              <a:rPr lang="en-US" sz="1200" dirty="0">
+                <a:solidFill>
+                  <a:srgbClr val="33444F"/>
+                </a:solidFill>
+                <a:latin typeface="Calibri" pitchFamily="34" charset="0"/>
+                <a:ea typeface="Calibri" pitchFamily="34" charset="-122"/>
+                <a:cs typeface="Calibri" pitchFamily="34" charset="-120"/>
+              </a:rPr>
+              <a:t>Under-filled tubes falsely prolong results.</a:t>
+            </a:r>
+            <a:endParaRPr lang="en-US" sz="1200" dirty="0"/>
+          </a:p>
+          <a:p>
+            <a:pPr algn="l" marL="177800" indent="-177800">
+              <a:spcAft>
+                <a:spcPts val="900"/>
+              </a:spcAft>
+              <a:buSzPct val="100000"/>
+              <a:buChar char="•"/>
+            </a:pPr>
+            <a:r>
+              <a:rPr lang="en-US" sz="1200" dirty="0">
+                <a:solidFill>
+                  <a:srgbClr val="33444F"/>
+                </a:solidFill>
+                <a:latin typeface="Calibri" pitchFamily="34" charset="0"/>
+                <a:ea typeface="Calibri" pitchFamily="34" charset="-122"/>
+                <a:cs typeface="Calibri" pitchFamily="34" charset="-120"/>
+              </a:rPr>
+              <a:t>Correct citrate volume for high hematocrit (polycythemia).</a:t>
+            </a:r>
+            <a:endParaRPr lang="en-US" sz="1200" dirty="0"/>
+          </a:p>
+          <a:p>
+            <a:pPr algn="l" marL="177800" indent="-177800">
+              <a:spcAft>
+                <a:spcPts val="900"/>
+              </a:spcAft>
+              <a:buSzPct val="100000"/>
+              <a:buChar char="•"/>
+            </a:pPr>
+            <a:r>
+              <a:rPr lang="en-US" sz="1200" dirty="0">
+                <a:solidFill>
+                  <a:srgbClr val="33444F"/>
+                </a:solidFill>
+                <a:latin typeface="Calibri" pitchFamily="34" charset="0"/>
+                <a:ea typeface="Calibri" pitchFamily="34" charset="-122"/>
+                <a:cs typeface="Calibri" pitchFamily="34" charset="-120"/>
+              </a:rPr>
+              <a:t>Heparin contamination (line draws) prolongs aPTT.</a:t>
+            </a:r>
+            <a:endParaRPr lang="en-US" sz="1200" dirty="0"/>
+          </a:p>
+        </p:txBody>
+      </p:sp>
+      <p:sp>
+        <p:nvSpPr>
+          <p:cNvPr id="10" name="Text 8"/>
           <p:cNvSpPr/>
           <p:nvPr/>
         </p:nvSpPr>
@@ -6727,7 +4945,7 @@
       </p:sp>
       <p:sp>
         <p:nvSpPr>
-          <p:cNvPr id="7" name="Text 4"/>
+          <p:cNvPr id="11" name="Text 9"/>
           <p:cNvSpPr/>
           <p:nvPr/>
         </p:nvSpPr>
@@ -7006,7 +5224,7 @@
                 <a:ea typeface="Calibri" pitchFamily="34" charset="-122"/>
                 <a:cs typeface="Calibri" pitchFamily="34" charset="-120"/>
               </a:rPr>
-              <a:t>A 22-year-old man with lifelong easy bruising and a hemarthrosis has a normal PT but a prolonged aPTT that corrects fully on a 1:1 mix.</a:t>
+              <a:t>A patient has an isolated prolonged aPTT that fully corrects on a 1:1 mix with normal plasma.</a:t>
             </a:r>
             <a:endParaRPr lang="en-US" sz="1450" dirty="0"/>
           </a:p>
@@ -7113,7 +5331,7 @@
                 <a:ea typeface="Calibri" pitchFamily="34" charset="-122"/>
                 <a:cs typeface="Calibri" pitchFamily="34" charset="-120"/>
               </a:rPr>
-              <a:t>Where is the defect, what does correction indicate, and what confirms the diagnosis?</a:t>
+              <a:t>What does this indicate and what is the next test?</a:t>
             </a:r>
             <a:endParaRPr lang="en-US" sz="1500" dirty="0"/>
           </a:p>
@@ -7329,7 +5547,7 @@
                 <a:ea typeface="Calibri" pitchFamily="34" charset="-122"/>
                 <a:cs typeface="Calibri" pitchFamily="34" charset="-120"/>
               </a:rPr>
-              <a:t>Case 1: Hemophilia (Intrinsic Factor Deficiency)</a:t>
+              <a:t>Case 1: Factor Deficiency</a:t>
             </a:r>
             <a:endParaRPr lang="en-US" sz="3000" dirty="0"/>
           </a:p>
@@ -7372,7 +5590,7 @@
                 <a:ea typeface="Calibri" pitchFamily="34" charset="-122"/>
                 <a:cs typeface="Calibri" pitchFamily="34" charset="-120"/>
               </a:rPr>
-              <a:t>Isolated prolonged aPTT with bleeding localizes to the intrinsic pathway.</a:t>
+              <a:t>Correction on mixing indicates a factor deficiency in the intrinsic pathway (e.g., factor VIII or IX).</a:t>
             </a:r>
             <a:endParaRPr lang="en-US" sz="1400" dirty="0"/>
           </a:p>
@@ -7393,7 +5611,7 @@
                 <a:ea typeface="Calibri" pitchFamily="34" charset="-122"/>
                 <a:cs typeface="Calibri" pitchFamily="34" charset="-120"/>
               </a:rPr>
-              <a:t>Correction on mixing indicates a factor deficiency, not an inhibitor.</a:t>
+              <a:t>Confirm with specific factor assays.</a:t>
             </a:r>
             <a:endParaRPr lang="en-US" sz="1400" dirty="0"/>
           </a:p>
@@ -7414,7 +5632,7 @@
                 <a:ea typeface="Calibri" pitchFamily="34" charset="-122"/>
                 <a:cs typeface="Calibri" pitchFamily="34" charset="-120"/>
               </a:rPr>
-              <a:t>Confirm with specific factor assays — factor VIII (hemophilia A) or IX (hemophilia B).</a:t>
+              <a:t>Correlate with bleeding history (e.g., hemophilia).</a:t>
             </a:r>
             <a:endParaRPr lang="en-US" sz="1400" dirty="0"/>
           </a:p>
@@ -7435,7 +5653,7 @@
                 <a:ea typeface="Calibri" pitchFamily="34" charset="-122"/>
                 <a:cs typeface="Calibri" pitchFamily="34" charset="-120"/>
               </a:rPr>
-              <a:t>Exclude heparin contamination first.</a:t>
+              <a:t>Normal plasma supplied the missing factor.</a:t>
             </a:r>
             <a:endParaRPr lang="en-US" sz="1400" dirty="0"/>
           </a:p>
@@ -7545,7 +5763,7 @@
                 <a:ea typeface="Calibri" pitchFamily="34" charset="-122"/>
                 <a:cs typeface="Calibri" pitchFamily="34" charset="-120"/>
               </a:rPr>
-              <a:t>Isolated aPTT + bleeding + corrects on mixing = factor deficiency → measure factors VIII and IX.</a:t>
+              <a:t>An aPTT that corrects on mixing means deficiency — confirm the specific factor; failure to correct would mean an inhibitor.</a:t>
             </a:r>
             <a:endParaRPr lang="en-US" sz="1350" dirty="0"/>
           </a:p>
@@ -7871,7 +6089,7 @@
                 <a:ea typeface="Calibri" pitchFamily="34" charset="-122"/>
                 <a:cs typeface="Calibri" pitchFamily="34" charset="-120"/>
               </a:rPr>
-              <a:t>An older patient with new spontaneous bruising has a prolonged aPTT that does NOT correct on immediate mixing and prolongs further after 1 h at 37°C; PT normal.</a:t>
+              <a:t>An aPTT does not correct on immediate mixing; the patient has a history of clotting, not bleeding.</a:t>
             </a:r>
             <a:endParaRPr lang="en-US" sz="1450" dirty="0"/>
           </a:p>
@@ -7978,7 +6196,7 @@
                 <a:ea typeface="Calibri" pitchFamily="34" charset="-122"/>
                 <a:cs typeface="Calibri" pitchFamily="34" charset="-120"/>
               </a:rPr>
-              <a:t>What does the incubated pattern indicate?</a:t>
+              <a:t>What inhibitor should be considered?</a:t>
             </a:r>
             <a:endParaRPr lang="en-US" sz="1500" dirty="0"/>
           </a:p>
@@ -8194,7 +6412,7 @@
                 <a:ea typeface="Calibri" pitchFamily="34" charset="-122"/>
                 <a:cs typeface="Calibri" pitchFamily="34" charset="-120"/>
               </a:rPr>
-              <a:t>Case 2: Acquired Factor VIII Inhibitor</a:t>
+              <a:t>Case 2: Lupus Anticoagulant</a:t>
             </a:r>
             <a:endParaRPr lang="en-US" sz="3000" dirty="0"/>
           </a:p>
@@ -8237,7 +6455,7 @@
                 <a:ea typeface="Calibri" pitchFamily="34" charset="-122"/>
                 <a:cs typeface="Calibri" pitchFamily="34" charset="-120"/>
               </a:rPr>
-              <a:t>Non-correction indicates an inhibitor; further prolongation after incubation indicates a time-dependent factor VIII inhibitor (acquired hemophilia).</a:t>
+              <a:t>Failure to correct with a thrombotic (not bleeding) history suggests lupus anticoagulant.</a:t>
             </a:r>
             <a:endParaRPr lang="en-US" sz="1400" dirty="0"/>
           </a:p>
@@ -8258,7 +6476,7 @@
                 <a:ea typeface="Calibri" pitchFamily="34" charset="-122"/>
                 <a:cs typeface="Calibri" pitchFamily="34" charset="-120"/>
               </a:rPr>
-              <a:t>Confirm with a factor VIII level and a Bethesda inhibitor titer.</a:t>
+              <a:t>Confirm with phospholipid-dependent testing per criteria.</a:t>
             </a:r>
             <a:endParaRPr lang="en-US" sz="1400" dirty="0"/>
           </a:p>
@@ -8279,7 +6497,7 @@
                 <a:ea typeface="Calibri" pitchFamily="34" charset="-122"/>
                 <a:cs typeface="Calibri" pitchFamily="34" charset="-120"/>
               </a:rPr>
-              <a:t>Clinically important — acquired factor VIII inhibitors cause serious bleeding.</a:t>
+              <a:t>Despite the in-vitro prolongation, it is associated with thrombosis.</a:t>
             </a:r>
             <a:endParaRPr lang="en-US" sz="1400" dirty="0"/>
           </a:p>
@@ -8300,7 +6518,7 @@
                 <a:ea typeface="Calibri" pitchFamily="34" charset="-122"/>
                 <a:cs typeface="Calibri" pitchFamily="34" charset="-120"/>
               </a:rPr>
-              <a:t>Contrast with lupus anticoagulant, which does not bleed.</a:t>
+              <a:t>Distinguish from a specific factor inhibitor (which causes bleeding).</a:t>
             </a:r>
             <a:endParaRPr lang="en-US" sz="1400" dirty="0"/>
           </a:p>
@@ -8410,7 +6628,7 @@
                 <a:ea typeface="Calibri" pitchFamily="34" charset="-122"/>
                 <a:cs typeface="Calibri" pitchFamily="34" charset="-120"/>
               </a:rPr>
-              <a:t>Time-dependent non-correction is the signature of a factor VIII inhibitor.</a:t>
+              <a:t>A non-correcting aPTT with thrombosis suggests lupus anticoagulant — an in-vitro artifact that is clinically prothrombotic.</a:t>
             </a:r>
             <a:endParaRPr lang="en-US" sz="1350" dirty="0"/>
           </a:p>
@@ -8736,7 +6954,7 @@
                 <a:ea typeface="Calibri" pitchFamily="34" charset="-122"/>
                 <a:cs typeface="Calibri" pitchFamily="34" charset="-120"/>
               </a:rPr>
-              <a:t>A 30-year-old woman with a first acute DVT, just started on anticoagulation, has a full thrombophilia panel requested today including protein C, protein S, and antithrombin.</a:t>
+              <a:t>All coagulation results from one patient are erratically prolonged; the citrate tube was under-filled.</a:t>
             </a:r>
             <a:endParaRPr lang="en-US" sz="1450" dirty="0"/>
           </a:p>
@@ -8843,7 +7061,7 @@
                 <a:ea typeface="Calibri" pitchFamily="34" charset="-122"/>
                 <a:cs typeface="Calibri" pitchFamily="34" charset="-120"/>
               </a:rPr>
-              <a:t>Should the functional assays be drawn now? Explain.</a:t>
+              <a:t>What is the problem and the fix?</a:t>
             </a:r>
             <a:endParaRPr lang="en-US" sz="1500" dirty="0"/>
           </a:p>
@@ -9059,7 +7277,7 @@
                 <a:ea typeface="Calibri" pitchFamily="34" charset="-122"/>
                 <a:cs typeface="Calibri" pitchFamily="34" charset="-120"/>
               </a:rPr>
-              <a:t>Case 3: Thrombophilia Testing Timing</a:t>
+              <a:t>Case 3: Pre-Analytic Error</a:t>
             </a:r>
             <a:endParaRPr lang="en-US" sz="3000" dirty="0"/>
           </a:p>
@@ -9102,7 +7320,7 @@
                 <a:ea typeface="Calibri" pitchFamily="34" charset="-122"/>
                 <a:cs typeface="Calibri" pitchFamily="34" charset="-120"/>
               </a:rPr>
-              <a:t>Do not draw functional protein C/S and antithrombin during the acute event or on anticoagulation.</a:t>
+              <a:t>An under-filled citrate tube changes the blood-to-anticoagulant ratio and falsely prolongs results.</a:t>
             </a:r>
             <a:endParaRPr lang="en-US" sz="1400" dirty="0"/>
           </a:p>
@@ -9123,7 +7341,7 @@
                 <a:ea typeface="Calibri" pitchFamily="34" charset="-122"/>
                 <a:cs typeface="Calibri" pitchFamily="34" charset="-120"/>
               </a:rPr>
-              <a:t>Acute clot consumes natural anticoagulants; warfarin lowers protein C/S; heparin lowers antithrombin; DOACs confound clot-based assays.</a:t>
+              <a:t>Recollect a properly filled 3.2% citrate tube (9:1 ratio).</a:t>
             </a:r>
             <a:endParaRPr lang="en-US" sz="1400" dirty="0"/>
           </a:p>
@@ -9144,7 +7362,7 @@
                 <a:ea typeface="Calibri" pitchFamily="34" charset="-122"/>
                 <a:cs typeface="Calibri" pitchFamily="34" charset="-120"/>
               </a:rPr>
-              <a:t>DNA tests (factor V Leiden, prothrombin G20210A) are unaffected and may be drawn anytime.</a:t>
+              <a:t>Adjust citrate for very high hematocrit.</a:t>
             </a:r>
             <a:endParaRPr lang="en-US" sz="1400" dirty="0"/>
           </a:p>
@@ -9165,7 +7383,7 @@
                 <a:ea typeface="Calibri" pitchFamily="34" charset="-122"/>
                 <a:cs typeface="Calibri" pitchFamily="34" charset="-120"/>
               </a:rPr>
-              <a:t>Defer functional assays until off anticoagulation and remote from the event — and only if results change management.</a:t>
+              <a:t>Exclude heparin contamination from line draws.</a:t>
             </a:r>
             <a:endParaRPr lang="en-US" sz="1400" dirty="0"/>
           </a:p>
@@ -9275,7 +7493,7 @@
                 <a:ea typeface="Calibri" pitchFamily="34" charset="-122"/>
                 <a:cs typeface="Calibri" pitchFamily="34" charset="-120"/>
               </a:rPr>
-              <a:t>Right test, wrong time = wrong answer; timing and current anticoagulation matter as much as the assay.</a:t>
+              <a:t>Coagulation testing is uniquely pre-analytic-sensitive — the correct citrate tube, fill, and ratio are essential for valid results.</a:t>
             </a:r>
             <a:endParaRPr lang="en-US" sz="1350" dirty="0"/>
           </a:p>
@@ -9559,7 +7777,7 @@
                 <a:ea typeface="Calibri" pitchFamily="34" charset="-122"/>
                 <a:cs typeface="Calibri" pitchFamily="34" charset="-120"/>
               </a:rPr>
-              <a:t>PT / aPTT</a:t>
+              <a:t>PT/aPTT</a:t>
             </a:r>
             <a:endParaRPr lang="en-US" sz="3600" dirty="0"/>
           </a:p>
@@ -9598,7 +7816,7 @@
                 <a:ea typeface="Calibri" pitchFamily="34" charset="-122"/>
                 <a:cs typeface="Calibri" pitchFamily="34" charset="-120"/>
               </a:rPr>
-              <a:t>Two screens that localize the defect along the cascade</a:t>
+              <a:t>Localize the defect to a pathway</a:t>
             </a:r>
             <a:endParaRPr lang="en-US" sz="1150" dirty="0"/>
           </a:p>
@@ -9666,7 +7884,7 @@
                 <a:ea typeface="Calibri" pitchFamily="34" charset="-122"/>
                 <a:cs typeface="Calibri" pitchFamily="34" charset="-120"/>
               </a:rPr>
-              <a:t>Mix</a:t>
+              <a:t>Mixing</a:t>
             </a:r>
             <a:endParaRPr lang="en-US" sz="3600" dirty="0"/>
           </a:p>
@@ -9705,7 +7923,7 @@
                 <a:ea typeface="Calibri" pitchFamily="34" charset="-122"/>
                 <a:cs typeface="Calibri" pitchFamily="34" charset="-120"/>
               </a:rPr>
-              <a:t>The 1:1 mix separates factor deficiency from an inhibitor</a:t>
+              <a:t>Corrects = deficiency; doesn’t = inhibitor</a:t>
             </a:r>
             <a:endParaRPr lang="en-US" sz="1150" dirty="0"/>
           </a:p>
@@ -9773,7 +7991,7 @@
                 <a:ea typeface="Calibri" pitchFamily="34" charset="-122"/>
                 <a:cs typeface="Calibri" pitchFamily="34" charset="-120"/>
               </a:rPr>
-              <a:t>Timing</a:t>
+              <a:t>Pre-analytic</a:t>
             </a:r>
             <a:endParaRPr lang="en-US" sz="3600" dirty="0"/>
           </a:p>
@@ -9812,7 +8030,7 @@
                 <a:ea typeface="Calibri" pitchFamily="34" charset="-122"/>
                 <a:cs typeface="Calibri" pitchFamily="34" charset="-120"/>
               </a:rPr>
-              <a:t>Thrombophilia testing is wrong if drawn at the wrong time</a:t>
+              <a:t>Citrate ratio and fill make or break coag results</a:t>
             </a:r>
             <a:endParaRPr lang="en-US" sz="1150" dirty="0"/>
           </a:p>
@@ -9883,7 +8101,7 @@
                 <a:ea typeface="Calibri" pitchFamily="34" charset="-122"/>
                 <a:cs typeface="Calibri" pitchFamily="34" charset="-120"/>
               </a:rPr>
-              <a:t>Coagulation is where preanalytics, assay design, and clinical context collide. A handful of screens — read in the right order — turn 'the PTT is high' into a specific, testable diagnosis.</a:t>
+              <a:t>Coagulation testing is logic on a pathway map: interpret PT and aPTT together, use mixing studies to separate deficiency from inhibitor, and respect the uniquely strict pre-analytics. Mixing-study interpretation follows the department’s teaching reference.</a:t>
             </a:r>
             <a:endParaRPr lang="en-US" sz="1450" dirty="0"/>
           </a:p>
@@ -9926,7 +8144,7 @@
                 <a:ea typeface="Calibri" pitchFamily="34" charset="-122"/>
                 <a:cs typeface="Calibri" pitchFamily="34" charset="-120"/>
               </a:rPr>
-              <a:t>Before chasing a prolonged result, exclude the artifacts: under-filled tube, heparin contamination, and high hematocrit.</a:t>
+              <a:t>Read PT and aPTT together to localize the defect, then mix to ask: deficiency or inhibitor?</a:t>
             </a:r>
             <a:endParaRPr lang="en-US" sz="1300" dirty="0"/>
           </a:p>
@@ -10184,7 +8402,7 @@
                 <a:ea typeface="Calibri" pitchFamily="34" charset="-122"/>
                 <a:cs typeface="Calibri" pitchFamily="34" charset="-120"/>
               </a:rPr>
-              <a:t>A prolonged aPTT does NOT correct on mixing and prolongs further after 1 h at 37°C. This indicates:</a:t>
+              <a:t>A prolonged aPTT that does NOT correct on 1:1 mixing indicates:</a:t>
             </a:r>
             <a:endParaRPr lang="en-US" sz="1450" dirty="0"/>
           </a:p>
@@ -10226,7 +8444,7 @@
                 <a:ea typeface="Calibri" pitchFamily="34" charset="-122"/>
                 <a:cs typeface="Calibri" pitchFamily="34" charset="-120"/>
               </a:rPr>
-              <a:t>A. Factor IX deficiency</a:t>
+              <a:t>A. A factor deficiency</a:t>
             </a:r>
             <a:endParaRPr lang="en-US" sz="1350" dirty="0"/>
           </a:p>
@@ -10246,7 +8464,7 @@
                 <a:ea typeface="Calibri" pitchFamily="34" charset="-122"/>
                 <a:cs typeface="Calibri" pitchFamily="34" charset="-120"/>
               </a:rPr>
-              <a:t>B. A time-dependent factor VIII inhibitor</a:t>
+              <a:t>B. An inhibitor</a:t>
             </a:r>
             <a:endParaRPr lang="en-US" sz="1350" dirty="0"/>
           </a:p>
@@ -10266,7 +8484,7 @@
                 <a:ea typeface="Calibri" pitchFamily="34" charset="-122"/>
                 <a:cs typeface="Calibri" pitchFamily="34" charset="-120"/>
               </a:rPr>
-              <a:t>C. Heparin contamination</a:t>
+              <a:t>C. Warfarin effect</a:t>
             </a:r>
             <a:endParaRPr lang="en-US" sz="1350" dirty="0"/>
           </a:p>
@@ -10286,7 +8504,7 @@
                 <a:ea typeface="Calibri" pitchFamily="34" charset="-122"/>
                 <a:cs typeface="Calibri" pitchFamily="34" charset="-120"/>
               </a:rPr>
-              <a:t>D. Vitamin K deficiency</a:t>
+              <a:t>D. Vitamin-K deficiency</a:t>
             </a:r>
             <a:endParaRPr lang="en-US" sz="1350" dirty="0"/>
           </a:p>
@@ -10306,7 +8524,7 @@
                 <a:ea typeface="Calibri" pitchFamily="34" charset="-122"/>
                 <a:cs typeface="Calibri" pitchFamily="34" charset="-120"/>
               </a:rPr>
-              <a:t>E. Von Willebrand disease</a:t>
+              <a:t>E. Factor VII deficiency</a:t>
             </a:r>
             <a:endParaRPr lang="en-US" sz="1350" dirty="0"/>
           </a:p>
@@ -10388,7 +8606,7 @@
                 <a:ea typeface="Calibri" pitchFamily="34" charset="-122"/>
                 <a:cs typeface="Calibri" pitchFamily="34" charset="-120"/>
               </a:rPr>
-              <a:t>B — Time-dependent factor VIII inhibitor</a:t>
+              <a:t>B — An inhibitor</a:t>
             </a:r>
             <a:endParaRPr lang="en-US" sz="1500" dirty="0"/>
           </a:p>
@@ -10430,7 +8648,7 @@
                 <a:ea typeface="Calibri" pitchFamily="34" charset="-122"/>
                 <a:cs typeface="Calibri" pitchFamily="34" charset="-120"/>
               </a:rPr>
-              <a:t>Non-correction indicates an inhibitor; additional prolongation after incubation is characteristic of a factor VIII inhibitor (acquired hemophilia).</a:t>
+              <a:t>Failure to correct indicates an inhibitor (lupus anticoagulant, specific factor inhibitor, or heparin); correction indicates deficiency.</a:t>
             </a:r>
             <a:endParaRPr lang="en-US" sz="1250" dirty="0"/>
           </a:p>
@@ -10688,7 +8906,7 @@
                 <a:ea typeface="Calibri" pitchFamily="34" charset="-122"/>
                 <a:cs typeface="Calibri" pitchFamily="34" charset="-120"/>
               </a:rPr>
-              <a:t>An asymptomatic patient has an isolated prolonged aPTT that corrects on mixing, with NO bleeding. The most likely deficiency is:</a:t>
+              <a:t>An isolated prolonged PT with a normal aPTT most suggests a deficiency of:</a:t>
             </a:r>
             <a:endParaRPr lang="en-US" sz="1450" dirty="0"/>
           </a:p>
@@ -10762,15 +8980,15 @@
               <a:buNone/>
             </a:pPr>
             <a:r>
-              <a:rPr lang="en-US" sz="1350" dirty="0">
-                <a:solidFill>
-                  <a:srgbClr val="33444F"/>
-                </a:solidFill>
-                <a:latin typeface="Calibri" pitchFamily="34" charset="0"/>
-                <a:ea typeface="Calibri" pitchFamily="34" charset="-122"/>
-                <a:cs typeface="Calibri" pitchFamily="34" charset="-120"/>
-              </a:rPr>
-              <a:t>C. Factor XI</a:t>
+              <a:rPr lang="en-US" sz="1350" b="1" dirty="0">
+                <a:solidFill>
+                  <a:srgbClr val="8E1622"/>
+                </a:solidFill>
+                <a:latin typeface="Calibri" pitchFamily="34" charset="0"/>
+                <a:ea typeface="Calibri" pitchFamily="34" charset="-122"/>
+                <a:cs typeface="Calibri" pitchFamily="34" charset="-120"/>
+              </a:rPr>
+              <a:t>C. Factor VII</a:t>
             </a:r>
             <a:endParaRPr lang="en-US" sz="1350" dirty="0"/>
           </a:p>
@@ -10782,9 +9000,9 @@
               <a:buNone/>
             </a:pPr>
             <a:r>
-              <a:rPr lang="en-US" sz="1350" b="1" dirty="0">
-                <a:solidFill>
-                  <a:srgbClr val="8E1622"/>
+              <a:rPr lang="en-US" sz="1350" dirty="0">
+                <a:solidFill>
+                  <a:srgbClr val="33444F"/>
                 </a:solidFill>
                 <a:latin typeface="Calibri" pitchFamily="34" charset="0"/>
                 <a:ea typeface="Calibri" pitchFamily="34" charset="-122"/>
@@ -10810,7 +9028,7 @@
                 <a:ea typeface="Calibri" pitchFamily="34" charset="-122"/>
                 <a:cs typeface="Calibri" pitchFamily="34" charset="-120"/>
               </a:rPr>
-              <a:t>E. Von Willebrand factor</a:t>
+              <a:t>E. Fibrinogen</a:t>
             </a:r>
             <a:endParaRPr lang="en-US" sz="1350" dirty="0"/>
           </a:p>
@@ -10892,7 +9110,7 @@
                 <a:ea typeface="Calibri" pitchFamily="34" charset="-122"/>
                 <a:cs typeface="Calibri" pitchFamily="34" charset="-120"/>
               </a:rPr>
-              <a:t>D — Factor XII</a:t>
+              <a:t>C — Factor VII</a:t>
             </a:r>
             <a:endParaRPr lang="en-US" sz="1500" dirty="0"/>
           </a:p>
@@ -10934,7 +9152,7 @@
                 <a:ea typeface="Calibri" pitchFamily="34" charset="-122"/>
                 <a:cs typeface="Calibri" pitchFamily="34" charset="-120"/>
               </a:rPr>
-              <a:t>Factor XII deficiency prolongs the aPTT and corrects on mixing but does not cause bleeding.</a:t>
+              <a:t>Factor VII is unique to the extrinsic pathway and has the shortest half-life, so the PT prolongs first.</a:t>
             </a:r>
             <a:endParaRPr lang="en-US" sz="1250" dirty="0"/>
           </a:p>
@@ -11192,7 +9410,7 @@
                 <a:ea typeface="Calibri" pitchFamily="34" charset="-122"/>
                 <a:cs typeface="Calibri" pitchFamily="34" charset="-120"/>
               </a:rPr>
-              <a:t>Which thrombophilia test is valid regardless of acute thrombosis or current anticoagulation?</a:t>
+              <a:t>The correct specimen for routine coagulation testing is:</a:t>
             </a:r>
             <a:endParaRPr lang="en-US" sz="1450" dirty="0"/>
           </a:p>
@@ -11234,7 +9452,7 @@
                 <a:ea typeface="Calibri" pitchFamily="34" charset="-122"/>
                 <a:cs typeface="Calibri" pitchFamily="34" charset="-120"/>
               </a:rPr>
-              <a:t>A. Antithrombin activity</a:t>
+              <a:t>A. EDTA, fully filled</a:t>
             </a:r>
             <a:endParaRPr lang="en-US" sz="1350" dirty="0"/>
           </a:p>
@@ -11246,15 +9464,15 @@
               <a:buNone/>
             </a:pPr>
             <a:r>
-              <a:rPr lang="en-US" sz="1350" dirty="0">
-                <a:solidFill>
-                  <a:srgbClr val="33444F"/>
-                </a:solidFill>
-                <a:latin typeface="Calibri" pitchFamily="34" charset="0"/>
-                <a:ea typeface="Calibri" pitchFamily="34" charset="-122"/>
-                <a:cs typeface="Calibri" pitchFamily="34" charset="-120"/>
-              </a:rPr>
-              <a:t>B. Protein C activity</a:t>
+              <a:rPr lang="en-US" sz="1350" b="1" dirty="0">
+                <a:solidFill>
+                  <a:srgbClr val="8E1622"/>
+                </a:solidFill>
+                <a:latin typeface="Calibri" pitchFamily="34" charset="0"/>
+                <a:ea typeface="Calibri" pitchFamily="34" charset="-122"/>
+                <a:cs typeface="Calibri" pitchFamily="34" charset="-120"/>
+              </a:rPr>
+              <a:t>B. 3.2% sodium citrate at a 9:1 ratio, properly filled</a:t>
             </a:r>
             <a:endParaRPr lang="en-US" sz="1350" dirty="0"/>
           </a:p>
@@ -11274,7 +9492,7 @@
                 <a:ea typeface="Calibri" pitchFamily="34" charset="-122"/>
                 <a:cs typeface="Calibri" pitchFamily="34" charset="-120"/>
               </a:rPr>
-              <a:t>C. Protein S activity</a:t>
+              <a:t>C. Heparinized plasma</a:t>
             </a:r>
             <a:endParaRPr lang="en-US" sz="1350" dirty="0"/>
           </a:p>
@@ -11286,15 +9504,15 @@
               <a:buNone/>
             </a:pPr>
             <a:r>
-              <a:rPr lang="en-US" sz="1350" b="1" dirty="0">
-                <a:solidFill>
-                  <a:srgbClr val="8E1622"/>
-                </a:solidFill>
-                <a:latin typeface="Calibri" pitchFamily="34" charset="0"/>
-                <a:ea typeface="Calibri" pitchFamily="34" charset="-122"/>
-                <a:cs typeface="Calibri" pitchFamily="34" charset="-120"/>
-              </a:rPr>
-              <a:t>D. Factor V Leiden (DNA)</a:t>
+              <a:rPr lang="en-US" sz="1350" dirty="0">
+                <a:solidFill>
+                  <a:srgbClr val="33444F"/>
+                </a:solidFill>
+                <a:latin typeface="Calibri" pitchFamily="34" charset="0"/>
+                <a:ea typeface="Calibri" pitchFamily="34" charset="-122"/>
+                <a:cs typeface="Calibri" pitchFamily="34" charset="-120"/>
+              </a:rPr>
+              <a:t>D. Serum</a:t>
             </a:r>
             <a:endParaRPr lang="en-US" sz="1350" dirty="0"/>
           </a:p>
@@ -11314,7 +9532,7 @@
                 <a:ea typeface="Calibri" pitchFamily="34" charset="-122"/>
                 <a:cs typeface="Calibri" pitchFamily="34" charset="-120"/>
               </a:rPr>
-              <a:t>E. Lupus anticoagulant</a:t>
+              <a:t>E. Any anticoagulant</a:t>
             </a:r>
             <a:endParaRPr lang="en-US" sz="1350" dirty="0"/>
           </a:p>
@@ -11396,7 +9614,7 @@
                 <a:ea typeface="Calibri" pitchFamily="34" charset="-122"/>
                 <a:cs typeface="Calibri" pitchFamily="34" charset="-120"/>
               </a:rPr>
-              <a:t>D — Factor V Leiden (DNA)</a:t>
+              <a:t>B — 3.2% citrate, 9:1, properly filled</a:t>
             </a:r>
             <a:endParaRPr lang="en-US" sz="1500" dirty="0"/>
           </a:p>
@@ -11438,7 +9656,7 @@
                 <a:ea typeface="Calibri" pitchFamily="34" charset="-122"/>
                 <a:cs typeface="Calibri" pitchFamily="34" charset="-120"/>
               </a:rPr>
-              <a:t>DNA-based tests are unaffected by timing or anticoagulation; functional assays and the lupus anticoagulant are confounded by acute clot and anticoagulants.</a:t>
+              <a:t>Citrate at the correct ratio and fill preserves the factors; under-filling or wrong tubes invalidate results.</a:t>
             </a:r>
             <a:endParaRPr lang="en-US" sz="1250" dirty="0"/>
           </a:p>
@@ -11561,6 +9779,510 @@
 <file path=ppt/slides/slide23.xml><?xml version="1.0" encoding="utf-8"?>
 <p:sld xmlns:a="http://schemas.openxmlformats.org/drawingml/2006/main" xmlns:r="http://schemas.openxmlformats.org/officeDocument/2006/relationships" xmlns:p="http://schemas.openxmlformats.org/presentationml/2006/main">
   <p:cSld name="Slide 23">
+    <p:bg>
+      <p:bgPr>
+        <a:solidFill>
+          <a:srgbClr val="FFFFFF"/>
+        </a:solidFill>
+      </p:bgPr>
+    </p:bg>
+    <p:spTree>
+      <p:nvGrpSpPr>
+        <p:cNvPr id="1" name=""/>
+        <p:cNvGrpSpPr/>
+        <p:nvPr/>
+      </p:nvGrpSpPr>
+      <p:grpSpPr>
+        <a:xfrm>
+          <a:off x="0" y="0"/>
+          <a:ext cx="0" cy="0"/>
+          <a:chOff x="0" y="0"/>
+          <a:chExt cx="0" cy="0"/>
+        </a:xfrm>
+      </p:grpSpPr>
+      <p:sp>
+        <p:nvSpPr>
+          <p:cNvPr id="2" name="Text 0"/>
+          <p:cNvSpPr/>
+          <p:nvPr/>
+        </p:nvSpPr>
+        <p:spPr>
+          <a:xfrm>
+            <a:off x="566928" y="329184"/>
+            <a:ext cx="10515600" cy="310896"/>
+          </a:xfrm>
+          <a:prstGeom prst="rect">
+            <a:avLst/>
+          </a:prstGeom>
+          <a:noFill/>
+          <a:ln/>
+        </p:spPr>
+        <p:txBody>
+          <a:bodyPr wrap="square" lIns="0" tIns="0" rIns="0" bIns="0" rtlCol="0" anchor="ctr"/>
+          <a:lstStyle/>
+          <a:p>
+            <a:pPr algn="l" indent="0" marL="0">
+              <a:buNone/>
+            </a:pPr>
+            <a:r>
+              <a:rPr lang="en-US" sz="1100" b="1" spc="150" kern="0" dirty="0">
+                <a:solidFill>
+                  <a:srgbClr val="C62133"/>
+                </a:solidFill>
+                <a:latin typeface="Calibri" pitchFamily="34" charset="0"/>
+                <a:ea typeface="Calibri" pitchFamily="34" charset="-122"/>
+                <a:cs typeface="Calibri" pitchFamily="34" charset="-120"/>
+              </a:rPr>
+              <a:t>HEMATOLOGY &amp; COAGULATION   ·   BOARD REVIEW  ·  Q4</a:t>
+            </a:r>
+            <a:endParaRPr lang="en-US" sz="1100" dirty="0"/>
+          </a:p>
+        </p:txBody>
+      </p:sp>
+      <p:sp>
+        <p:nvSpPr>
+          <p:cNvPr id="3" name="Text 1"/>
+          <p:cNvSpPr/>
+          <p:nvPr/>
+        </p:nvSpPr>
+        <p:spPr>
+          <a:xfrm>
+            <a:off x="566928" y="713232"/>
+            <a:ext cx="11064240" cy="749808"/>
+          </a:xfrm>
+          <a:prstGeom prst="rect">
+            <a:avLst/>
+          </a:prstGeom>
+          <a:noFill/>
+          <a:ln/>
+        </p:spPr>
+        <p:txBody>
+          <a:bodyPr wrap="square" lIns="0" tIns="0" rIns="0" bIns="0" rtlCol="0" anchor="ctr"/>
+          <a:lstStyle/>
+          <a:p>
+            <a:pPr algn="l" indent="0" marL="0">
+              <a:buNone/>
+            </a:pPr>
+            <a:r>
+              <a:rPr lang="en-US" sz="2600" b="1" dirty="0">
+                <a:solidFill>
+                  <a:srgbClr val="0E3A5F"/>
+                </a:solidFill>
+                <a:latin typeface="Calibri" pitchFamily="34" charset="0"/>
+                <a:ea typeface="Calibri" pitchFamily="34" charset="-122"/>
+                <a:cs typeface="Calibri" pitchFamily="34" charset="-120"/>
+              </a:rPr>
+              <a:t>Board-Style Review</a:t>
+            </a:r>
+            <a:endParaRPr lang="en-US" sz="2600" dirty="0"/>
+          </a:p>
+        </p:txBody>
+      </p:sp>
+      <p:sp>
+        <p:nvSpPr>
+          <p:cNvPr id="4" name="Text 2"/>
+          <p:cNvSpPr/>
+          <p:nvPr/>
+        </p:nvSpPr>
+        <p:spPr>
+          <a:xfrm>
+            <a:off x="566928" y="1417320"/>
+            <a:ext cx="11057839" cy="914400"/>
+          </a:xfrm>
+          <a:prstGeom prst="rect">
+            <a:avLst/>
+          </a:prstGeom>
+          <a:noFill/>
+          <a:ln/>
+        </p:spPr>
+        <p:txBody>
+          <a:bodyPr wrap="square" lIns="0" tIns="0" rIns="0" bIns="0" rtlCol="0" anchor="t"/>
+          <a:lstStyle/>
+          <a:p>
+            <a:pPr algn="l" indent="0" marL="0">
+              <a:lnSpc>
+                <a:spcPct val="105000"/>
+              </a:lnSpc>
+              <a:buNone/>
+            </a:pPr>
+            <a:r>
+              <a:rPr lang="en-US" sz="1450" b="1" dirty="0">
+                <a:solidFill>
+                  <a:srgbClr val="1B2A38"/>
+                </a:solidFill>
+                <a:latin typeface="Calibri" pitchFamily="34" charset="0"/>
+                <a:ea typeface="Calibri" pitchFamily="34" charset="-122"/>
+                <a:cs typeface="Calibri" pitchFamily="34" charset="-120"/>
+              </a:rPr>
+              <a:t>Which test best fits a screen with high negative predictive value for venous thromboembolism?</a:t>
+            </a:r>
+            <a:endParaRPr lang="en-US" sz="1450" dirty="0"/>
+          </a:p>
+        </p:txBody>
+      </p:sp>
+      <p:sp>
+        <p:nvSpPr>
+          <p:cNvPr id="5" name="Text 3"/>
+          <p:cNvSpPr/>
+          <p:nvPr/>
+        </p:nvSpPr>
+        <p:spPr>
+          <a:xfrm>
+            <a:off x="658368" y="2395728"/>
+            <a:ext cx="6192390" cy="3017520"/>
+          </a:xfrm>
+          <a:prstGeom prst="rect">
+            <a:avLst/>
+          </a:prstGeom>
+          <a:noFill/>
+          <a:ln/>
+        </p:spPr>
+        <p:txBody>
+          <a:bodyPr wrap="square" lIns="0" tIns="0" rIns="0" bIns="0" rtlCol="0" anchor="t"/>
+          <a:lstStyle/>
+          <a:p>
+            <a:pPr algn="l" indent="0" marL="0">
+              <a:spcAft>
+                <a:spcPts val="600"/>
+              </a:spcAft>
+              <a:buNone/>
+            </a:pPr>
+            <a:r>
+              <a:rPr lang="en-US" sz="1350" dirty="0">
+                <a:solidFill>
+                  <a:srgbClr val="33444F"/>
+                </a:solidFill>
+                <a:latin typeface="Calibri" pitchFamily="34" charset="0"/>
+                <a:ea typeface="Calibri" pitchFamily="34" charset="-122"/>
+                <a:cs typeface="Calibri" pitchFamily="34" charset="-120"/>
+              </a:rPr>
+              <a:t>A. Fibrinogen</a:t>
+            </a:r>
+            <a:endParaRPr lang="en-US" sz="1350" dirty="0"/>
+          </a:p>
+          <a:p>
+            <a:pPr algn="l" indent="0" marL="0">
+              <a:spcAft>
+                <a:spcPts val="600"/>
+              </a:spcAft>
+              <a:buNone/>
+            </a:pPr>
+            <a:r>
+              <a:rPr lang="en-US" sz="1350" b="1" dirty="0">
+                <a:solidFill>
+                  <a:srgbClr val="8E1622"/>
+                </a:solidFill>
+                <a:latin typeface="Calibri" pitchFamily="34" charset="0"/>
+                <a:ea typeface="Calibri" pitchFamily="34" charset="-122"/>
+                <a:cs typeface="Calibri" pitchFamily="34" charset="-120"/>
+              </a:rPr>
+              <a:t>B. D-dimer</a:t>
+            </a:r>
+            <a:endParaRPr lang="en-US" sz="1350" dirty="0"/>
+          </a:p>
+          <a:p>
+            <a:pPr algn="l" indent="0" marL="0">
+              <a:spcAft>
+                <a:spcPts val="600"/>
+              </a:spcAft>
+              <a:buNone/>
+            </a:pPr>
+            <a:r>
+              <a:rPr lang="en-US" sz="1350" dirty="0">
+                <a:solidFill>
+                  <a:srgbClr val="33444F"/>
+                </a:solidFill>
+                <a:latin typeface="Calibri" pitchFamily="34" charset="0"/>
+                <a:ea typeface="Calibri" pitchFamily="34" charset="-122"/>
+                <a:cs typeface="Calibri" pitchFamily="34" charset="-120"/>
+              </a:rPr>
+              <a:t>C. PT</a:t>
+            </a:r>
+            <a:endParaRPr lang="en-US" sz="1350" dirty="0"/>
+          </a:p>
+          <a:p>
+            <a:pPr algn="l" indent="0" marL="0">
+              <a:spcAft>
+                <a:spcPts val="600"/>
+              </a:spcAft>
+              <a:buNone/>
+            </a:pPr>
+            <a:r>
+              <a:rPr lang="en-US" sz="1350" dirty="0">
+                <a:solidFill>
+                  <a:srgbClr val="33444F"/>
+                </a:solidFill>
+                <a:latin typeface="Calibri" pitchFamily="34" charset="0"/>
+                <a:ea typeface="Calibri" pitchFamily="34" charset="-122"/>
+                <a:cs typeface="Calibri" pitchFamily="34" charset="-120"/>
+              </a:rPr>
+              <a:t>D. aPTT</a:t>
+            </a:r>
+            <a:endParaRPr lang="en-US" sz="1350" dirty="0"/>
+          </a:p>
+          <a:p>
+            <a:pPr algn="l" indent="0" marL="0">
+              <a:spcAft>
+                <a:spcPts val="600"/>
+              </a:spcAft>
+              <a:buNone/>
+            </a:pPr>
+            <a:r>
+              <a:rPr lang="en-US" sz="1350" dirty="0">
+                <a:solidFill>
+                  <a:srgbClr val="33444F"/>
+                </a:solidFill>
+                <a:latin typeface="Calibri" pitchFamily="34" charset="0"/>
+                <a:ea typeface="Calibri" pitchFamily="34" charset="-122"/>
+                <a:cs typeface="Calibri" pitchFamily="34" charset="-120"/>
+              </a:rPr>
+              <a:t>E. Factor VIII level</a:t>
+            </a:r>
+            <a:endParaRPr lang="en-US" sz="1350" dirty="0"/>
+          </a:p>
+        </p:txBody>
+      </p:sp>
+      <p:sp>
+        <p:nvSpPr>
+          <p:cNvPr id="6" name="Shape 4"/>
+          <p:cNvSpPr/>
+          <p:nvPr/>
+        </p:nvSpPr>
+        <p:spPr>
+          <a:xfrm>
+            <a:off x="7201632" y="2395728"/>
+            <a:ext cx="4423136" cy="3246120"/>
+          </a:xfrm>
+          <a:prstGeom prst="roundRect">
+            <a:avLst>
+              <a:gd name="adj" fmla="val 2535"/>
+            </a:avLst>
+          </a:prstGeom>
+          <a:solidFill>
+            <a:srgbClr val="FBEAEC"/>
+          </a:solidFill>
+          <a:ln/>
+          <a:effectLst>
+            <a:outerShdw sx="100000" sy="100000" kx="0" ky="0" algn="bl" rotWithShape="0" blurRad="88900" dist="25400" dir="5400000">
+              <a:srgbClr val="22303C">
+                <a:alpha val="12000"/>
+              </a:srgbClr>
+            </a:outerShdw>
+          </a:effectLst>
+        </p:spPr>
+      </p:sp>
+      <p:sp>
+        <p:nvSpPr>
+          <p:cNvPr id="7" name="Text 5"/>
+          <p:cNvSpPr/>
+          <p:nvPr/>
+        </p:nvSpPr>
+        <p:spPr>
+          <a:xfrm>
+            <a:off x="7439376" y="2578608"/>
+            <a:ext cx="3965936" cy="457200"/>
+          </a:xfrm>
+          <a:prstGeom prst="rect">
+            <a:avLst/>
+          </a:prstGeom>
+          <a:noFill/>
+          <a:ln/>
+        </p:spPr>
+        <p:txBody>
+          <a:bodyPr wrap="square" lIns="0" tIns="0" rIns="0" bIns="0" rtlCol="0" anchor="ctr"/>
+          <a:lstStyle/>
+          <a:p>
+            <a:pPr indent="0" marL="0">
+              <a:buNone/>
+            </a:pPr>
+            <a:r>
+              <a:rPr lang="en-US" sz="1500" b="1" dirty="0">
+                <a:solidFill>
+                  <a:srgbClr val="C62133"/>
+                </a:solidFill>
+                <a:latin typeface="Calibri" pitchFamily="34" charset="0"/>
+                <a:ea typeface="Calibri" pitchFamily="34" charset="-122"/>
+                <a:cs typeface="Calibri" pitchFamily="34" charset="-120"/>
+              </a:rPr>
+              <a:t>ANSWER  </a:t>
+            </a:r>
+            <a:pPr indent="0" marL="0">
+              <a:buNone/>
+            </a:pPr>
+            <a:r>
+              <a:rPr lang="en-US" sz="1500" b="1" dirty="0">
+                <a:solidFill>
+                  <a:srgbClr val="1B2A38"/>
+                </a:solidFill>
+                <a:latin typeface="Calibri" pitchFamily="34" charset="0"/>
+                <a:ea typeface="Calibri" pitchFamily="34" charset="-122"/>
+                <a:cs typeface="Calibri" pitchFamily="34" charset="-120"/>
+              </a:rPr>
+              <a:t>B — D-dimer</a:t>
+            </a:r>
+            <a:endParaRPr lang="en-US" sz="1500" dirty="0"/>
+          </a:p>
+        </p:txBody>
+      </p:sp>
+      <p:sp>
+        <p:nvSpPr>
+          <p:cNvPr id="8" name="Text 6"/>
+          <p:cNvSpPr/>
+          <p:nvPr/>
+        </p:nvSpPr>
+        <p:spPr>
+          <a:xfrm>
+            <a:off x="7439376" y="3127248"/>
+            <a:ext cx="3947648" cy="2377440"/>
+          </a:xfrm>
+          <a:prstGeom prst="rect">
+            <a:avLst/>
+          </a:prstGeom>
+          <a:noFill/>
+          <a:ln/>
+        </p:spPr>
+        <p:txBody>
+          <a:bodyPr wrap="square" lIns="0" tIns="0" rIns="0" bIns="0" rtlCol="0" anchor="t"/>
+          <a:lstStyle/>
+          <a:p>
+            <a:pPr algn="l" indent="0" marL="0">
+              <a:lnSpc>
+                <a:spcPct val="108000"/>
+              </a:lnSpc>
+              <a:buNone/>
+            </a:pPr>
+            <a:r>
+              <a:rPr lang="en-US" sz="1250" dirty="0">
+                <a:solidFill>
+                  <a:srgbClr val="33444F"/>
+                </a:solidFill>
+                <a:latin typeface="Calibri" pitchFamily="34" charset="0"/>
+                <a:ea typeface="Calibri" pitchFamily="34" charset="-122"/>
+                <a:cs typeface="Calibri" pitchFamily="34" charset="-120"/>
+              </a:rPr>
+              <a:t>A normal D-dimer helps exclude VTE in low/intermediate pretest probability; it is not specific enough to rule in.</a:t>
+            </a:r>
+            <a:endParaRPr lang="en-US" sz="1250" dirty="0"/>
+          </a:p>
+        </p:txBody>
+      </p:sp>
+      <p:sp>
+        <p:nvSpPr>
+          <p:cNvPr id="9" name="Text 7"/>
+          <p:cNvSpPr/>
+          <p:nvPr/>
+        </p:nvSpPr>
+        <p:spPr>
+          <a:xfrm>
+            <a:off x="566928" y="6473952"/>
+            <a:ext cx="7772400" cy="274320"/>
+          </a:xfrm>
+          <a:prstGeom prst="rect">
+            <a:avLst/>
+          </a:prstGeom>
+          <a:noFill/>
+          <a:ln/>
+        </p:spPr>
+        <p:txBody>
+          <a:bodyPr wrap="square" lIns="0" tIns="0" rIns="0" bIns="0" rtlCol="0" anchor="ctr"/>
+          <a:lstStyle/>
+          <a:p>
+            <a:pPr algn="l" indent="0" marL="0">
+              <a:buNone/>
+            </a:pPr>
+            <a:r>
+              <a:rPr lang="en-US" sz="850" dirty="0">
+                <a:solidFill>
+                  <a:srgbClr val="9AA8B4"/>
+                </a:solidFill>
+                <a:latin typeface="Calibri" pitchFamily="34" charset="0"/>
+                <a:ea typeface="Calibri" pitchFamily="34" charset="-122"/>
+                <a:cs typeface="Calibri" pitchFamily="34" charset="-120"/>
+              </a:rPr>
+              <a:t>Makassed General Hospital  ·  Department of Laboratory Medicine</a:t>
+            </a:r>
+            <a:endParaRPr lang="en-US" sz="850" dirty="0"/>
+          </a:p>
+        </p:txBody>
+      </p:sp>
+      <p:sp>
+        <p:nvSpPr>
+          <p:cNvPr id="10" name="Text 8"/>
+          <p:cNvSpPr/>
+          <p:nvPr/>
+        </p:nvSpPr>
+        <p:spPr>
+          <a:xfrm>
+            <a:off x="9814255" y="6473952"/>
+            <a:ext cx="1828800" cy="274320"/>
+          </a:xfrm>
+          <a:prstGeom prst="rect">
+            <a:avLst/>
+          </a:prstGeom>
+          <a:noFill/>
+          <a:ln/>
+        </p:spPr>
+        <p:txBody>
+          <a:bodyPr wrap="square" lIns="0" tIns="0" rIns="0" bIns="0" rtlCol="0" anchor="ctr"/>
+          <a:lstStyle/>
+          <a:p>
+            <a:pPr algn="r" indent="0" marL="0">
+              <a:buNone/>
+            </a:pPr>
+            <a:r>
+              <a:rPr lang="en-US" sz="850" dirty="0">
+                <a:solidFill>
+                  <a:srgbClr val="9AA8B4"/>
+                </a:solidFill>
+                <a:latin typeface="Calibri" pitchFamily="34" charset="0"/>
+                <a:ea typeface="Calibri" pitchFamily="34" charset="-122"/>
+                <a:cs typeface="Calibri" pitchFamily="34" charset="-120"/>
+              </a:rPr>
+              <a:t>CP Lecture Series</a:t>
+            </a:r>
+            <a:pPr algn="r" indent="0" marL="0">
+              <a:buNone/>
+            </a:pPr>
+            <a:r>
+              <a:rPr lang="en-US" sz="850" dirty="0">
+                <a:solidFill>
+                  <a:srgbClr val="DCE4EC"/>
+                </a:solidFill>
+                <a:latin typeface="Calibri" pitchFamily="34" charset="0"/>
+                <a:ea typeface="Calibri" pitchFamily="34" charset="-122"/>
+                <a:cs typeface="Calibri" pitchFamily="34" charset="-120"/>
+              </a:rPr>
+              <a:t>   ·   </a:t>
+            </a:r>
+            <a:pPr algn="r" indent="0" marL="0">
+              <a:buNone/>
+            </a:pPr>
+            <a:r>
+              <a:rPr lang="en-US" sz="850" b="1" dirty="0">
+                <a:solidFill>
+                  <a:srgbClr val="C62133"/>
+                </a:solidFill>
+                <a:latin typeface="Calibri" pitchFamily="34" charset="0"/>
+                <a:ea typeface="Calibri" pitchFamily="34" charset="-122"/>
+                <a:cs typeface="Calibri" pitchFamily="34" charset="-120"/>
+              </a:rPr>
+              <a:t>20</a:t>
+            </a:r>
+            <a:endParaRPr lang="en-US" sz="850" dirty="0"/>
+          </a:p>
+        </p:txBody>
+      </p:sp>
+    </p:spTree>
+  </p:cSld>
+  <p:clrMapOvr>
+    <a:masterClrMapping/>
+  </p:clrMapOvr>
+</p:sld>
+</file>
+
+<file path=ppt/slides/slide24.xml><?xml version="1.0" encoding="utf-8"?>
+<p:sld xmlns:a="http://schemas.openxmlformats.org/drawingml/2006/main" xmlns:r="http://schemas.openxmlformats.org/officeDocument/2006/relationships" xmlns:p="http://schemas.openxmlformats.org/presentationml/2006/main">
+  <p:cSld name="Slide 24">
     <p:bg>
       <p:bgPr>
         <a:solidFill>
@@ -11781,7 +10503,7 @@
                 <a:ea typeface="Calibri" pitchFamily="34" charset="-122"/>
                 <a:cs typeface="Calibri" pitchFamily="34" charset="-120"/>
               </a:rPr>
-              <a:t>PT covers extrinsic + common; aPTT covers intrinsic + common — the pattern localizes the defect.</a:t>
+              <a:t>Read PT and aPTT together to localize the defect: PT = extrinsic/common, aPTT = intrinsic/common.</a:t>
             </a:r>
             <a:endParaRPr lang="en-US" sz="1350" dirty="0"/>
           </a:p>
@@ -11908,7 +10630,7 @@
                 <a:ea typeface="Calibri" pitchFamily="34" charset="-122"/>
                 <a:cs typeface="Calibri" pitchFamily="34" charset="-120"/>
               </a:rPr>
-              <a:t>Exclude preanalytic causes first: tube under-fill, heparin contamination, high hematocrit.</a:t>
+              <a:t>Mixing study: correction = factor deficiency; failure to correct = inhibitor (incubated mix unmasks factor VIII inhibitors).</a:t>
             </a:r>
             <a:endParaRPr lang="en-US" sz="1350" dirty="0"/>
           </a:p>
@@ -12035,7 +10757,7 @@
                 <a:ea typeface="Calibri" pitchFamily="34" charset="-122"/>
                 <a:cs typeface="Calibri" pitchFamily="34" charset="-120"/>
               </a:rPr>
-              <a:t>Mixing study: corrects → factor deficiency; doesn’t correct → inhibitor; incubate for a factor VIII inhibitor.</a:t>
+              <a:t>Know the patterns: isolated ↑PT → factor VII; isolated ↑aPTT → hemophilia/heparin/lupus anticoagulant; both ↑ → common pathway/DIC/liver.</a:t>
             </a:r>
             <a:endParaRPr lang="en-US" sz="1350" dirty="0"/>
           </a:p>
@@ -12162,7 +10884,7 @@
                 <a:ea typeface="Calibri" pitchFamily="34" charset="-122"/>
                 <a:cs typeface="Calibri" pitchFamily="34" charset="-120"/>
               </a:rPr>
-              <a:t>Lupus anticoagulant causes a non-correcting aPTT and thrombosis (not bleeding); confirm phospholipid dependence.</a:t>
+              <a:t>Von Willebrand disease (often normal screens) is the commonest inherited bleeding disorder; D-dimer rules out, not in, VTE.</a:t>
             </a:r>
             <a:endParaRPr lang="en-US" sz="1350" dirty="0"/>
           </a:p>
@@ -12289,7 +11011,7 @@
                 <a:ea typeface="Calibri" pitchFamily="34" charset="-122"/>
                 <a:cs typeface="Calibri" pitchFamily="34" charset="-120"/>
               </a:rPr>
-              <a:t>Thrombophilia: DNA tests anytime; defer functional assays off anticoagulation and remote from the acute clot.</a:t>
+              <a:t>Respect coagulation pre-analytics: correct 3.2% citrate tube, 9:1 ratio, proper fill, hematocrit correction, and no heparin contamination.</a:t>
             </a:r>
             <a:endParaRPr lang="en-US" sz="1350" dirty="0"/>
           </a:p>
@@ -12367,7 +11089,7 @@
                 <a:ea typeface="Calibri" pitchFamily="34" charset="-122"/>
                 <a:cs typeface="Calibri" pitchFamily="34" charset="-120"/>
               </a:rPr>
-              <a:t>20</a:t>
+              <a:t>21</a:t>
             </a:r>
             <a:endParaRPr lang="en-US" sz="850" dirty="0"/>
           </a:p>
@@ -12381,9 +11103,9 @@
 </p:sld>
 </file>
 
-<file path=ppt/slides/slide24.xml><?xml version="1.0" encoding="utf-8"?>
+<file path=ppt/slides/slide25.xml><?xml version="1.0" encoding="utf-8"?>
 <p:sld xmlns:a="http://schemas.openxmlformats.org/drawingml/2006/main" xmlns:r="http://schemas.openxmlformats.org/officeDocument/2006/relationships" xmlns:p="http://schemas.openxmlformats.org/presentationml/2006/main">
-  <p:cSld name="Slide 24">
+  <p:cSld name="Slide 25">
     <p:bg>
       <p:bgPr>
         <a:solidFill>
@@ -12519,7 +11241,7 @@
                 <a:ea typeface="Calibri" pitchFamily="34" charset="-122"/>
                 <a:cs typeface="Calibri" pitchFamily="34" charset="-120"/>
               </a:rPr>
-              <a:t>1.   Miller CH. Mixing Studies. In: Transfusion Medicine and Hemostasis, 3rd ed. Elsevier, 2019.</a:t>
+              <a:t>1.   Marques MB, Fritsma GA. Quick Guide to Coagulation Testing.</a:t>
             </a:r>
             <a:endParaRPr lang="en-US" sz="1150" dirty="0"/>
           </a:p>
@@ -12539,7 +11261,7 @@
                 <a:ea typeface="Calibri" pitchFamily="34" charset="-122"/>
                 <a:cs typeface="Calibri" pitchFamily="34" charset="-120"/>
               </a:rPr>
-              <a:t>2.   CLSI H21: Collection and processing of specimens for coagulation testing.</a:t>
+              <a:t>2.   Transfusion Medicine and Hemostasis, Section 2: Hemostasis — mixing studies (department teaching reference).</a:t>
             </a:r>
             <a:endParaRPr lang="en-US" sz="1150" dirty="0"/>
           </a:p>
@@ -12559,7 +11281,7 @@
                 <a:ea typeface="Calibri" pitchFamily="34" charset="-122"/>
                 <a:cs typeface="Calibri" pitchFamily="34" charset="-120"/>
               </a:rPr>
-              <a:t>3.   Moore GW, et al. Guidelines on lupus anticoagulant testing (ISTH/CLSI).</a:t>
+              <a:t>3.   CLSI H21: Collection, Transport, and Processing of Blood Specimens for Coagulation Testing.</a:t>
             </a:r>
             <a:endParaRPr lang="en-US" sz="1150" dirty="0"/>
           </a:p>
@@ -12579,7 +11301,7 @@
                 <a:ea typeface="Calibri" pitchFamily="34" charset="-122"/>
                 <a:cs typeface="Calibri" pitchFamily="34" charset="-120"/>
               </a:rPr>
-              <a:t>4.   Marlar RA, et al. Laboratory evaluation of thrombophilia (recommendations).</a:t>
+              <a:t>4.   Hoffman R, et al. Hematology: Basic Principles and Practice.</a:t>
             </a:r>
             <a:endParaRPr lang="en-US" sz="1150" dirty="0"/>
           </a:p>
@@ -12685,7 +11407,7 @@
                 <a:ea typeface="Calibri" pitchFamily="34" charset="-122"/>
                 <a:cs typeface="Calibri" pitchFamily="34" charset="-120"/>
               </a:rPr>
-              <a:t>21</a:t>
+              <a:t>22</a:t>
             </a:r>
             <a:endParaRPr lang="en-US" sz="850" dirty="0"/>
           </a:p>
@@ -12929,7 +11651,7 @@
                 <a:ea typeface="Calibri" pitchFamily="34" charset="-122"/>
                 <a:cs typeface="Calibri" pitchFamily="34" charset="-120"/>
               </a:rPr>
-              <a:t>Map PT, aPTT, fibrinogen, and D-dimer onto the coagulation cascade.</a:t>
+              <a:t>Describe the coagulation cascade as PT and aPTT pathways.</a:t>
             </a:r>
             <a:endParaRPr lang="en-US" sz="1350" dirty="0"/>
           </a:p>
@@ -13063,7 +11785,7 @@
                 <a:ea typeface="Calibri" pitchFamily="34" charset="-122"/>
                 <a:cs typeface="Calibri" pitchFamily="34" charset="-120"/>
               </a:rPr>
-              <a:t>Interpret patterns of prolonged PT and/or aPTT.</a:t>
+              <a:t>Interpret combinations of prolonged PT and/or aPTT.</a:t>
             </a:r>
             <a:endParaRPr lang="en-US" sz="1350" dirty="0"/>
           </a:p>
@@ -13197,7 +11919,7 @@
                 <a:ea typeface="Calibri" pitchFamily="34" charset="-122"/>
                 <a:cs typeface="Calibri" pitchFamily="34" charset="-120"/>
               </a:rPr>
-              <a:t>Use the 1:1 mixing study to separate factor deficiency from inhibitor.</a:t>
+              <a:t>Apply mixing studies to separate factor deficiency from inhibitor.</a:t>
             </a:r>
             <a:endParaRPr lang="en-US" sz="1350" dirty="0"/>
           </a:p>
@@ -13331,7 +12053,7 @@
                 <a:ea typeface="Calibri" pitchFamily="34" charset="-122"/>
                 <a:cs typeface="Calibri" pitchFamily="34" charset="-120"/>
               </a:rPr>
-              <a:t>Outline lupus anticoagulant testing.</a:t>
+              <a:t>Recognize key pre-analytic pitfalls in coagulation testing.</a:t>
             </a:r>
             <a:endParaRPr lang="en-US" sz="1350" dirty="0"/>
           </a:p>
@@ -13465,7 +12187,7 @@
                 <a:ea typeface="Calibri" pitchFamily="34" charset="-122"/>
                 <a:cs typeface="Calibri" pitchFamily="34" charset="-120"/>
               </a:rPr>
-              <a:t>Build a rational thrombophilia testing strategy, including timing.</a:t>
+              <a:t>Evaluate common bleeding and thrombotic disorders.</a:t>
             </a:r>
             <a:endParaRPr lang="en-US" sz="1350" dirty="0"/>
           </a:p>
@@ -13599,7 +12321,7 @@
                 <a:ea typeface="Calibri" pitchFamily="34" charset="-122"/>
                 <a:cs typeface="Calibri" pitchFamily="34" charset="-120"/>
               </a:rPr>
-              <a:t>Recognize the preanalytic errors unique to coagulation.</a:t>
+              <a:t>Interpret D-dimer, fibrinogen, and special coagulation tests appropriately.</a:t>
             </a:r>
             <a:endParaRPr lang="en-US" sz="1350" dirty="0"/>
           </a:p>
@@ -13949,7 +12671,7 @@
                 <a:ea typeface="Calibri" pitchFamily="34" charset="-122"/>
                 <a:cs typeface="Calibri" pitchFamily="34" charset="-120"/>
               </a:rPr>
-              <a:t>The cascade &amp; screening tests</a:t>
+              <a:t>Cascade &amp; screens</a:t>
             </a:r>
             <a:pPr algn="l" indent="0" marL="0">
               <a:buNone/>
@@ -13963,7 +12685,7 @@
                 <a:ea typeface="Calibri" pitchFamily="34" charset="-122"/>
                 <a:cs typeface="Calibri" pitchFamily="34" charset="-120"/>
               </a:rPr>
-              <a:t>   —  what PT and aPTT measure</a:t>
+              <a:t>   —  PT and aPTT pathways</a:t>
             </a:r>
             <a:endParaRPr lang="en-US" sz="1400" dirty="0"/>
           </a:p>
@@ -14090,7 +12812,7 @@
                 <a:ea typeface="Calibri" pitchFamily="34" charset="-122"/>
                 <a:cs typeface="Calibri" pitchFamily="34" charset="-120"/>
               </a:rPr>
-              <a:t>Mixing studies</a:t>
+              <a:t>Interpreting prolongation</a:t>
             </a:r>
             <a:pPr algn="l" indent="0" marL="0">
               <a:buNone/>
@@ -14104,7 +12826,7 @@
                 <a:ea typeface="Calibri" pitchFamily="34" charset="-122"/>
                 <a:cs typeface="Calibri" pitchFamily="34" charset="-120"/>
               </a:rPr>
-              <a:t>   —  factor deficiency vs inhibitor</a:t>
+              <a:t>   —  PT/aPTT combinations</a:t>
             </a:r>
             <a:endParaRPr lang="en-US" sz="1400" dirty="0"/>
           </a:p>
@@ -14238,7 +12960,7 @@
                 <a:ea typeface="Calibri" pitchFamily="34" charset="-122"/>
                 <a:cs typeface="Calibri" pitchFamily="34" charset="-120"/>
               </a:rPr>
-              <a:t>Lupus anticoagulant &amp; thrombophilia</a:t>
+              <a:t>Mixing studies</a:t>
             </a:r>
             <a:pPr algn="l" indent="0" marL="0">
               <a:buNone/>
@@ -14252,7 +12974,7 @@
                 <a:ea typeface="Calibri" pitchFamily="34" charset="-122"/>
                 <a:cs typeface="Calibri" pitchFamily="34" charset="-120"/>
               </a:rPr>
-              <a:t>   —  what and when</a:t>
+              <a:t>   —  deficiency vs inhibitor</a:t>
             </a:r>
             <a:endParaRPr lang="en-US" sz="1400" dirty="0"/>
           </a:p>
@@ -14379,7 +13101,7 @@
                 <a:ea typeface="Calibri" pitchFamily="34" charset="-122"/>
                 <a:cs typeface="Calibri" pitchFamily="34" charset="-120"/>
               </a:rPr>
-              <a:t>Preanalytics &amp; disease patterns</a:t>
+              <a:t>Bleeding &amp; thrombosis</a:t>
             </a:r>
             <a:pPr algn="l" indent="0" marL="0">
               <a:buNone/>
@@ -14393,7 +13115,7 @@
                 <a:ea typeface="Calibri" pitchFamily="34" charset="-122"/>
                 <a:cs typeface="Calibri" pitchFamily="34" charset="-120"/>
               </a:rPr>
-              <a:t>   —  DIC, liver, vitamin K</a:t>
+              <a:t>   —  key disorders, pre-analytics</a:t>
             </a:r>
             <a:endParaRPr lang="en-US" sz="1400" dirty="0"/>
           </a:p>
@@ -14826,7 +13548,7 @@
                 <a:ea typeface="Calibri" pitchFamily="34" charset="-122"/>
                 <a:cs typeface="Calibri" pitchFamily="34" charset="-120"/>
               </a:rPr>
-              <a:t>The Cascade &amp; Screening Tests</a:t>
+              <a:t>The Cascade &amp; the Screens</a:t>
             </a:r>
             <a:endParaRPr lang="en-US" sz="3800" dirty="0"/>
           </a:p>
@@ -14897,7 +13619,7 @@
                 <a:ea typeface="Calibri" pitchFamily="34" charset="-122"/>
                 <a:cs typeface="Calibri" pitchFamily="34" charset="-120"/>
               </a:rPr>
-              <a:t>HEMATOLOGY &amp; COAGULATION   ·   THE CASCADE</a:t>
+              <a:t>HEMATOLOGY &amp; COAGULATION   ·   CASCADE</a:t>
             </a:r>
             <a:endParaRPr lang="en-US" sz="1100" dirty="0"/>
           </a:p>
@@ -14936,7 +13658,7 @@
                 <a:ea typeface="Calibri" pitchFamily="34" charset="-122"/>
                 <a:cs typeface="Calibri" pitchFamily="34" charset="-120"/>
               </a:rPr>
-              <a:t>What PT and aPTT Measure</a:t>
+              <a:t>PT and aPTT on the Cascade</a:t>
             </a:r>
             <a:endParaRPr lang="en-US" sz="3000" dirty="0"/>
           </a:p>
@@ -14950,12 +13672,12 @@
         </p:nvSpPr>
         <p:spPr>
           <a:xfrm>
-            <a:off x="1066648" y="1481328"/>
-            <a:ext cx="10058400" cy="4434840"/>
+            <a:off x="975208" y="1481328"/>
+            <a:ext cx="10241280" cy="4261104"/>
           </a:xfrm>
           <a:prstGeom prst="roundRect">
             <a:avLst>
-              <a:gd name="adj" fmla="val 1856"/>
+              <a:gd name="adj" fmla="val 1931"/>
             </a:avLst>
           </a:prstGeom>
           <a:solidFill>
@@ -14992,8 +13714,8 @@
         </p:blipFill>
         <p:spPr>
           <a:xfrm>
-            <a:off x="1194664" y="1609344"/>
-            <a:ext cx="9802368" cy="4178808"/>
+            <a:off x="1103224" y="1609344"/>
+            <a:ext cx="9985248" cy="4005072"/>
           </a:xfrm>
           <a:prstGeom prst="rect">
             <a:avLst/>
@@ -15008,7 +13730,7 @@
         </p:nvSpPr>
         <p:spPr>
           <a:xfrm>
-            <a:off x="566928" y="5989320"/>
+            <a:off x="566928" y="5815584"/>
             <a:ext cx="11057839" cy="365760"/>
           </a:xfrm>
           <a:prstGeom prst="rect">
@@ -15033,7 +13755,7 @@
                 <a:ea typeface="Calibri" pitchFamily="34" charset="-122"/>
                 <a:cs typeface="Calibri" pitchFamily="34" charset="-120"/>
               </a:rPr>
-              <a:t>Original schematic. PT covers extrinsic + common (warfarin, VII, liver); aPTT covers intrinsic + common (heparin, hemophilia, lupus anticoagulant).</a:t>
+              <a:t>Original schematic. PT interrogates the extrinsic/common pathway; aPTT the intrinsic/common pathway.</a:t>
             </a:r>
             <a:endParaRPr lang="en-US" sz="1150" dirty="0"/>
           </a:p>
@@ -15210,7 +13932,7 @@
                 <a:ea typeface="Calibri" pitchFamily="34" charset="-122"/>
                 <a:cs typeface="Calibri" pitchFamily="34" charset="-120"/>
               </a:rPr>
-              <a:t>HEMATOLOGY &amp; COAGULATION   ·   SCREENING TESTS</a:t>
+              <a:t>HEMATOLOGY &amp; COAGULATION   ·   SCREENS</a:t>
             </a:r>
             <a:endParaRPr lang="en-US" sz="1100" dirty="0"/>
           </a:p>
@@ -15249,7 +13971,764 @@
                 <a:ea typeface="Calibri" pitchFamily="34" charset="-122"/>
                 <a:cs typeface="Calibri" pitchFamily="34" charset="-120"/>
               </a:rPr>
-              <a:t>Reading the PT / aPTT Pattern</a:t>
+              <a:t>What PT and aPTT Measure</a:t>
+            </a:r>
+            <a:endParaRPr lang="en-US" sz="3000" dirty="0"/>
+          </a:p>
+        </p:txBody>
+      </p:sp>
+      <p:sp>
+        <p:nvSpPr>
+          <p:cNvPr id="4" name="Shape 2"/>
+          <p:cNvSpPr/>
+          <p:nvPr/>
+        </p:nvSpPr>
+        <p:spPr>
+          <a:xfrm>
+            <a:off x="566928" y="1517904"/>
+            <a:ext cx="5346040" cy="4114800"/>
+          </a:xfrm>
+          <a:prstGeom prst="roundRect">
+            <a:avLst>
+              <a:gd name="adj" fmla="val 2000"/>
+            </a:avLst>
+          </a:prstGeom>
+          <a:solidFill>
+            <a:srgbClr val="FBEAEC"/>
+          </a:solidFill>
+          <a:ln/>
+          <a:effectLst>
+            <a:outerShdw sx="100000" sy="100000" kx="0" ky="0" algn="bl" rotWithShape="0" blurRad="88900" dist="25400" dir="5400000">
+              <a:srgbClr val="22303C">
+                <a:alpha val="12000"/>
+              </a:srgbClr>
+            </a:outerShdw>
+          </a:effectLst>
+        </p:spPr>
+      </p:sp>
+      <p:sp>
+        <p:nvSpPr>
+          <p:cNvPr id="5" name="Text 3"/>
+          <p:cNvSpPr/>
+          <p:nvPr/>
+        </p:nvSpPr>
+        <p:spPr>
+          <a:xfrm>
+            <a:off x="804672" y="1682496"/>
+            <a:ext cx="4888840" cy="274320"/>
+          </a:xfrm>
+          <a:prstGeom prst="rect">
+            <a:avLst/>
+          </a:prstGeom>
+          <a:noFill/>
+          <a:ln/>
+        </p:spPr>
+        <p:txBody>
+          <a:bodyPr wrap="square" lIns="0" tIns="0" rIns="0" bIns="0" rtlCol="0" anchor="ctr"/>
+          <a:lstStyle/>
+          <a:p>
+            <a:pPr indent="0" marL="0">
+              <a:buNone/>
+            </a:pPr>
+            <a:r>
+              <a:rPr lang="en-US" sz="1200" b="1" spc="100" kern="0" dirty="0">
+                <a:solidFill>
+                  <a:srgbClr val="8E1622"/>
+                </a:solidFill>
+                <a:latin typeface="Calibri" pitchFamily="34" charset="0"/>
+                <a:ea typeface="Calibri" pitchFamily="34" charset="-122"/>
+                <a:cs typeface="Calibri" pitchFamily="34" charset="-120"/>
+              </a:rPr>
+              <a:t>PT / INR</a:t>
+            </a:r>
+            <a:endParaRPr lang="en-US" sz="1200" dirty="0"/>
+          </a:p>
+        </p:txBody>
+      </p:sp>
+      <p:sp>
+        <p:nvSpPr>
+          <p:cNvPr id="6" name="Text 4"/>
+          <p:cNvSpPr/>
+          <p:nvPr/>
+        </p:nvSpPr>
+        <p:spPr>
+          <a:xfrm>
+            <a:off x="804672" y="2029968"/>
+            <a:ext cx="4870552" cy="3474720"/>
+          </a:xfrm>
+          <a:prstGeom prst="rect">
+            <a:avLst/>
+          </a:prstGeom>
+          <a:noFill/>
+          <a:ln/>
+        </p:spPr>
+        <p:txBody>
+          <a:bodyPr wrap="square" lIns="0" tIns="0" rIns="0" bIns="0" rtlCol="0" anchor="t"/>
+          <a:lstStyle/>
+          <a:p>
+            <a:pPr algn="l" marL="177800" indent="-177800">
+              <a:spcAft>
+                <a:spcPts val="900"/>
+              </a:spcAft>
+              <a:buSzPct val="100000"/>
+              <a:buChar char="•"/>
+            </a:pPr>
+            <a:r>
+              <a:rPr lang="en-US" sz="1250" b="1" dirty="0">
+                <a:solidFill>
+                  <a:srgbClr val="1B2A38"/>
+                </a:solidFill>
+                <a:latin typeface="Calibri" pitchFamily="34" charset="0"/>
+                <a:ea typeface="Calibri" pitchFamily="34" charset="-122"/>
+                <a:cs typeface="Calibri" pitchFamily="34" charset="-120"/>
+              </a:rPr>
+              <a:t>PT reflects the extrinsic and common pathways (factors VII, X, V, II, fibrinogen).</a:t>
+            </a:r>
+            <a:endParaRPr lang="en-US" sz="1250" dirty="0"/>
+          </a:p>
+          <a:p>
+            <a:pPr algn="l" marL="177800" indent="-177800">
+              <a:spcAft>
+                <a:spcPts val="900"/>
+              </a:spcAft>
+              <a:buSzPct val="100000"/>
+              <a:buChar char="•"/>
+            </a:pPr>
+            <a:r>
+              <a:rPr lang="en-US" sz="1250" dirty="0">
+                <a:solidFill>
+                  <a:srgbClr val="33444F"/>
+                </a:solidFill>
+                <a:latin typeface="Calibri" pitchFamily="34" charset="0"/>
+                <a:ea typeface="Calibri" pitchFamily="34" charset="-122"/>
+                <a:cs typeface="Calibri" pitchFamily="34" charset="-120"/>
+              </a:rPr>
+              <a:t>INR standardizes PT for vitamin-K-antagonist monitoring.</a:t>
+            </a:r>
+            <a:endParaRPr lang="en-US" sz="1250" dirty="0"/>
+          </a:p>
+          <a:p>
+            <a:pPr algn="l" marL="177800" indent="-177800">
+              <a:spcAft>
+                <a:spcPts val="900"/>
+              </a:spcAft>
+              <a:buSzPct val="100000"/>
+              <a:buChar char="•"/>
+            </a:pPr>
+            <a:r>
+              <a:rPr lang="en-US" sz="1250" dirty="0">
+                <a:solidFill>
+                  <a:srgbClr val="33444F"/>
+                </a:solidFill>
+                <a:latin typeface="Calibri" pitchFamily="34" charset="0"/>
+                <a:ea typeface="Calibri" pitchFamily="34" charset="-122"/>
+                <a:cs typeface="Calibri" pitchFamily="34" charset="-120"/>
+              </a:rPr>
+              <a:t>Sensitive to factor VII (shortest half-life) — early in liver disease/warfarin.</a:t>
+            </a:r>
+            <a:endParaRPr lang="en-US" sz="1250" dirty="0"/>
+          </a:p>
+          <a:p>
+            <a:pPr algn="l" marL="177800" indent="-177800">
+              <a:spcAft>
+                <a:spcPts val="900"/>
+              </a:spcAft>
+              <a:buSzPct val="100000"/>
+              <a:buChar char="•"/>
+            </a:pPr>
+            <a:r>
+              <a:rPr lang="en-US" sz="1250" dirty="0">
+                <a:solidFill>
+                  <a:srgbClr val="33444F"/>
+                </a:solidFill>
+                <a:latin typeface="Calibri" pitchFamily="34" charset="0"/>
+                <a:ea typeface="Calibri" pitchFamily="34" charset="-122"/>
+                <a:cs typeface="Calibri" pitchFamily="34" charset="-120"/>
+              </a:rPr>
+              <a:t>Prolonged by warfarin, vitamin-K deficiency, liver disease.</a:t>
+            </a:r>
+            <a:endParaRPr lang="en-US" sz="1250" dirty="0"/>
+          </a:p>
+        </p:txBody>
+      </p:sp>
+      <p:sp>
+        <p:nvSpPr>
+          <p:cNvPr id="7" name="Shape 5"/>
+          <p:cNvSpPr/>
+          <p:nvPr/>
+        </p:nvSpPr>
+        <p:spPr>
+          <a:xfrm>
+            <a:off x="6278728" y="1517904"/>
+            <a:ext cx="5346040" cy="4114800"/>
+          </a:xfrm>
+          <a:prstGeom prst="roundRect">
+            <a:avLst>
+              <a:gd name="adj" fmla="val 2000"/>
+            </a:avLst>
+          </a:prstGeom>
+          <a:solidFill>
+            <a:srgbClr val="FBE7E9"/>
+          </a:solidFill>
+          <a:ln/>
+          <a:effectLst>
+            <a:outerShdw sx="100000" sy="100000" kx="0" ky="0" algn="bl" rotWithShape="0" blurRad="88900" dist="25400" dir="5400000">
+              <a:srgbClr val="22303C">
+                <a:alpha val="12000"/>
+              </a:srgbClr>
+            </a:outerShdw>
+          </a:effectLst>
+        </p:spPr>
+      </p:sp>
+      <p:sp>
+        <p:nvSpPr>
+          <p:cNvPr id="8" name="Text 6"/>
+          <p:cNvSpPr/>
+          <p:nvPr/>
+        </p:nvSpPr>
+        <p:spPr>
+          <a:xfrm>
+            <a:off x="6516472" y="1682496"/>
+            <a:ext cx="4888840" cy="274320"/>
+          </a:xfrm>
+          <a:prstGeom prst="rect">
+            <a:avLst/>
+          </a:prstGeom>
+          <a:noFill/>
+          <a:ln/>
+        </p:spPr>
+        <p:txBody>
+          <a:bodyPr wrap="square" lIns="0" tIns="0" rIns="0" bIns="0" rtlCol="0" anchor="ctr"/>
+          <a:lstStyle/>
+          <a:p>
+            <a:pPr indent="0" marL="0">
+              <a:buNone/>
+            </a:pPr>
+            <a:r>
+              <a:rPr lang="en-US" sz="1200" b="1" spc="100" kern="0" dirty="0">
+                <a:solidFill>
+                  <a:srgbClr val="8E1622"/>
+                </a:solidFill>
+                <a:latin typeface="Calibri" pitchFamily="34" charset="0"/>
+                <a:ea typeface="Calibri" pitchFamily="34" charset="-122"/>
+                <a:cs typeface="Calibri" pitchFamily="34" charset="-120"/>
+              </a:rPr>
+              <a:t>APTT</a:t>
+            </a:r>
+            <a:endParaRPr lang="en-US" sz="1200" dirty="0"/>
+          </a:p>
+        </p:txBody>
+      </p:sp>
+      <p:sp>
+        <p:nvSpPr>
+          <p:cNvPr id="9" name="Text 7"/>
+          <p:cNvSpPr/>
+          <p:nvPr/>
+        </p:nvSpPr>
+        <p:spPr>
+          <a:xfrm>
+            <a:off x="6516472" y="2029968"/>
+            <a:ext cx="4870552" cy="3474720"/>
+          </a:xfrm>
+          <a:prstGeom prst="rect">
+            <a:avLst/>
+          </a:prstGeom>
+          <a:noFill/>
+          <a:ln/>
+        </p:spPr>
+        <p:txBody>
+          <a:bodyPr wrap="square" lIns="0" tIns="0" rIns="0" bIns="0" rtlCol="0" anchor="t"/>
+          <a:lstStyle/>
+          <a:p>
+            <a:pPr algn="l" marL="177800" indent="-177800">
+              <a:spcAft>
+                <a:spcPts val="900"/>
+              </a:spcAft>
+              <a:buSzPct val="100000"/>
+              <a:buChar char="•"/>
+            </a:pPr>
+            <a:r>
+              <a:rPr lang="en-US" sz="1250" b="1" dirty="0">
+                <a:solidFill>
+                  <a:srgbClr val="1B2A38"/>
+                </a:solidFill>
+                <a:latin typeface="Calibri" pitchFamily="34" charset="0"/>
+                <a:ea typeface="Calibri" pitchFamily="34" charset="-122"/>
+                <a:cs typeface="Calibri" pitchFamily="34" charset="-120"/>
+              </a:rPr>
+              <a:t>aPTT reflects the intrinsic and common pathways (XII, XI, IX, VIII, X, V, II, fibrinogen).</a:t>
+            </a:r>
+            <a:endParaRPr lang="en-US" sz="1250" dirty="0"/>
+          </a:p>
+          <a:p>
+            <a:pPr algn="l" marL="177800" indent="-177800">
+              <a:spcAft>
+                <a:spcPts val="900"/>
+              </a:spcAft>
+              <a:buSzPct val="100000"/>
+              <a:buChar char="•"/>
+            </a:pPr>
+            <a:r>
+              <a:rPr lang="en-US" sz="1250" dirty="0">
+                <a:solidFill>
+                  <a:srgbClr val="33444F"/>
+                </a:solidFill>
+                <a:latin typeface="Calibri" pitchFamily="34" charset="0"/>
+                <a:ea typeface="Calibri" pitchFamily="34" charset="-122"/>
+                <a:cs typeface="Calibri" pitchFamily="34" charset="-120"/>
+              </a:rPr>
+              <a:t>Monitors unfractionated heparin.</a:t>
+            </a:r>
+            <a:endParaRPr lang="en-US" sz="1250" dirty="0"/>
+          </a:p>
+          <a:p>
+            <a:pPr algn="l" marL="177800" indent="-177800">
+              <a:spcAft>
+                <a:spcPts val="900"/>
+              </a:spcAft>
+              <a:buSzPct val="100000"/>
+              <a:buChar char="•"/>
+            </a:pPr>
+            <a:r>
+              <a:rPr lang="en-US" sz="1250" dirty="0">
+                <a:solidFill>
+                  <a:srgbClr val="33444F"/>
+                </a:solidFill>
+                <a:latin typeface="Calibri" pitchFamily="34" charset="0"/>
+                <a:ea typeface="Calibri" pitchFamily="34" charset="-122"/>
+                <a:cs typeface="Calibri" pitchFamily="34" charset="-120"/>
+              </a:rPr>
+              <a:t>Prolonged by hemophilia, heparin, and inhibitors (incl. lupus anticoagulant).</a:t>
+            </a:r>
+            <a:endParaRPr lang="en-US" sz="1250" dirty="0"/>
+          </a:p>
+          <a:p>
+            <a:pPr algn="l" marL="177800" indent="-177800">
+              <a:spcAft>
+                <a:spcPts val="900"/>
+              </a:spcAft>
+              <a:buSzPct val="100000"/>
+              <a:buChar char="•"/>
+            </a:pPr>
+            <a:r>
+              <a:rPr lang="en-US" sz="1250" dirty="0">
+                <a:solidFill>
+                  <a:srgbClr val="33444F"/>
+                </a:solidFill>
+                <a:latin typeface="Calibri" pitchFamily="34" charset="0"/>
+                <a:ea typeface="Calibri" pitchFamily="34" charset="-122"/>
+                <a:cs typeface="Calibri" pitchFamily="34" charset="-120"/>
+              </a:rPr>
+              <a:t>Interpret with the PT.</a:t>
+            </a:r>
+            <a:endParaRPr lang="en-US" sz="1250" dirty="0"/>
+          </a:p>
+        </p:txBody>
+      </p:sp>
+      <p:sp>
+        <p:nvSpPr>
+          <p:cNvPr id="10" name="Text 8"/>
+          <p:cNvSpPr/>
+          <p:nvPr/>
+        </p:nvSpPr>
+        <p:spPr>
+          <a:xfrm>
+            <a:off x="566928" y="6473952"/>
+            <a:ext cx="7772400" cy="274320"/>
+          </a:xfrm>
+          <a:prstGeom prst="rect">
+            <a:avLst/>
+          </a:prstGeom>
+          <a:noFill/>
+          <a:ln/>
+        </p:spPr>
+        <p:txBody>
+          <a:bodyPr wrap="square" lIns="0" tIns="0" rIns="0" bIns="0" rtlCol="0" anchor="ctr"/>
+          <a:lstStyle/>
+          <a:p>
+            <a:pPr algn="l" indent="0" marL="0">
+              <a:buNone/>
+            </a:pPr>
+            <a:r>
+              <a:rPr lang="en-US" sz="850" dirty="0">
+                <a:solidFill>
+                  <a:srgbClr val="9AA8B4"/>
+                </a:solidFill>
+                <a:latin typeface="Calibri" pitchFamily="34" charset="0"/>
+                <a:ea typeface="Calibri" pitchFamily="34" charset="-122"/>
+                <a:cs typeface="Calibri" pitchFamily="34" charset="-120"/>
+              </a:rPr>
+              <a:t>Makassed General Hospital  ·  Department of Laboratory Medicine</a:t>
+            </a:r>
+            <a:endParaRPr lang="en-US" sz="850" dirty="0"/>
+          </a:p>
+        </p:txBody>
+      </p:sp>
+      <p:sp>
+        <p:nvSpPr>
+          <p:cNvPr id="11" name="Text 9"/>
+          <p:cNvSpPr/>
+          <p:nvPr/>
+        </p:nvSpPr>
+        <p:spPr>
+          <a:xfrm>
+            <a:off x="9814255" y="6473952"/>
+            <a:ext cx="1828800" cy="274320"/>
+          </a:xfrm>
+          <a:prstGeom prst="rect">
+            <a:avLst/>
+          </a:prstGeom>
+          <a:noFill/>
+          <a:ln/>
+        </p:spPr>
+        <p:txBody>
+          <a:bodyPr wrap="square" lIns="0" tIns="0" rIns="0" bIns="0" rtlCol="0" anchor="ctr"/>
+          <a:lstStyle/>
+          <a:p>
+            <a:pPr algn="r" indent="0" marL="0">
+              <a:buNone/>
+            </a:pPr>
+            <a:r>
+              <a:rPr lang="en-US" sz="850" dirty="0">
+                <a:solidFill>
+                  <a:srgbClr val="9AA8B4"/>
+                </a:solidFill>
+                <a:latin typeface="Calibri" pitchFamily="34" charset="0"/>
+                <a:ea typeface="Calibri" pitchFamily="34" charset="-122"/>
+                <a:cs typeface="Calibri" pitchFamily="34" charset="-120"/>
+              </a:rPr>
+              <a:t>CP Lecture Series</a:t>
+            </a:r>
+            <a:pPr algn="r" indent="0" marL="0">
+              <a:buNone/>
+            </a:pPr>
+            <a:r>
+              <a:rPr lang="en-US" sz="850" dirty="0">
+                <a:solidFill>
+                  <a:srgbClr val="DCE4EC"/>
+                </a:solidFill>
+                <a:latin typeface="Calibri" pitchFamily="34" charset="0"/>
+                <a:ea typeface="Calibri" pitchFamily="34" charset="-122"/>
+                <a:cs typeface="Calibri" pitchFamily="34" charset="-120"/>
+              </a:rPr>
+              <a:t>   ·   </a:t>
+            </a:r>
+            <a:pPr algn="r" indent="0" marL="0">
+              <a:buNone/>
+            </a:pPr>
+            <a:r>
+              <a:rPr lang="en-US" sz="850" b="1" dirty="0">
+                <a:solidFill>
+                  <a:srgbClr val="C62133"/>
+                </a:solidFill>
+                <a:latin typeface="Calibri" pitchFamily="34" charset="0"/>
+                <a:ea typeface="Calibri" pitchFamily="34" charset="-122"/>
+                <a:cs typeface="Calibri" pitchFamily="34" charset="-120"/>
+              </a:rPr>
+              <a:t>6</a:t>
+            </a:r>
+            <a:endParaRPr lang="en-US" sz="850" dirty="0"/>
+          </a:p>
+        </p:txBody>
+      </p:sp>
+    </p:spTree>
+  </p:cSld>
+  <p:clrMapOvr>
+    <a:masterClrMapping/>
+  </p:clrMapOvr>
+</p:sld>
+</file>
+
+<file path=ppt/slides/slide8.xml><?xml version="1.0" encoding="utf-8"?>
+<p:sld xmlns:a="http://schemas.openxmlformats.org/drawingml/2006/main" xmlns:r="http://schemas.openxmlformats.org/officeDocument/2006/relationships" xmlns:p="http://schemas.openxmlformats.org/presentationml/2006/main">
+  <p:cSld name="Slide 8">
+    <p:bg>
+      <p:bgPr>
+        <a:solidFill>
+          <a:srgbClr val="8E1622"/>
+        </a:solidFill>
+      </p:bgPr>
+    </p:bg>
+    <p:spTree>
+      <p:nvGrpSpPr>
+        <p:cNvPr id="1" name=""/>
+        <p:cNvGrpSpPr/>
+        <p:nvPr/>
+      </p:nvGrpSpPr>
+      <p:grpSpPr>
+        <a:xfrm>
+          <a:off x="0" y="0"/>
+          <a:ext cx="0" cy="0"/>
+          <a:chOff x="0" y="0"/>
+          <a:chExt cx="0" cy="0"/>
+        </a:xfrm>
+      </p:grpSpPr>
+      <p:sp>
+        <p:nvSpPr>
+          <p:cNvPr id="2" name="Shape 0"/>
+          <p:cNvSpPr/>
+          <p:nvPr/>
+        </p:nvSpPr>
+        <p:spPr>
+          <a:xfrm>
+            <a:off x="9509760" y="-1280160"/>
+            <a:ext cx="4754880" cy="4754880"/>
+          </a:xfrm>
+          <a:prstGeom prst="ellipse">
+            <a:avLst/>
+          </a:prstGeom>
+          <a:solidFill>
+            <a:srgbClr val="FFFFFF">
+              <a:alpha val="8000"/>
+            </a:srgbClr>
+          </a:solidFill>
+          <a:ln/>
+        </p:spPr>
+      </p:sp>
+      <p:sp>
+        <p:nvSpPr>
+          <p:cNvPr id="3" name="Shape 1"/>
+          <p:cNvSpPr/>
+          <p:nvPr/>
+        </p:nvSpPr>
+        <p:spPr>
+          <a:xfrm>
+            <a:off x="10607040" y="3931920"/>
+            <a:ext cx="3108960" cy="3108960"/>
+          </a:xfrm>
+          <a:prstGeom prst="ellipse">
+            <a:avLst/>
+          </a:prstGeom>
+          <a:solidFill>
+            <a:srgbClr val="FFFFFF">
+              <a:alpha val="6000"/>
+            </a:srgbClr>
+          </a:solidFill>
+          <a:ln/>
+        </p:spPr>
+      </p:sp>
+      <p:sp>
+        <p:nvSpPr>
+          <p:cNvPr id="4" name="Text 2"/>
+          <p:cNvSpPr/>
+          <p:nvPr/>
+        </p:nvSpPr>
+        <p:spPr>
+          <a:xfrm>
+            <a:off x="566928" y="1783080"/>
+            <a:ext cx="2743200" cy="1463040"/>
+          </a:xfrm>
+          <a:prstGeom prst="rect">
+            <a:avLst/>
+          </a:prstGeom>
+          <a:noFill/>
+          <a:ln/>
+        </p:spPr>
+        <p:txBody>
+          <a:bodyPr wrap="square" lIns="0" tIns="0" rIns="0" bIns="0" rtlCol="0" anchor="ctr"/>
+          <a:lstStyle/>
+          <a:p>
+            <a:pPr algn="l" indent="0" marL="0">
+              <a:buNone/>
+            </a:pPr>
+            <a:r>
+              <a:rPr lang="en-US" sz="6400" b="1" dirty="0">
+                <a:solidFill>
+                  <a:srgbClr val="FBEAEC"/>
+                </a:solidFill>
+                <a:latin typeface="Calibri" pitchFamily="34" charset="0"/>
+                <a:ea typeface="Calibri" pitchFamily="34" charset="-122"/>
+                <a:cs typeface="Calibri" pitchFamily="34" charset="-120"/>
+              </a:rPr>
+              <a:t>02</a:t>
+            </a:r>
+            <a:endParaRPr lang="en-US" sz="6400" dirty="0"/>
+          </a:p>
+        </p:txBody>
+      </p:sp>
+      <p:sp>
+        <p:nvSpPr>
+          <p:cNvPr id="5" name="Text 3"/>
+          <p:cNvSpPr/>
+          <p:nvPr/>
+        </p:nvSpPr>
+        <p:spPr>
+          <a:xfrm>
+            <a:off x="566928" y="3246120"/>
+            <a:ext cx="10058400" cy="365760"/>
+          </a:xfrm>
+          <a:prstGeom prst="rect">
+            <a:avLst/>
+          </a:prstGeom>
+          <a:noFill/>
+          <a:ln/>
+        </p:spPr>
+        <p:txBody>
+          <a:bodyPr wrap="square" lIns="0" tIns="0" rIns="0" bIns="0" rtlCol="0" anchor="ctr"/>
+          <a:lstStyle/>
+          <a:p>
+            <a:pPr algn="l" indent="0" marL="0">
+              <a:buNone/>
+            </a:pPr>
+            <a:r>
+              <a:rPr lang="en-US" sz="1300" b="1" spc="250" kern="0" dirty="0">
+                <a:solidFill>
+                  <a:srgbClr val="F2C9D9"/>
+                </a:solidFill>
+                <a:latin typeface="Calibri" pitchFamily="34" charset="0"/>
+                <a:ea typeface="Calibri" pitchFamily="34" charset="-122"/>
+                <a:cs typeface="Calibri" pitchFamily="34" charset="-120"/>
+              </a:rPr>
+              <a:t>PART TWO</a:t>
+            </a:r>
+            <a:endParaRPr lang="en-US" sz="1300" dirty="0"/>
+          </a:p>
+        </p:txBody>
+      </p:sp>
+      <p:sp>
+        <p:nvSpPr>
+          <p:cNvPr id="6" name="Text 4"/>
+          <p:cNvSpPr/>
+          <p:nvPr/>
+        </p:nvSpPr>
+        <p:spPr>
+          <a:xfrm>
+            <a:off x="566928" y="3611880"/>
+            <a:ext cx="10607040" cy="1463040"/>
+          </a:xfrm>
+          <a:prstGeom prst="rect">
+            <a:avLst/>
+          </a:prstGeom>
+          <a:noFill/>
+          <a:ln/>
+        </p:spPr>
+        <p:txBody>
+          <a:bodyPr wrap="square" lIns="0" tIns="0" rIns="0" bIns="0" rtlCol="0" anchor="t"/>
+          <a:lstStyle/>
+          <a:p>
+            <a:pPr algn="l" indent="0" marL="0">
+              <a:buNone/>
+            </a:pPr>
+            <a:r>
+              <a:rPr lang="en-US" sz="3800" b="1" dirty="0">
+                <a:solidFill>
+                  <a:srgbClr val="FFFFFF"/>
+                </a:solidFill>
+                <a:latin typeface="Calibri" pitchFamily="34" charset="0"/>
+                <a:ea typeface="Calibri" pitchFamily="34" charset="-122"/>
+                <a:cs typeface="Calibri" pitchFamily="34" charset="-120"/>
+              </a:rPr>
+              <a:t>Interpreting Prolongation &amp; Mixing Studies</a:t>
+            </a:r>
+            <a:endParaRPr lang="en-US" sz="3800" dirty="0"/>
+          </a:p>
+        </p:txBody>
+      </p:sp>
+    </p:spTree>
+  </p:cSld>
+  <p:clrMapOvr>
+    <a:masterClrMapping/>
+  </p:clrMapOvr>
+</p:sld>
+</file>
+
+<file path=ppt/slides/slide9.xml><?xml version="1.0" encoding="utf-8"?>
+<p:sld xmlns:a="http://schemas.openxmlformats.org/drawingml/2006/main" xmlns:r="http://schemas.openxmlformats.org/officeDocument/2006/relationships" xmlns:p="http://schemas.openxmlformats.org/presentationml/2006/main">
+  <p:cSld name="Slide 9">
+    <p:bg>
+      <p:bgPr>
+        <a:solidFill>
+          <a:srgbClr val="FFFFFF"/>
+        </a:solidFill>
+      </p:bgPr>
+    </p:bg>
+    <p:spTree>
+      <p:nvGrpSpPr>
+        <p:cNvPr id="1" name=""/>
+        <p:cNvGrpSpPr/>
+        <p:nvPr/>
+      </p:nvGrpSpPr>
+      <p:grpSpPr>
+        <a:xfrm>
+          <a:off x="0" y="0"/>
+          <a:ext cx="0" cy="0"/>
+          <a:chOff x="0" y="0"/>
+          <a:chExt cx="0" cy="0"/>
+        </a:xfrm>
+      </p:grpSpPr>
+      <p:sp>
+        <p:nvSpPr>
+          <p:cNvPr id="2" name="Text 0"/>
+          <p:cNvSpPr/>
+          <p:nvPr/>
+        </p:nvSpPr>
+        <p:spPr>
+          <a:xfrm>
+            <a:off x="566928" y="329184"/>
+            <a:ext cx="10515600" cy="310896"/>
+          </a:xfrm>
+          <a:prstGeom prst="rect">
+            <a:avLst/>
+          </a:prstGeom>
+          <a:noFill/>
+          <a:ln/>
+        </p:spPr>
+        <p:txBody>
+          <a:bodyPr wrap="square" lIns="0" tIns="0" rIns="0" bIns="0" rtlCol="0" anchor="ctr"/>
+          <a:lstStyle/>
+          <a:p>
+            <a:pPr algn="l" indent="0" marL="0">
+              <a:buNone/>
+            </a:pPr>
+            <a:r>
+              <a:rPr lang="en-US" sz="1100" b="1" spc="150" kern="0" dirty="0">
+                <a:solidFill>
+                  <a:srgbClr val="C62133"/>
+                </a:solidFill>
+                <a:latin typeface="Calibri" pitchFamily="34" charset="0"/>
+                <a:ea typeface="Calibri" pitchFamily="34" charset="-122"/>
+                <a:cs typeface="Calibri" pitchFamily="34" charset="-120"/>
+              </a:rPr>
+              <a:t>HEMATOLOGY &amp; COAGULATION   ·   PATTERN</a:t>
+            </a:r>
+            <a:endParaRPr lang="en-US" sz="1100" dirty="0"/>
+          </a:p>
+        </p:txBody>
+      </p:sp>
+      <p:sp>
+        <p:nvSpPr>
+          <p:cNvPr id="3" name="Text 1"/>
+          <p:cNvSpPr/>
+          <p:nvPr/>
+        </p:nvSpPr>
+        <p:spPr>
+          <a:xfrm>
+            <a:off x="566928" y="713232"/>
+            <a:ext cx="11064240" cy="749808"/>
+          </a:xfrm>
+          <a:prstGeom prst="rect">
+            <a:avLst/>
+          </a:prstGeom>
+          <a:noFill/>
+          <a:ln/>
+        </p:spPr>
+        <p:txBody>
+          <a:bodyPr wrap="square" lIns="0" tIns="0" rIns="0" bIns="0" rtlCol="0" anchor="ctr"/>
+          <a:lstStyle/>
+          <a:p>
+            <a:pPr algn="l" indent="0" marL="0">
+              <a:buNone/>
+            </a:pPr>
+            <a:r>
+              <a:rPr lang="en-US" sz="3000" b="1" dirty="0">
+                <a:solidFill>
+                  <a:srgbClr val="0E3A5F"/>
+                </a:solidFill>
+                <a:latin typeface="Calibri" pitchFamily="34" charset="0"/>
+                <a:ea typeface="Calibri" pitchFamily="34" charset="-122"/>
+                <a:cs typeface="Calibri" pitchFamily="34" charset="-120"/>
+              </a:rPr>
+              <a:t>Reading PT/aPTT Combinations</a:t>
             </a:r>
             <a:endParaRPr lang="en-US" sz="3000" dirty="0"/>
           </a:p>
@@ -15257,7 +14736,7 @@
       </p:sp>
       <p:graphicFrame>
         <p:nvGraphicFramePr>
-          <p:cNvPr id="8" name="Table 0"/>
+          <p:cNvPr id="10" name="Table 0"/>
           <p:cNvGraphicFramePr>
             <a:graphicFrameLocks noGrp="1"/>
           </p:cNvGraphicFramePr>
@@ -15278,10 +14757,10 @@
             <a:tbl>
               <a:tblPr/>
               <a:tblGrid>
-                <a:gridCol w="4023360"/>
-                <a:gridCol w="7031736"/>
+                <a:gridCol w="3383280"/>
+                <a:gridCol w="6309360"/>
               </a:tblGrid>
-              <a:tr h="676656">
+              <a:tr h="512064">
                 <a:tc>
                   <a:txBody>
                     <a:bodyPr/>
@@ -15367,7 +14846,7 @@
                           <a:ea typeface="Calibri" pitchFamily="34" charset="-122"/>
                           <a:cs typeface="Calibri" pitchFamily="34" charset="-120"/>
                         </a:rPr>
-                        <a:t>Think of</a:t>
+                        <a:t>Typical causes</a:t>
                       </a:r>
                       <a:endParaRPr lang="en-US" sz="1200" dirty="0">
                         <a:latin typeface="Calibri" charset="0"/>
@@ -15419,7 +14898,7 @@
                   </a:tcPr>
                 </a:tc>
               </a:tr>
-              <a:tr h="676656">
+              <a:tr h="512064">
                 <a:tc>
                   <a:txBody>
                     <a:bodyPr/>
@@ -15429,7 +14908,7 @@
                         <a:buNone/>
                       </a:pPr>
                       <a:r>
-                        <a:rPr lang="en-US" sz="1200" b="1" dirty="0">
+                        <a:rPr lang="en-US" sz="1100" b="1" dirty="0">
                           <a:solidFill>
                             <a:srgbClr val="1B2A38"/>
                           </a:solidFill>
@@ -15437,9 +14916,9 @@
                           <a:ea typeface="Calibri" pitchFamily="34" charset="-122"/>
                           <a:cs typeface="Calibri" pitchFamily="34" charset="-120"/>
                         </a:rPr>
-                        <a:t>↑ PT, normal aPTT</a:t>
+                        <a:t>↑PT, normal aPTT</a:t>
                       </a:r>
-                      <a:endParaRPr lang="en-US" sz="1200" dirty="0">
+                      <a:endParaRPr lang="en-US" sz="1100" dirty="0">
                         <a:latin typeface="Calibri" charset="0"/>
                         <a:ea typeface="Calibri" charset="0"/>
                         <a:cs typeface="Calibri" charset="0"/>
@@ -15497,7 +14976,7 @@
                         <a:buNone/>
                       </a:pPr>
                       <a:r>
-                        <a:rPr lang="en-US" sz="1200" dirty="0">
+                        <a:rPr lang="en-US" sz="1100" dirty="0">
                           <a:solidFill>
                             <a:srgbClr val="33444F"/>
                           </a:solidFill>
@@ -15505,9 +14984,9 @@
                           <a:ea typeface="Calibri" pitchFamily="34" charset="-122"/>
                           <a:cs typeface="Calibri" pitchFamily="34" charset="-120"/>
                         </a:rPr>
-                        <a:t>Factor VII deficiency; early warfarin; early/mild liver disease</a:t>
+                        <a:t>Factor VII deficiency; early warfarin/vit-K deficiency, liver disease</a:t>
                       </a:r>
-                      <a:endParaRPr lang="en-US" sz="1200" dirty="0">
+                      <a:endParaRPr lang="en-US" sz="1100" dirty="0">
                         <a:latin typeface="Calibri" charset="0"/>
                         <a:ea typeface="Calibri" charset="0"/>
                         <a:cs typeface="Calibri" charset="0"/>
@@ -15557,7 +15036,7 @@
                   </a:tcPr>
                 </a:tc>
               </a:tr>
-              <a:tr h="676656">
+              <a:tr h="512064">
                 <a:tc>
                   <a:txBody>
                     <a:bodyPr/>
@@ -15567,7 +15046,7 @@
                         <a:buNone/>
                       </a:pPr>
                       <a:r>
-                        <a:rPr lang="en-US" sz="1200" b="1" dirty="0">
+                        <a:rPr lang="en-US" sz="1100" b="1" dirty="0">
                           <a:solidFill>
                             <a:srgbClr val="1B2A38"/>
                           </a:solidFill>
@@ -15575,9 +15054,9 @@
                           <a:ea typeface="Calibri" pitchFamily="34" charset="-122"/>
                           <a:cs typeface="Calibri" pitchFamily="34" charset="-120"/>
                         </a:rPr>
-                        <a:t>Normal PT, ↑ aPTT</a:t>
+                        <a:t>Normal PT, ↑aPTT</a:t>
                       </a:r>
-                      <a:endParaRPr lang="en-US" sz="1200" dirty="0">
+                      <a:endParaRPr lang="en-US" sz="1100" dirty="0">
                         <a:latin typeface="Calibri" charset="0"/>
                         <a:ea typeface="Calibri" charset="0"/>
                         <a:cs typeface="Calibri" charset="0"/>
@@ -15635,7 +15114,7 @@
                         <a:buNone/>
                       </a:pPr>
                       <a:r>
-                        <a:rPr lang="en-US" sz="1200" dirty="0">
+                        <a:rPr lang="en-US" sz="1100" dirty="0">
                           <a:solidFill>
                             <a:srgbClr val="33444F"/>
                           </a:solidFill>
@@ -15643,9 +15122,9 @@
                           <a:ea typeface="Calibri" pitchFamily="34" charset="-122"/>
                           <a:cs typeface="Calibri" pitchFamily="34" charset="-120"/>
                         </a:rPr>
-                        <a:t>Heparin; factor VIII/IX/XI deficiency; lupus anticoagulant; factor XII (no bleeding)</a:t>
+                        <a:t>Hemophilia A/B, factor XI; heparin; lupus anticoagulant; factor XII</a:t>
                       </a:r>
-                      <a:endParaRPr lang="en-US" sz="1200" dirty="0">
+                      <a:endParaRPr lang="en-US" sz="1100" dirty="0">
                         <a:latin typeface="Calibri" charset="0"/>
                         <a:ea typeface="Calibri" charset="0"/>
                         <a:cs typeface="Calibri" charset="0"/>
@@ -15695,7 +15174,7 @@
                   </a:tcPr>
                 </a:tc>
               </a:tr>
-              <a:tr h="676656">
+              <a:tr h="512064">
                 <a:tc>
                   <a:txBody>
                     <a:bodyPr/>
@@ -15705,7 +15184,7 @@
                         <a:buNone/>
                       </a:pPr>
                       <a:r>
-                        <a:rPr lang="en-US" sz="1200" b="1" dirty="0">
+                        <a:rPr lang="en-US" sz="1100" b="1" dirty="0">
                           <a:solidFill>
                             <a:srgbClr val="1B2A38"/>
                           </a:solidFill>
@@ -15713,9 +15192,9 @@
                           <a:ea typeface="Calibri" pitchFamily="34" charset="-122"/>
                           <a:cs typeface="Calibri" pitchFamily="34" charset="-120"/>
                         </a:rPr>
-                        <a:t>↑ PT and ↑ aPTT</a:t>
+                        <a:t>↑PT and ↑aPTT</a:t>
                       </a:r>
-                      <a:endParaRPr lang="en-US" sz="1200" dirty="0">
+                      <a:endParaRPr lang="en-US" sz="1100" dirty="0">
                         <a:latin typeface="Calibri" charset="0"/>
                         <a:ea typeface="Calibri" charset="0"/>
                         <a:cs typeface="Calibri" charset="0"/>
@@ -15773,7 +15252,7 @@
                         <a:buNone/>
                       </a:pPr>
                       <a:r>
-                        <a:rPr lang="en-US" sz="1200" dirty="0">
+                        <a:rPr lang="en-US" sz="1100" dirty="0">
                           <a:solidFill>
                             <a:srgbClr val="33444F"/>
                           </a:solidFill>
@@ -15781,9 +15260,9 @@
                           <a:ea typeface="Calibri" pitchFamily="34" charset="-122"/>
                           <a:cs typeface="Calibri" pitchFamily="34" charset="-120"/>
                         </a:rPr>
-                        <a:t>Common-pathway defect; DIC; severe liver disease; vitamin K deficiency; supratherapeutic anticoagulation</a:t>
+                        <a:t>Common-pathway defect; DIC, severe liver disease, high-dose warfarin</a:t>
                       </a:r>
-                      <a:endParaRPr lang="en-US" sz="1200" dirty="0">
+                      <a:endParaRPr lang="en-US" sz="1100" dirty="0">
                         <a:latin typeface="Calibri" charset="0"/>
                         <a:ea typeface="Calibri" charset="0"/>
                         <a:cs typeface="Calibri" charset="0"/>
@@ -15833,7 +15312,7 @@
                   </a:tcPr>
                 </a:tc>
               </a:tr>
-              <a:tr h="676656">
+              <a:tr h="512064">
                 <a:tc>
                   <a:txBody>
                     <a:bodyPr/>
@@ -15843,7 +15322,7 @@
                         <a:buNone/>
                       </a:pPr>
                       <a:r>
-                        <a:rPr lang="en-US" sz="1200" b="1" dirty="0">
+                        <a:rPr lang="en-US" sz="1100" b="1" dirty="0">
                           <a:solidFill>
                             <a:srgbClr val="1B2A38"/>
                           </a:solidFill>
@@ -15851,9 +15330,9 @@
                           <a:ea typeface="Calibri" pitchFamily="34" charset="-122"/>
                           <a:cs typeface="Calibri" pitchFamily="34" charset="-120"/>
                         </a:rPr>
-                        <a:t>Normal PT/aPTT but bleeding</a:t>
+                        <a:t>Both normal, bleeding</a:t>
                       </a:r>
-                      <a:endParaRPr lang="en-US" sz="1200" dirty="0">
+                      <a:endParaRPr lang="en-US" sz="1100" dirty="0">
                         <a:latin typeface="Calibri" charset="0"/>
                         <a:ea typeface="Calibri" charset="0"/>
                         <a:cs typeface="Calibri" charset="0"/>
@@ -15911,7 +15390,7 @@
                         <a:buNone/>
                       </a:pPr>
                       <a:r>
-                        <a:rPr lang="en-US" sz="1200" dirty="0">
+                        <a:rPr lang="en-US" sz="1100" dirty="0">
                           <a:solidFill>
                             <a:srgbClr val="33444F"/>
                           </a:solidFill>
@@ -15919,9 +15398,9 @@
                           <a:ea typeface="Calibri" pitchFamily="34" charset="-122"/>
                           <a:cs typeface="Calibri" pitchFamily="34" charset="-120"/>
                         </a:rPr>
-                        <a:t>Von Willebrand disease, platelet function defect, factor XIII deficiency, vascular/fibrinolytic disorder</a:t>
+                        <a:t>Von Willebrand disease, platelet dysfunction, factor XIII deficiency</a:t>
                       </a:r>
-                      <a:endParaRPr lang="en-US" sz="1200" dirty="0">
+                      <a:endParaRPr lang="en-US" sz="1100" dirty="0">
                         <a:latin typeface="Calibri" charset="0"/>
                         <a:ea typeface="Calibri" charset="0"/>
                         <a:cs typeface="Calibri" charset="0"/>
@@ -15983,6 +15462,45 @@
         </p:nvSpPr>
         <p:spPr>
           <a:xfrm>
+            <a:off x="566928" y="6016752"/>
+            <a:ext cx="11057839" cy="365760"/>
+          </a:xfrm>
+          <a:prstGeom prst="rect">
+            <a:avLst/>
+          </a:prstGeom>
+          <a:noFill/>
+          <a:ln/>
+        </p:spPr>
+        <p:txBody>
+          <a:bodyPr wrap="square" lIns="0" tIns="0" rIns="0" bIns="0" rtlCol="0" anchor="ctr"/>
+          <a:lstStyle/>
+          <a:p>
+            <a:pPr algn="l" indent="0" marL="0">
+              <a:buNone/>
+            </a:pPr>
+            <a:r>
+              <a:rPr lang="en-US" sz="1050" i="1" dirty="0">
+                <a:solidFill>
+                  <a:srgbClr val="6B7B8A"/>
+                </a:solidFill>
+                <a:latin typeface="Calibri" pitchFamily="34" charset="0"/>
+                <a:ea typeface="Calibri" pitchFamily="34" charset="-122"/>
+                <a:cs typeface="Calibri" pitchFamily="34" charset="-120"/>
+              </a:rPr>
+              <a:t>Localize first with the pattern, then decide whether to mix or pursue specific factor/vWF testing.</a:t>
+            </a:r>
+            <a:endParaRPr lang="en-US" sz="1050" dirty="0"/>
+          </a:p>
+        </p:txBody>
+      </p:sp>
+      <p:sp>
+        <p:nvSpPr>
+          <p:cNvPr id="6" name="Text 3"/>
+          <p:cNvSpPr/>
+          <p:nvPr/>
+        </p:nvSpPr>
+        <p:spPr>
+          <a:xfrm>
             <a:off x="566928" y="6473952"/>
             <a:ext cx="7772400" cy="274320"/>
           </a:xfrm>
@@ -16016,805 +15534,7 @@
       </p:sp>
       <p:sp>
         <p:nvSpPr>
-          <p:cNvPr id="6" name="Text 3"/>
-          <p:cNvSpPr/>
-          <p:nvPr/>
-        </p:nvSpPr>
-        <p:spPr>
-          <a:xfrm>
-            <a:off x="9814255" y="6473952"/>
-            <a:ext cx="1828800" cy="274320"/>
-          </a:xfrm>
-          <a:prstGeom prst="rect">
-            <a:avLst/>
-          </a:prstGeom>
-          <a:noFill/>
-          <a:ln/>
-        </p:spPr>
-        <p:txBody>
-          <a:bodyPr wrap="square" lIns="0" tIns="0" rIns="0" bIns="0" rtlCol="0" anchor="ctr"/>
-          <a:lstStyle/>
-          <a:p>
-            <a:pPr algn="r" indent="0" marL="0">
-              <a:buNone/>
-            </a:pPr>
-            <a:r>
-              <a:rPr lang="en-US" sz="850" dirty="0">
-                <a:solidFill>
-                  <a:srgbClr val="9AA8B4"/>
-                </a:solidFill>
-                <a:latin typeface="Calibri" pitchFamily="34" charset="0"/>
-                <a:ea typeface="Calibri" pitchFamily="34" charset="-122"/>
-                <a:cs typeface="Calibri" pitchFamily="34" charset="-120"/>
-              </a:rPr>
-              <a:t>CP Lecture Series</a:t>
-            </a:r>
-            <a:pPr algn="r" indent="0" marL="0">
-              <a:buNone/>
-            </a:pPr>
-            <a:r>
-              <a:rPr lang="en-US" sz="850" dirty="0">
-                <a:solidFill>
-                  <a:srgbClr val="DCE4EC"/>
-                </a:solidFill>
-                <a:latin typeface="Calibri" pitchFamily="34" charset="0"/>
-                <a:ea typeface="Calibri" pitchFamily="34" charset="-122"/>
-                <a:cs typeface="Calibri" pitchFamily="34" charset="-120"/>
-              </a:rPr>
-              <a:t>   ·   </a:t>
-            </a:r>
-            <a:pPr algn="r" indent="0" marL="0">
-              <a:buNone/>
-            </a:pPr>
-            <a:r>
-              <a:rPr lang="en-US" sz="850" b="1" dirty="0">
-                <a:solidFill>
-                  <a:srgbClr val="C62133"/>
-                </a:solidFill>
-                <a:latin typeface="Calibri" pitchFamily="34" charset="0"/>
-                <a:ea typeface="Calibri" pitchFamily="34" charset="-122"/>
-                <a:cs typeface="Calibri" pitchFamily="34" charset="-120"/>
-              </a:rPr>
-              <a:t>6</a:t>
-            </a:r>
-            <a:endParaRPr lang="en-US" sz="850" dirty="0"/>
-          </a:p>
-        </p:txBody>
-      </p:sp>
-    </p:spTree>
-  </p:cSld>
-  <p:clrMapOvr>
-    <a:masterClrMapping/>
-  </p:clrMapOvr>
-</p:sld>
-</file>
-
-<file path=ppt/slides/slide8.xml><?xml version="1.0" encoding="utf-8"?>
-<p:sld xmlns:a="http://schemas.openxmlformats.org/drawingml/2006/main" xmlns:r="http://schemas.openxmlformats.org/officeDocument/2006/relationships" xmlns:p="http://schemas.openxmlformats.org/presentationml/2006/main">
-  <p:cSld name="Slide 8">
-    <p:bg>
-      <p:bgPr>
-        <a:solidFill>
-          <a:srgbClr val="8E1622"/>
-        </a:solidFill>
-      </p:bgPr>
-    </p:bg>
-    <p:spTree>
-      <p:nvGrpSpPr>
-        <p:cNvPr id="1" name=""/>
-        <p:cNvGrpSpPr/>
-        <p:nvPr/>
-      </p:nvGrpSpPr>
-      <p:grpSpPr>
-        <a:xfrm>
-          <a:off x="0" y="0"/>
-          <a:ext cx="0" cy="0"/>
-          <a:chOff x="0" y="0"/>
-          <a:chExt cx="0" cy="0"/>
-        </a:xfrm>
-      </p:grpSpPr>
-      <p:sp>
-        <p:nvSpPr>
-          <p:cNvPr id="2" name="Shape 0"/>
-          <p:cNvSpPr/>
-          <p:nvPr/>
-        </p:nvSpPr>
-        <p:spPr>
-          <a:xfrm>
-            <a:off x="9509760" y="-1280160"/>
-            <a:ext cx="4754880" cy="4754880"/>
-          </a:xfrm>
-          <a:prstGeom prst="ellipse">
-            <a:avLst/>
-          </a:prstGeom>
-          <a:solidFill>
-            <a:srgbClr val="FFFFFF">
-              <a:alpha val="8000"/>
-            </a:srgbClr>
-          </a:solidFill>
-          <a:ln/>
-        </p:spPr>
-      </p:sp>
-      <p:sp>
-        <p:nvSpPr>
-          <p:cNvPr id="3" name="Shape 1"/>
-          <p:cNvSpPr/>
-          <p:nvPr/>
-        </p:nvSpPr>
-        <p:spPr>
-          <a:xfrm>
-            <a:off x="10607040" y="3931920"/>
-            <a:ext cx="3108960" cy="3108960"/>
-          </a:xfrm>
-          <a:prstGeom prst="ellipse">
-            <a:avLst/>
-          </a:prstGeom>
-          <a:solidFill>
-            <a:srgbClr val="FFFFFF">
-              <a:alpha val="6000"/>
-            </a:srgbClr>
-          </a:solidFill>
-          <a:ln/>
-        </p:spPr>
-      </p:sp>
-      <p:sp>
-        <p:nvSpPr>
-          <p:cNvPr id="4" name="Text 2"/>
-          <p:cNvSpPr/>
-          <p:nvPr/>
-        </p:nvSpPr>
-        <p:spPr>
-          <a:xfrm>
-            <a:off x="566928" y="1783080"/>
-            <a:ext cx="2743200" cy="1463040"/>
-          </a:xfrm>
-          <a:prstGeom prst="rect">
-            <a:avLst/>
-          </a:prstGeom>
-          <a:noFill/>
-          <a:ln/>
-        </p:spPr>
-        <p:txBody>
-          <a:bodyPr wrap="square" lIns="0" tIns="0" rIns="0" bIns="0" rtlCol="0" anchor="ctr"/>
-          <a:lstStyle/>
-          <a:p>
-            <a:pPr algn="l" indent="0" marL="0">
-              <a:buNone/>
-            </a:pPr>
-            <a:r>
-              <a:rPr lang="en-US" sz="6400" b="1" dirty="0">
-                <a:solidFill>
-                  <a:srgbClr val="FBEAEC"/>
-                </a:solidFill>
-                <a:latin typeface="Calibri" pitchFamily="34" charset="0"/>
-                <a:ea typeface="Calibri" pitchFamily="34" charset="-122"/>
-                <a:cs typeface="Calibri" pitchFamily="34" charset="-120"/>
-              </a:rPr>
-              <a:t>02</a:t>
-            </a:r>
-            <a:endParaRPr lang="en-US" sz="6400" dirty="0"/>
-          </a:p>
-        </p:txBody>
-      </p:sp>
-      <p:sp>
-        <p:nvSpPr>
-          <p:cNvPr id="5" name="Text 3"/>
-          <p:cNvSpPr/>
-          <p:nvPr/>
-        </p:nvSpPr>
-        <p:spPr>
-          <a:xfrm>
-            <a:off x="566928" y="3246120"/>
-            <a:ext cx="10058400" cy="365760"/>
-          </a:xfrm>
-          <a:prstGeom prst="rect">
-            <a:avLst/>
-          </a:prstGeom>
-          <a:noFill/>
-          <a:ln/>
-        </p:spPr>
-        <p:txBody>
-          <a:bodyPr wrap="square" lIns="0" tIns="0" rIns="0" bIns="0" rtlCol="0" anchor="ctr"/>
-          <a:lstStyle/>
-          <a:p>
-            <a:pPr algn="l" indent="0" marL="0">
-              <a:buNone/>
-            </a:pPr>
-            <a:r>
-              <a:rPr lang="en-US" sz="1300" b="1" spc="250" kern="0" dirty="0">
-                <a:solidFill>
-                  <a:srgbClr val="F2C9D9"/>
-                </a:solidFill>
-                <a:latin typeface="Calibri" pitchFamily="34" charset="0"/>
-                <a:ea typeface="Calibri" pitchFamily="34" charset="-122"/>
-                <a:cs typeface="Calibri" pitchFamily="34" charset="-120"/>
-              </a:rPr>
-              <a:t>PART TWO</a:t>
-            </a:r>
-            <a:endParaRPr lang="en-US" sz="1300" dirty="0"/>
-          </a:p>
-        </p:txBody>
-      </p:sp>
-      <p:sp>
-        <p:nvSpPr>
-          <p:cNvPr id="6" name="Text 4"/>
-          <p:cNvSpPr/>
-          <p:nvPr/>
-        </p:nvSpPr>
-        <p:spPr>
-          <a:xfrm>
-            <a:off x="566928" y="3611880"/>
-            <a:ext cx="10607040" cy="1463040"/>
-          </a:xfrm>
-          <a:prstGeom prst="rect">
-            <a:avLst/>
-          </a:prstGeom>
-          <a:noFill/>
-          <a:ln/>
-        </p:spPr>
-        <p:txBody>
-          <a:bodyPr wrap="square" lIns="0" tIns="0" rIns="0" bIns="0" rtlCol="0" anchor="t"/>
-          <a:lstStyle/>
-          <a:p>
-            <a:pPr algn="l" indent="0" marL="0">
-              <a:buNone/>
-            </a:pPr>
-            <a:r>
-              <a:rPr lang="en-US" sz="3800" b="1" dirty="0">
-                <a:solidFill>
-                  <a:srgbClr val="FFFFFF"/>
-                </a:solidFill>
-                <a:latin typeface="Calibri" pitchFamily="34" charset="0"/>
-                <a:ea typeface="Calibri" pitchFamily="34" charset="-122"/>
-                <a:cs typeface="Calibri" pitchFamily="34" charset="-120"/>
-              </a:rPr>
-              <a:t>Mixing Studies &amp; Inhibitors</a:t>
-            </a:r>
-            <a:endParaRPr lang="en-US" sz="3800" dirty="0"/>
-          </a:p>
-        </p:txBody>
-      </p:sp>
-    </p:spTree>
-  </p:cSld>
-  <p:clrMapOvr>
-    <a:masterClrMapping/>
-  </p:clrMapOvr>
-</p:sld>
-</file>
-
-<file path=ppt/slides/slide9.xml><?xml version="1.0" encoding="utf-8"?>
-<p:sld xmlns:a="http://schemas.openxmlformats.org/drawingml/2006/main" xmlns:r="http://schemas.openxmlformats.org/officeDocument/2006/relationships" xmlns:p="http://schemas.openxmlformats.org/presentationml/2006/main">
-  <p:cSld name="Slide 9">
-    <p:bg>
-      <p:bgPr>
-        <a:solidFill>
-          <a:srgbClr val="FFFFFF"/>
-        </a:solidFill>
-      </p:bgPr>
-    </p:bg>
-    <p:spTree>
-      <p:nvGrpSpPr>
-        <p:cNvPr id="1" name=""/>
-        <p:cNvGrpSpPr/>
-        <p:nvPr/>
-      </p:nvGrpSpPr>
-      <p:grpSpPr>
-        <a:xfrm>
-          <a:off x="0" y="0"/>
-          <a:ext cx="0" cy="0"/>
-          <a:chOff x="0" y="0"/>
-          <a:chExt cx="0" cy="0"/>
-        </a:xfrm>
-      </p:grpSpPr>
-      <p:sp>
-        <p:nvSpPr>
-          <p:cNvPr id="2" name="Text 0"/>
-          <p:cNvSpPr/>
-          <p:nvPr/>
-        </p:nvSpPr>
-        <p:spPr>
-          <a:xfrm>
-            <a:off x="566928" y="329184"/>
-            <a:ext cx="10515600" cy="310896"/>
-          </a:xfrm>
-          <a:prstGeom prst="rect">
-            <a:avLst/>
-          </a:prstGeom>
-          <a:noFill/>
-          <a:ln/>
-        </p:spPr>
-        <p:txBody>
-          <a:bodyPr wrap="square" lIns="0" tIns="0" rIns="0" bIns="0" rtlCol="0" anchor="ctr"/>
-          <a:lstStyle/>
-          <a:p>
-            <a:pPr algn="l" indent="0" marL="0">
-              <a:buNone/>
-            </a:pPr>
-            <a:r>
-              <a:rPr lang="en-US" sz="1100" b="1" spc="150" kern="0" dirty="0">
-                <a:solidFill>
-                  <a:srgbClr val="C62133"/>
-                </a:solidFill>
-                <a:latin typeface="Calibri" pitchFamily="34" charset="0"/>
-                <a:ea typeface="Calibri" pitchFamily="34" charset="-122"/>
-                <a:cs typeface="Calibri" pitchFamily="34" charset="-120"/>
-              </a:rPr>
-              <a:t>HEMATOLOGY &amp; COAGULATION   ·   FACTOR DEFICIENCY vs INHIBITOR</a:t>
-            </a:r>
-            <a:endParaRPr lang="en-US" sz="1100" dirty="0"/>
-          </a:p>
-        </p:txBody>
-      </p:sp>
-      <p:sp>
-        <p:nvSpPr>
-          <p:cNvPr id="3" name="Text 1"/>
-          <p:cNvSpPr/>
-          <p:nvPr/>
-        </p:nvSpPr>
-        <p:spPr>
-          <a:xfrm>
-            <a:off x="566928" y="713232"/>
-            <a:ext cx="11064240" cy="749808"/>
-          </a:xfrm>
-          <a:prstGeom prst="rect">
-            <a:avLst/>
-          </a:prstGeom>
-          <a:noFill/>
-          <a:ln/>
-        </p:spPr>
-        <p:txBody>
-          <a:bodyPr wrap="square" lIns="0" tIns="0" rIns="0" bIns="0" rtlCol="0" anchor="ctr"/>
-          <a:lstStyle/>
-          <a:p>
-            <a:pPr algn="l" indent="0" marL="0">
-              <a:buNone/>
-            </a:pPr>
-            <a:r>
-              <a:rPr lang="en-US" sz="3000" b="1" dirty="0">
-                <a:solidFill>
-                  <a:srgbClr val="0E3A5F"/>
-                </a:solidFill>
-                <a:latin typeface="Calibri" pitchFamily="34" charset="0"/>
-                <a:ea typeface="Calibri" pitchFamily="34" charset="-122"/>
-                <a:cs typeface="Calibri" pitchFamily="34" charset="-120"/>
-              </a:rPr>
-              <a:t>The 1:1 Mixing Study</a:t>
-            </a:r>
-            <a:endParaRPr lang="en-US" sz="3000" dirty="0"/>
-          </a:p>
-        </p:txBody>
-      </p:sp>
-      <p:sp>
-        <p:nvSpPr>
-          <p:cNvPr id="4" name="Shape 2"/>
-          <p:cNvSpPr/>
-          <p:nvPr/>
-        </p:nvSpPr>
-        <p:spPr>
-          <a:xfrm>
-            <a:off x="566928" y="1828800"/>
-            <a:ext cx="3442106" cy="1188720"/>
-          </a:xfrm>
-          <a:prstGeom prst="roundRect">
-            <a:avLst>
-              <a:gd name="adj" fmla="val 5385"/>
-            </a:avLst>
-          </a:prstGeom>
-          <a:solidFill>
-            <a:srgbClr val="C62133"/>
-          </a:solidFill>
-          <a:ln w="15875">
-            <a:solidFill>
-              <a:srgbClr val="C62133"/>
-            </a:solidFill>
-            <a:prstDash val="solid"/>
-          </a:ln>
-          <a:effectLst>
-            <a:outerShdw sx="100000" sy="100000" kx="0" ky="0" algn="bl" rotWithShape="0" blurRad="88900" dist="25400" dir="5400000">
-              <a:srgbClr val="22303C">
-                <a:alpha val="12000"/>
-              </a:srgbClr>
-            </a:outerShdw>
-          </a:effectLst>
-        </p:spPr>
-      </p:sp>
-      <p:sp>
-        <p:nvSpPr>
-          <p:cNvPr id="5" name="Text 3"/>
-          <p:cNvSpPr/>
-          <p:nvPr/>
-        </p:nvSpPr>
-        <p:spPr>
-          <a:xfrm>
-            <a:off x="621792" y="1828800"/>
-            <a:ext cx="3332378" cy="1188720"/>
-          </a:xfrm>
-          <a:prstGeom prst="rect">
-            <a:avLst/>
-          </a:prstGeom>
-          <a:noFill/>
-          <a:ln/>
-        </p:spPr>
-        <p:txBody>
-          <a:bodyPr wrap="square" lIns="25400" tIns="25400" rIns="25400" bIns="25400" rtlCol="0" anchor="ctr"/>
-          <a:lstStyle/>
-          <a:p>
-            <a:pPr algn="ctr" indent="0" marL="0">
-              <a:buNone/>
-            </a:pPr>
-            <a:r>
-              <a:rPr lang="en-US" sz="1150" b="1" dirty="0">
-                <a:solidFill>
-                  <a:srgbClr val="FFFFFF"/>
-                </a:solidFill>
-                <a:latin typeface="Calibri" pitchFamily="34" charset="0"/>
-                <a:ea typeface="Calibri" pitchFamily="34" charset="-122"/>
-                <a:cs typeface="Calibri" pitchFamily="34" charset="-120"/>
-              </a:rPr>
-              <a:t>Prolonged PT/aPTT</a:t>
-            </a:r>
-            <a:endParaRPr lang="en-US" sz="1150" dirty="0"/>
-          </a:p>
-          <a:p>
-            <a:pPr algn="ctr" indent="0" marL="0">
-              <a:buNone/>
-            </a:pPr>
-            <a:r>
-              <a:rPr lang="en-US" sz="1150" b="1" dirty="0">
-                <a:solidFill>
-                  <a:srgbClr val="FFFFFF"/>
-                </a:solidFill>
-                <a:latin typeface="Calibri" pitchFamily="34" charset="0"/>
-                <a:ea typeface="Calibri" pitchFamily="34" charset="-122"/>
-                <a:cs typeface="Calibri" pitchFamily="34" charset="-120"/>
-              </a:rPr>
-              <a:t>mix 1:1 with normal plasma</a:t>
-            </a:r>
-            <a:endParaRPr lang="en-US" sz="1150" dirty="0"/>
-          </a:p>
-        </p:txBody>
-      </p:sp>
-      <p:sp>
-        <p:nvSpPr>
-          <p:cNvPr id="6" name="Shape 4"/>
-          <p:cNvSpPr/>
-          <p:nvPr/>
-        </p:nvSpPr>
-        <p:spPr>
-          <a:xfrm>
-            <a:off x="4027322" y="2423160"/>
-            <a:ext cx="329184" cy="0"/>
-          </a:xfrm>
-          <a:prstGeom prst="line">
-            <a:avLst/>
-          </a:prstGeom>
-          <a:noFill/>
-          <a:ln w="22225">
-            <a:solidFill>
-              <a:srgbClr val="C62133"/>
-            </a:solidFill>
-            <a:prstDash val="solid"/>
-            <a:tailEnd type="triangle"/>
-          </a:ln>
-        </p:spPr>
-      </p:sp>
-      <p:sp>
-        <p:nvSpPr>
-          <p:cNvPr id="7" name="Shape 5"/>
-          <p:cNvSpPr/>
-          <p:nvPr/>
-        </p:nvSpPr>
-        <p:spPr>
-          <a:xfrm>
-            <a:off x="4374794" y="1828800"/>
-            <a:ext cx="3442106" cy="1188720"/>
-          </a:xfrm>
-          <a:prstGeom prst="roundRect">
-            <a:avLst>
-              <a:gd name="adj" fmla="val 5385"/>
-            </a:avLst>
-          </a:prstGeom>
-          <a:solidFill>
-            <a:srgbClr val="FFFFFF"/>
-          </a:solidFill>
-          <a:ln w="15875">
-            <a:solidFill>
-              <a:srgbClr val="DCE4EC"/>
-            </a:solidFill>
-            <a:prstDash val="solid"/>
-          </a:ln>
-          <a:effectLst>
-            <a:outerShdw sx="100000" sy="100000" kx="0" ky="0" algn="bl" rotWithShape="0" blurRad="88900" dist="25400" dir="5400000">
-              <a:srgbClr val="22303C">
-                <a:alpha val="12000"/>
-              </a:srgbClr>
-            </a:outerShdw>
-          </a:effectLst>
-        </p:spPr>
-      </p:sp>
-      <p:sp>
-        <p:nvSpPr>
-          <p:cNvPr id="8" name="Text 6"/>
-          <p:cNvSpPr/>
-          <p:nvPr/>
-        </p:nvSpPr>
-        <p:spPr>
-          <a:xfrm>
-            <a:off x="4429658" y="1828800"/>
-            <a:ext cx="3332378" cy="1188720"/>
-          </a:xfrm>
-          <a:prstGeom prst="rect">
-            <a:avLst/>
-          </a:prstGeom>
-          <a:noFill/>
-          <a:ln/>
-        </p:spPr>
-        <p:txBody>
-          <a:bodyPr wrap="square" lIns="25400" tIns="25400" rIns="25400" bIns="25400" rtlCol="0" anchor="ctr"/>
-          <a:lstStyle/>
-          <a:p>
-            <a:pPr algn="ctr" indent="0" marL="0">
-              <a:buNone/>
-            </a:pPr>
-            <a:r>
-              <a:rPr lang="en-US" sz="1150" b="1" dirty="0">
-                <a:solidFill>
-                  <a:srgbClr val="1B2A38"/>
-                </a:solidFill>
-                <a:latin typeface="Calibri" pitchFamily="34" charset="0"/>
-                <a:ea typeface="Calibri" pitchFamily="34" charset="-122"/>
-                <a:cs typeface="Calibri" pitchFamily="34" charset="-120"/>
-              </a:rPr>
-              <a:t>CORRECTS → factor deficiency</a:t>
-            </a:r>
-            <a:endParaRPr lang="en-US" sz="1150" dirty="0"/>
-          </a:p>
-          <a:p>
-            <a:pPr algn="ctr" indent="0" marL="0">
-              <a:buNone/>
-            </a:pPr>
-            <a:r>
-              <a:rPr lang="en-US" sz="1150" b="1" dirty="0">
-                <a:solidFill>
-                  <a:srgbClr val="1B2A38"/>
-                </a:solidFill>
-                <a:latin typeface="Calibri" pitchFamily="34" charset="0"/>
-                <a:ea typeface="Calibri" pitchFamily="34" charset="-122"/>
-                <a:cs typeface="Calibri" pitchFamily="34" charset="-120"/>
-              </a:rPr>
-              <a:t>→ specific factor assays</a:t>
-            </a:r>
-            <a:endParaRPr lang="en-US" sz="1150" dirty="0"/>
-          </a:p>
-        </p:txBody>
-      </p:sp>
-      <p:sp>
-        <p:nvSpPr>
-          <p:cNvPr id="9" name="Shape 7"/>
-          <p:cNvSpPr/>
-          <p:nvPr/>
-        </p:nvSpPr>
-        <p:spPr>
-          <a:xfrm>
-            <a:off x="7835189" y="2423160"/>
-            <a:ext cx="329184" cy="0"/>
-          </a:xfrm>
-          <a:prstGeom prst="line">
-            <a:avLst/>
-          </a:prstGeom>
-          <a:noFill/>
-          <a:ln w="22225">
-            <a:solidFill>
-              <a:srgbClr val="C62133"/>
-            </a:solidFill>
-            <a:prstDash val="solid"/>
-            <a:tailEnd type="triangle"/>
-          </a:ln>
-        </p:spPr>
-      </p:sp>
-      <p:sp>
-        <p:nvSpPr>
-          <p:cNvPr id="10" name="Shape 8"/>
-          <p:cNvSpPr/>
-          <p:nvPr/>
-        </p:nvSpPr>
-        <p:spPr>
-          <a:xfrm>
-            <a:off x="8182661" y="1828800"/>
-            <a:ext cx="3442106" cy="1188720"/>
-          </a:xfrm>
-          <a:prstGeom prst="roundRect">
-            <a:avLst>
-              <a:gd name="adj" fmla="val 5385"/>
-            </a:avLst>
-          </a:prstGeom>
-          <a:solidFill>
-            <a:srgbClr val="FFFFFF"/>
-          </a:solidFill>
-          <a:ln w="15875">
-            <a:solidFill>
-              <a:srgbClr val="DCE4EC"/>
-            </a:solidFill>
-            <a:prstDash val="solid"/>
-          </a:ln>
-          <a:effectLst>
-            <a:outerShdw sx="100000" sy="100000" kx="0" ky="0" algn="bl" rotWithShape="0" blurRad="88900" dist="25400" dir="5400000">
-              <a:srgbClr val="22303C">
-                <a:alpha val="12000"/>
-              </a:srgbClr>
-            </a:outerShdw>
-          </a:effectLst>
-        </p:spPr>
-      </p:sp>
-      <p:sp>
-        <p:nvSpPr>
-          <p:cNvPr id="11" name="Text 9"/>
-          <p:cNvSpPr/>
-          <p:nvPr/>
-        </p:nvSpPr>
-        <p:spPr>
-          <a:xfrm>
-            <a:off x="8237525" y="1828800"/>
-            <a:ext cx="3332378" cy="1188720"/>
-          </a:xfrm>
-          <a:prstGeom prst="rect">
-            <a:avLst/>
-          </a:prstGeom>
-          <a:noFill/>
-          <a:ln/>
-        </p:spPr>
-        <p:txBody>
-          <a:bodyPr wrap="square" lIns="25400" tIns="25400" rIns="25400" bIns="25400" rtlCol="0" anchor="ctr"/>
-          <a:lstStyle/>
-          <a:p>
-            <a:pPr algn="ctr" indent="0" marL="0">
-              <a:buNone/>
-            </a:pPr>
-            <a:r>
-              <a:rPr lang="en-US" sz="1150" b="1" dirty="0">
-                <a:solidFill>
-                  <a:srgbClr val="1B2A38"/>
-                </a:solidFill>
-                <a:latin typeface="Calibri" pitchFamily="34" charset="0"/>
-                <a:ea typeface="Calibri" pitchFamily="34" charset="-122"/>
-                <a:cs typeface="Calibri" pitchFamily="34" charset="-120"/>
-              </a:rPr>
-              <a:t>DOES NOT CORRECT → inhibitor</a:t>
-            </a:r>
-            <a:endParaRPr lang="en-US" sz="1150" dirty="0"/>
-          </a:p>
-          <a:p>
-            <a:pPr algn="ctr" indent="0" marL="0">
-              <a:buNone/>
-            </a:pPr>
-            <a:r>
-              <a:rPr lang="en-US" sz="1150" b="1" dirty="0">
-                <a:solidFill>
-                  <a:srgbClr val="1B2A38"/>
-                </a:solidFill>
-                <a:latin typeface="Calibri" pitchFamily="34" charset="0"/>
-                <a:ea typeface="Calibri" pitchFamily="34" charset="-122"/>
-                <a:cs typeface="Calibri" pitchFamily="34" charset="-120"/>
-              </a:rPr>
-              <a:t>(LA, factor inhibitor, heparin)</a:t>
-            </a:r>
-            <a:endParaRPr lang="en-US" sz="1150" dirty="0"/>
-          </a:p>
-        </p:txBody>
-      </p:sp>
-      <p:sp>
-        <p:nvSpPr>
-          <p:cNvPr id="12" name="Shape 10"/>
-          <p:cNvSpPr/>
-          <p:nvPr/>
-        </p:nvSpPr>
-        <p:spPr>
-          <a:xfrm>
-            <a:off x="566928" y="3246120"/>
-            <a:ext cx="11057839" cy="914400"/>
-          </a:xfrm>
-          <a:prstGeom prst="roundRect">
-            <a:avLst>
-              <a:gd name="adj" fmla="val 9000"/>
-            </a:avLst>
-          </a:prstGeom>
-          <a:solidFill>
-            <a:srgbClr val="FBEAEC"/>
-          </a:solidFill>
-          <a:ln/>
-          <a:effectLst>
-            <a:outerShdw sx="100000" sy="100000" kx="0" ky="0" algn="bl" rotWithShape="0" blurRad="88900" dist="25400" dir="5400000">
-              <a:srgbClr val="22303C">
-                <a:alpha val="12000"/>
-              </a:srgbClr>
-            </a:outerShdw>
-          </a:effectLst>
-        </p:spPr>
-      </p:sp>
-      <p:sp>
-        <p:nvSpPr>
-          <p:cNvPr id="13" name="Text 11"/>
-          <p:cNvSpPr/>
-          <p:nvPr/>
-        </p:nvSpPr>
-        <p:spPr>
-          <a:xfrm>
-            <a:off x="841248" y="3246120"/>
-            <a:ext cx="10509199" cy="914400"/>
-          </a:xfrm>
-          <a:prstGeom prst="rect">
-            <a:avLst/>
-          </a:prstGeom>
-          <a:noFill/>
-          <a:ln/>
-        </p:spPr>
-        <p:txBody>
-          <a:bodyPr wrap="square" lIns="0" tIns="0" rIns="0" bIns="0" rtlCol="0" anchor="ctr"/>
-          <a:lstStyle/>
-          <a:p>
-            <a:pPr algn="l" indent="0" marL="0">
-              <a:lnSpc>
-                <a:spcPct val="105000"/>
-              </a:lnSpc>
-              <a:buNone/>
-            </a:pPr>
-            <a:r>
-              <a:rPr lang="en-US" sz="1300" dirty="0">
-                <a:solidFill>
-                  <a:srgbClr val="33444F"/>
-                </a:solidFill>
-                <a:latin typeface="Calibri" pitchFamily="34" charset="0"/>
-                <a:ea typeface="Calibri" pitchFamily="34" charset="-122"/>
-                <a:cs typeface="Calibri" pitchFamily="34" charset="-120"/>
-              </a:rPr>
-              <a:t>Incubate 1 h at 37°C: further prolongation suggests a time-dependent factor VIII inhibitor. A PT that corrects often means multifactor deficiency (liver, vitamin K, warfarin).</a:t>
-            </a:r>
-            <a:endParaRPr lang="en-US" sz="1300" dirty="0"/>
-          </a:p>
-        </p:txBody>
-      </p:sp>
-      <p:sp>
-        <p:nvSpPr>
-          <p:cNvPr id="14" name="Text 12"/>
-          <p:cNvSpPr/>
-          <p:nvPr/>
-        </p:nvSpPr>
-        <p:spPr>
-          <a:xfrm>
-            <a:off x="566928" y="6473952"/>
-            <a:ext cx="7772400" cy="274320"/>
-          </a:xfrm>
-          <a:prstGeom prst="rect">
-            <a:avLst/>
-          </a:prstGeom>
-          <a:noFill/>
-          <a:ln/>
-        </p:spPr>
-        <p:txBody>
-          <a:bodyPr wrap="square" lIns="0" tIns="0" rIns="0" bIns="0" rtlCol="0" anchor="ctr"/>
-          <a:lstStyle/>
-          <a:p>
-            <a:pPr algn="l" indent="0" marL="0">
-              <a:buNone/>
-            </a:pPr>
-            <a:r>
-              <a:rPr lang="en-US" sz="850" dirty="0">
-                <a:solidFill>
-                  <a:srgbClr val="9AA8B4"/>
-                </a:solidFill>
-                <a:latin typeface="Calibri" pitchFamily="34" charset="0"/>
-                <a:ea typeface="Calibri" pitchFamily="34" charset="-122"/>
-                <a:cs typeface="Calibri" pitchFamily="34" charset="-120"/>
-              </a:rPr>
-              <a:t>Makassed General Hospital  ·  Department of Laboratory Medicine</a:t>
-            </a:r>
-            <a:endParaRPr lang="en-US" sz="850" dirty="0"/>
-          </a:p>
-        </p:txBody>
-      </p:sp>
-      <p:sp>
-        <p:nvSpPr>
-          <p:cNvPr id="15" name="Text 13"/>
+          <p:cNvPr id="7" name="Text 4"/>
           <p:cNvSpPr/>
           <p:nvPr/>
         </p:nvSpPr>

--- a/decks/Coag_05_Coagulation-Testing-and-Bleeding-Thrombosis.pptx
+++ b/decks/Coag_05_Coagulation-Testing-and-Bleeding-Thrombosis.pptx
@@ -25,9 +25,13 @@
     <p:sldId id="273" r:id="rId19"/>
     <p:sldId id="274" r:id="rId20"/>
     <p:sldId id="275" r:id="rId21"/>
+    <p:sldId id="284" r:id="rId35"/>
     <p:sldId id="276" r:id="rId22"/>
+    <p:sldId id="283" r:id="rId34"/>
     <p:sldId id="277" r:id="rId23"/>
+    <p:sldId id="282" r:id="rId33"/>
     <p:sldId id="278" r:id="rId24"/>
+    <p:sldId id="281" r:id="rId32"/>
     <p:sldId id="279" r:id="rId25"/>
     <p:sldId id="280" r:id="rId26"/>
   </p:sldIdLst>
@@ -3032,6 +3036,10 @@
           </a:solidFill>
           <a:ln/>
         </p:spPr>
+        <p:txBody>
+          <a:bodyPr/>
+          <a:p/>
+        </p:txBody>
       </p:sp>
       <p:sp>
         <p:nvSpPr>
@@ -3054,6 +3062,10 @@
           </a:solidFill>
           <a:ln/>
         </p:spPr>
+        <p:txBody>
+          <a:bodyPr/>
+          <a:p/>
+        </p:txBody>
       </p:sp>
       <p:sp>
         <p:nvSpPr>
@@ -3076,6 +3088,10 @@
           </a:solidFill>
           <a:ln/>
         </p:spPr>
+        <p:txBody>
+          <a:bodyPr/>
+          <a:p/>
+        </p:txBody>
       </p:sp>
       <p:sp>
         <p:nvSpPr>
@@ -3098,6 +3114,10 @@
           </a:solidFill>
           <a:ln/>
         </p:spPr>
+        <p:txBody>
+          <a:bodyPr/>
+          <a:p/>
+        </p:txBody>
       </p:sp>
       <p:sp>
         <p:nvSpPr>
@@ -3519,6 +3539,10 @@
             </a:outerShdw>
           </a:effectLst>
         </p:spPr>
+        <p:txBody>
+          <a:bodyPr/>
+          <a:p/>
+        </p:txBody>
       </p:sp>
       <p:pic>
         <p:nvPicPr>
@@ -3827,6 +3851,10 @@
             </a:outerShdw>
           </a:effectLst>
         </p:spPr>
+        <p:txBody>
+          <a:bodyPr/>
+          <a:p/>
+        </p:txBody>
       </p:sp>
       <p:sp>
         <p:nvSpPr>
@@ -4001,6 +4029,10 @@
             </a:outerShdw>
           </a:effectLst>
         </p:spPr>
+        <p:txBody>
+          <a:bodyPr/>
+          <a:p/>
+        </p:txBody>
       </p:sp>
       <p:sp>
         <p:nvSpPr>
@@ -4306,6 +4338,10 @@
           </a:solidFill>
           <a:ln/>
         </p:spPr>
+        <p:txBody>
+          <a:bodyPr/>
+          <a:p/>
+        </p:txBody>
       </p:sp>
       <p:sp>
         <p:nvSpPr>
@@ -4328,6 +4364,10 @@
           </a:solidFill>
           <a:ln/>
         </p:spPr>
+        <p:txBody>
+          <a:bodyPr/>
+          <a:p/>
+        </p:txBody>
       </p:sp>
       <p:sp>
         <p:nvSpPr>
@@ -4584,6 +4624,10 @@
             </a:outerShdw>
           </a:effectLst>
         </p:spPr>
+        <p:txBody>
+          <a:bodyPr/>
+          <a:p/>
+        </p:txBody>
       </p:sp>
       <p:sp>
         <p:nvSpPr>
@@ -4758,6 +4802,10 @@
             </a:outerShdw>
           </a:effectLst>
         </p:spPr>
+        <p:txBody>
+          <a:bodyPr/>
+          <a:p/>
+        </p:txBody>
       </p:sp>
       <p:sp>
         <p:nvSpPr>
@@ -5148,6 +5196,10 @@
             </a:outerShdw>
           </a:effectLst>
         </p:spPr>
+        <p:txBody>
+          <a:bodyPr/>
+          <a:p/>
+        </p:txBody>
       </p:sp>
       <p:sp>
         <p:nvSpPr>
@@ -5258,6 +5310,10 @@
             </a:outerShdw>
           </a:effectLst>
         </p:spPr>
+        <p:txBody>
+          <a:bodyPr/>
+          <a:p/>
+        </p:txBody>
       </p:sp>
       <p:sp>
         <p:nvSpPr>
@@ -5687,6 +5743,10 @@
             </a:outerShdw>
           </a:effectLst>
         </p:spPr>
+        <p:txBody>
+          <a:bodyPr/>
+          <a:p/>
+        </p:txBody>
       </p:sp>
       <p:sp>
         <p:nvSpPr>
@@ -6013,6 +6073,10 @@
             </a:outerShdw>
           </a:effectLst>
         </p:spPr>
+        <p:txBody>
+          <a:bodyPr/>
+          <a:p/>
+        </p:txBody>
       </p:sp>
       <p:sp>
         <p:nvSpPr>
@@ -6123,6 +6187,10 @@
             </a:outerShdw>
           </a:effectLst>
         </p:spPr>
+        <p:txBody>
+          <a:bodyPr/>
+          <a:p/>
+        </p:txBody>
       </p:sp>
       <p:sp>
         <p:nvSpPr>
@@ -6552,6 +6620,10 @@
             </a:outerShdw>
           </a:effectLst>
         </p:spPr>
+        <p:txBody>
+          <a:bodyPr/>
+          <a:p/>
+        </p:txBody>
       </p:sp>
       <p:sp>
         <p:nvSpPr>
@@ -6878,6 +6950,10 @@
             </a:outerShdw>
           </a:effectLst>
         </p:spPr>
+        <p:txBody>
+          <a:bodyPr/>
+          <a:p/>
+        </p:txBody>
       </p:sp>
       <p:sp>
         <p:nvSpPr>
@@ -6988,6 +7064,10 @@
             </a:outerShdw>
           </a:effectLst>
         </p:spPr>
+        <p:txBody>
+          <a:bodyPr/>
+          <a:p/>
+        </p:txBody>
       </p:sp>
       <p:sp>
         <p:nvSpPr>
@@ -7417,6 +7497,10 @@
             </a:outerShdw>
           </a:effectLst>
         </p:spPr>
+        <p:txBody>
+          <a:bodyPr/>
+          <a:p/>
+        </p:txBody>
       </p:sp>
       <p:sp>
         <p:nvSpPr>
@@ -7743,6 +7827,10 @@
             </a:outerShdw>
           </a:effectLst>
         </p:spPr>
+        <p:txBody>
+          <a:bodyPr/>
+          <a:p/>
+        </p:txBody>
       </p:sp>
       <p:sp>
         <p:nvSpPr>
@@ -7850,6 +7938,10 @@
             </a:outerShdw>
           </a:effectLst>
         </p:spPr>
+        <p:txBody>
+          <a:bodyPr/>
+          <a:p/>
+        </p:txBody>
       </p:sp>
       <p:sp>
         <p:nvSpPr>
@@ -7957,6 +8049,10 @@
             </a:outerShdw>
           </a:effectLst>
         </p:spPr>
+        <p:txBody>
+          <a:bodyPr/>
+          <a:p/>
+        </p:txBody>
       </p:sp>
       <p:sp>
         <p:nvSpPr>
@@ -8064,6 +8160,10 @@
             </a:outerShdw>
           </a:effectLst>
         </p:spPr>
+        <p:txBody>
+          <a:bodyPr/>
+          <a:p/>
+        </p:txBody>
       </p:sp>
       <p:sp>
         <p:nvSpPr>
@@ -8456,9 +8556,9 @@
               <a:buNone/>
             </a:pPr>
             <a:r>
-              <a:rPr lang="en-US" sz="1350" b="1" dirty="0">
-                <a:solidFill>
-                  <a:srgbClr val="8E1622"/>
+              <a:rPr lang="en-US" sz="1350" b="0" dirty="0">
+                <a:solidFill>
+                  <a:srgbClr val="33444F"/>
                 </a:solidFill>
                 <a:latin typeface="Calibri" pitchFamily="34" charset="0"/>
                 <a:ea typeface="Calibri" pitchFamily="34" charset="-122"/>
@@ -8527,130 +8627,6 @@
               <a:t>E. Factor VII deficiency</a:t>
             </a:r>
             <a:endParaRPr lang="en-US" sz="1350" dirty="0"/>
-          </a:p>
-        </p:txBody>
-      </p:sp>
-      <p:sp>
-        <p:nvSpPr>
-          <p:cNvPr id="6" name="Shape 4"/>
-          <p:cNvSpPr/>
-          <p:nvPr/>
-        </p:nvSpPr>
-        <p:spPr>
-          <a:xfrm>
-            <a:off x="7201632" y="2395728"/>
-            <a:ext cx="4423136" cy="3246120"/>
-          </a:xfrm>
-          <a:prstGeom prst="roundRect">
-            <a:avLst>
-              <a:gd name="adj" fmla="val 2535"/>
-            </a:avLst>
-          </a:prstGeom>
-          <a:solidFill>
-            <a:srgbClr val="FBEAEC"/>
-          </a:solidFill>
-          <a:ln/>
-          <a:effectLst>
-            <a:outerShdw sx="100000" sy="100000" kx="0" ky="0" algn="bl" rotWithShape="0" blurRad="88900" dist="25400" dir="5400000">
-              <a:srgbClr val="22303C">
-                <a:alpha val="12000"/>
-              </a:srgbClr>
-            </a:outerShdw>
-          </a:effectLst>
-        </p:spPr>
-      </p:sp>
-      <p:sp>
-        <p:nvSpPr>
-          <p:cNvPr id="7" name="Text 5"/>
-          <p:cNvSpPr/>
-          <p:nvPr/>
-        </p:nvSpPr>
-        <p:spPr>
-          <a:xfrm>
-            <a:off x="7439376" y="2578608"/>
-            <a:ext cx="3965936" cy="457200"/>
-          </a:xfrm>
-          <a:prstGeom prst="rect">
-            <a:avLst/>
-          </a:prstGeom>
-          <a:noFill/>
-          <a:ln/>
-        </p:spPr>
-        <p:txBody>
-          <a:bodyPr wrap="square" lIns="0" tIns="0" rIns="0" bIns="0" rtlCol="0" anchor="ctr"/>
-          <a:lstStyle/>
-          <a:p>
-            <a:pPr indent="0" marL="0">
-              <a:buNone/>
-            </a:pPr>
-            <a:r>
-              <a:rPr lang="en-US" sz="1500" b="1" dirty="0">
-                <a:solidFill>
-                  <a:srgbClr val="C62133"/>
-                </a:solidFill>
-                <a:latin typeface="Calibri" pitchFamily="34" charset="0"/>
-                <a:ea typeface="Calibri" pitchFamily="34" charset="-122"/>
-                <a:cs typeface="Calibri" pitchFamily="34" charset="-120"/>
-              </a:rPr>
-              <a:t>ANSWER  </a:t>
-            </a:r>
-            <a:pPr indent="0" marL="0">
-              <a:buNone/>
-            </a:pPr>
-            <a:r>
-              <a:rPr lang="en-US" sz="1500" b="1" dirty="0">
-                <a:solidFill>
-                  <a:srgbClr val="1B2A38"/>
-                </a:solidFill>
-                <a:latin typeface="Calibri" pitchFamily="34" charset="0"/>
-                <a:ea typeface="Calibri" pitchFamily="34" charset="-122"/>
-                <a:cs typeface="Calibri" pitchFamily="34" charset="-120"/>
-              </a:rPr>
-              <a:t>B — An inhibitor</a:t>
-            </a:r>
-            <a:endParaRPr lang="en-US" sz="1500" dirty="0"/>
-          </a:p>
-        </p:txBody>
-      </p:sp>
-      <p:sp>
-        <p:nvSpPr>
-          <p:cNvPr id="8" name="Text 6"/>
-          <p:cNvSpPr/>
-          <p:nvPr/>
-        </p:nvSpPr>
-        <p:spPr>
-          <a:xfrm>
-            <a:off x="7439376" y="3127248"/>
-            <a:ext cx="3947648" cy="2377440"/>
-          </a:xfrm>
-          <a:prstGeom prst="rect">
-            <a:avLst/>
-          </a:prstGeom>
-          <a:noFill/>
-          <a:ln/>
-        </p:spPr>
-        <p:txBody>
-          <a:bodyPr wrap="square" lIns="0" tIns="0" rIns="0" bIns="0" rtlCol="0" anchor="t"/>
-          <a:lstStyle/>
-          <a:p>
-            <a:pPr algn="l" indent="0" marL="0">
-              <a:lnSpc>
-                <a:spcPct val="108000"/>
-              </a:lnSpc>
-              <a:buNone/>
-            </a:pPr>
-            <a:r>
-              <a:rPr lang="en-US" sz="1250" dirty="0">
-                <a:solidFill>
-                  <a:srgbClr val="33444F"/>
-                </a:solidFill>
-                <a:latin typeface="Calibri" pitchFamily="34" charset="0"/>
-                <a:ea typeface="Calibri" pitchFamily="34" charset="-122"/>
-                <a:cs typeface="Calibri" pitchFamily="34" charset="-120"/>
-              </a:rPr>
-              <a:t>Failure to correct indicates an inhibitor (lupus anticoagulant, specific factor inhibitor, or heparin); correction indicates deficiency.</a:t>
-            </a:r>
-            <a:endParaRPr lang="en-US" sz="1250" dirty="0"/>
           </a:p>
         </p:txBody>
       </p:sp>
@@ -8980,9 +8956,9 @@
               <a:buNone/>
             </a:pPr>
             <a:r>
-              <a:rPr lang="en-US" sz="1350" b="1" dirty="0">
-                <a:solidFill>
-                  <a:srgbClr val="8E1622"/>
+              <a:rPr lang="en-US" sz="1350" b="0" dirty="0">
+                <a:solidFill>
+                  <a:srgbClr val="33444F"/>
                 </a:solidFill>
                 <a:latin typeface="Calibri" pitchFamily="34" charset="0"/>
                 <a:ea typeface="Calibri" pitchFamily="34" charset="-122"/>
@@ -9031,130 +9007,6 @@
               <a:t>E. Fibrinogen</a:t>
             </a:r>
             <a:endParaRPr lang="en-US" sz="1350" dirty="0"/>
-          </a:p>
-        </p:txBody>
-      </p:sp>
-      <p:sp>
-        <p:nvSpPr>
-          <p:cNvPr id="6" name="Shape 4"/>
-          <p:cNvSpPr/>
-          <p:nvPr/>
-        </p:nvSpPr>
-        <p:spPr>
-          <a:xfrm>
-            <a:off x="7201632" y="2395728"/>
-            <a:ext cx="4423136" cy="3246120"/>
-          </a:xfrm>
-          <a:prstGeom prst="roundRect">
-            <a:avLst>
-              <a:gd name="adj" fmla="val 2535"/>
-            </a:avLst>
-          </a:prstGeom>
-          <a:solidFill>
-            <a:srgbClr val="FBEAEC"/>
-          </a:solidFill>
-          <a:ln/>
-          <a:effectLst>
-            <a:outerShdw sx="100000" sy="100000" kx="0" ky="0" algn="bl" rotWithShape="0" blurRad="88900" dist="25400" dir="5400000">
-              <a:srgbClr val="22303C">
-                <a:alpha val="12000"/>
-              </a:srgbClr>
-            </a:outerShdw>
-          </a:effectLst>
-        </p:spPr>
-      </p:sp>
-      <p:sp>
-        <p:nvSpPr>
-          <p:cNvPr id="7" name="Text 5"/>
-          <p:cNvSpPr/>
-          <p:nvPr/>
-        </p:nvSpPr>
-        <p:spPr>
-          <a:xfrm>
-            <a:off x="7439376" y="2578608"/>
-            <a:ext cx="3965936" cy="457200"/>
-          </a:xfrm>
-          <a:prstGeom prst="rect">
-            <a:avLst/>
-          </a:prstGeom>
-          <a:noFill/>
-          <a:ln/>
-        </p:spPr>
-        <p:txBody>
-          <a:bodyPr wrap="square" lIns="0" tIns="0" rIns="0" bIns="0" rtlCol="0" anchor="ctr"/>
-          <a:lstStyle/>
-          <a:p>
-            <a:pPr indent="0" marL="0">
-              <a:buNone/>
-            </a:pPr>
-            <a:r>
-              <a:rPr lang="en-US" sz="1500" b="1" dirty="0">
-                <a:solidFill>
-                  <a:srgbClr val="C62133"/>
-                </a:solidFill>
-                <a:latin typeface="Calibri" pitchFamily="34" charset="0"/>
-                <a:ea typeface="Calibri" pitchFamily="34" charset="-122"/>
-                <a:cs typeface="Calibri" pitchFamily="34" charset="-120"/>
-              </a:rPr>
-              <a:t>ANSWER  </a:t>
-            </a:r>
-            <a:pPr indent="0" marL="0">
-              <a:buNone/>
-            </a:pPr>
-            <a:r>
-              <a:rPr lang="en-US" sz="1500" b="1" dirty="0">
-                <a:solidFill>
-                  <a:srgbClr val="1B2A38"/>
-                </a:solidFill>
-                <a:latin typeface="Calibri" pitchFamily="34" charset="0"/>
-                <a:ea typeface="Calibri" pitchFamily="34" charset="-122"/>
-                <a:cs typeface="Calibri" pitchFamily="34" charset="-120"/>
-              </a:rPr>
-              <a:t>C — Factor VII</a:t>
-            </a:r>
-            <a:endParaRPr lang="en-US" sz="1500" dirty="0"/>
-          </a:p>
-        </p:txBody>
-      </p:sp>
-      <p:sp>
-        <p:nvSpPr>
-          <p:cNvPr id="8" name="Text 6"/>
-          <p:cNvSpPr/>
-          <p:nvPr/>
-        </p:nvSpPr>
-        <p:spPr>
-          <a:xfrm>
-            <a:off x="7439376" y="3127248"/>
-            <a:ext cx="3947648" cy="2377440"/>
-          </a:xfrm>
-          <a:prstGeom prst="rect">
-            <a:avLst/>
-          </a:prstGeom>
-          <a:noFill/>
-          <a:ln/>
-        </p:spPr>
-        <p:txBody>
-          <a:bodyPr wrap="square" lIns="0" tIns="0" rIns="0" bIns="0" rtlCol="0" anchor="t"/>
-          <a:lstStyle/>
-          <a:p>
-            <a:pPr algn="l" indent="0" marL="0">
-              <a:lnSpc>
-                <a:spcPct val="108000"/>
-              </a:lnSpc>
-              <a:buNone/>
-            </a:pPr>
-            <a:r>
-              <a:rPr lang="en-US" sz="1250" dirty="0">
-                <a:solidFill>
-                  <a:srgbClr val="33444F"/>
-                </a:solidFill>
-                <a:latin typeface="Calibri" pitchFamily="34" charset="0"/>
-                <a:ea typeface="Calibri" pitchFamily="34" charset="-122"/>
-                <a:cs typeface="Calibri" pitchFamily="34" charset="-120"/>
-              </a:rPr>
-              <a:t>Factor VII is unique to the extrinsic pathway and has the shortest half-life, so the PT prolongs first.</a:t>
-            </a:r>
-            <a:endParaRPr lang="en-US" sz="1250" dirty="0"/>
           </a:p>
         </p:txBody>
       </p:sp>
@@ -9464,9 +9316,9 @@
               <a:buNone/>
             </a:pPr>
             <a:r>
-              <a:rPr lang="en-US" sz="1350" b="1" dirty="0">
-                <a:solidFill>
-                  <a:srgbClr val="8E1622"/>
+              <a:rPr lang="en-US" sz="1350" b="0" dirty="0">
+                <a:solidFill>
+                  <a:srgbClr val="33444F"/>
                 </a:solidFill>
                 <a:latin typeface="Calibri" pitchFamily="34" charset="0"/>
                 <a:ea typeface="Calibri" pitchFamily="34" charset="-122"/>
@@ -9535,130 +9387,6 @@
               <a:t>E. Any anticoagulant</a:t>
             </a:r>
             <a:endParaRPr lang="en-US" sz="1350" dirty="0"/>
-          </a:p>
-        </p:txBody>
-      </p:sp>
-      <p:sp>
-        <p:nvSpPr>
-          <p:cNvPr id="6" name="Shape 4"/>
-          <p:cNvSpPr/>
-          <p:nvPr/>
-        </p:nvSpPr>
-        <p:spPr>
-          <a:xfrm>
-            <a:off x="7201632" y="2395728"/>
-            <a:ext cx="4423136" cy="3246120"/>
-          </a:xfrm>
-          <a:prstGeom prst="roundRect">
-            <a:avLst>
-              <a:gd name="adj" fmla="val 2535"/>
-            </a:avLst>
-          </a:prstGeom>
-          <a:solidFill>
-            <a:srgbClr val="FBEAEC"/>
-          </a:solidFill>
-          <a:ln/>
-          <a:effectLst>
-            <a:outerShdw sx="100000" sy="100000" kx="0" ky="0" algn="bl" rotWithShape="0" blurRad="88900" dist="25400" dir="5400000">
-              <a:srgbClr val="22303C">
-                <a:alpha val="12000"/>
-              </a:srgbClr>
-            </a:outerShdw>
-          </a:effectLst>
-        </p:spPr>
-      </p:sp>
-      <p:sp>
-        <p:nvSpPr>
-          <p:cNvPr id="7" name="Text 5"/>
-          <p:cNvSpPr/>
-          <p:nvPr/>
-        </p:nvSpPr>
-        <p:spPr>
-          <a:xfrm>
-            <a:off x="7439376" y="2578608"/>
-            <a:ext cx="3965936" cy="457200"/>
-          </a:xfrm>
-          <a:prstGeom prst="rect">
-            <a:avLst/>
-          </a:prstGeom>
-          <a:noFill/>
-          <a:ln/>
-        </p:spPr>
-        <p:txBody>
-          <a:bodyPr wrap="square" lIns="0" tIns="0" rIns="0" bIns="0" rtlCol="0" anchor="ctr"/>
-          <a:lstStyle/>
-          <a:p>
-            <a:pPr indent="0" marL="0">
-              <a:buNone/>
-            </a:pPr>
-            <a:r>
-              <a:rPr lang="en-US" sz="1500" b="1" dirty="0">
-                <a:solidFill>
-                  <a:srgbClr val="C62133"/>
-                </a:solidFill>
-                <a:latin typeface="Calibri" pitchFamily="34" charset="0"/>
-                <a:ea typeface="Calibri" pitchFamily="34" charset="-122"/>
-                <a:cs typeface="Calibri" pitchFamily="34" charset="-120"/>
-              </a:rPr>
-              <a:t>ANSWER  </a:t>
-            </a:r>
-            <a:pPr indent="0" marL="0">
-              <a:buNone/>
-            </a:pPr>
-            <a:r>
-              <a:rPr lang="en-US" sz="1500" b="1" dirty="0">
-                <a:solidFill>
-                  <a:srgbClr val="1B2A38"/>
-                </a:solidFill>
-                <a:latin typeface="Calibri" pitchFamily="34" charset="0"/>
-                <a:ea typeface="Calibri" pitchFamily="34" charset="-122"/>
-                <a:cs typeface="Calibri" pitchFamily="34" charset="-120"/>
-              </a:rPr>
-              <a:t>B — 3.2% citrate, 9:1, properly filled</a:t>
-            </a:r>
-            <a:endParaRPr lang="en-US" sz="1500" dirty="0"/>
-          </a:p>
-        </p:txBody>
-      </p:sp>
-      <p:sp>
-        <p:nvSpPr>
-          <p:cNvPr id="8" name="Text 6"/>
-          <p:cNvSpPr/>
-          <p:nvPr/>
-        </p:nvSpPr>
-        <p:spPr>
-          <a:xfrm>
-            <a:off x="7439376" y="3127248"/>
-            <a:ext cx="3947648" cy="2377440"/>
-          </a:xfrm>
-          <a:prstGeom prst="rect">
-            <a:avLst/>
-          </a:prstGeom>
-          <a:noFill/>
-          <a:ln/>
-        </p:spPr>
-        <p:txBody>
-          <a:bodyPr wrap="square" lIns="0" tIns="0" rIns="0" bIns="0" rtlCol="0" anchor="t"/>
-          <a:lstStyle/>
-          <a:p>
-            <a:pPr algn="l" indent="0" marL="0">
-              <a:lnSpc>
-                <a:spcPct val="108000"/>
-              </a:lnSpc>
-              <a:buNone/>
-            </a:pPr>
-            <a:r>
-              <a:rPr lang="en-US" sz="1250" dirty="0">
-                <a:solidFill>
-                  <a:srgbClr val="33444F"/>
-                </a:solidFill>
-                <a:latin typeface="Calibri" pitchFamily="34" charset="0"/>
-                <a:ea typeface="Calibri" pitchFamily="34" charset="-122"/>
-                <a:cs typeface="Calibri" pitchFamily="34" charset="-120"/>
-              </a:rPr>
-              <a:t>Citrate at the correct ratio and fill preserves the factors; under-filling or wrong tubes invalidate results.</a:t>
-            </a:r>
-            <a:endParaRPr lang="en-US" sz="1250" dirty="0"/>
           </a:p>
         </p:txBody>
       </p:sp>
@@ -9968,9 +9696,9 @@
               <a:buNone/>
             </a:pPr>
             <a:r>
-              <a:rPr lang="en-US" sz="1350" b="1" dirty="0">
-                <a:solidFill>
-                  <a:srgbClr val="8E1622"/>
+              <a:rPr lang="en-US" sz="1350" b="0" dirty="0">
+                <a:solidFill>
+                  <a:srgbClr val="33444F"/>
                 </a:solidFill>
                 <a:latin typeface="Calibri" pitchFamily="34" charset="0"/>
                 <a:ea typeface="Calibri" pitchFamily="34" charset="-122"/>
@@ -10039,130 +9767,6 @@
               <a:t>E. Factor VIII level</a:t>
             </a:r>
             <a:endParaRPr lang="en-US" sz="1350" dirty="0"/>
-          </a:p>
-        </p:txBody>
-      </p:sp>
-      <p:sp>
-        <p:nvSpPr>
-          <p:cNvPr id="6" name="Shape 4"/>
-          <p:cNvSpPr/>
-          <p:nvPr/>
-        </p:nvSpPr>
-        <p:spPr>
-          <a:xfrm>
-            <a:off x="7201632" y="2395728"/>
-            <a:ext cx="4423136" cy="3246120"/>
-          </a:xfrm>
-          <a:prstGeom prst="roundRect">
-            <a:avLst>
-              <a:gd name="adj" fmla="val 2535"/>
-            </a:avLst>
-          </a:prstGeom>
-          <a:solidFill>
-            <a:srgbClr val="FBEAEC"/>
-          </a:solidFill>
-          <a:ln/>
-          <a:effectLst>
-            <a:outerShdw sx="100000" sy="100000" kx="0" ky="0" algn="bl" rotWithShape="0" blurRad="88900" dist="25400" dir="5400000">
-              <a:srgbClr val="22303C">
-                <a:alpha val="12000"/>
-              </a:srgbClr>
-            </a:outerShdw>
-          </a:effectLst>
-        </p:spPr>
-      </p:sp>
-      <p:sp>
-        <p:nvSpPr>
-          <p:cNvPr id="7" name="Text 5"/>
-          <p:cNvSpPr/>
-          <p:nvPr/>
-        </p:nvSpPr>
-        <p:spPr>
-          <a:xfrm>
-            <a:off x="7439376" y="2578608"/>
-            <a:ext cx="3965936" cy="457200"/>
-          </a:xfrm>
-          <a:prstGeom prst="rect">
-            <a:avLst/>
-          </a:prstGeom>
-          <a:noFill/>
-          <a:ln/>
-        </p:spPr>
-        <p:txBody>
-          <a:bodyPr wrap="square" lIns="0" tIns="0" rIns="0" bIns="0" rtlCol="0" anchor="ctr"/>
-          <a:lstStyle/>
-          <a:p>
-            <a:pPr indent="0" marL="0">
-              <a:buNone/>
-            </a:pPr>
-            <a:r>
-              <a:rPr lang="en-US" sz="1500" b="1" dirty="0">
-                <a:solidFill>
-                  <a:srgbClr val="C62133"/>
-                </a:solidFill>
-                <a:latin typeface="Calibri" pitchFamily="34" charset="0"/>
-                <a:ea typeface="Calibri" pitchFamily="34" charset="-122"/>
-                <a:cs typeface="Calibri" pitchFamily="34" charset="-120"/>
-              </a:rPr>
-              <a:t>ANSWER  </a:t>
-            </a:r>
-            <a:pPr indent="0" marL="0">
-              <a:buNone/>
-            </a:pPr>
-            <a:r>
-              <a:rPr lang="en-US" sz="1500" b="1" dirty="0">
-                <a:solidFill>
-                  <a:srgbClr val="1B2A38"/>
-                </a:solidFill>
-                <a:latin typeface="Calibri" pitchFamily="34" charset="0"/>
-                <a:ea typeface="Calibri" pitchFamily="34" charset="-122"/>
-                <a:cs typeface="Calibri" pitchFamily="34" charset="-120"/>
-              </a:rPr>
-              <a:t>B — D-dimer</a:t>
-            </a:r>
-            <a:endParaRPr lang="en-US" sz="1500" dirty="0"/>
-          </a:p>
-        </p:txBody>
-      </p:sp>
-      <p:sp>
-        <p:nvSpPr>
-          <p:cNvPr id="8" name="Text 6"/>
-          <p:cNvSpPr/>
-          <p:nvPr/>
-        </p:nvSpPr>
-        <p:spPr>
-          <a:xfrm>
-            <a:off x="7439376" y="3127248"/>
-            <a:ext cx="3947648" cy="2377440"/>
-          </a:xfrm>
-          <a:prstGeom prst="rect">
-            <a:avLst/>
-          </a:prstGeom>
-          <a:noFill/>
-          <a:ln/>
-        </p:spPr>
-        <p:txBody>
-          <a:bodyPr wrap="square" lIns="0" tIns="0" rIns="0" bIns="0" rtlCol="0" anchor="t"/>
-          <a:lstStyle/>
-          <a:p>
-            <a:pPr algn="l" indent="0" marL="0">
-              <a:lnSpc>
-                <a:spcPct val="108000"/>
-              </a:lnSpc>
-              <a:buNone/>
-            </a:pPr>
-            <a:r>
-              <a:rPr lang="en-US" sz="1250" dirty="0">
-                <a:solidFill>
-                  <a:srgbClr val="33444F"/>
-                </a:solidFill>
-                <a:latin typeface="Calibri" pitchFamily="34" charset="0"/>
-                <a:ea typeface="Calibri" pitchFamily="34" charset="-122"/>
-                <a:cs typeface="Calibri" pitchFamily="34" charset="-120"/>
-              </a:rPr>
-              <a:t>A normal D-dimer helps exclude VTE in low/intermediate pretest probability; it is not specific enough to rule in.</a:t>
-            </a:r>
-            <a:endParaRPr lang="en-US" sz="1250" dirty="0"/>
           </a:p>
         </p:txBody>
       </p:sp>
@@ -10403,6 +10007,10 @@
           </a:solidFill>
           <a:ln/>
         </p:spPr>
+        <p:txBody>
+          <a:bodyPr/>
+          <a:p/>
+        </p:txBody>
       </p:sp>
       <p:sp>
         <p:nvSpPr>
@@ -10430,6 +10038,10 @@
             </a:outerShdw>
           </a:effectLst>
         </p:spPr>
+        <p:txBody>
+          <a:bodyPr/>
+          <a:p/>
+        </p:txBody>
       </p:sp>
       <p:sp>
         <p:nvSpPr>
@@ -10530,6 +10142,10 @@
           </a:solidFill>
           <a:ln/>
         </p:spPr>
+        <p:txBody>
+          <a:bodyPr/>
+          <a:p/>
+        </p:txBody>
       </p:sp>
       <p:sp>
         <p:nvSpPr>
@@ -10557,6 +10173,10 @@
             </a:outerShdw>
           </a:effectLst>
         </p:spPr>
+        <p:txBody>
+          <a:bodyPr/>
+          <a:p/>
+        </p:txBody>
       </p:sp>
       <p:sp>
         <p:nvSpPr>
@@ -10657,6 +10277,10 @@
           </a:solidFill>
           <a:ln/>
         </p:spPr>
+        <p:txBody>
+          <a:bodyPr/>
+          <a:p/>
+        </p:txBody>
       </p:sp>
       <p:sp>
         <p:nvSpPr>
@@ -10684,6 +10308,10 @@
             </a:outerShdw>
           </a:effectLst>
         </p:spPr>
+        <p:txBody>
+          <a:bodyPr/>
+          <a:p/>
+        </p:txBody>
       </p:sp>
       <p:sp>
         <p:nvSpPr>
@@ -10784,6 +10412,10 @@
           </a:solidFill>
           <a:ln/>
         </p:spPr>
+        <p:txBody>
+          <a:bodyPr/>
+          <a:p/>
+        </p:txBody>
       </p:sp>
       <p:sp>
         <p:nvSpPr>
@@ -10811,6 +10443,10 @@
             </a:outerShdw>
           </a:effectLst>
         </p:spPr>
+        <p:txBody>
+          <a:bodyPr/>
+          <a:p/>
+        </p:txBody>
       </p:sp>
       <p:sp>
         <p:nvSpPr>
@@ -10911,6 +10547,10 @@
           </a:solidFill>
           <a:ln/>
         </p:spPr>
+        <p:txBody>
+          <a:bodyPr/>
+          <a:p/>
+        </p:txBody>
       </p:sp>
       <p:sp>
         <p:nvSpPr>
@@ -10938,6 +10578,10 @@
             </a:outerShdw>
           </a:effectLst>
         </p:spPr>
+        <p:txBody>
+          <a:bodyPr/>
+          <a:p/>
+        </p:txBody>
       </p:sp>
       <p:sp>
         <p:nvSpPr>
@@ -11421,6 +11065,1982 @@
 </p:sld>
 </file>
 
+<file path=ppt/slides/slide26.xml><?xml version="1.0" encoding="utf-8"?>
+<p:sld xmlns:a="http://schemas.openxmlformats.org/drawingml/2006/main" xmlns:p="http://schemas.openxmlformats.org/presentationml/2006/main" xmlns:r="http://schemas.openxmlformats.org/officeDocument/2006/relationships">
+  <p:cSld>
+    <p:spTree>
+      <p:nvGrpSpPr>
+        <p:cNvPr id="1" name=""/>
+        <p:cNvGrpSpPr/>
+        <p:nvPr/>
+      </p:nvGrpSpPr>
+      <p:grpSpPr/>
+      <p:sp>
+        <p:nvSpPr>
+          <p:cNvPr id="2" name="Text 0"/>
+          <p:cNvSpPr/>
+          <p:nvPr/>
+        </p:nvSpPr>
+        <p:spPr>
+          <a:xfrm>
+            <a:off x="566928" y="329184"/>
+            <a:ext cx="10515600" cy="310896"/>
+          </a:xfrm>
+          <a:prstGeom prst="rect">
+            <a:avLst/>
+          </a:prstGeom>
+          <a:noFill/>
+          <a:ln/>
+        </p:spPr>
+        <p:txBody>
+          <a:bodyPr wrap="square" lIns="0" tIns="0" rIns="0" bIns="0" rtlCol="0" anchor="ctr"/>
+          <a:lstStyle/>
+          <a:p>
+            <a:pPr algn="l" indent="0" marL="0">
+              <a:buNone/>
+            </a:pPr>
+            <a:r>
+              <a:rPr lang="en-US" sz="1100" b="1" spc="150" kern="0" dirty="0">
+                <a:solidFill>
+                  <a:srgbClr val="C62133"/>
+                </a:solidFill>
+                <a:latin typeface="Calibri" pitchFamily="34" charset="0"/>
+                <a:ea typeface="Calibri" pitchFamily="34" charset="-122"/>
+                <a:cs typeface="Calibri" pitchFamily="34" charset="-120"/>
+              </a:rPr>
+              <a:t>HEMATOLOGY &amp; COAGULATION   ·   BOARD REVIEW  ·  Q4</a:t>
+            </a:r>
+            <a:endParaRPr lang="en-US" sz="1100" dirty="0"/>
+          </a:p>
+        </p:txBody>
+      </p:sp>
+      <p:sp>
+        <p:nvSpPr>
+          <p:cNvPr id="3" name="Text 1"/>
+          <p:cNvSpPr/>
+          <p:nvPr/>
+        </p:nvSpPr>
+        <p:spPr>
+          <a:xfrm>
+            <a:off x="566928" y="713232"/>
+            <a:ext cx="11064240" cy="749808"/>
+          </a:xfrm>
+          <a:prstGeom prst="rect">
+            <a:avLst/>
+          </a:prstGeom>
+          <a:noFill/>
+          <a:ln/>
+        </p:spPr>
+        <p:txBody>
+          <a:bodyPr wrap="square" lIns="0" tIns="0" rIns="0" bIns="0" rtlCol="0" anchor="ctr"/>
+          <a:lstStyle/>
+          <a:p>
+            <a:pPr algn="l" indent="0" marL="0">
+              <a:buNone/>
+            </a:pPr>
+            <a:r>
+              <a:rPr lang="en-US" sz="2600" b="1" dirty="0">
+                <a:solidFill>
+                  <a:srgbClr val="0E3A5F"/>
+                </a:solidFill>
+                <a:latin typeface="Calibri" pitchFamily="34" charset="0"/>
+                <a:ea typeface="Calibri" pitchFamily="34" charset="-122"/>
+                <a:cs typeface="Calibri" pitchFamily="34" charset="-120"/>
+              </a:rPr>
+              <a:t>Board-Style Review</a:t>
+            </a:r>
+            <a:endParaRPr lang="en-US" sz="2600" dirty="0"/>
+          </a:p>
+        </p:txBody>
+      </p:sp>
+      <p:sp>
+        <p:nvSpPr>
+          <p:cNvPr id="4" name="Text 2"/>
+          <p:cNvSpPr/>
+          <p:nvPr/>
+        </p:nvSpPr>
+        <p:spPr>
+          <a:xfrm>
+            <a:off x="566928" y="1417320"/>
+            <a:ext cx="11057839" cy="914400"/>
+          </a:xfrm>
+          <a:prstGeom prst="rect">
+            <a:avLst/>
+          </a:prstGeom>
+          <a:noFill/>
+          <a:ln/>
+        </p:spPr>
+        <p:txBody>
+          <a:bodyPr wrap="square" lIns="0" tIns="0" rIns="0" bIns="0" rtlCol="0" anchor="t"/>
+          <a:lstStyle/>
+          <a:p>
+            <a:pPr algn="l" indent="0" marL="0">
+              <a:lnSpc>
+                <a:spcPct val="105000"/>
+              </a:lnSpc>
+              <a:buNone/>
+            </a:pPr>
+            <a:r>
+              <a:rPr lang="en-US" sz="1450" b="1" dirty="0">
+                <a:solidFill>
+                  <a:srgbClr val="1B2A38"/>
+                </a:solidFill>
+                <a:latin typeface="Calibri" pitchFamily="34" charset="0"/>
+                <a:ea typeface="Calibri" pitchFamily="34" charset="-122"/>
+                <a:cs typeface="Calibri" pitchFamily="34" charset="-120"/>
+              </a:rPr>
+              <a:t>Which test best fits a screen with high negative predictive value for venous thromboembolism?</a:t>
+            </a:r>
+            <a:endParaRPr lang="en-US" sz="1450" dirty="0"/>
+          </a:p>
+        </p:txBody>
+      </p:sp>
+      <p:sp>
+        <p:nvSpPr>
+          <p:cNvPr id="5" name="Text 3"/>
+          <p:cNvSpPr/>
+          <p:nvPr/>
+        </p:nvSpPr>
+        <p:spPr>
+          <a:xfrm>
+            <a:off x="658368" y="2395728"/>
+            <a:ext cx="6192390" cy="3017520"/>
+          </a:xfrm>
+          <a:prstGeom prst="rect">
+            <a:avLst/>
+          </a:prstGeom>
+          <a:noFill/>
+          <a:ln/>
+        </p:spPr>
+        <p:txBody>
+          <a:bodyPr wrap="square" lIns="0" tIns="0" rIns="0" bIns="0" rtlCol="0" anchor="t"/>
+          <a:lstStyle/>
+          <a:p>
+            <a:pPr algn="l" indent="0" marL="0">
+              <a:spcAft>
+                <a:spcPts val="600"/>
+              </a:spcAft>
+              <a:buNone/>
+            </a:pPr>
+            <a:r>
+              <a:rPr lang="en-US" sz="1350" dirty="0">
+                <a:solidFill>
+                  <a:srgbClr val="33444F"/>
+                </a:solidFill>
+                <a:latin typeface="Calibri" pitchFamily="34" charset="0"/>
+                <a:ea typeface="Calibri" pitchFamily="34" charset="-122"/>
+                <a:cs typeface="Calibri" pitchFamily="34" charset="-120"/>
+              </a:rPr>
+              <a:t>A. Fibrinogen</a:t>
+            </a:r>
+            <a:endParaRPr lang="en-US" sz="1350" dirty="0"/>
+          </a:p>
+          <a:p>
+            <a:pPr algn="l" indent="0" marL="0">
+              <a:spcAft>
+                <a:spcPts val="600"/>
+              </a:spcAft>
+              <a:buNone/>
+            </a:pPr>
+            <a:r>
+              <a:rPr lang="en-US" sz="1350" b="1" dirty="0">
+                <a:solidFill>
+                  <a:srgbClr val="8E1622"/>
+                </a:solidFill>
+                <a:latin typeface="Calibri" pitchFamily="34" charset="0"/>
+                <a:ea typeface="Calibri" pitchFamily="34" charset="-122"/>
+                <a:cs typeface="Calibri" pitchFamily="34" charset="-120"/>
+              </a:rPr>
+              <a:t>B. D-dimer</a:t>
+            </a:r>
+            <a:endParaRPr lang="en-US" sz="1350" dirty="0"/>
+          </a:p>
+          <a:p>
+            <a:pPr algn="l" indent="0" marL="0">
+              <a:spcAft>
+                <a:spcPts val="600"/>
+              </a:spcAft>
+              <a:buNone/>
+            </a:pPr>
+            <a:r>
+              <a:rPr lang="en-US" sz="1350" dirty="0">
+                <a:solidFill>
+                  <a:srgbClr val="33444F"/>
+                </a:solidFill>
+                <a:latin typeface="Calibri" pitchFamily="34" charset="0"/>
+                <a:ea typeface="Calibri" pitchFamily="34" charset="-122"/>
+                <a:cs typeface="Calibri" pitchFamily="34" charset="-120"/>
+              </a:rPr>
+              <a:t>C. PT</a:t>
+            </a:r>
+            <a:endParaRPr lang="en-US" sz="1350" dirty="0"/>
+          </a:p>
+          <a:p>
+            <a:pPr algn="l" indent="0" marL="0">
+              <a:spcAft>
+                <a:spcPts val="600"/>
+              </a:spcAft>
+              <a:buNone/>
+            </a:pPr>
+            <a:r>
+              <a:rPr lang="en-US" sz="1350" dirty="0">
+                <a:solidFill>
+                  <a:srgbClr val="33444F"/>
+                </a:solidFill>
+                <a:latin typeface="Calibri" pitchFamily="34" charset="0"/>
+                <a:ea typeface="Calibri" pitchFamily="34" charset="-122"/>
+                <a:cs typeface="Calibri" pitchFamily="34" charset="-120"/>
+              </a:rPr>
+              <a:t>D. aPTT</a:t>
+            </a:r>
+            <a:endParaRPr lang="en-US" sz="1350" dirty="0"/>
+          </a:p>
+          <a:p>
+            <a:pPr algn="l" indent="0" marL="0">
+              <a:spcAft>
+                <a:spcPts val="600"/>
+              </a:spcAft>
+              <a:buNone/>
+            </a:pPr>
+            <a:r>
+              <a:rPr lang="en-US" sz="1350" dirty="0">
+                <a:solidFill>
+                  <a:srgbClr val="33444F"/>
+                </a:solidFill>
+                <a:latin typeface="Calibri" pitchFamily="34" charset="0"/>
+                <a:ea typeface="Calibri" pitchFamily="34" charset="-122"/>
+                <a:cs typeface="Calibri" pitchFamily="34" charset="-120"/>
+              </a:rPr>
+              <a:t>E. Factor VIII level</a:t>
+            </a:r>
+            <a:endParaRPr lang="en-US" sz="1350" dirty="0"/>
+          </a:p>
+        </p:txBody>
+      </p:sp>
+      <p:sp>
+        <p:nvSpPr>
+          <p:cNvPr id="6" name="Shape 4"/>
+          <p:cNvSpPr/>
+          <p:nvPr/>
+        </p:nvSpPr>
+        <p:spPr>
+          <a:xfrm>
+            <a:off x="7201632" y="2395728"/>
+            <a:ext cx="4423136" cy="3246120"/>
+          </a:xfrm>
+          <a:prstGeom prst="roundRect">
+            <a:avLst>
+              <a:gd name="adj" fmla="val 2535"/>
+            </a:avLst>
+          </a:prstGeom>
+          <a:solidFill>
+            <a:srgbClr val="FBEAEC"/>
+          </a:solidFill>
+          <a:ln/>
+          <a:effectLst>
+            <a:outerShdw sx="100000" sy="100000" kx="0" ky="0" algn="bl" rotWithShape="0" blurRad="88900" dist="25400" dir="5400000">
+              <a:srgbClr val="22303C">
+                <a:alpha val="12000"/>
+              </a:srgbClr>
+            </a:outerShdw>
+          </a:effectLst>
+        </p:spPr>
+        <p:txBody>
+          <a:bodyPr/>
+          <a:p/>
+        </p:txBody>
+      </p:sp>
+      <p:sp>
+        <p:nvSpPr>
+          <p:cNvPr id="7" name="Text 5"/>
+          <p:cNvSpPr/>
+          <p:nvPr/>
+        </p:nvSpPr>
+        <p:spPr>
+          <a:xfrm>
+            <a:off x="7439376" y="2578608"/>
+            <a:ext cx="3965936" cy="457200"/>
+          </a:xfrm>
+          <a:prstGeom prst="rect">
+            <a:avLst/>
+          </a:prstGeom>
+          <a:noFill/>
+          <a:ln/>
+        </p:spPr>
+        <p:txBody>
+          <a:bodyPr wrap="square" lIns="0" tIns="0" rIns="0" bIns="0" rtlCol="0" anchor="ctr"/>
+          <a:lstStyle/>
+          <a:p>
+            <a:pPr indent="0" marL="0">
+              <a:buNone/>
+            </a:pPr>
+            <a:r>
+              <a:rPr lang="en-US" sz="1500" b="1" dirty="0">
+                <a:solidFill>
+                  <a:srgbClr val="C62133"/>
+                </a:solidFill>
+                <a:latin typeface="Calibri" pitchFamily="34" charset="0"/>
+                <a:ea typeface="Calibri" pitchFamily="34" charset="-122"/>
+                <a:cs typeface="Calibri" pitchFamily="34" charset="-120"/>
+              </a:rPr>
+              <a:t>ANSWER  </a:t>
+            </a:r>
+            <a:pPr indent="0" marL="0">
+              <a:buNone/>
+            </a:pPr>
+            <a:r>
+              <a:rPr lang="en-US" sz="1500" b="1" dirty="0">
+                <a:solidFill>
+                  <a:srgbClr val="1B2A38"/>
+                </a:solidFill>
+                <a:latin typeface="Calibri" pitchFamily="34" charset="0"/>
+                <a:ea typeface="Calibri" pitchFamily="34" charset="-122"/>
+                <a:cs typeface="Calibri" pitchFamily="34" charset="-120"/>
+              </a:rPr>
+              <a:t>B — D-dimer</a:t>
+            </a:r>
+            <a:endParaRPr lang="en-US" sz="1500" dirty="0"/>
+          </a:p>
+        </p:txBody>
+      </p:sp>
+      <p:sp>
+        <p:nvSpPr>
+          <p:cNvPr id="8" name="Text 6"/>
+          <p:cNvSpPr/>
+          <p:nvPr/>
+        </p:nvSpPr>
+        <p:spPr>
+          <a:xfrm>
+            <a:off x="7439376" y="3127248"/>
+            <a:ext cx="3947648" cy="2377440"/>
+          </a:xfrm>
+          <a:prstGeom prst="rect">
+            <a:avLst/>
+          </a:prstGeom>
+          <a:noFill/>
+          <a:ln/>
+        </p:spPr>
+        <p:txBody>
+          <a:bodyPr wrap="square" lIns="0" tIns="0" rIns="0" bIns="0" rtlCol="0" anchor="t"/>
+          <a:lstStyle/>
+          <a:p>
+            <a:pPr algn="l" indent="0" marL="0">
+              <a:lnSpc>
+                <a:spcPct val="108000"/>
+              </a:lnSpc>
+              <a:buNone/>
+            </a:pPr>
+            <a:r>
+              <a:rPr lang="en-US" sz="1250" dirty="0">
+                <a:solidFill>
+                  <a:srgbClr val="33444F"/>
+                </a:solidFill>
+                <a:latin typeface="Calibri" pitchFamily="34" charset="0"/>
+                <a:ea typeface="Calibri" pitchFamily="34" charset="-122"/>
+                <a:cs typeface="Calibri" pitchFamily="34" charset="-120"/>
+              </a:rPr>
+              <a:t>A normal D-dimer helps exclude VTE in low/intermediate pretest probability; it is not specific enough to rule in.</a:t>
+            </a:r>
+            <a:endParaRPr lang="en-US" sz="1250" dirty="0"/>
+          </a:p>
+        </p:txBody>
+      </p:sp>
+      <p:sp>
+        <p:nvSpPr>
+          <p:cNvPr id="9" name="Text 7"/>
+          <p:cNvSpPr/>
+          <p:nvPr/>
+        </p:nvSpPr>
+        <p:spPr>
+          <a:xfrm>
+            <a:off x="566928" y="6473952"/>
+            <a:ext cx="7772400" cy="274320"/>
+          </a:xfrm>
+          <a:prstGeom prst="rect">
+            <a:avLst/>
+          </a:prstGeom>
+          <a:noFill/>
+          <a:ln/>
+        </p:spPr>
+        <p:txBody>
+          <a:bodyPr wrap="square" lIns="0" tIns="0" rIns="0" bIns="0" rtlCol="0" anchor="ctr"/>
+          <a:lstStyle/>
+          <a:p>
+            <a:pPr algn="l" indent="0" marL="0">
+              <a:buNone/>
+            </a:pPr>
+            <a:r>
+              <a:rPr lang="en-US" sz="850" dirty="0">
+                <a:solidFill>
+                  <a:srgbClr val="9AA8B4"/>
+                </a:solidFill>
+                <a:latin typeface="Calibri" pitchFamily="34" charset="0"/>
+                <a:ea typeface="Calibri" pitchFamily="34" charset="-122"/>
+                <a:cs typeface="Calibri" pitchFamily="34" charset="-120"/>
+              </a:rPr>
+              <a:t>Makassed General Hospital  ·  Department of Laboratory Medicine</a:t>
+            </a:r>
+            <a:endParaRPr lang="en-US" sz="850" dirty="0"/>
+          </a:p>
+        </p:txBody>
+      </p:sp>
+      <p:sp>
+        <p:nvSpPr>
+          <p:cNvPr id="10" name="Text 8"/>
+          <p:cNvSpPr/>
+          <p:nvPr/>
+        </p:nvSpPr>
+        <p:spPr>
+          <a:xfrm>
+            <a:off x="9814255" y="6473952"/>
+            <a:ext cx="1828800" cy="274320"/>
+          </a:xfrm>
+          <a:prstGeom prst="rect">
+            <a:avLst/>
+          </a:prstGeom>
+          <a:noFill/>
+          <a:ln/>
+        </p:spPr>
+        <p:txBody>
+          <a:bodyPr wrap="square" lIns="0" tIns="0" rIns="0" bIns="0" rtlCol="0" anchor="ctr"/>
+          <a:lstStyle/>
+          <a:p>
+            <a:pPr algn="r" indent="0" marL="0">
+              <a:buNone/>
+            </a:pPr>
+            <a:r>
+              <a:rPr lang="en-US" sz="850" dirty="0">
+                <a:solidFill>
+                  <a:srgbClr val="9AA8B4"/>
+                </a:solidFill>
+                <a:latin typeface="Calibri" pitchFamily="34" charset="0"/>
+                <a:ea typeface="Calibri" pitchFamily="34" charset="-122"/>
+                <a:cs typeface="Calibri" pitchFamily="34" charset="-120"/>
+              </a:rPr>
+              <a:t>CP Lecture Series</a:t>
+            </a:r>
+            <a:pPr algn="r" indent="0" marL="0">
+              <a:buNone/>
+            </a:pPr>
+            <a:r>
+              <a:rPr lang="en-US" sz="850" dirty="0">
+                <a:solidFill>
+                  <a:srgbClr val="DCE4EC"/>
+                </a:solidFill>
+                <a:latin typeface="Calibri" pitchFamily="34" charset="0"/>
+                <a:ea typeface="Calibri" pitchFamily="34" charset="-122"/>
+                <a:cs typeface="Calibri" pitchFamily="34" charset="-120"/>
+              </a:rPr>
+              <a:t>   ·   </a:t>
+            </a:r>
+            <a:pPr algn="r" indent="0" marL="0">
+              <a:buNone/>
+            </a:pPr>
+            <a:r>
+              <a:rPr lang="en-US" sz="850" b="1" dirty="0">
+                <a:solidFill>
+                  <a:srgbClr val="C62133"/>
+                </a:solidFill>
+                <a:latin typeface="Calibri" pitchFamily="34" charset="0"/>
+                <a:ea typeface="Calibri" pitchFamily="34" charset="-122"/>
+                <a:cs typeface="Calibri" pitchFamily="34" charset="-120"/>
+              </a:rPr>
+              <a:t>20</a:t>
+            </a:r>
+            <a:endParaRPr lang="en-US" sz="850" dirty="0"/>
+          </a:p>
+        </p:txBody>
+      </p:sp>
+    </p:spTree>
+  </p:cSld>
+  <p:clrMapOvr>
+    <a:masterClrMapping/>
+  </p:clrMapOvr>
+</p:sld>
+</file>
+
+<file path=ppt/slides/slide27.xml><?xml version="1.0" encoding="utf-8"?>
+<p:sld xmlns:a="http://schemas.openxmlformats.org/drawingml/2006/main" xmlns:p="http://schemas.openxmlformats.org/presentationml/2006/main" xmlns:r="http://schemas.openxmlformats.org/officeDocument/2006/relationships">
+  <p:cSld>
+    <p:spTree>
+      <p:nvGrpSpPr>
+        <p:cNvPr id="1" name=""/>
+        <p:cNvGrpSpPr/>
+        <p:nvPr/>
+      </p:nvGrpSpPr>
+      <p:grpSpPr/>
+      <p:sp>
+        <p:nvSpPr>
+          <p:cNvPr id="2" name="Text 0"/>
+          <p:cNvSpPr/>
+          <p:nvPr/>
+        </p:nvSpPr>
+        <p:spPr>
+          <a:xfrm>
+            <a:off x="566928" y="329184"/>
+            <a:ext cx="10515600" cy="310896"/>
+          </a:xfrm>
+          <a:prstGeom prst="rect">
+            <a:avLst/>
+          </a:prstGeom>
+          <a:noFill/>
+          <a:ln/>
+        </p:spPr>
+        <p:txBody>
+          <a:bodyPr wrap="square" lIns="0" tIns="0" rIns="0" bIns="0" rtlCol="0" anchor="ctr"/>
+          <a:lstStyle/>
+          <a:p>
+            <a:pPr algn="l" indent="0" marL="0">
+              <a:buNone/>
+            </a:pPr>
+            <a:r>
+              <a:rPr lang="en-US" sz="1100" b="1" spc="150" kern="0" dirty="0">
+                <a:solidFill>
+                  <a:srgbClr val="C62133"/>
+                </a:solidFill>
+                <a:latin typeface="Calibri" pitchFamily="34" charset="0"/>
+                <a:ea typeface="Calibri" pitchFamily="34" charset="-122"/>
+                <a:cs typeface="Calibri" pitchFamily="34" charset="-120"/>
+              </a:rPr>
+              <a:t>HEMATOLOGY &amp; COAGULATION   ·   BOARD REVIEW  ·  Q3</a:t>
+            </a:r>
+            <a:endParaRPr lang="en-US" sz="1100" dirty="0"/>
+          </a:p>
+        </p:txBody>
+      </p:sp>
+      <p:sp>
+        <p:nvSpPr>
+          <p:cNvPr id="3" name="Text 1"/>
+          <p:cNvSpPr/>
+          <p:nvPr/>
+        </p:nvSpPr>
+        <p:spPr>
+          <a:xfrm>
+            <a:off x="566928" y="713232"/>
+            <a:ext cx="11064240" cy="749808"/>
+          </a:xfrm>
+          <a:prstGeom prst="rect">
+            <a:avLst/>
+          </a:prstGeom>
+          <a:noFill/>
+          <a:ln/>
+        </p:spPr>
+        <p:txBody>
+          <a:bodyPr wrap="square" lIns="0" tIns="0" rIns="0" bIns="0" rtlCol="0" anchor="ctr"/>
+          <a:lstStyle/>
+          <a:p>
+            <a:pPr algn="l" indent="0" marL="0">
+              <a:buNone/>
+            </a:pPr>
+            <a:r>
+              <a:rPr lang="en-US" sz="2600" b="1" dirty="0">
+                <a:solidFill>
+                  <a:srgbClr val="0E3A5F"/>
+                </a:solidFill>
+                <a:latin typeface="Calibri" pitchFamily="34" charset="0"/>
+                <a:ea typeface="Calibri" pitchFamily="34" charset="-122"/>
+                <a:cs typeface="Calibri" pitchFamily="34" charset="-120"/>
+              </a:rPr>
+              <a:t>Board-Style Review</a:t>
+            </a:r>
+            <a:endParaRPr lang="en-US" sz="2600" dirty="0"/>
+          </a:p>
+        </p:txBody>
+      </p:sp>
+      <p:sp>
+        <p:nvSpPr>
+          <p:cNvPr id="4" name="Text 2"/>
+          <p:cNvSpPr/>
+          <p:nvPr/>
+        </p:nvSpPr>
+        <p:spPr>
+          <a:xfrm>
+            <a:off x="566928" y="1417320"/>
+            <a:ext cx="11057839" cy="914400"/>
+          </a:xfrm>
+          <a:prstGeom prst="rect">
+            <a:avLst/>
+          </a:prstGeom>
+          <a:noFill/>
+          <a:ln/>
+        </p:spPr>
+        <p:txBody>
+          <a:bodyPr wrap="square" lIns="0" tIns="0" rIns="0" bIns="0" rtlCol="0" anchor="t"/>
+          <a:lstStyle/>
+          <a:p>
+            <a:pPr algn="l" indent="0" marL="0">
+              <a:lnSpc>
+                <a:spcPct val="105000"/>
+              </a:lnSpc>
+              <a:buNone/>
+            </a:pPr>
+            <a:r>
+              <a:rPr lang="en-US" sz="1450" b="1" dirty="0">
+                <a:solidFill>
+                  <a:srgbClr val="1B2A38"/>
+                </a:solidFill>
+                <a:latin typeface="Calibri" pitchFamily="34" charset="0"/>
+                <a:ea typeface="Calibri" pitchFamily="34" charset="-122"/>
+                <a:cs typeface="Calibri" pitchFamily="34" charset="-120"/>
+              </a:rPr>
+              <a:t>The correct specimen for routine coagulation testing is:</a:t>
+            </a:r>
+            <a:endParaRPr lang="en-US" sz="1450" dirty="0"/>
+          </a:p>
+        </p:txBody>
+      </p:sp>
+      <p:sp>
+        <p:nvSpPr>
+          <p:cNvPr id="5" name="Text 3"/>
+          <p:cNvSpPr/>
+          <p:nvPr/>
+        </p:nvSpPr>
+        <p:spPr>
+          <a:xfrm>
+            <a:off x="658368" y="2395728"/>
+            <a:ext cx="6192390" cy="3017520"/>
+          </a:xfrm>
+          <a:prstGeom prst="rect">
+            <a:avLst/>
+          </a:prstGeom>
+          <a:noFill/>
+          <a:ln/>
+        </p:spPr>
+        <p:txBody>
+          <a:bodyPr wrap="square" lIns="0" tIns="0" rIns="0" bIns="0" rtlCol="0" anchor="t"/>
+          <a:lstStyle/>
+          <a:p>
+            <a:pPr algn="l" indent="0" marL="0">
+              <a:spcAft>
+                <a:spcPts val="600"/>
+              </a:spcAft>
+              <a:buNone/>
+            </a:pPr>
+            <a:r>
+              <a:rPr lang="en-US" sz="1350" dirty="0">
+                <a:solidFill>
+                  <a:srgbClr val="33444F"/>
+                </a:solidFill>
+                <a:latin typeface="Calibri" pitchFamily="34" charset="0"/>
+                <a:ea typeface="Calibri" pitchFamily="34" charset="-122"/>
+                <a:cs typeface="Calibri" pitchFamily="34" charset="-120"/>
+              </a:rPr>
+              <a:t>A. EDTA, fully filled</a:t>
+            </a:r>
+            <a:endParaRPr lang="en-US" sz="1350" dirty="0"/>
+          </a:p>
+          <a:p>
+            <a:pPr algn="l" indent="0" marL="0">
+              <a:spcAft>
+                <a:spcPts val="600"/>
+              </a:spcAft>
+              <a:buNone/>
+            </a:pPr>
+            <a:r>
+              <a:rPr lang="en-US" sz="1350" b="1" dirty="0">
+                <a:solidFill>
+                  <a:srgbClr val="8E1622"/>
+                </a:solidFill>
+                <a:latin typeface="Calibri" pitchFamily="34" charset="0"/>
+                <a:ea typeface="Calibri" pitchFamily="34" charset="-122"/>
+                <a:cs typeface="Calibri" pitchFamily="34" charset="-120"/>
+              </a:rPr>
+              <a:t>B. 3.2% sodium citrate at a 9:1 ratio, properly filled</a:t>
+            </a:r>
+            <a:endParaRPr lang="en-US" sz="1350" dirty="0"/>
+          </a:p>
+          <a:p>
+            <a:pPr algn="l" indent="0" marL="0">
+              <a:spcAft>
+                <a:spcPts val="600"/>
+              </a:spcAft>
+              <a:buNone/>
+            </a:pPr>
+            <a:r>
+              <a:rPr lang="en-US" sz="1350" dirty="0">
+                <a:solidFill>
+                  <a:srgbClr val="33444F"/>
+                </a:solidFill>
+                <a:latin typeface="Calibri" pitchFamily="34" charset="0"/>
+                <a:ea typeface="Calibri" pitchFamily="34" charset="-122"/>
+                <a:cs typeface="Calibri" pitchFamily="34" charset="-120"/>
+              </a:rPr>
+              <a:t>C. Heparinized plasma</a:t>
+            </a:r>
+            <a:endParaRPr lang="en-US" sz="1350" dirty="0"/>
+          </a:p>
+          <a:p>
+            <a:pPr algn="l" indent="0" marL="0">
+              <a:spcAft>
+                <a:spcPts val="600"/>
+              </a:spcAft>
+              <a:buNone/>
+            </a:pPr>
+            <a:r>
+              <a:rPr lang="en-US" sz="1350" dirty="0">
+                <a:solidFill>
+                  <a:srgbClr val="33444F"/>
+                </a:solidFill>
+                <a:latin typeface="Calibri" pitchFamily="34" charset="0"/>
+                <a:ea typeface="Calibri" pitchFamily="34" charset="-122"/>
+                <a:cs typeface="Calibri" pitchFamily="34" charset="-120"/>
+              </a:rPr>
+              <a:t>D. Serum</a:t>
+            </a:r>
+            <a:endParaRPr lang="en-US" sz="1350" dirty="0"/>
+          </a:p>
+          <a:p>
+            <a:pPr algn="l" indent="0" marL="0">
+              <a:spcAft>
+                <a:spcPts val="600"/>
+              </a:spcAft>
+              <a:buNone/>
+            </a:pPr>
+            <a:r>
+              <a:rPr lang="en-US" sz="1350" dirty="0">
+                <a:solidFill>
+                  <a:srgbClr val="33444F"/>
+                </a:solidFill>
+                <a:latin typeface="Calibri" pitchFamily="34" charset="0"/>
+                <a:ea typeface="Calibri" pitchFamily="34" charset="-122"/>
+                <a:cs typeface="Calibri" pitchFamily="34" charset="-120"/>
+              </a:rPr>
+              <a:t>E. Any anticoagulant</a:t>
+            </a:r>
+            <a:endParaRPr lang="en-US" sz="1350" dirty="0"/>
+          </a:p>
+        </p:txBody>
+      </p:sp>
+      <p:sp>
+        <p:nvSpPr>
+          <p:cNvPr id="6" name="Shape 4"/>
+          <p:cNvSpPr/>
+          <p:nvPr/>
+        </p:nvSpPr>
+        <p:spPr>
+          <a:xfrm>
+            <a:off x="7201632" y="2395728"/>
+            <a:ext cx="4423136" cy="3246120"/>
+          </a:xfrm>
+          <a:prstGeom prst="roundRect">
+            <a:avLst>
+              <a:gd name="adj" fmla="val 2535"/>
+            </a:avLst>
+          </a:prstGeom>
+          <a:solidFill>
+            <a:srgbClr val="FBEAEC"/>
+          </a:solidFill>
+          <a:ln/>
+          <a:effectLst>
+            <a:outerShdw sx="100000" sy="100000" kx="0" ky="0" algn="bl" rotWithShape="0" blurRad="88900" dist="25400" dir="5400000">
+              <a:srgbClr val="22303C">
+                <a:alpha val="12000"/>
+              </a:srgbClr>
+            </a:outerShdw>
+          </a:effectLst>
+        </p:spPr>
+        <p:txBody>
+          <a:bodyPr/>
+          <a:p/>
+        </p:txBody>
+      </p:sp>
+      <p:sp>
+        <p:nvSpPr>
+          <p:cNvPr id="7" name="Text 5"/>
+          <p:cNvSpPr/>
+          <p:nvPr/>
+        </p:nvSpPr>
+        <p:spPr>
+          <a:xfrm>
+            <a:off x="7439376" y="2578608"/>
+            <a:ext cx="3965936" cy="457200"/>
+          </a:xfrm>
+          <a:prstGeom prst="rect">
+            <a:avLst/>
+          </a:prstGeom>
+          <a:noFill/>
+          <a:ln/>
+        </p:spPr>
+        <p:txBody>
+          <a:bodyPr wrap="square" lIns="0" tIns="0" rIns="0" bIns="0" rtlCol="0" anchor="ctr"/>
+          <a:lstStyle/>
+          <a:p>
+            <a:pPr indent="0" marL="0">
+              <a:buNone/>
+            </a:pPr>
+            <a:r>
+              <a:rPr lang="en-US" sz="1500" b="1" dirty="0">
+                <a:solidFill>
+                  <a:srgbClr val="C62133"/>
+                </a:solidFill>
+                <a:latin typeface="Calibri" pitchFamily="34" charset="0"/>
+                <a:ea typeface="Calibri" pitchFamily="34" charset="-122"/>
+                <a:cs typeface="Calibri" pitchFamily="34" charset="-120"/>
+              </a:rPr>
+              <a:t>ANSWER  </a:t>
+            </a:r>
+            <a:pPr indent="0" marL="0">
+              <a:buNone/>
+            </a:pPr>
+            <a:r>
+              <a:rPr lang="en-US" sz="1500" b="1" dirty="0">
+                <a:solidFill>
+                  <a:srgbClr val="1B2A38"/>
+                </a:solidFill>
+                <a:latin typeface="Calibri" pitchFamily="34" charset="0"/>
+                <a:ea typeface="Calibri" pitchFamily="34" charset="-122"/>
+                <a:cs typeface="Calibri" pitchFamily="34" charset="-120"/>
+              </a:rPr>
+              <a:t>B — 3.2% citrate, 9:1, properly filled</a:t>
+            </a:r>
+            <a:endParaRPr lang="en-US" sz="1500" dirty="0"/>
+          </a:p>
+        </p:txBody>
+      </p:sp>
+      <p:sp>
+        <p:nvSpPr>
+          <p:cNvPr id="8" name="Text 6"/>
+          <p:cNvSpPr/>
+          <p:nvPr/>
+        </p:nvSpPr>
+        <p:spPr>
+          <a:xfrm>
+            <a:off x="7439376" y="3127248"/>
+            <a:ext cx="3947648" cy="2377440"/>
+          </a:xfrm>
+          <a:prstGeom prst="rect">
+            <a:avLst/>
+          </a:prstGeom>
+          <a:noFill/>
+          <a:ln/>
+        </p:spPr>
+        <p:txBody>
+          <a:bodyPr wrap="square" lIns="0" tIns="0" rIns="0" bIns="0" rtlCol="0" anchor="t"/>
+          <a:lstStyle/>
+          <a:p>
+            <a:pPr algn="l" indent="0" marL="0">
+              <a:lnSpc>
+                <a:spcPct val="108000"/>
+              </a:lnSpc>
+              <a:buNone/>
+            </a:pPr>
+            <a:r>
+              <a:rPr lang="en-US" sz="1250" dirty="0">
+                <a:solidFill>
+                  <a:srgbClr val="33444F"/>
+                </a:solidFill>
+                <a:latin typeface="Calibri" pitchFamily="34" charset="0"/>
+                <a:ea typeface="Calibri" pitchFamily="34" charset="-122"/>
+                <a:cs typeface="Calibri" pitchFamily="34" charset="-120"/>
+              </a:rPr>
+              <a:t>Citrate at the correct ratio and fill preserves the factors; under-filling or wrong tubes invalidate results.</a:t>
+            </a:r>
+            <a:endParaRPr lang="en-US" sz="1250" dirty="0"/>
+          </a:p>
+        </p:txBody>
+      </p:sp>
+      <p:sp>
+        <p:nvSpPr>
+          <p:cNvPr id="9" name="Text 7"/>
+          <p:cNvSpPr/>
+          <p:nvPr/>
+        </p:nvSpPr>
+        <p:spPr>
+          <a:xfrm>
+            <a:off x="566928" y="6473952"/>
+            <a:ext cx="7772400" cy="274320"/>
+          </a:xfrm>
+          <a:prstGeom prst="rect">
+            <a:avLst/>
+          </a:prstGeom>
+          <a:noFill/>
+          <a:ln/>
+        </p:spPr>
+        <p:txBody>
+          <a:bodyPr wrap="square" lIns="0" tIns="0" rIns="0" bIns="0" rtlCol="0" anchor="ctr"/>
+          <a:lstStyle/>
+          <a:p>
+            <a:pPr algn="l" indent="0" marL="0">
+              <a:buNone/>
+            </a:pPr>
+            <a:r>
+              <a:rPr lang="en-US" sz="850" dirty="0">
+                <a:solidFill>
+                  <a:srgbClr val="9AA8B4"/>
+                </a:solidFill>
+                <a:latin typeface="Calibri" pitchFamily="34" charset="0"/>
+                <a:ea typeface="Calibri" pitchFamily="34" charset="-122"/>
+                <a:cs typeface="Calibri" pitchFamily="34" charset="-120"/>
+              </a:rPr>
+              <a:t>Makassed General Hospital  ·  Department of Laboratory Medicine</a:t>
+            </a:r>
+            <a:endParaRPr lang="en-US" sz="850" dirty="0"/>
+          </a:p>
+        </p:txBody>
+      </p:sp>
+      <p:sp>
+        <p:nvSpPr>
+          <p:cNvPr id="10" name="Text 8"/>
+          <p:cNvSpPr/>
+          <p:nvPr/>
+        </p:nvSpPr>
+        <p:spPr>
+          <a:xfrm>
+            <a:off x="9814255" y="6473952"/>
+            <a:ext cx="1828800" cy="274320"/>
+          </a:xfrm>
+          <a:prstGeom prst="rect">
+            <a:avLst/>
+          </a:prstGeom>
+          <a:noFill/>
+          <a:ln/>
+        </p:spPr>
+        <p:txBody>
+          <a:bodyPr wrap="square" lIns="0" tIns="0" rIns="0" bIns="0" rtlCol="0" anchor="ctr"/>
+          <a:lstStyle/>
+          <a:p>
+            <a:pPr algn="r" indent="0" marL="0">
+              <a:buNone/>
+            </a:pPr>
+            <a:r>
+              <a:rPr lang="en-US" sz="850" dirty="0">
+                <a:solidFill>
+                  <a:srgbClr val="9AA8B4"/>
+                </a:solidFill>
+                <a:latin typeface="Calibri" pitchFamily="34" charset="0"/>
+                <a:ea typeface="Calibri" pitchFamily="34" charset="-122"/>
+                <a:cs typeface="Calibri" pitchFamily="34" charset="-120"/>
+              </a:rPr>
+              <a:t>CP Lecture Series</a:t>
+            </a:r>
+            <a:pPr algn="r" indent="0" marL="0">
+              <a:buNone/>
+            </a:pPr>
+            <a:r>
+              <a:rPr lang="en-US" sz="850" dirty="0">
+                <a:solidFill>
+                  <a:srgbClr val="DCE4EC"/>
+                </a:solidFill>
+                <a:latin typeface="Calibri" pitchFamily="34" charset="0"/>
+                <a:ea typeface="Calibri" pitchFamily="34" charset="-122"/>
+                <a:cs typeface="Calibri" pitchFamily="34" charset="-120"/>
+              </a:rPr>
+              <a:t>   ·   </a:t>
+            </a:r>
+            <a:pPr algn="r" indent="0" marL="0">
+              <a:buNone/>
+            </a:pPr>
+            <a:r>
+              <a:rPr lang="en-US" sz="850" b="1" dirty="0">
+                <a:solidFill>
+                  <a:srgbClr val="C62133"/>
+                </a:solidFill>
+                <a:latin typeface="Calibri" pitchFamily="34" charset="0"/>
+                <a:ea typeface="Calibri" pitchFamily="34" charset="-122"/>
+                <a:cs typeface="Calibri" pitchFamily="34" charset="-120"/>
+              </a:rPr>
+              <a:t>19</a:t>
+            </a:r>
+            <a:endParaRPr lang="en-US" sz="850" dirty="0"/>
+          </a:p>
+        </p:txBody>
+      </p:sp>
+    </p:spTree>
+  </p:cSld>
+  <p:clrMapOvr>
+    <a:masterClrMapping/>
+  </p:clrMapOvr>
+</p:sld>
+</file>
+
+<file path=ppt/slides/slide28.xml><?xml version="1.0" encoding="utf-8"?>
+<p:sld xmlns:a="http://schemas.openxmlformats.org/drawingml/2006/main" xmlns:p="http://schemas.openxmlformats.org/presentationml/2006/main" xmlns:r="http://schemas.openxmlformats.org/officeDocument/2006/relationships">
+  <p:cSld>
+    <p:spTree>
+      <p:nvGrpSpPr>
+        <p:cNvPr id="1" name=""/>
+        <p:cNvGrpSpPr/>
+        <p:nvPr/>
+      </p:nvGrpSpPr>
+      <p:grpSpPr/>
+      <p:sp>
+        <p:nvSpPr>
+          <p:cNvPr id="2" name="Text 0"/>
+          <p:cNvSpPr/>
+          <p:nvPr/>
+        </p:nvSpPr>
+        <p:spPr>
+          <a:xfrm>
+            <a:off x="566928" y="329184"/>
+            <a:ext cx="10515600" cy="310896"/>
+          </a:xfrm>
+          <a:prstGeom prst="rect">
+            <a:avLst/>
+          </a:prstGeom>
+          <a:noFill/>
+          <a:ln/>
+        </p:spPr>
+        <p:txBody>
+          <a:bodyPr wrap="square" lIns="0" tIns="0" rIns="0" bIns="0" rtlCol="0" anchor="ctr"/>
+          <a:lstStyle/>
+          <a:p>
+            <a:pPr algn="l" indent="0" marL="0">
+              <a:buNone/>
+            </a:pPr>
+            <a:r>
+              <a:rPr lang="en-US" sz="1100" b="1" spc="150" kern="0" dirty="0">
+                <a:solidFill>
+                  <a:srgbClr val="C62133"/>
+                </a:solidFill>
+                <a:latin typeface="Calibri" pitchFamily="34" charset="0"/>
+                <a:ea typeface="Calibri" pitchFamily="34" charset="-122"/>
+                <a:cs typeface="Calibri" pitchFamily="34" charset="-120"/>
+              </a:rPr>
+              <a:t>HEMATOLOGY &amp; COAGULATION   ·   BOARD REVIEW  ·  Q2</a:t>
+            </a:r>
+            <a:endParaRPr lang="en-US" sz="1100" dirty="0"/>
+          </a:p>
+        </p:txBody>
+      </p:sp>
+      <p:sp>
+        <p:nvSpPr>
+          <p:cNvPr id="3" name="Text 1"/>
+          <p:cNvSpPr/>
+          <p:nvPr/>
+        </p:nvSpPr>
+        <p:spPr>
+          <a:xfrm>
+            <a:off x="566928" y="713232"/>
+            <a:ext cx="11064240" cy="749808"/>
+          </a:xfrm>
+          <a:prstGeom prst="rect">
+            <a:avLst/>
+          </a:prstGeom>
+          <a:noFill/>
+          <a:ln/>
+        </p:spPr>
+        <p:txBody>
+          <a:bodyPr wrap="square" lIns="0" tIns="0" rIns="0" bIns="0" rtlCol="0" anchor="ctr"/>
+          <a:lstStyle/>
+          <a:p>
+            <a:pPr algn="l" indent="0" marL="0">
+              <a:buNone/>
+            </a:pPr>
+            <a:r>
+              <a:rPr lang="en-US" sz="2600" b="1" dirty="0">
+                <a:solidFill>
+                  <a:srgbClr val="0E3A5F"/>
+                </a:solidFill>
+                <a:latin typeface="Calibri" pitchFamily="34" charset="0"/>
+                <a:ea typeface="Calibri" pitchFamily="34" charset="-122"/>
+                <a:cs typeface="Calibri" pitchFamily="34" charset="-120"/>
+              </a:rPr>
+              <a:t>Board-Style Review</a:t>
+            </a:r>
+            <a:endParaRPr lang="en-US" sz="2600" dirty="0"/>
+          </a:p>
+        </p:txBody>
+      </p:sp>
+      <p:sp>
+        <p:nvSpPr>
+          <p:cNvPr id="4" name="Text 2"/>
+          <p:cNvSpPr/>
+          <p:nvPr/>
+        </p:nvSpPr>
+        <p:spPr>
+          <a:xfrm>
+            <a:off x="566928" y="1417320"/>
+            <a:ext cx="11057839" cy="914400"/>
+          </a:xfrm>
+          <a:prstGeom prst="rect">
+            <a:avLst/>
+          </a:prstGeom>
+          <a:noFill/>
+          <a:ln/>
+        </p:spPr>
+        <p:txBody>
+          <a:bodyPr wrap="square" lIns="0" tIns="0" rIns="0" bIns="0" rtlCol="0" anchor="t"/>
+          <a:lstStyle/>
+          <a:p>
+            <a:pPr algn="l" indent="0" marL="0">
+              <a:lnSpc>
+                <a:spcPct val="105000"/>
+              </a:lnSpc>
+              <a:buNone/>
+            </a:pPr>
+            <a:r>
+              <a:rPr lang="en-US" sz="1450" b="1" dirty="0">
+                <a:solidFill>
+                  <a:srgbClr val="1B2A38"/>
+                </a:solidFill>
+                <a:latin typeface="Calibri" pitchFamily="34" charset="0"/>
+                <a:ea typeface="Calibri" pitchFamily="34" charset="-122"/>
+                <a:cs typeface="Calibri" pitchFamily="34" charset="-120"/>
+              </a:rPr>
+              <a:t>An isolated prolonged PT with a normal aPTT most suggests a deficiency of:</a:t>
+            </a:r>
+            <a:endParaRPr lang="en-US" sz="1450" dirty="0"/>
+          </a:p>
+        </p:txBody>
+      </p:sp>
+      <p:sp>
+        <p:nvSpPr>
+          <p:cNvPr id="5" name="Text 3"/>
+          <p:cNvSpPr/>
+          <p:nvPr/>
+        </p:nvSpPr>
+        <p:spPr>
+          <a:xfrm>
+            <a:off x="658368" y="2395728"/>
+            <a:ext cx="6192390" cy="3017520"/>
+          </a:xfrm>
+          <a:prstGeom prst="rect">
+            <a:avLst/>
+          </a:prstGeom>
+          <a:noFill/>
+          <a:ln/>
+        </p:spPr>
+        <p:txBody>
+          <a:bodyPr wrap="square" lIns="0" tIns="0" rIns="0" bIns="0" rtlCol="0" anchor="t"/>
+          <a:lstStyle/>
+          <a:p>
+            <a:pPr algn="l" indent="0" marL="0">
+              <a:spcAft>
+                <a:spcPts val="600"/>
+              </a:spcAft>
+              <a:buNone/>
+            </a:pPr>
+            <a:r>
+              <a:rPr lang="en-US" sz="1350" dirty="0">
+                <a:solidFill>
+                  <a:srgbClr val="33444F"/>
+                </a:solidFill>
+                <a:latin typeface="Calibri" pitchFamily="34" charset="0"/>
+                <a:ea typeface="Calibri" pitchFamily="34" charset="-122"/>
+                <a:cs typeface="Calibri" pitchFamily="34" charset="-120"/>
+              </a:rPr>
+              <a:t>A. Factor VIII</a:t>
+            </a:r>
+            <a:endParaRPr lang="en-US" sz="1350" dirty="0"/>
+          </a:p>
+          <a:p>
+            <a:pPr algn="l" indent="0" marL="0">
+              <a:spcAft>
+                <a:spcPts val="600"/>
+              </a:spcAft>
+              <a:buNone/>
+            </a:pPr>
+            <a:r>
+              <a:rPr lang="en-US" sz="1350" dirty="0">
+                <a:solidFill>
+                  <a:srgbClr val="33444F"/>
+                </a:solidFill>
+                <a:latin typeface="Calibri" pitchFamily="34" charset="0"/>
+                <a:ea typeface="Calibri" pitchFamily="34" charset="-122"/>
+                <a:cs typeface="Calibri" pitchFamily="34" charset="-120"/>
+              </a:rPr>
+              <a:t>B. Factor IX</a:t>
+            </a:r>
+            <a:endParaRPr lang="en-US" sz="1350" dirty="0"/>
+          </a:p>
+          <a:p>
+            <a:pPr algn="l" indent="0" marL="0">
+              <a:spcAft>
+                <a:spcPts val="600"/>
+              </a:spcAft>
+              <a:buNone/>
+            </a:pPr>
+            <a:r>
+              <a:rPr lang="en-US" sz="1350" b="1" dirty="0">
+                <a:solidFill>
+                  <a:srgbClr val="8E1622"/>
+                </a:solidFill>
+                <a:latin typeface="Calibri" pitchFamily="34" charset="0"/>
+                <a:ea typeface="Calibri" pitchFamily="34" charset="-122"/>
+                <a:cs typeface="Calibri" pitchFamily="34" charset="-120"/>
+              </a:rPr>
+              <a:t>C. Factor VII</a:t>
+            </a:r>
+            <a:endParaRPr lang="en-US" sz="1350" dirty="0"/>
+          </a:p>
+          <a:p>
+            <a:pPr algn="l" indent="0" marL="0">
+              <a:spcAft>
+                <a:spcPts val="600"/>
+              </a:spcAft>
+              <a:buNone/>
+            </a:pPr>
+            <a:r>
+              <a:rPr lang="en-US" sz="1350" dirty="0">
+                <a:solidFill>
+                  <a:srgbClr val="33444F"/>
+                </a:solidFill>
+                <a:latin typeface="Calibri" pitchFamily="34" charset="0"/>
+                <a:ea typeface="Calibri" pitchFamily="34" charset="-122"/>
+                <a:cs typeface="Calibri" pitchFamily="34" charset="-120"/>
+              </a:rPr>
+              <a:t>D. Factor XII</a:t>
+            </a:r>
+            <a:endParaRPr lang="en-US" sz="1350" dirty="0"/>
+          </a:p>
+          <a:p>
+            <a:pPr algn="l" indent="0" marL="0">
+              <a:spcAft>
+                <a:spcPts val="600"/>
+              </a:spcAft>
+              <a:buNone/>
+            </a:pPr>
+            <a:r>
+              <a:rPr lang="en-US" sz="1350" dirty="0">
+                <a:solidFill>
+                  <a:srgbClr val="33444F"/>
+                </a:solidFill>
+                <a:latin typeface="Calibri" pitchFamily="34" charset="0"/>
+                <a:ea typeface="Calibri" pitchFamily="34" charset="-122"/>
+                <a:cs typeface="Calibri" pitchFamily="34" charset="-120"/>
+              </a:rPr>
+              <a:t>E. Fibrinogen</a:t>
+            </a:r>
+            <a:endParaRPr lang="en-US" sz="1350" dirty="0"/>
+          </a:p>
+        </p:txBody>
+      </p:sp>
+      <p:sp>
+        <p:nvSpPr>
+          <p:cNvPr id="6" name="Shape 4"/>
+          <p:cNvSpPr/>
+          <p:nvPr/>
+        </p:nvSpPr>
+        <p:spPr>
+          <a:xfrm>
+            <a:off x="7201632" y="2395728"/>
+            <a:ext cx="4423136" cy="3246120"/>
+          </a:xfrm>
+          <a:prstGeom prst="roundRect">
+            <a:avLst>
+              <a:gd name="adj" fmla="val 2535"/>
+            </a:avLst>
+          </a:prstGeom>
+          <a:solidFill>
+            <a:srgbClr val="FBEAEC"/>
+          </a:solidFill>
+          <a:ln/>
+          <a:effectLst>
+            <a:outerShdw sx="100000" sy="100000" kx="0" ky="0" algn="bl" rotWithShape="0" blurRad="88900" dist="25400" dir="5400000">
+              <a:srgbClr val="22303C">
+                <a:alpha val="12000"/>
+              </a:srgbClr>
+            </a:outerShdw>
+          </a:effectLst>
+        </p:spPr>
+        <p:txBody>
+          <a:bodyPr/>
+          <a:p/>
+        </p:txBody>
+      </p:sp>
+      <p:sp>
+        <p:nvSpPr>
+          <p:cNvPr id="7" name="Text 5"/>
+          <p:cNvSpPr/>
+          <p:nvPr/>
+        </p:nvSpPr>
+        <p:spPr>
+          <a:xfrm>
+            <a:off x="7439376" y="2578608"/>
+            <a:ext cx="3965936" cy="457200"/>
+          </a:xfrm>
+          <a:prstGeom prst="rect">
+            <a:avLst/>
+          </a:prstGeom>
+          <a:noFill/>
+          <a:ln/>
+        </p:spPr>
+        <p:txBody>
+          <a:bodyPr wrap="square" lIns="0" tIns="0" rIns="0" bIns="0" rtlCol="0" anchor="ctr"/>
+          <a:lstStyle/>
+          <a:p>
+            <a:pPr indent="0" marL="0">
+              <a:buNone/>
+            </a:pPr>
+            <a:r>
+              <a:rPr lang="en-US" sz="1500" b="1" dirty="0">
+                <a:solidFill>
+                  <a:srgbClr val="C62133"/>
+                </a:solidFill>
+                <a:latin typeface="Calibri" pitchFamily="34" charset="0"/>
+                <a:ea typeface="Calibri" pitchFamily="34" charset="-122"/>
+                <a:cs typeface="Calibri" pitchFamily="34" charset="-120"/>
+              </a:rPr>
+              <a:t>ANSWER  </a:t>
+            </a:r>
+            <a:pPr indent="0" marL="0">
+              <a:buNone/>
+            </a:pPr>
+            <a:r>
+              <a:rPr lang="en-US" sz="1500" b="1" dirty="0">
+                <a:solidFill>
+                  <a:srgbClr val="1B2A38"/>
+                </a:solidFill>
+                <a:latin typeface="Calibri" pitchFamily="34" charset="0"/>
+                <a:ea typeface="Calibri" pitchFamily="34" charset="-122"/>
+                <a:cs typeface="Calibri" pitchFamily="34" charset="-120"/>
+              </a:rPr>
+              <a:t>C — Factor VII</a:t>
+            </a:r>
+            <a:endParaRPr lang="en-US" sz="1500" dirty="0"/>
+          </a:p>
+        </p:txBody>
+      </p:sp>
+      <p:sp>
+        <p:nvSpPr>
+          <p:cNvPr id="8" name="Text 6"/>
+          <p:cNvSpPr/>
+          <p:nvPr/>
+        </p:nvSpPr>
+        <p:spPr>
+          <a:xfrm>
+            <a:off x="7439376" y="3127248"/>
+            <a:ext cx="3947648" cy="2377440"/>
+          </a:xfrm>
+          <a:prstGeom prst="rect">
+            <a:avLst/>
+          </a:prstGeom>
+          <a:noFill/>
+          <a:ln/>
+        </p:spPr>
+        <p:txBody>
+          <a:bodyPr wrap="square" lIns="0" tIns="0" rIns="0" bIns="0" rtlCol="0" anchor="t"/>
+          <a:lstStyle/>
+          <a:p>
+            <a:pPr algn="l" indent="0" marL="0">
+              <a:lnSpc>
+                <a:spcPct val="108000"/>
+              </a:lnSpc>
+              <a:buNone/>
+            </a:pPr>
+            <a:r>
+              <a:rPr lang="en-US" sz="1250" dirty="0">
+                <a:solidFill>
+                  <a:srgbClr val="33444F"/>
+                </a:solidFill>
+                <a:latin typeface="Calibri" pitchFamily="34" charset="0"/>
+                <a:ea typeface="Calibri" pitchFamily="34" charset="-122"/>
+                <a:cs typeface="Calibri" pitchFamily="34" charset="-120"/>
+              </a:rPr>
+              <a:t>Factor VII is unique to the extrinsic pathway and has the shortest half-life, so the PT prolongs first.</a:t>
+            </a:r>
+            <a:endParaRPr lang="en-US" sz="1250" dirty="0"/>
+          </a:p>
+        </p:txBody>
+      </p:sp>
+      <p:sp>
+        <p:nvSpPr>
+          <p:cNvPr id="9" name="Text 7"/>
+          <p:cNvSpPr/>
+          <p:nvPr/>
+        </p:nvSpPr>
+        <p:spPr>
+          <a:xfrm>
+            <a:off x="566928" y="6473952"/>
+            <a:ext cx="7772400" cy="274320"/>
+          </a:xfrm>
+          <a:prstGeom prst="rect">
+            <a:avLst/>
+          </a:prstGeom>
+          <a:noFill/>
+          <a:ln/>
+        </p:spPr>
+        <p:txBody>
+          <a:bodyPr wrap="square" lIns="0" tIns="0" rIns="0" bIns="0" rtlCol="0" anchor="ctr"/>
+          <a:lstStyle/>
+          <a:p>
+            <a:pPr algn="l" indent="0" marL="0">
+              <a:buNone/>
+            </a:pPr>
+            <a:r>
+              <a:rPr lang="en-US" sz="850" dirty="0">
+                <a:solidFill>
+                  <a:srgbClr val="9AA8B4"/>
+                </a:solidFill>
+                <a:latin typeface="Calibri" pitchFamily="34" charset="0"/>
+                <a:ea typeface="Calibri" pitchFamily="34" charset="-122"/>
+                <a:cs typeface="Calibri" pitchFamily="34" charset="-120"/>
+              </a:rPr>
+              <a:t>Makassed General Hospital  ·  Department of Laboratory Medicine</a:t>
+            </a:r>
+            <a:endParaRPr lang="en-US" sz="850" dirty="0"/>
+          </a:p>
+        </p:txBody>
+      </p:sp>
+      <p:sp>
+        <p:nvSpPr>
+          <p:cNvPr id="10" name="Text 8"/>
+          <p:cNvSpPr/>
+          <p:nvPr/>
+        </p:nvSpPr>
+        <p:spPr>
+          <a:xfrm>
+            <a:off x="9814255" y="6473952"/>
+            <a:ext cx="1828800" cy="274320"/>
+          </a:xfrm>
+          <a:prstGeom prst="rect">
+            <a:avLst/>
+          </a:prstGeom>
+          <a:noFill/>
+          <a:ln/>
+        </p:spPr>
+        <p:txBody>
+          <a:bodyPr wrap="square" lIns="0" tIns="0" rIns="0" bIns="0" rtlCol="0" anchor="ctr"/>
+          <a:lstStyle/>
+          <a:p>
+            <a:pPr algn="r" indent="0" marL="0">
+              <a:buNone/>
+            </a:pPr>
+            <a:r>
+              <a:rPr lang="en-US" sz="850" dirty="0">
+                <a:solidFill>
+                  <a:srgbClr val="9AA8B4"/>
+                </a:solidFill>
+                <a:latin typeface="Calibri" pitchFamily="34" charset="0"/>
+                <a:ea typeface="Calibri" pitchFamily="34" charset="-122"/>
+                <a:cs typeface="Calibri" pitchFamily="34" charset="-120"/>
+              </a:rPr>
+              <a:t>CP Lecture Series</a:t>
+            </a:r>
+            <a:pPr algn="r" indent="0" marL="0">
+              <a:buNone/>
+            </a:pPr>
+            <a:r>
+              <a:rPr lang="en-US" sz="850" dirty="0">
+                <a:solidFill>
+                  <a:srgbClr val="DCE4EC"/>
+                </a:solidFill>
+                <a:latin typeface="Calibri" pitchFamily="34" charset="0"/>
+                <a:ea typeface="Calibri" pitchFamily="34" charset="-122"/>
+                <a:cs typeface="Calibri" pitchFamily="34" charset="-120"/>
+              </a:rPr>
+              <a:t>   ·   </a:t>
+            </a:r>
+            <a:pPr algn="r" indent="0" marL="0">
+              <a:buNone/>
+            </a:pPr>
+            <a:r>
+              <a:rPr lang="en-US" sz="850" b="1" dirty="0">
+                <a:solidFill>
+                  <a:srgbClr val="C62133"/>
+                </a:solidFill>
+                <a:latin typeface="Calibri" pitchFamily="34" charset="0"/>
+                <a:ea typeface="Calibri" pitchFamily="34" charset="-122"/>
+                <a:cs typeface="Calibri" pitchFamily="34" charset="-120"/>
+              </a:rPr>
+              <a:t>18</a:t>
+            </a:r>
+            <a:endParaRPr lang="en-US" sz="850" dirty="0"/>
+          </a:p>
+        </p:txBody>
+      </p:sp>
+    </p:spTree>
+  </p:cSld>
+  <p:clrMapOvr>
+    <a:masterClrMapping/>
+  </p:clrMapOvr>
+</p:sld>
+</file>
+
+<file path=ppt/slides/slide29.xml><?xml version="1.0" encoding="utf-8"?>
+<p:sld xmlns:a="http://schemas.openxmlformats.org/drawingml/2006/main" xmlns:p="http://schemas.openxmlformats.org/presentationml/2006/main" xmlns:r="http://schemas.openxmlformats.org/officeDocument/2006/relationships">
+  <p:cSld>
+    <p:spTree>
+      <p:nvGrpSpPr>
+        <p:cNvPr id="1" name=""/>
+        <p:cNvGrpSpPr/>
+        <p:nvPr/>
+      </p:nvGrpSpPr>
+      <p:grpSpPr/>
+      <p:sp>
+        <p:nvSpPr>
+          <p:cNvPr id="2" name="Text 0"/>
+          <p:cNvSpPr/>
+          <p:nvPr/>
+        </p:nvSpPr>
+        <p:spPr>
+          <a:xfrm>
+            <a:off x="566928" y="329184"/>
+            <a:ext cx="10515600" cy="310896"/>
+          </a:xfrm>
+          <a:prstGeom prst="rect">
+            <a:avLst/>
+          </a:prstGeom>
+          <a:noFill/>
+          <a:ln/>
+        </p:spPr>
+        <p:txBody>
+          <a:bodyPr wrap="square" lIns="0" tIns="0" rIns="0" bIns="0" rtlCol="0" anchor="ctr"/>
+          <a:lstStyle/>
+          <a:p>
+            <a:pPr algn="l" indent="0" marL="0">
+              <a:buNone/>
+            </a:pPr>
+            <a:r>
+              <a:rPr lang="en-US" sz="1100" b="1" spc="150" kern="0" dirty="0">
+                <a:solidFill>
+                  <a:srgbClr val="C62133"/>
+                </a:solidFill>
+                <a:latin typeface="Calibri" pitchFamily="34" charset="0"/>
+                <a:ea typeface="Calibri" pitchFamily="34" charset="-122"/>
+                <a:cs typeface="Calibri" pitchFamily="34" charset="-120"/>
+              </a:rPr>
+              <a:t>HEMATOLOGY &amp; COAGULATION   ·   BOARD REVIEW  ·  Q1</a:t>
+            </a:r>
+            <a:endParaRPr lang="en-US" sz="1100" dirty="0"/>
+          </a:p>
+        </p:txBody>
+      </p:sp>
+      <p:sp>
+        <p:nvSpPr>
+          <p:cNvPr id="3" name="Text 1"/>
+          <p:cNvSpPr/>
+          <p:nvPr/>
+        </p:nvSpPr>
+        <p:spPr>
+          <a:xfrm>
+            <a:off x="566928" y="713232"/>
+            <a:ext cx="11064240" cy="749808"/>
+          </a:xfrm>
+          <a:prstGeom prst="rect">
+            <a:avLst/>
+          </a:prstGeom>
+          <a:noFill/>
+          <a:ln/>
+        </p:spPr>
+        <p:txBody>
+          <a:bodyPr wrap="square" lIns="0" tIns="0" rIns="0" bIns="0" rtlCol="0" anchor="ctr"/>
+          <a:lstStyle/>
+          <a:p>
+            <a:pPr algn="l" indent="0" marL="0">
+              <a:buNone/>
+            </a:pPr>
+            <a:r>
+              <a:rPr lang="en-US" sz="2600" b="1" dirty="0">
+                <a:solidFill>
+                  <a:srgbClr val="0E3A5F"/>
+                </a:solidFill>
+                <a:latin typeface="Calibri" pitchFamily="34" charset="0"/>
+                <a:ea typeface="Calibri" pitchFamily="34" charset="-122"/>
+                <a:cs typeface="Calibri" pitchFamily="34" charset="-120"/>
+              </a:rPr>
+              <a:t>Board-Style Review</a:t>
+            </a:r>
+            <a:endParaRPr lang="en-US" sz="2600" dirty="0"/>
+          </a:p>
+        </p:txBody>
+      </p:sp>
+      <p:sp>
+        <p:nvSpPr>
+          <p:cNvPr id="4" name="Text 2"/>
+          <p:cNvSpPr/>
+          <p:nvPr/>
+        </p:nvSpPr>
+        <p:spPr>
+          <a:xfrm>
+            <a:off x="566928" y="1417320"/>
+            <a:ext cx="11057839" cy="914400"/>
+          </a:xfrm>
+          <a:prstGeom prst="rect">
+            <a:avLst/>
+          </a:prstGeom>
+          <a:noFill/>
+          <a:ln/>
+        </p:spPr>
+        <p:txBody>
+          <a:bodyPr wrap="square" lIns="0" tIns="0" rIns="0" bIns="0" rtlCol="0" anchor="t"/>
+          <a:lstStyle/>
+          <a:p>
+            <a:pPr algn="l" indent="0" marL="0">
+              <a:lnSpc>
+                <a:spcPct val="105000"/>
+              </a:lnSpc>
+              <a:buNone/>
+            </a:pPr>
+            <a:r>
+              <a:rPr lang="en-US" sz="1450" b="1" dirty="0">
+                <a:solidFill>
+                  <a:srgbClr val="1B2A38"/>
+                </a:solidFill>
+                <a:latin typeface="Calibri" pitchFamily="34" charset="0"/>
+                <a:ea typeface="Calibri" pitchFamily="34" charset="-122"/>
+                <a:cs typeface="Calibri" pitchFamily="34" charset="-120"/>
+              </a:rPr>
+              <a:t>A prolonged aPTT that does NOT correct on 1:1 mixing indicates:</a:t>
+            </a:r>
+            <a:endParaRPr lang="en-US" sz="1450" dirty="0"/>
+          </a:p>
+        </p:txBody>
+      </p:sp>
+      <p:sp>
+        <p:nvSpPr>
+          <p:cNvPr id="5" name="Text 3"/>
+          <p:cNvSpPr/>
+          <p:nvPr/>
+        </p:nvSpPr>
+        <p:spPr>
+          <a:xfrm>
+            <a:off x="658368" y="2395728"/>
+            <a:ext cx="6192390" cy="3017520"/>
+          </a:xfrm>
+          <a:prstGeom prst="rect">
+            <a:avLst/>
+          </a:prstGeom>
+          <a:noFill/>
+          <a:ln/>
+        </p:spPr>
+        <p:txBody>
+          <a:bodyPr wrap="square" lIns="0" tIns="0" rIns="0" bIns="0" rtlCol="0" anchor="t"/>
+          <a:lstStyle/>
+          <a:p>
+            <a:pPr algn="l" indent="0" marL="0">
+              <a:spcAft>
+                <a:spcPts val="600"/>
+              </a:spcAft>
+              <a:buNone/>
+            </a:pPr>
+            <a:r>
+              <a:rPr lang="en-US" sz="1350" dirty="0">
+                <a:solidFill>
+                  <a:srgbClr val="33444F"/>
+                </a:solidFill>
+                <a:latin typeface="Calibri" pitchFamily="34" charset="0"/>
+                <a:ea typeface="Calibri" pitchFamily="34" charset="-122"/>
+                <a:cs typeface="Calibri" pitchFamily="34" charset="-120"/>
+              </a:rPr>
+              <a:t>A. A factor deficiency</a:t>
+            </a:r>
+            <a:endParaRPr lang="en-US" sz="1350" dirty="0"/>
+          </a:p>
+          <a:p>
+            <a:pPr algn="l" indent="0" marL="0">
+              <a:spcAft>
+                <a:spcPts val="600"/>
+              </a:spcAft>
+              <a:buNone/>
+            </a:pPr>
+            <a:r>
+              <a:rPr lang="en-US" sz="1350" b="1" dirty="0">
+                <a:solidFill>
+                  <a:srgbClr val="8E1622"/>
+                </a:solidFill>
+                <a:latin typeface="Calibri" pitchFamily="34" charset="0"/>
+                <a:ea typeface="Calibri" pitchFamily="34" charset="-122"/>
+                <a:cs typeface="Calibri" pitchFamily="34" charset="-120"/>
+              </a:rPr>
+              <a:t>B. An inhibitor</a:t>
+            </a:r>
+            <a:endParaRPr lang="en-US" sz="1350" dirty="0"/>
+          </a:p>
+          <a:p>
+            <a:pPr algn="l" indent="0" marL="0">
+              <a:spcAft>
+                <a:spcPts val="600"/>
+              </a:spcAft>
+              <a:buNone/>
+            </a:pPr>
+            <a:r>
+              <a:rPr lang="en-US" sz="1350" dirty="0">
+                <a:solidFill>
+                  <a:srgbClr val="33444F"/>
+                </a:solidFill>
+                <a:latin typeface="Calibri" pitchFamily="34" charset="0"/>
+                <a:ea typeface="Calibri" pitchFamily="34" charset="-122"/>
+                <a:cs typeface="Calibri" pitchFamily="34" charset="-120"/>
+              </a:rPr>
+              <a:t>C. Warfarin effect</a:t>
+            </a:r>
+            <a:endParaRPr lang="en-US" sz="1350" dirty="0"/>
+          </a:p>
+          <a:p>
+            <a:pPr algn="l" indent="0" marL="0">
+              <a:spcAft>
+                <a:spcPts val="600"/>
+              </a:spcAft>
+              <a:buNone/>
+            </a:pPr>
+            <a:r>
+              <a:rPr lang="en-US" sz="1350" dirty="0">
+                <a:solidFill>
+                  <a:srgbClr val="33444F"/>
+                </a:solidFill>
+                <a:latin typeface="Calibri" pitchFamily="34" charset="0"/>
+                <a:ea typeface="Calibri" pitchFamily="34" charset="-122"/>
+                <a:cs typeface="Calibri" pitchFamily="34" charset="-120"/>
+              </a:rPr>
+              <a:t>D. Vitamin-K deficiency</a:t>
+            </a:r>
+            <a:endParaRPr lang="en-US" sz="1350" dirty="0"/>
+          </a:p>
+          <a:p>
+            <a:pPr algn="l" indent="0" marL="0">
+              <a:spcAft>
+                <a:spcPts val="600"/>
+              </a:spcAft>
+              <a:buNone/>
+            </a:pPr>
+            <a:r>
+              <a:rPr lang="en-US" sz="1350" dirty="0">
+                <a:solidFill>
+                  <a:srgbClr val="33444F"/>
+                </a:solidFill>
+                <a:latin typeface="Calibri" pitchFamily="34" charset="0"/>
+                <a:ea typeface="Calibri" pitchFamily="34" charset="-122"/>
+                <a:cs typeface="Calibri" pitchFamily="34" charset="-120"/>
+              </a:rPr>
+              <a:t>E. Factor VII deficiency</a:t>
+            </a:r>
+            <a:endParaRPr lang="en-US" sz="1350" dirty="0"/>
+          </a:p>
+        </p:txBody>
+      </p:sp>
+      <p:sp>
+        <p:nvSpPr>
+          <p:cNvPr id="6" name="Shape 4"/>
+          <p:cNvSpPr/>
+          <p:nvPr/>
+        </p:nvSpPr>
+        <p:spPr>
+          <a:xfrm>
+            <a:off x="7201632" y="2395728"/>
+            <a:ext cx="4423136" cy="3246120"/>
+          </a:xfrm>
+          <a:prstGeom prst="roundRect">
+            <a:avLst>
+              <a:gd name="adj" fmla="val 2535"/>
+            </a:avLst>
+          </a:prstGeom>
+          <a:solidFill>
+            <a:srgbClr val="FBEAEC"/>
+          </a:solidFill>
+          <a:ln/>
+          <a:effectLst>
+            <a:outerShdw sx="100000" sy="100000" kx="0" ky="0" algn="bl" rotWithShape="0" blurRad="88900" dist="25400" dir="5400000">
+              <a:srgbClr val="22303C">
+                <a:alpha val="12000"/>
+              </a:srgbClr>
+            </a:outerShdw>
+          </a:effectLst>
+        </p:spPr>
+        <p:txBody>
+          <a:bodyPr/>
+          <a:p/>
+        </p:txBody>
+      </p:sp>
+      <p:sp>
+        <p:nvSpPr>
+          <p:cNvPr id="7" name="Text 5"/>
+          <p:cNvSpPr/>
+          <p:nvPr/>
+        </p:nvSpPr>
+        <p:spPr>
+          <a:xfrm>
+            <a:off x="7439376" y="2578608"/>
+            <a:ext cx="3965936" cy="457200"/>
+          </a:xfrm>
+          <a:prstGeom prst="rect">
+            <a:avLst/>
+          </a:prstGeom>
+          <a:noFill/>
+          <a:ln/>
+        </p:spPr>
+        <p:txBody>
+          <a:bodyPr wrap="square" lIns="0" tIns="0" rIns="0" bIns="0" rtlCol="0" anchor="ctr"/>
+          <a:lstStyle/>
+          <a:p>
+            <a:pPr indent="0" marL="0">
+              <a:buNone/>
+            </a:pPr>
+            <a:r>
+              <a:rPr lang="en-US" sz="1500" b="1" dirty="0">
+                <a:solidFill>
+                  <a:srgbClr val="C62133"/>
+                </a:solidFill>
+                <a:latin typeface="Calibri" pitchFamily="34" charset="0"/>
+                <a:ea typeface="Calibri" pitchFamily="34" charset="-122"/>
+                <a:cs typeface="Calibri" pitchFamily="34" charset="-120"/>
+              </a:rPr>
+              <a:t>ANSWER  </a:t>
+            </a:r>
+            <a:pPr indent="0" marL="0">
+              <a:buNone/>
+            </a:pPr>
+            <a:r>
+              <a:rPr lang="en-US" sz="1500" b="1" dirty="0">
+                <a:solidFill>
+                  <a:srgbClr val="1B2A38"/>
+                </a:solidFill>
+                <a:latin typeface="Calibri" pitchFamily="34" charset="0"/>
+                <a:ea typeface="Calibri" pitchFamily="34" charset="-122"/>
+                <a:cs typeface="Calibri" pitchFamily="34" charset="-120"/>
+              </a:rPr>
+              <a:t>B — An inhibitor</a:t>
+            </a:r>
+            <a:endParaRPr lang="en-US" sz="1500" dirty="0"/>
+          </a:p>
+        </p:txBody>
+      </p:sp>
+      <p:sp>
+        <p:nvSpPr>
+          <p:cNvPr id="8" name="Text 6"/>
+          <p:cNvSpPr/>
+          <p:nvPr/>
+        </p:nvSpPr>
+        <p:spPr>
+          <a:xfrm>
+            <a:off x="7439376" y="3127248"/>
+            <a:ext cx="3947648" cy="2377440"/>
+          </a:xfrm>
+          <a:prstGeom prst="rect">
+            <a:avLst/>
+          </a:prstGeom>
+          <a:noFill/>
+          <a:ln/>
+        </p:spPr>
+        <p:txBody>
+          <a:bodyPr wrap="square" lIns="0" tIns="0" rIns="0" bIns="0" rtlCol="0" anchor="t"/>
+          <a:lstStyle/>
+          <a:p>
+            <a:pPr algn="l" indent="0" marL="0">
+              <a:lnSpc>
+                <a:spcPct val="108000"/>
+              </a:lnSpc>
+              <a:buNone/>
+            </a:pPr>
+            <a:r>
+              <a:rPr lang="en-US" sz="1250" dirty="0">
+                <a:solidFill>
+                  <a:srgbClr val="33444F"/>
+                </a:solidFill>
+                <a:latin typeface="Calibri" pitchFamily="34" charset="0"/>
+                <a:ea typeface="Calibri" pitchFamily="34" charset="-122"/>
+                <a:cs typeface="Calibri" pitchFamily="34" charset="-120"/>
+              </a:rPr>
+              <a:t>Failure to correct indicates an inhibitor (lupus anticoagulant, specific factor inhibitor, or heparin); correction indicates deficiency.</a:t>
+            </a:r>
+            <a:endParaRPr lang="en-US" sz="1250" dirty="0"/>
+          </a:p>
+        </p:txBody>
+      </p:sp>
+      <p:sp>
+        <p:nvSpPr>
+          <p:cNvPr id="9" name="Text 7"/>
+          <p:cNvSpPr/>
+          <p:nvPr/>
+        </p:nvSpPr>
+        <p:spPr>
+          <a:xfrm>
+            <a:off x="566928" y="6473952"/>
+            <a:ext cx="7772400" cy="274320"/>
+          </a:xfrm>
+          <a:prstGeom prst="rect">
+            <a:avLst/>
+          </a:prstGeom>
+          <a:noFill/>
+          <a:ln/>
+        </p:spPr>
+        <p:txBody>
+          <a:bodyPr wrap="square" lIns="0" tIns="0" rIns="0" bIns="0" rtlCol="0" anchor="ctr"/>
+          <a:lstStyle/>
+          <a:p>
+            <a:pPr algn="l" indent="0" marL="0">
+              <a:buNone/>
+            </a:pPr>
+            <a:r>
+              <a:rPr lang="en-US" sz="850" dirty="0">
+                <a:solidFill>
+                  <a:srgbClr val="9AA8B4"/>
+                </a:solidFill>
+                <a:latin typeface="Calibri" pitchFamily="34" charset="0"/>
+                <a:ea typeface="Calibri" pitchFamily="34" charset="-122"/>
+                <a:cs typeface="Calibri" pitchFamily="34" charset="-120"/>
+              </a:rPr>
+              <a:t>Makassed General Hospital  ·  Department of Laboratory Medicine</a:t>
+            </a:r>
+            <a:endParaRPr lang="en-US" sz="850" dirty="0"/>
+          </a:p>
+        </p:txBody>
+      </p:sp>
+      <p:sp>
+        <p:nvSpPr>
+          <p:cNvPr id="10" name="Text 8"/>
+          <p:cNvSpPr/>
+          <p:nvPr/>
+        </p:nvSpPr>
+        <p:spPr>
+          <a:xfrm>
+            <a:off x="9814255" y="6473952"/>
+            <a:ext cx="1828800" cy="274320"/>
+          </a:xfrm>
+          <a:prstGeom prst="rect">
+            <a:avLst/>
+          </a:prstGeom>
+          <a:noFill/>
+          <a:ln/>
+        </p:spPr>
+        <p:txBody>
+          <a:bodyPr wrap="square" lIns="0" tIns="0" rIns="0" bIns="0" rtlCol="0" anchor="ctr"/>
+          <a:lstStyle/>
+          <a:p>
+            <a:pPr algn="r" indent="0" marL="0">
+              <a:buNone/>
+            </a:pPr>
+            <a:r>
+              <a:rPr lang="en-US" sz="850" dirty="0">
+                <a:solidFill>
+                  <a:srgbClr val="9AA8B4"/>
+                </a:solidFill>
+                <a:latin typeface="Calibri" pitchFamily="34" charset="0"/>
+                <a:ea typeface="Calibri" pitchFamily="34" charset="-122"/>
+                <a:cs typeface="Calibri" pitchFamily="34" charset="-120"/>
+              </a:rPr>
+              <a:t>CP Lecture Series</a:t>
+            </a:r>
+            <a:pPr algn="r" indent="0" marL="0">
+              <a:buNone/>
+            </a:pPr>
+            <a:r>
+              <a:rPr lang="en-US" sz="850" dirty="0">
+                <a:solidFill>
+                  <a:srgbClr val="DCE4EC"/>
+                </a:solidFill>
+                <a:latin typeface="Calibri" pitchFamily="34" charset="0"/>
+                <a:ea typeface="Calibri" pitchFamily="34" charset="-122"/>
+                <a:cs typeface="Calibri" pitchFamily="34" charset="-120"/>
+              </a:rPr>
+              <a:t>   ·   </a:t>
+            </a:r>
+            <a:pPr algn="r" indent="0" marL="0">
+              <a:buNone/>
+            </a:pPr>
+            <a:r>
+              <a:rPr lang="en-US" sz="850" b="1" dirty="0">
+                <a:solidFill>
+                  <a:srgbClr val="C62133"/>
+                </a:solidFill>
+                <a:latin typeface="Calibri" pitchFamily="34" charset="0"/>
+                <a:ea typeface="Calibri" pitchFamily="34" charset="-122"/>
+                <a:cs typeface="Calibri" pitchFamily="34" charset="-120"/>
+              </a:rPr>
+              <a:t>17</a:t>
+            </a:r>
+            <a:endParaRPr lang="en-US" sz="850" dirty="0"/>
+          </a:p>
+        </p:txBody>
+      </p:sp>
+    </p:spTree>
+  </p:cSld>
+  <p:clrMapOvr>
+    <a:masterClrMapping/>
+  </p:clrMapOvr>
+</p:sld>
+</file>
+
 <file path=ppt/slides/slide3.xml><?xml version="1.0" encoding="utf-8"?>
 <p:sld xmlns:a="http://schemas.openxmlformats.org/drawingml/2006/main" xmlns:r="http://schemas.openxmlformats.org/officeDocument/2006/relationships" xmlns:p="http://schemas.openxmlformats.org/presentationml/2006/main">
   <p:cSld name="Slide 3">
@@ -11551,6 +13171,10 @@
             </a:outerShdw>
           </a:effectLst>
         </p:spPr>
+        <p:txBody>
+          <a:bodyPr/>
+          <a:p/>
+        </p:txBody>
       </p:sp>
       <p:sp>
         <p:nvSpPr>
@@ -11578,6 +13202,10 @@
             </a:outerShdw>
           </a:effectLst>
         </p:spPr>
+        <p:txBody>
+          <a:bodyPr/>
+          <a:p/>
+        </p:txBody>
       </p:sp>
       <p:sp>
         <p:nvSpPr>
@@ -11685,6 +13313,10 @@
             </a:outerShdw>
           </a:effectLst>
         </p:spPr>
+        <p:txBody>
+          <a:bodyPr/>
+          <a:p/>
+        </p:txBody>
       </p:sp>
       <p:sp>
         <p:nvSpPr>
@@ -11712,6 +13344,10 @@
             </a:outerShdw>
           </a:effectLst>
         </p:spPr>
+        <p:txBody>
+          <a:bodyPr/>
+          <a:p/>
+        </p:txBody>
       </p:sp>
       <p:sp>
         <p:nvSpPr>
@@ -11819,6 +13455,10 @@
             </a:outerShdw>
           </a:effectLst>
         </p:spPr>
+        <p:txBody>
+          <a:bodyPr/>
+          <a:p/>
+        </p:txBody>
       </p:sp>
       <p:sp>
         <p:nvSpPr>
@@ -11846,6 +13486,10 @@
             </a:outerShdw>
           </a:effectLst>
         </p:spPr>
+        <p:txBody>
+          <a:bodyPr/>
+          <a:p/>
+        </p:txBody>
       </p:sp>
       <p:sp>
         <p:nvSpPr>
@@ -11953,6 +13597,10 @@
             </a:outerShdw>
           </a:effectLst>
         </p:spPr>
+        <p:txBody>
+          <a:bodyPr/>
+          <a:p/>
+        </p:txBody>
       </p:sp>
       <p:sp>
         <p:nvSpPr>
@@ -11980,6 +13628,10 @@
             </a:outerShdw>
           </a:effectLst>
         </p:spPr>
+        <p:txBody>
+          <a:bodyPr/>
+          <a:p/>
+        </p:txBody>
       </p:sp>
       <p:sp>
         <p:nvSpPr>
@@ -12087,6 +13739,10 @@
             </a:outerShdw>
           </a:effectLst>
         </p:spPr>
+        <p:txBody>
+          <a:bodyPr/>
+          <a:p/>
+        </p:txBody>
       </p:sp>
       <p:sp>
         <p:nvSpPr>
@@ -12114,6 +13770,10 @@
             </a:outerShdw>
           </a:effectLst>
         </p:spPr>
+        <p:txBody>
+          <a:bodyPr/>
+          <a:p/>
+        </p:txBody>
       </p:sp>
       <p:sp>
         <p:nvSpPr>
@@ -12221,6 +13881,10 @@
             </a:outerShdw>
           </a:effectLst>
         </p:spPr>
+        <p:txBody>
+          <a:bodyPr/>
+          <a:p/>
+        </p:txBody>
       </p:sp>
       <p:sp>
         <p:nvSpPr>
@@ -12248,6 +13912,10 @@
             </a:outerShdw>
           </a:effectLst>
         </p:spPr>
+        <p:txBody>
+          <a:bodyPr/>
+          <a:p/>
+        </p:txBody>
       </p:sp>
       <p:sp>
         <p:nvSpPr>
@@ -12571,6 +14239,10 @@
             </a:outerShdw>
           </a:effectLst>
         </p:spPr>
+        <p:txBody>
+          <a:bodyPr/>
+          <a:p/>
+        </p:txBody>
       </p:sp>
       <p:sp>
         <p:nvSpPr>
@@ -12598,6 +14270,10 @@
             </a:outerShdw>
           </a:effectLst>
         </p:spPr>
+        <p:txBody>
+          <a:bodyPr/>
+          <a:p/>
+        </p:txBody>
       </p:sp>
       <p:sp>
         <p:nvSpPr>
@@ -12712,6 +14388,10 @@
           </a:solidFill>
           <a:ln/>
         </p:spPr>
+        <p:txBody>
+          <a:bodyPr/>
+          <a:p/>
+        </p:txBody>
       </p:sp>
       <p:sp>
         <p:nvSpPr>
@@ -12739,6 +14419,10 @@
             </a:outerShdw>
           </a:effectLst>
         </p:spPr>
+        <p:txBody>
+          <a:bodyPr/>
+          <a:p/>
+        </p:txBody>
       </p:sp>
       <p:sp>
         <p:nvSpPr>
@@ -12860,6 +14544,10 @@
             </a:outerShdw>
           </a:effectLst>
         </p:spPr>
+        <p:txBody>
+          <a:bodyPr/>
+          <a:p/>
+        </p:txBody>
       </p:sp>
       <p:sp>
         <p:nvSpPr>
@@ -12887,6 +14575,10 @@
             </a:outerShdw>
           </a:effectLst>
         </p:spPr>
+        <p:txBody>
+          <a:bodyPr/>
+          <a:p/>
+        </p:txBody>
       </p:sp>
       <p:sp>
         <p:nvSpPr>
@@ -13001,6 +14693,10 @@
           </a:solidFill>
           <a:ln/>
         </p:spPr>
+        <p:txBody>
+          <a:bodyPr/>
+          <a:p/>
+        </p:txBody>
       </p:sp>
       <p:sp>
         <p:nvSpPr>
@@ -13028,6 +14724,10 @@
             </a:outerShdw>
           </a:effectLst>
         </p:spPr>
+        <p:txBody>
+          <a:bodyPr/>
+          <a:p/>
+        </p:txBody>
       </p:sp>
       <p:sp>
         <p:nvSpPr>
@@ -13149,6 +14849,10 @@
             </a:outerShdw>
           </a:effectLst>
         </p:spPr>
+        <p:txBody>
+          <a:bodyPr/>
+          <a:p/>
+        </p:txBody>
       </p:sp>
       <p:sp>
         <p:nvSpPr>
@@ -13176,6 +14880,10 @@
             </a:outerShdw>
           </a:effectLst>
         </p:spPr>
+        <p:txBody>
+          <a:bodyPr/>
+          <a:p/>
+        </p:txBody>
       </p:sp>
       <p:sp>
         <p:nvSpPr>
@@ -13414,6 +15122,10 @@
           </a:solidFill>
           <a:ln/>
         </p:spPr>
+        <p:txBody>
+          <a:bodyPr/>
+          <a:p/>
+        </p:txBody>
       </p:sp>
       <p:sp>
         <p:nvSpPr>
@@ -13436,6 +15148,10 @@
           </a:solidFill>
           <a:ln/>
         </p:spPr>
+        <p:txBody>
+          <a:bodyPr/>
+          <a:p/>
+        </p:txBody>
       </p:sp>
       <p:sp>
         <p:nvSpPr>
@@ -13697,6 +15413,10 @@
             </a:outerShdw>
           </a:effectLst>
         </p:spPr>
+        <p:txBody>
+          <a:bodyPr/>
+          <a:p/>
+        </p:txBody>
       </p:sp>
       <p:pic>
         <p:nvPicPr>
@@ -14005,6 +15725,10 @@
             </a:outerShdw>
           </a:effectLst>
         </p:spPr>
+        <p:txBody>
+          <a:bodyPr/>
+          <a:p/>
+        </p:txBody>
       </p:sp>
       <p:sp>
         <p:nvSpPr>
@@ -14179,6 +15903,10 @@
             </a:outerShdw>
           </a:effectLst>
         </p:spPr>
+        <p:txBody>
+          <a:bodyPr/>
+          <a:p/>
+        </p:txBody>
       </p:sp>
       <p:sp>
         <p:nvSpPr>
@@ -14484,6 +16212,10 @@
           </a:solidFill>
           <a:ln/>
         </p:spPr>
+        <p:txBody>
+          <a:bodyPr/>
+          <a:p/>
+        </p:txBody>
       </p:sp>
       <p:sp>
         <p:nvSpPr>
@@ -14506,6 +16238,10 @@
           </a:solidFill>
           <a:ln/>
         </p:spPr>
+        <p:txBody>
+          <a:bodyPr/>
+          <a:p/>
+        </p:txBody>
       </p:sp>
       <p:sp>
         <p:nvSpPr>
